--- a/Unit 5 - Strategy, Innovation and Leadership.pptx
+++ b/Unit 5 - Strategy, Innovation and Leadership.pptx
@@ -4094,7 +4094,7 @@
         </p:nvSpPr>
         <p:spPr>
           <a:xfrm>
-            <a:off x="932688" y="5159197"/>
+            <a:off x="932688" y="4992624"/>
             <a:ext cx="1147734" cy="329184"/>
           </a:xfrm>
           <a:prstGeom prst="roundRect">
@@ -4161,7 +4161,7 @@
         </p:nvSpPr>
         <p:spPr>
           <a:xfrm>
-            <a:off x="2208438" y="5159197"/>
+            <a:off x="2208438" y="4992624"/>
             <a:ext cx="1429267" cy="329184"/>
           </a:xfrm>
           <a:prstGeom prst="roundRect">
@@ -4228,7 +4228,7 @@
         </p:nvSpPr>
         <p:spPr>
           <a:xfrm>
-            <a:off x="3765722" y="5159197"/>
+            <a:off x="3765722" y="4992624"/>
             <a:ext cx="998757" cy="329184"/>
           </a:xfrm>
           <a:prstGeom prst="roundRect">
@@ -4295,7 +4295,7 @@
         </p:nvSpPr>
         <p:spPr>
           <a:xfrm>
-            <a:off x="4892496" y="5159197"/>
+            <a:off x="4892496" y="4992624"/>
             <a:ext cx="878554" cy="329184"/>
           </a:xfrm>
           <a:prstGeom prst="roundRect">
@@ -4362,7 +4362,7 @@
         </p:nvSpPr>
         <p:spPr>
           <a:xfrm>
-            <a:off x="932688" y="5742432"/>
+            <a:off x="932688" y="5614416"/>
             <a:ext cx="3840480" cy="12700"/>
           </a:xfrm>
           <a:prstGeom prst="rect">
@@ -4406,8 +4406,8 @@
         </p:nvSpPr>
         <p:spPr>
           <a:xfrm>
-            <a:off x="932688" y="5925312"/>
-            <a:ext cx="5486400" cy="640080"/>
+            <a:off x="932688" y="5797296"/>
+            <a:ext cx="4937760" cy="640080"/>
           </a:xfrm>
           <a:prstGeom prst="rect">
             <a:avLst/>
@@ -4422,7 +4422,7 @@
           <a:p>
             <a:pPr algn="l">
               <a:lnSpc>
-                <a:spcPct val="130000"/>
+                <a:spcPct val="122000"/>
               </a:lnSpc>
               <a:spcBef>
                 <a:spcPts val="0"/>
@@ -4432,33 +4432,102 @@
               </a:spcAft>
             </a:pPr>
             <a:r>
-              <a:rPr sz="1050" b="1" i="0">
-                <a:solidFill>
-                  <a:srgbClr val="FFFFFF"/>
-                </a:solidFill>
-                <a:latin typeface="Segoe UI"/>
-                <a:ea typeface="Segoe UI"/>
-                <a:cs typeface="Segoe UI"/>
-              </a:rPr>
-              <a:t>PGPM · Systems Specialisation</a:t>
+              <a:rPr sz="850" b="1" i="0" spc="160">
+                <a:solidFill>
+                  <a:srgbClr val="00B3A4"/>
+                </a:solidFill>
+                <a:latin typeface="Segoe UI"/>
+                <a:ea typeface="Segoe UI"/>
+                <a:cs typeface="Segoe UI"/>
+              </a:rPr>
+              <a:t>PRESENTED BY</a:t>
             </a:r>
           </a:p>
           <a:p>
             <a:pPr algn="l">
               <a:lnSpc>
-                <a:spcPct val="130000"/>
+                <a:spcPct val="122000"/>
               </a:lnSpc>
               <a:spcBef>
-                <a:spcPts val="0"/>
+                <a:spcPts val="400"/>
               </a:spcBef>
               <a:spcAft>
                 <a:spcPts val="0"/>
               </a:spcAft>
             </a:pPr>
             <a:r>
+              <a:rPr sz="1300" b="1" i="0">
+                <a:solidFill>
+                  <a:srgbClr val="FFFFFF"/>
+                </a:solidFill>
+                <a:latin typeface="Segoe UI"/>
+                <a:ea typeface="Segoe UI"/>
+                <a:cs typeface="Segoe UI"/>
+              </a:rPr>
+              <a:t>Lingesh K</a:t>
+            </a:r>
+            <a:r>
               <a:rPr sz="1050" b="0" i="0">
                 <a:solidFill>
-                  <a:srgbClr val="8B9DBE"/>
+                  <a:srgbClr val="7E91B4"/>
+                </a:solidFill>
+                <a:latin typeface="Segoe UI"/>
+                <a:ea typeface="Segoe UI"/>
+                <a:cs typeface="Segoe UI"/>
+              </a:rPr>
+              <a:t>      Register No. </a:t>
+            </a:r>
+            <a:r>
+              <a:rPr sz="1050" b="1" i="0">
+                <a:solidFill>
+                  <a:srgbClr val="C5D2E8"/>
+                </a:solidFill>
+                <a:latin typeface="Segoe UI"/>
+                <a:ea typeface="Segoe UI"/>
+                <a:cs typeface="Segoe UI"/>
+              </a:rPr>
+              <a:t>OSI2509030</a:t>
+            </a:r>
+          </a:p>
+        </p:txBody>
+      </p:sp>
+      <p:sp>
+        <p:nvSpPr>
+          <p:cNvPr id="18" name="TextBox 17"/>
+          <p:cNvSpPr txBox="1"/>
+          <p:nvPr/>
+        </p:nvSpPr>
+        <p:spPr>
+          <a:xfrm>
+            <a:off x="7180783" y="5870448"/>
+            <a:ext cx="4206240" cy="640080"/>
+          </a:xfrm>
+          <a:prstGeom prst="rect">
+            <a:avLst/>
+          </a:prstGeom>
+          <a:noFill/>
+        </p:spPr>
+        <p:txBody>
+          <a:bodyPr wrap="square" lIns="0" rIns="0" tIns="0" bIns="0" anchor="t">
+            <a:spAutoFit/>
+          </a:bodyPr>
+          <a:lstStyle/>
+          <a:p>
+            <a:pPr algn="r">
+              <a:lnSpc>
+                <a:spcPct val="134000"/>
+              </a:lnSpc>
+              <a:spcBef>
+                <a:spcPts val="0"/>
+              </a:spcBef>
+              <a:spcAft>
+                <a:spcPts val="0"/>
+              </a:spcAft>
+            </a:pPr>
+            <a:r>
+              <a:rPr sz="1000" b="1" i="0">
+                <a:solidFill>
+                  <a:srgbClr val="C5D2E8"/>
                 </a:solidFill>
                 <a:latin typeface="Segoe UI"/>
                 <a:ea typeface="Segoe UI"/>
@@ -4540,7 +4609,7 @@
         <p:spPr>
           <a:xfrm>
             <a:off x="713232" y="6272784"/>
-            <a:ext cx="8073923" cy="219456"/>
+            <a:ext cx="5597920" cy="219456"/>
           </a:xfrm>
           <a:prstGeom prst="rect">
             <a:avLst/>
@@ -4608,8 +4677,8 @@
         </p:nvSpPr>
         <p:spPr>
           <a:xfrm>
-            <a:off x="10381183" y="6272784"/>
-            <a:ext cx="1097280" cy="219456"/>
+            <a:off x="8826703" y="6272784"/>
+            <a:ext cx="2651760" cy="219456"/>
           </a:xfrm>
           <a:prstGeom prst="rect">
             <a:avLst/>
@@ -4634,9 +4703,31 @@
               </a:spcAft>
             </a:pPr>
             <a:r>
+              <a:rPr sz="900" b="0" i="0">
+                <a:solidFill>
+                  <a:srgbClr val="636E85"/>
+                </a:solidFill>
+                <a:latin typeface="Segoe UI"/>
+                <a:ea typeface="Segoe UI"/>
+                <a:cs typeface="Segoe UI"/>
+              </a:rPr>
+              <a:t>Lingesh K  ·  OSI2509030</a:t>
+            </a:r>
+            <a:r>
+              <a:rPr sz="900" b="0" i="0">
+                <a:solidFill>
+                  <a:srgbClr val="141C2E"/>
+                </a:solidFill>
+                <a:latin typeface="Segoe UI"/>
+                <a:ea typeface="Segoe UI"/>
+                <a:cs typeface="Segoe UI"/>
+              </a:rPr>
+              <a:t>     </a:t>
+            </a:r>
+            <a:r>
               <a:rPr sz="900" b="1" i="0">
                 <a:solidFill>
-                  <a:srgbClr val="636E85"/>
+                  <a:srgbClr val="0E1E3C"/>
                 </a:solidFill>
                 <a:latin typeface="Segoe UI"/>
                 <a:ea typeface="Segoe UI"/>
@@ -5988,7 +6079,7 @@
         <p:spPr>
           <a:xfrm>
             <a:off x="713232" y="6272784"/>
-            <a:ext cx="8073923" cy="219456"/>
+            <a:ext cx="5597920" cy="219456"/>
           </a:xfrm>
           <a:prstGeom prst="rect">
             <a:avLst/>
@@ -6056,8 +6147,8 @@
         </p:nvSpPr>
         <p:spPr>
           <a:xfrm>
-            <a:off x="10381183" y="6272784"/>
-            <a:ext cx="1097280" cy="219456"/>
+            <a:off x="8826703" y="6272784"/>
+            <a:ext cx="2651760" cy="219456"/>
           </a:xfrm>
           <a:prstGeom prst="rect">
             <a:avLst/>
@@ -6082,9 +6173,31 @@
               </a:spcAft>
             </a:pPr>
             <a:r>
+              <a:rPr sz="900" b="0" i="0">
+                <a:solidFill>
+                  <a:srgbClr val="636E85"/>
+                </a:solidFill>
+                <a:latin typeface="Segoe UI"/>
+                <a:ea typeface="Segoe UI"/>
+                <a:cs typeface="Segoe UI"/>
+              </a:rPr>
+              <a:t>Lingesh K  ·  OSI2509030</a:t>
+            </a:r>
+            <a:r>
+              <a:rPr sz="900" b="0" i="0">
+                <a:solidFill>
+                  <a:srgbClr val="141C2E"/>
+                </a:solidFill>
+                <a:latin typeface="Segoe UI"/>
+                <a:ea typeface="Segoe UI"/>
+                <a:cs typeface="Segoe UI"/>
+              </a:rPr>
+              <a:t>     </a:t>
+            </a:r>
+            <a:r>
               <a:rPr sz="900" b="1" i="0">
                 <a:solidFill>
-                  <a:srgbClr val="636E85"/>
+                  <a:srgbClr val="0E1E3C"/>
                 </a:solidFill>
                 <a:latin typeface="Segoe UI"/>
                 <a:ea typeface="Segoe UI"/>
@@ -7011,7 +7124,7 @@
         <p:spPr>
           <a:xfrm>
             <a:off x="713232" y="6272784"/>
-            <a:ext cx="8073923" cy="219456"/>
+            <a:ext cx="5597920" cy="219456"/>
           </a:xfrm>
           <a:prstGeom prst="rect">
             <a:avLst/>
@@ -7079,8 +7192,8 @@
         </p:nvSpPr>
         <p:spPr>
           <a:xfrm>
-            <a:off x="10381183" y="6272784"/>
-            <a:ext cx="1097280" cy="219456"/>
+            <a:off x="8826703" y="6272784"/>
+            <a:ext cx="2651760" cy="219456"/>
           </a:xfrm>
           <a:prstGeom prst="rect">
             <a:avLst/>
@@ -7105,9 +7218,31 @@
               </a:spcAft>
             </a:pPr>
             <a:r>
+              <a:rPr sz="900" b="0" i="0">
+                <a:solidFill>
+                  <a:srgbClr val="636E85"/>
+                </a:solidFill>
+                <a:latin typeface="Segoe UI"/>
+                <a:ea typeface="Segoe UI"/>
+                <a:cs typeface="Segoe UI"/>
+              </a:rPr>
+              <a:t>Lingesh K  ·  OSI2509030</a:t>
+            </a:r>
+            <a:r>
+              <a:rPr sz="900" b="0" i="0">
+                <a:solidFill>
+                  <a:srgbClr val="141C2E"/>
+                </a:solidFill>
+                <a:latin typeface="Segoe UI"/>
+                <a:ea typeface="Segoe UI"/>
+                <a:cs typeface="Segoe UI"/>
+              </a:rPr>
+              <a:t>     </a:t>
+            </a:r>
+            <a:r>
               <a:rPr sz="900" b="1" i="0">
                 <a:solidFill>
-                  <a:srgbClr val="636E85"/>
+                  <a:srgbClr val="0E1E3C"/>
                 </a:solidFill>
                 <a:latin typeface="Segoe UI"/>
                 <a:ea typeface="Segoe UI"/>
@@ -8158,7 +8293,7 @@
         <p:spPr>
           <a:xfrm>
             <a:off x="713232" y="6272784"/>
-            <a:ext cx="8073923" cy="219456"/>
+            <a:ext cx="5597920" cy="219456"/>
           </a:xfrm>
           <a:prstGeom prst="rect">
             <a:avLst/>
@@ -8226,8 +8361,8 @@
         </p:nvSpPr>
         <p:spPr>
           <a:xfrm>
-            <a:off x="10381183" y="6272784"/>
-            <a:ext cx="1097280" cy="219456"/>
+            <a:off x="8826703" y="6272784"/>
+            <a:ext cx="2651760" cy="219456"/>
           </a:xfrm>
           <a:prstGeom prst="rect">
             <a:avLst/>
@@ -8252,9 +8387,31 @@
               </a:spcAft>
             </a:pPr>
             <a:r>
+              <a:rPr sz="900" b="0" i="0">
+                <a:solidFill>
+                  <a:srgbClr val="636E85"/>
+                </a:solidFill>
+                <a:latin typeface="Segoe UI"/>
+                <a:ea typeface="Segoe UI"/>
+                <a:cs typeface="Segoe UI"/>
+              </a:rPr>
+              <a:t>Lingesh K  ·  OSI2509030</a:t>
+            </a:r>
+            <a:r>
+              <a:rPr sz="900" b="0" i="0">
+                <a:solidFill>
+                  <a:srgbClr val="141C2E"/>
+                </a:solidFill>
+                <a:latin typeface="Segoe UI"/>
+                <a:ea typeface="Segoe UI"/>
+                <a:cs typeface="Segoe UI"/>
+              </a:rPr>
+              <a:t>     </a:t>
+            </a:r>
+            <a:r>
               <a:rPr sz="900" b="1" i="0">
                 <a:solidFill>
-                  <a:srgbClr val="636E85"/>
+                  <a:srgbClr val="0E1E3C"/>
                 </a:solidFill>
                 <a:latin typeface="Segoe UI"/>
                 <a:ea typeface="Segoe UI"/>
@@ -10174,7 +10331,7 @@
         <p:spPr>
           <a:xfrm>
             <a:off x="987552" y="5943600"/>
-            <a:ext cx="5486400" cy="274320"/>
+            <a:ext cx="6400800" cy="274320"/>
           </a:xfrm>
           <a:prstGeom prst="rect">
             <a:avLst/>
@@ -10283,7 +10440,7 @@
         <p:spPr>
           <a:xfrm>
             <a:off x="713232" y="6272784"/>
-            <a:ext cx="8073923" cy="219456"/>
+            <a:ext cx="5597920" cy="219456"/>
           </a:xfrm>
           <a:prstGeom prst="rect">
             <a:avLst/>
@@ -10351,8 +10508,8 @@
         </p:nvSpPr>
         <p:spPr>
           <a:xfrm>
-            <a:off x="10381183" y="6272784"/>
-            <a:ext cx="1097280" cy="219456"/>
+            <a:off x="8826703" y="6272784"/>
+            <a:ext cx="2651760" cy="219456"/>
           </a:xfrm>
           <a:prstGeom prst="rect">
             <a:avLst/>
@@ -10377,9 +10534,31 @@
               </a:spcAft>
             </a:pPr>
             <a:r>
+              <a:rPr sz="900" b="0" i="0">
+                <a:solidFill>
+                  <a:srgbClr val="636E85"/>
+                </a:solidFill>
+                <a:latin typeface="Segoe UI"/>
+                <a:ea typeface="Segoe UI"/>
+                <a:cs typeface="Segoe UI"/>
+              </a:rPr>
+              <a:t>Lingesh K  ·  OSI2509030</a:t>
+            </a:r>
+            <a:r>
+              <a:rPr sz="900" b="0" i="0">
+                <a:solidFill>
+                  <a:srgbClr val="141C2E"/>
+                </a:solidFill>
+                <a:latin typeface="Segoe UI"/>
+                <a:ea typeface="Segoe UI"/>
+                <a:cs typeface="Segoe UI"/>
+              </a:rPr>
+              <a:t>     </a:t>
+            </a:r>
+            <a:r>
               <a:rPr sz="900" b="1" i="0">
                 <a:solidFill>
-                  <a:srgbClr val="636E85"/>
+                  <a:srgbClr val="0E1E3C"/>
                 </a:solidFill>
                 <a:latin typeface="Segoe UI"/>
                 <a:ea typeface="Segoe UI"/>
@@ -12127,7 +12306,7 @@
         <p:spPr>
           <a:xfrm>
             <a:off x="987552" y="5943600"/>
-            <a:ext cx="5486400" cy="274320"/>
+            <a:ext cx="6400800" cy="274320"/>
           </a:xfrm>
           <a:prstGeom prst="rect">
             <a:avLst/>
@@ -12236,7 +12415,7 @@
         <p:spPr>
           <a:xfrm>
             <a:off x="713232" y="6272784"/>
-            <a:ext cx="8073923" cy="219456"/>
+            <a:ext cx="5597920" cy="219456"/>
           </a:xfrm>
           <a:prstGeom prst="rect">
             <a:avLst/>
@@ -12304,8 +12483,8 @@
         </p:nvSpPr>
         <p:spPr>
           <a:xfrm>
-            <a:off x="10381183" y="6272784"/>
-            <a:ext cx="1097280" cy="219456"/>
+            <a:off x="8826703" y="6272784"/>
+            <a:ext cx="2651760" cy="219456"/>
           </a:xfrm>
           <a:prstGeom prst="rect">
             <a:avLst/>
@@ -12330,9 +12509,31 @@
               </a:spcAft>
             </a:pPr>
             <a:r>
+              <a:rPr sz="900" b="0" i="0">
+                <a:solidFill>
+                  <a:srgbClr val="636E85"/>
+                </a:solidFill>
+                <a:latin typeface="Segoe UI"/>
+                <a:ea typeface="Segoe UI"/>
+                <a:cs typeface="Segoe UI"/>
+              </a:rPr>
+              <a:t>Lingesh K  ·  OSI2509030</a:t>
+            </a:r>
+            <a:r>
+              <a:rPr sz="900" b="0" i="0">
+                <a:solidFill>
+                  <a:srgbClr val="141C2E"/>
+                </a:solidFill>
+                <a:latin typeface="Segoe UI"/>
+                <a:ea typeface="Segoe UI"/>
+                <a:cs typeface="Segoe UI"/>
+              </a:rPr>
+              <a:t>     </a:t>
+            </a:r>
+            <a:r>
               <a:rPr sz="900" b="1" i="0">
                 <a:solidFill>
-                  <a:srgbClr val="636E85"/>
+                  <a:srgbClr val="0E1E3C"/>
                 </a:solidFill>
                 <a:latin typeface="Segoe UI"/>
                 <a:ea typeface="Segoe UI"/>
@@ -14014,7 +14215,7 @@
         <p:spPr>
           <a:xfrm>
             <a:off x="713232" y="6272784"/>
-            <a:ext cx="8073923" cy="219456"/>
+            <a:ext cx="5597920" cy="219456"/>
           </a:xfrm>
           <a:prstGeom prst="rect">
             <a:avLst/>
@@ -14082,8 +14283,8 @@
         </p:nvSpPr>
         <p:spPr>
           <a:xfrm>
-            <a:off x="10381183" y="6272784"/>
-            <a:ext cx="1097280" cy="219456"/>
+            <a:off x="8826703" y="6272784"/>
+            <a:ext cx="2651760" cy="219456"/>
           </a:xfrm>
           <a:prstGeom prst="rect">
             <a:avLst/>
@@ -14108,9 +14309,31 @@
               </a:spcAft>
             </a:pPr>
             <a:r>
+              <a:rPr sz="900" b="0" i="0">
+                <a:solidFill>
+                  <a:srgbClr val="636E85"/>
+                </a:solidFill>
+                <a:latin typeface="Segoe UI"/>
+                <a:ea typeface="Segoe UI"/>
+                <a:cs typeface="Segoe UI"/>
+              </a:rPr>
+              <a:t>Lingesh K  ·  OSI2509030</a:t>
+            </a:r>
+            <a:r>
+              <a:rPr sz="900" b="0" i="0">
+                <a:solidFill>
+                  <a:srgbClr val="141C2E"/>
+                </a:solidFill>
+                <a:latin typeface="Segoe UI"/>
+                <a:ea typeface="Segoe UI"/>
+                <a:cs typeface="Segoe UI"/>
+              </a:rPr>
+              <a:t>     </a:t>
+            </a:r>
+            <a:r>
               <a:rPr sz="900" b="1" i="0">
                 <a:solidFill>
-                  <a:srgbClr val="636E85"/>
+                  <a:srgbClr val="0E1E3C"/>
                 </a:solidFill>
                 <a:latin typeface="Segoe UI"/>
                 <a:ea typeface="Segoe UI"/>
@@ -15321,7 +15544,7 @@
         <p:spPr>
           <a:xfrm>
             <a:off x="713232" y="6272784"/>
-            <a:ext cx="8073923" cy="219456"/>
+            <a:ext cx="5597920" cy="219456"/>
           </a:xfrm>
           <a:prstGeom prst="rect">
             <a:avLst/>
@@ -15389,8 +15612,8 @@
         </p:nvSpPr>
         <p:spPr>
           <a:xfrm>
-            <a:off x="10381183" y="6272784"/>
-            <a:ext cx="1097280" cy="219456"/>
+            <a:off x="8826703" y="6272784"/>
+            <a:ext cx="2651760" cy="219456"/>
           </a:xfrm>
           <a:prstGeom prst="rect">
             <a:avLst/>
@@ -15415,9 +15638,31 @@
               </a:spcAft>
             </a:pPr>
             <a:r>
+              <a:rPr sz="900" b="0" i="0">
+                <a:solidFill>
+                  <a:srgbClr val="636E85"/>
+                </a:solidFill>
+                <a:latin typeface="Segoe UI"/>
+                <a:ea typeface="Segoe UI"/>
+                <a:cs typeface="Segoe UI"/>
+              </a:rPr>
+              <a:t>Lingesh K  ·  OSI2509030</a:t>
+            </a:r>
+            <a:r>
+              <a:rPr sz="900" b="0" i="0">
+                <a:solidFill>
+                  <a:srgbClr val="141C2E"/>
+                </a:solidFill>
+                <a:latin typeface="Segoe UI"/>
+                <a:ea typeface="Segoe UI"/>
+                <a:cs typeface="Segoe UI"/>
+              </a:rPr>
+              <a:t>     </a:t>
+            </a:r>
+            <a:r>
               <a:rPr sz="900" b="1" i="0">
                 <a:solidFill>
-                  <a:srgbClr val="636E85"/>
+                  <a:srgbClr val="0E1E3C"/>
                 </a:solidFill>
                 <a:latin typeface="Segoe UI"/>
                 <a:ea typeface="Segoe UI"/>
@@ -16386,7 +16631,7 @@
         <p:spPr>
           <a:xfrm>
             <a:off x="713232" y="6272784"/>
-            <a:ext cx="8073923" cy="219456"/>
+            <a:ext cx="5597920" cy="219456"/>
           </a:xfrm>
           <a:prstGeom prst="rect">
             <a:avLst/>
@@ -16454,8 +16699,8 @@
         </p:nvSpPr>
         <p:spPr>
           <a:xfrm>
-            <a:off x="10381183" y="6272784"/>
-            <a:ext cx="1097280" cy="219456"/>
+            <a:off x="8826703" y="6272784"/>
+            <a:ext cx="2651760" cy="219456"/>
           </a:xfrm>
           <a:prstGeom prst="rect">
             <a:avLst/>
@@ -16480,9 +16725,31 @@
               </a:spcAft>
             </a:pPr>
             <a:r>
+              <a:rPr sz="900" b="0" i="0">
+                <a:solidFill>
+                  <a:srgbClr val="636E85"/>
+                </a:solidFill>
+                <a:latin typeface="Segoe UI"/>
+                <a:ea typeface="Segoe UI"/>
+                <a:cs typeface="Segoe UI"/>
+              </a:rPr>
+              <a:t>Lingesh K  ·  OSI2509030</a:t>
+            </a:r>
+            <a:r>
+              <a:rPr sz="900" b="0" i="0">
+                <a:solidFill>
+                  <a:srgbClr val="141C2E"/>
+                </a:solidFill>
+                <a:latin typeface="Segoe UI"/>
+                <a:ea typeface="Segoe UI"/>
+                <a:cs typeface="Segoe UI"/>
+              </a:rPr>
+              <a:t>     </a:t>
+            </a:r>
+            <a:r>
               <a:rPr sz="900" b="1" i="0">
                 <a:solidFill>
-                  <a:srgbClr val="636E85"/>
+                  <a:srgbClr val="0E1E3C"/>
                 </a:solidFill>
                 <a:latin typeface="Segoe UI"/>
                 <a:ea typeface="Segoe UI"/>
@@ -18045,7 +18312,7 @@
         <p:spPr>
           <a:xfrm>
             <a:off x="713232" y="6272784"/>
-            <a:ext cx="8073923" cy="219456"/>
+            <a:ext cx="5597920" cy="219456"/>
           </a:xfrm>
           <a:prstGeom prst="rect">
             <a:avLst/>
@@ -18113,8 +18380,8 @@
         </p:nvSpPr>
         <p:spPr>
           <a:xfrm>
-            <a:off x="10381183" y="6272784"/>
-            <a:ext cx="1097280" cy="219456"/>
+            <a:off x="8826703" y="6272784"/>
+            <a:ext cx="2651760" cy="219456"/>
           </a:xfrm>
           <a:prstGeom prst="rect">
             <a:avLst/>
@@ -18139,9 +18406,31 @@
               </a:spcAft>
             </a:pPr>
             <a:r>
+              <a:rPr sz="900" b="0" i="0">
+                <a:solidFill>
+                  <a:srgbClr val="636E85"/>
+                </a:solidFill>
+                <a:latin typeface="Segoe UI"/>
+                <a:ea typeface="Segoe UI"/>
+                <a:cs typeface="Segoe UI"/>
+              </a:rPr>
+              <a:t>Lingesh K  ·  OSI2509030</a:t>
+            </a:r>
+            <a:r>
+              <a:rPr sz="900" b="0" i="0">
+                <a:solidFill>
+                  <a:srgbClr val="141C2E"/>
+                </a:solidFill>
+                <a:latin typeface="Segoe UI"/>
+                <a:ea typeface="Segoe UI"/>
+                <a:cs typeface="Segoe UI"/>
+              </a:rPr>
+              <a:t>     </a:t>
+            </a:r>
+            <a:r>
               <a:rPr sz="900" b="1" i="0">
                 <a:solidFill>
-                  <a:srgbClr val="636E85"/>
+                  <a:srgbClr val="0E1E3C"/>
                 </a:solidFill>
                 <a:latin typeface="Segoe UI"/>
                 <a:ea typeface="Segoe UI"/>
@@ -19609,7 +19898,7 @@
         <p:spPr>
           <a:xfrm>
             <a:off x="713232" y="6272784"/>
-            <a:ext cx="8073923" cy="219456"/>
+            <a:ext cx="5597920" cy="219456"/>
           </a:xfrm>
           <a:prstGeom prst="rect">
             <a:avLst/>
@@ -19677,8 +19966,8 @@
         </p:nvSpPr>
         <p:spPr>
           <a:xfrm>
-            <a:off x="10381183" y="6272784"/>
-            <a:ext cx="1097280" cy="219456"/>
+            <a:off x="8826703" y="6272784"/>
+            <a:ext cx="2651760" cy="219456"/>
           </a:xfrm>
           <a:prstGeom prst="rect">
             <a:avLst/>
@@ -19703,9 +19992,31 @@
               </a:spcAft>
             </a:pPr>
             <a:r>
+              <a:rPr sz="900" b="0" i="0">
+                <a:solidFill>
+                  <a:srgbClr val="636E85"/>
+                </a:solidFill>
+                <a:latin typeface="Segoe UI"/>
+                <a:ea typeface="Segoe UI"/>
+                <a:cs typeface="Segoe UI"/>
+              </a:rPr>
+              <a:t>Lingesh K  ·  OSI2509030</a:t>
+            </a:r>
+            <a:r>
+              <a:rPr sz="900" b="0" i="0">
+                <a:solidFill>
+                  <a:srgbClr val="141C2E"/>
+                </a:solidFill>
+                <a:latin typeface="Segoe UI"/>
+                <a:ea typeface="Segoe UI"/>
+                <a:cs typeface="Segoe UI"/>
+              </a:rPr>
+              <a:t>     </a:t>
+            </a:r>
+            <a:r>
               <a:rPr sz="900" b="1" i="0">
                 <a:solidFill>
-                  <a:srgbClr val="636E85"/>
+                  <a:srgbClr val="0E1E3C"/>
                 </a:solidFill>
                 <a:latin typeface="Segoe UI"/>
                 <a:ea typeface="Segoe UI"/>
@@ -21860,8 +22171,8 @@
         </p:nvSpPr>
         <p:spPr>
           <a:xfrm>
-            <a:off x="987552" y="4882896"/>
-            <a:ext cx="7315200" cy="1572768"/>
+            <a:off x="987552" y="4718304"/>
+            <a:ext cx="7315200" cy="1207008"/>
           </a:xfrm>
           <a:prstGeom prst="rect">
             <a:avLst/>
@@ -21900,10 +22211,10 @@
           <a:p>
             <a:pPr algn="l">
               <a:lnSpc>
-                <a:spcPct val="132000"/>
+                <a:spcPct val="128000"/>
               </a:lnSpc>
               <a:spcBef>
-                <a:spcPts val="500"/>
+                <a:spcPts val="400"/>
               </a:spcBef>
               <a:spcAft>
                 <a:spcPts val="0"/>
@@ -21924,10 +22235,10 @@
           <a:p>
             <a:pPr algn="l">
               <a:lnSpc>
-                <a:spcPct val="132000"/>
+                <a:spcPct val="128000"/>
               </a:lnSpc>
               <a:spcBef>
-                <a:spcPts val="500"/>
+                <a:spcPts val="400"/>
               </a:spcBef>
               <a:spcAft>
                 <a:spcPts val="0"/>
@@ -21948,10 +22259,10 @@
           <a:p>
             <a:pPr algn="l">
               <a:lnSpc>
-                <a:spcPct val="132000"/>
+                <a:spcPct val="128000"/>
               </a:lnSpc>
               <a:spcBef>
-                <a:spcPts val="500"/>
+                <a:spcPts val="400"/>
               </a:spcBef>
               <a:spcAft>
                 <a:spcPts val="0"/>
@@ -21967,6 +22278,141 @@
                 <a:cs typeface="Segoe UI"/>
               </a:rPr>
               <a:t>— What will your organisation do with the time AI gives back?</a:t>
+            </a:r>
+          </a:p>
+        </p:txBody>
+      </p:sp>
+      <p:sp>
+        <p:nvSpPr>
+          <p:cNvPr id="11" name="Rectangle 10"/>
+          <p:cNvSpPr/>
+          <p:nvPr/>
+        </p:nvSpPr>
+        <p:spPr>
+          <a:xfrm>
+            <a:off x="987552" y="6035040"/>
+            <a:ext cx="3291840" cy="12700"/>
+          </a:xfrm>
+          <a:prstGeom prst="rect">
+            <a:avLst/>
+          </a:prstGeom>
+          <a:solidFill>
+            <a:srgbClr val="2A3E66"/>
+          </a:solidFill>
+          <a:ln>
+            <a:noFill/>
+          </a:ln>
+          <a:effectLst/>
+        </p:spPr>
+        <p:style>
+          <a:lnRef idx="1">
+            <a:schemeClr val="accent1"/>
+          </a:lnRef>
+          <a:fillRef idx="3">
+            <a:schemeClr val="accent1"/>
+          </a:fillRef>
+          <a:effectRef idx="2">
+            <a:schemeClr val="accent1"/>
+          </a:effectRef>
+          <a:fontRef idx="minor">
+            <a:schemeClr val="lt1"/>
+          </a:fontRef>
+        </p:style>
+        <p:txBody>
+          <a:bodyPr rtlCol="0" anchor="ctr"/>
+          <a:lstStyle/>
+          <a:p>
+            <a:pPr algn="ctr"/>
+          </a:p>
+        </p:txBody>
+      </p:sp>
+      <p:sp>
+        <p:nvSpPr>
+          <p:cNvPr id="12" name="TextBox 11"/>
+          <p:cNvSpPr txBox="1"/>
+          <p:nvPr/>
+        </p:nvSpPr>
+        <p:spPr>
+          <a:xfrm>
+            <a:off x="987552" y="6163056"/>
+            <a:ext cx="5852160" cy="292608"/>
+          </a:xfrm>
+          <a:prstGeom prst="rect">
+            <a:avLst/>
+          </a:prstGeom>
+          <a:noFill/>
+        </p:spPr>
+        <p:txBody>
+          <a:bodyPr wrap="square" lIns="0" rIns="0" tIns="0" bIns="0" anchor="t">
+            <a:spAutoFit/>
+          </a:bodyPr>
+          <a:lstStyle/>
+          <a:p>
+            <a:pPr algn="l">
+              <a:lnSpc>
+                <a:spcPct val="122000"/>
+              </a:lnSpc>
+              <a:spcBef>
+                <a:spcPts val="0"/>
+              </a:spcBef>
+              <a:spcAft>
+                <a:spcPts val="0"/>
+              </a:spcAft>
+            </a:pPr>
+            <a:r>
+              <a:rPr sz="1150" b="1" i="0">
+                <a:solidFill>
+                  <a:srgbClr val="FFFFFF"/>
+                </a:solidFill>
+                <a:latin typeface="Segoe UI"/>
+                <a:ea typeface="Segoe UI"/>
+                <a:cs typeface="Segoe UI"/>
+              </a:rPr>
+              <a:t>Lingesh K</a:t>
+            </a:r>
+            <a:r>
+              <a:rPr sz="1000" b="0" i="0">
+                <a:solidFill>
+                  <a:srgbClr val="7E91B4"/>
+                </a:solidFill>
+                <a:latin typeface="Segoe UI"/>
+                <a:ea typeface="Segoe UI"/>
+                <a:cs typeface="Segoe UI"/>
+              </a:rPr>
+              <a:t>   ·   Register No. </a:t>
+            </a:r>
+            <a:r>
+              <a:rPr sz="1000" b="1" i="0">
+                <a:solidFill>
+                  <a:srgbClr val="C5D2E8"/>
+                </a:solidFill>
+                <a:latin typeface="Segoe UI"/>
+                <a:ea typeface="Segoe UI"/>
+                <a:cs typeface="Segoe UI"/>
+              </a:rPr>
+              <a:t>OSI2509030</a:t>
+            </a:r>
+            <a:r>
+              <a:rPr sz="1000" b="0" i="0">
+                <a:solidFill>
+                  <a:srgbClr val="4A5E86"/>
+                </a:solidFill>
+                <a:latin typeface="Segoe UI"/>
+                <a:ea typeface="Segoe UI"/>
+                <a:cs typeface="Segoe UI"/>
+              </a:rPr>
+              <a:t>   ·   </a:t>
+            </a:r>
+            <a:r>
+              <a:rPr sz="1000" b="0" i="0">
+                <a:solidFill>
+                  <a:srgbClr val="7E91B4"/>
+                </a:solidFill>
+                <a:latin typeface="Segoe UI"/>
+                <a:ea typeface="Segoe UI"/>
+                <a:cs typeface="Segoe UI"/>
+              </a:rPr>
+              <a:t>PGPM · Systems Specialisation</a:t>
             </a:r>
           </a:p>
         </p:txBody>
@@ -22371,7 +22817,7 @@
         <p:spPr>
           <a:xfrm>
             <a:off x="987552" y="5943600"/>
-            <a:ext cx="5486400" cy="274320"/>
+            <a:ext cx="6400800" cy="274320"/>
           </a:xfrm>
           <a:prstGeom prst="rect">
             <a:avLst/>
@@ -22480,7 +22926,7 @@
         <p:spPr>
           <a:xfrm>
             <a:off x="713232" y="6272784"/>
-            <a:ext cx="8073923" cy="219456"/>
+            <a:ext cx="5597920" cy="219456"/>
           </a:xfrm>
           <a:prstGeom prst="rect">
             <a:avLst/>
@@ -22548,8 +22994,8 @@
         </p:nvSpPr>
         <p:spPr>
           <a:xfrm>
-            <a:off x="10381183" y="6272784"/>
-            <a:ext cx="1097280" cy="219456"/>
+            <a:off x="8826703" y="6272784"/>
+            <a:ext cx="2651760" cy="219456"/>
           </a:xfrm>
           <a:prstGeom prst="rect">
             <a:avLst/>
@@ -22574,9 +23020,31 @@
               </a:spcAft>
             </a:pPr>
             <a:r>
+              <a:rPr sz="900" b="0" i="0">
+                <a:solidFill>
+                  <a:srgbClr val="636E85"/>
+                </a:solidFill>
+                <a:latin typeface="Segoe UI"/>
+                <a:ea typeface="Segoe UI"/>
+                <a:cs typeface="Segoe UI"/>
+              </a:rPr>
+              <a:t>Lingesh K  ·  OSI2509030</a:t>
+            </a:r>
+            <a:r>
+              <a:rPr sz="900" b="0" i="0">
+                <a:solidFill>
+                  <a:srgbClr val="141C2E"/>
+                </a:solidFill>
+                <a:latin typeface="Segoe UI"/>
+                <a:ea typeface="Segoe UI"/>
+                <a:cs typeface="Segoe UI"/>
+              </a:rPr>
+              <a:t>     </a:t>
+            </a:r>
+            <a:r>
               <a:rPr sz="900" b="1" i="0">
                 <a:solidFill>
-                  <a:srgbClr val="636E85"/>
+                  <a:srgbClr val="0E1E3C"/>
                 </a:solidFill>
                 <a:latin typeface="Segoe UI"/>
                 <a:ea typeface="Segoe UI"/>
@@ -23579,7 +24047,7 @@
         <p:spPr>
           <a:xfrm>
             <a:off x="713232" y="6272784"/>
-            <a:ext cx="8073923" cy="219456"/>
+            <a:ext cx="5597920" cy="219456"/>
           </a:xfrm>
           <a:prstGeom prst="rect">
             <a:avLst/>
@@ -23647,8 +24115,8 @@
         </p:nvSpPr>
         <p:spPr>
           <a:xfrm>
-            <a:off x="10381183" y="6272784"/>
-            <a:ext cx="1097280" cy="219456"/>
+            <a:off x="8826703" y="6272784"/>
+            <a:ext cx="2651760" cy="219456"/>
           </a:xfrm>
           <a:prstGeom prst="rect">
             <a:avLst/>
@@ -23673,9 +24141,31 @@
               </a:spcAft>
             </a:pPr>
             <a:r>
+              <a:rPr sz="900" b="0" i="0">
+                <a:solidFill>
+                  <a:srgbClr val="636E85"/>
+                </a:solidFill>
+                <a:latin typeface="Segoe UI"/>
+                <a:ea typeface="Segoe UI"/>
+                <a:cs typeface="Segoe UI"/>
+              </a:rPr>
+              <a:t>Lingesh K  ·  OSI2509030</a:t>
+            </a:r>
+            <a:r>
+              <a:rPr sz="900" b="0" i="0">
+                <a:solidFill>
+                  <a:srgbClr val="141C2E"/>
+                </a:solidFill>
+                <a:latin typeface="Segoe UI"/>
+                <a:ea typeface="Segoe UI"/>
+                <a:cs typeface="Segoe UI"/>
+              </a:rPr>
+              <a:t>     </a:t>
+            </a:r>
+            <a:r>
               <a:rPr sz="900" b="1" i="0">
                 <a:solidFill>
-                  <a:srgbClr val="636E85"/>
+                  <a:srgbClr val="0E1E3C"/>
                 </a:solidFill>
                 <a:latin typeface="Segoe UI"/>
                 <a:ea typeface="Segoe UI"/>
@@ -25415,7 +25905,7 @@
         <p:spPr>
           <a:xfrm>
             <a:off x="713232" y="6272784"/>
-            <a:ext cx="8073923" cy="219456"/>
+            <a:ext cx="5597920" cy="219456"/>
           </a:xfrm>
           <a:prstGeom prst="rect">
             <a:avLst/>
@@ -25483,8 +25973,8 @@
         </p:nvSpPr>
         <p:spPr>
           <a:xfrm>
-            <a:off x="10381183" y="6272784"/>
-            <a:ext cx="1097280" cy="219456"/>
+            <a:off x="8826703" y="6272784"/>
+            <a:ext cx="2651760" cy="219456"/>
           </a:xfrm>
           <a:prstGeom prst="rect">
             <a:avLst/>
@@ -25509,9 +25999,31 @@
               </a:spcAft>
             </a:pPr>
             <a:r>
+              <a:rPr sz="900" b="0" i="0">
+                <a:solidFill>
+                  <a:srgbClr val="636E85"/>
+                </a:solidFill>
+                <a:latin typeface="Segoe UI"/>
+                <a:ea typeface="Segoe UI"/>
+                <a:cs typeface="Segoe UI"/>
+              </a:rPr>
+              <a:t>Lingesh K  ·  OSI2509030</a:t>
+            </a:r>
+            <a:r>
+              <a:rPr sz="900" b="0" i="0">
+                <a:solidFill>
+                  <a:srgbClr val="141C2E"/>
+                </a:solidFill>
+                <a:latin typeface="Segoe UI"/>
+                <a:ea typeface="Segoe UI"/>
+                <a:cs typeface="Segoe UI"/>
+              </a:rPr>
+              <a:t>     </a:t>
+            </a:r>
+            <a:r>
               <a:rPr sz="900" b="1" i="0">
                 <a:solidFill>
-                  <a:srgbClr val="636E85"/>
+                  <a:srgbClr val="0E1E3C"/>
                 </a:solidFill>
                 <a:latin typeface="Segoe UI"/>
                 <a:ea typeface="Segoe UI"/>
@@ -26546,7 +27058,7 @@
         <p:spPr>
           <a:xfrm>
             <a:off x="713232" y="6272784"/>
-            <a:ext cx="8073923" cy="219456"/>
+            <a:ext cx="5597920" cy="219456"/>
           </a:xfrm>
           <a:prstGeom prst="rect">
             <a:avLst/>
@@ -26614,8 +27126,8 @@
         </p:nvSpPr>
         <p:spPr>
           <a:xfrm>
-            <a:off x="10381183" y="6272784"/>
-            <a:ext cx="1097280" cy="219456"/>
+            <a:off x="8826703" y="6272784"/>
+            <a:ext cx="2651760" cy="219456"/>
           </a:xfrm>
           <a:prstGeom prst="rect">
             <a:avLst/>
@@ -26640,9 +27152,31 @@
               </a:spcAft>
             </a:pPr>
             <a:r>
+              <a:rPr sz="900" b="0" i="0">
+                <a:solidFill>
+                  <a:srgbClr val="636E85"/>
+                </a:solidFill>
+                <a:latin typeface="Segoe UI"/>
+                <a:ea typeface="Segoe UI"/>
+                <a:cs typeface="Segoe UI"/>
+              </a:rPr>
+              <a:t>Lingesh K  ·  OSI2509030</a:t>
+            </a:r>
+            <a:r>
+              <a:rPr sz="900" b="0" i="0">
+                <a:solidFill>
+                  <a:srgbClr val="141C2E"/>
+                </a:solidFill>
+                <a:latin typeface="Segoe UI"/>
+                <a:ea typeface="Segoe UI"/>
+                <a:cs typeface="Segoe UI"/>
+              </a:rPr>
+              <a:t>     </a:t>
+            </a:r>
+            <a:r>
               <a:rPr sz="900" b="1" i="0">
                 <a:solidFill>
-                  <a:srgbClr val="636E85"/>
+                  <a:srgbClr val="0E1E3C"/>
                 </a:solidFill>
                 <a:latin typeface="Segoe UI"/>
                 <a:ea typeface="Segoe UI"/>
@@ -28087,7 +28621,7 @@
         <p:spPr>
           <a:xfrm>
             <a:off x="987552" y="5943600"/>
-            <a:ext cx="5486400" cy="274320"/>
+            <a:ext cx="6400800" cy="274320"/>
           </a:xfrm>
           <a:prstGeom prst="rect">
             <a:avLst/>
@@ -28196,7 +28730,7 @@
         <p:spPr>
           <a:xfrm>
             <a:off x="713232" y="6272784"/>
-            <a:ext cx="8073923" cy="219456"/>
+            <a:ext cx="5597920" cy="219456"/>
           </a:xfrm>
           <a:prstGeom prst="rect">
             <a:avLst/>
@@ -28264,8 +28798,8 @@
         </p:nvSpPr>
         <p:spPr>
           <a:xfrm>
-            <a:off x="10381183" y="6272784"/>
-            <a:ext cx="1097280" cy="219456"/>
+            <a:off x="8826703" y="6272784"/>
+            <a:ext cx="2651760" cy="219456"/>
           </a:xfrm>
           <a:prstGeom prst="rect">
             <a:avLst/>
@@ -28290,9 +28824,31 @@
               </a:spcAft>
             </a:pPr>
             <a:r>
+              <a:rPr sz="900" b="0" i="0">
+                <a:solidFill>
+                  <a:srgbClr val="636E85"/>
+                </a:solidFill>
+                <a:latin typeface="Segoe UI"/>
+                <a:ea typeface="Segoe UI"/>
+                <a:cs typeface="Segoe UI"/>
+              </a:rPr>
+              <a:t>Lingesh K  ·  OSI2509030</a:t>
+            </a:r>
+            <a:r>
+              <a:rPr sz="900" b="0" i="0">
+                <a:solidFill>
+                  <a:srgbClr val="141C2E"/>
+                </a:solidFill>
+                <a:latin typeface="Segoe UI"/>
+                <a:ea typeface="Segoe UI"/>
+                <a:cs typeface="Segoe UI"/>
+              </a:rPr>
+              <a:t>     </a:t>
+            </a:r>
+            <a:r>
               <a:rPr sz="900" b="1" i="0">
                 <a:solidFill>
-                  <a:srgbClr val="636E85"/>
+                  <a:srgbClr val="0E1E3C"/>
                 </a:solidFill>
                 <a:latin typeface="Segoe UI"/>
                 <a:ea typeface="Segoe UI"/>

--- a/Unit 5 - Strategy, Innovation and Leadership.pptx
+++ b/Unit 5 - Strategy, Innovation and Leadership.pptx
@@ -3836,7 +3836,77 @@
       </p:sp>
       <p:sp>
         <p:nvSpPr>
-          <p:cNvPr id="7" name="TextBox 6"/>
+          <p:cNvPr id="7" name="logo-plate"/>
+          <p:cNvSpPr/>
+          <p:nvPr/>
+        </p:nvSpPr>
+        <p:spPr>
+          <a:xfrm>
+            <a:off x="9126735" y="539496"/>
+            <a:ext cx="2379159" cy="1152144"/>
+          </a:xfrm>
+          <a:prstGeom prst="roundRect">
+            <a:avLst>
+              <a:gd name="adj" fmla="val 14000"/>
+            </a:avLst>
+          </a:prstGeom>
+          <a:solidFill>
+            <a:srgbClr val="FFFFFF"/>
+          </a:solidFill>
+          <a:ln>
+            <a:noFill/>
+          </a:ln>
+          <a:effectLst/>
+        </p:spPr>
+        <p:style>
+          <a:lnRef idx="1">
+            <a:schemeClr val="accent1"/>
+          </a:lnRef>
+          <a:fillRef idx="3">
+            <a:schemeClr val="accent1"/>
+          </a:fillRef>
+          <a:effectRef idx="2">
+            <a:schemeClr val="accent1"/>
+          </a:effectRef>
+          <a:fontRef idx="minor">
+            <a:schemeClr val="lt1"/>
+          </a:fontRef>
+        </p:style>
+        <p:txBody>
+          <a:bodyPr rtlCol="0" anchor="ctr" wrap="square"/>
+          <a:lstStyle/>
+          <a:p>
+            <a:pPr algn="ctr"/>
+          </a:p>
+        </p:txBody>
+      </p:sp>
+      <p:pic>
+        <p:nvPicPr>
+          <p:cNvPr id="8" name="college-logo" descr="logo-full.png"/>
+          <p:cNvPicPr>
+            <a:picLocks noChangeAspect="1"/>
+          </p:cNvPicPr>
+          <p:nvPr/>
+        </p:nvPicPr>
+        <p:blipFill>
+          <a:blip r:embed="rId2"/>
+          <a:stretch>
+            <a:fillRect/>
+          </a:stretch>
+        </p:blipFill>
+        <p:spPr>
+          <a:xfrm>
+            <a:off x="9245607" y="658368"/>
+            <a:ext cx="2141415" cy="914400"/>
+          </a:xfrm>
+          <a:prstGeom prst="rect">
+            <a:avLst/>
+          </a:prstGeom>
+        </p:spPr>
+      </p:pic>
+      <p:sp>
+        <p:nvSpPr>
+          <p:cNvPr id="9" name="TextBox 8"/>
           <p:cNvSpPr txBox="1"/>
           <p:nvPr/>
         </p:nvSpPr>
@@ -3883,7 +3953,7 @@
       </p:sp>
       <p:sp>
         <p:nvSpPr>
-          <p:cNvPr id="8" name="Rounded Rectangle 7"/>
+          <p:cNvPr id="10" name="Rounded Rectangle 9"/>
           <p:cNvSpPr/>
           <p:nvPr/>
         </p:nvSpPr>
@@ -3950,7 +4020,7 @@
       </p:sp>
       <p:sp>
         <p:nvSpPr>
-          <p:cNvPr id="9" name="TextBox 8"/>
+          <p:cNvPr id="11" name="TextBox 10"/>
           <p:cNvSpPr txBox="1"/>
           <p:nvPr/>
         </p:nvSpPr>
@@ -3997,7 +4067,7 @@
       </p:sp>
       <p:sp>
         <p:nvSpPr>
-          <p:cNvPr id="10" name="Rectangle 9"/>
+          <p:cNvPr id="12" name="Rectangle 11"/>
           <p:cNvSpPr/>
           <p:nvPr/>
         </p:nvSpPr>
@@ -4041,7 +4111,7 @@
       </p:sp>
       <p:sp>
         <p:nvSpPr>
-          <p:cNvPr id="11" name="TextBox 10"/>
+          <p:cNvPr id="13" name="TextBox 12"/>
           <p:cNvSpPr txBox="1"/>
           <p:nvPr/>
         </p:nvSpPr>
@@ -4088,7 +4158,7 @@
       </p:sp>
       <p:sp>
         <p:nvSpPr>
-          <p:cNvPr id="12" name="Rounded Rectangle 11"/>
+          <p:cNvPr id="14" name="Rounded Rectangle 13"/>
           <p:cNvSpPr/>
           <p:nvPr/>
         </p:nvSpPr>
@@ -4155,7 +4225,7 @@
       </p:sp>
       <p:sp>
         <p:nvSpPr>
-          <p:cNvPr id="13" name="Rounded Rectangle 12"/>
+          <p:cNvPr id="15" name="Rounded Rectangle 14"/>
           <p:cNvSpPr/>
           <p:nvPr/>
         </p:nvSpPr>
@@ -4222,7 +4292,7 @@
       </p:sp>
       <p:sp>
         <p:nvSpPr>
-          <p:cNvPr id="14" name="Rounded Rectangle 13"/>
+          <p:cNvPr id="16" name="Rounded Rectangle 15"/>
           <p:cNvSpPr/>
           <p:nvPr/>
         </p:nvSpPr>
@@ -4289,7 +4359,7 @@
       </p:sp>
       <p:sp>
         <p:nvSpPr>
-          <p:cNvPr id="15" name="Rounded Rectangle 14"/>
+          <p:cNvPr id="17" name="Rounded Rectangle 16"/>
           <p:cNvSpPr/>
           <p:nvPr/>
         </p:nvSpPr>
@@ -4356,7 +4426,7 @@
       </p:sp>
       <p:sp>
         <p:nvSpPr>
-          <p:cNvPr id="16" name="Rectangle 15"/>
+          <p:cNvPr id="18" name="Rectangle 17"/>
           <p:cNvSpPr/>
           <p:nvPr/>
         </p:nvSpPr>
@@ -4400,7 +4470,7 @@
       </p:sp>
       <p:sp>
         <p:nvSpPr>
-          <p:cNvPr id="17" name="TextBox 16"/>
+          <p:cNvPr id="19" name="TextBox 18"/>
           <p:cNvSpPr txBox="1"/>
           <p:nvPr/>
         </p:nvSpPr>
@@ -4493,7 +4563,7 @@
       </p:sp>
       <p:sp>
         <p:nvSpPr>
-          <p:cNvPr id="18" name="TextBox 17"/>
+          <p:cNvPr id="20" name="TextBox 19"/>
           <p:cNvSpPr txBox="1"/>
           <p:nvPr/>
         </p:nvSpPr>
@@ -4600,9 +4670,33 @@
           </a:p>
         </p:txBody>
       </p:sp>
-      <p:sp>
-        <p:nvSpPr>
-          <p:cNvPr id="3" name="TextBox 2"/>
+      <p:pic>
+        <p:nvPicPr>
+          <p:cNvPr id="3" name="college-logo" descr="logo-mark.png"/>
+          <p:cNvPicPr>
+            <a:picLocks noChangeAspect="1"/>
+          </p:cNvPicPr>
+          <p:nvPr/>
+        </p:nvPicPr>
+        <p:blipFill>
+          <a:blip r:embed="rId2"/>
+          <a:stretch>
+            <a:fillRect/>
+          </a:stretch>
+        </p:blipFill>
+        <p:spPr>
+          <a:xfrm>
+            <a:off x="11203333" y="6199632"/>
+            <a:ext cx="275129" cy="310896"/>
+          </a:xfrm>
+          <a:prstGeom prst="rect">
+            <a:avLst/>
+          </a:prstGeom>
+        </p:spPr>
+      </p:pic>
+      <p:sp>
+        <p:nvSpPr>
+          <p:cNvPr id="4" name="TextBox 3"/>
           <p:cNvSpPr txBox="1"/>
           <p:nvPr/>
         </p:nvSpPr>
@@ -4671,13 +4765,13 @@
       </p:sp>
       <p:sp>
         <p:nvSpPr>
-          <p:cNvPr id="4" name="TextBox 3"/>
+          <p:cNvPr id="5" name="TextBox 4"/>
           <p:cNvSpPr txBox="1"/>
           <p:nvPr/>
         </p:nvSpPr>
         <p:spPr>
           <a:xfrm>
-            <a:off x="8826703" y="6272784"/>
+            <a:off x="8240677" y="6272784"/>
             <a:ext cx="2651760" cy="219456"/>
           </a:xfrm>
           <a:prstGeom prst="rect">
@@ -4740,7 +4834,7 @@
       </p:sp>
       <p:sp>
         <p:nvSpPr>
-          <p:cNvPr id="5" name="TextBox 4"/>
+          <p:cNvPr id="6" name="TextBox 5"/>
           <p:cNvSpPr txBox="1"/>
           <p:nvPr/>
         </p:nvSpPr>
@@ -4787,7 +4881,7 @@
       </p:sp>
       <p:sp>
         <p:nvSpPr>
-          <p:cNvPr id="6" name="TextBox 5"/>
+          <p:cNvPr id="7" name="TextBox 6"/>
           <p:cNvSpPr txBox="1"/>
           <p:nvPr/>
         </p:nvSpPr>
@@ -4834,7 +4928,7 @@
       </p:sp>
       <p:sp>
         <p:nvSpPr>
-          <p:cNvPr id="7" name="Rectangle 6"/>
+          <p:cNvPr id="8" name="Rectangle 7"/>
           <p:cNvSpPr/>
           <p:nvPr/>
         </p:nvSpPr>
@@ -4878,7 +4972,7 @@
       </p:sp>
       <p:sp>
         <p:nvSpPr>
-          <p:cNvPr id="8" name="TextBox 7"/>
+          <p:cNvPr id="9" name="TextBox 8"/>
           <p:cNvSpPr txBox="1"/>
           <p:nvPr/>
         </p:nvSpPr>
@@ -4925,7 +5019,7 @@
       </p:sp>
       <p:sp>
         <p:nvSpPr>
-          <p:cNvPr id="9" name="Rectangle 8"/>
+          <p:cNvPr id="10" name="Rectangle 9"/>
           <p:cNvSpPr/>
           <p:nvPr/>
         </p:nvSpPr>
@@ -4969,7 +5063,7 @@
       </p:sp>
       <p:sp>
         <p:nvSpPr>
-          <p:cNvPr id="10" name="Rounded Rectangle 9"/>
+          <p:cNvPr id="11" name="Rounded Rectangle 10"/>
           <p:cNvSpPr/>
           <p:nvPr/>
         </p:nvSpPr>
@@ -5015,7 +5109,7 @@
       </p:sp>
       <p:sp>
         <p:nvSpPr>
-          <p:cNvPr id="11" name="TextBox 10"/>
+          <p:cNvPr id="12" name="TextBox 11"/>
           <p:cNvSpPr txBox="1"/>
           <p:nvPr/>
         </p:nvSpPr>
@@ -5062,7 +5156,7 @@
       </p:sp>
       <p:sp>
         <p:nvSpPr>
-          <p:cNvPr id="12" name="Rounded Rectangle 11"/>
+          <p:cNvPr id="13" name="Rounded Rectangle 12"/>
           <p:cNvSpPr/>
           <p:nvPr/>
         </p:nvSpPr>
@@ -5108,7 +5202,7 @@
       </p:sp>
       <p:sp>
         <p:nvSpPr>
-          <p:cNvPr id="13" name="TextBox 12"/>
+          <p:cNvPr id="14" name="TextBox 13"/>
           <p:cNvSpPr txBox="1"/>
           <p:nvPr/>
         </p:nvSpPr>
@@ -5155,7 +5249,7 @@
       </p:sp>
       <p:sp>
         <p:nvSpPr>
-          <p:cNvPr id="14" name="Rounded Rectangle 13"/>
+          <p:cNvPr id="15" name="Rounded Rectangle 14"/>
           <p:cNvSpPr/>
           <p:nvPr/>
         </p:nvSpPr>
@@ -5201,7 +5295,7 @@
       </p:sp>
       <p:sp>
         <p:nvSpPr>
-          <p:cNvPr id="15" name="TextBox 14"/>
+          <p:cNvPr id="16" name="TextBox 15"/>
           <p:cNvSpPr txBox="1"/>
           <p:nvPr/>
         </p:nvSpPr>
@@ -5248,7 +5342,7 @@
       </p:sp>
       <p:sp>
         <p:nvSpPr>
-          <p:cNvPr id="16" name="Rounded Rectangle 15"/>
+          <p:cNvPr id="17" name="Rounded Rectangle 16"/>
           <p:cNvSpPr/>
           <p:nvPr/>
         </p:nvSpPr>
@@ -5294,7 +5388,7 @@
       </p:sp>
       <p:sp>
         <p:nvSpPr>
-          <p:cNvPr id="17" name="TextBox 16"/>
+          <p:cNvPr id="18" name="TextBox 17"/>
           <p:cNvSpPr txBox="1"/>
           <p:nvPr/>
         </p:nvSpPr>
@@ -5341,7 +5435,7 @@
       </p:sp>
       <p:sp>
         <p:nvSpPr>
-          <p:cNvPr id="18" name="Rounded Rectangle 17"/>
+          <p:cNvPr id="19" name="Rounded Rectangle 18"/>
           <p:cNvSpPr/>
           <p:nvPr/>
         </p:nvSpPr>
@@ -5387,7 +5481,7 @@
       </p:sp>
       <p:sp>
         <p:nvSpPr>
-          <p:cNvPr id="19" name="TextBox 18"/>
+          <p:cNvPr id="20" name="TextBox 19"/>
           <p:cNvSpPr txBox="1"/>
           <p:nvPr/>
         </p:nvSpPr>
@@ -5434,7 +5528,7 @@
       </p:sp>
       <p:sp>
         <p:nvSpPr>
-          <p:cNvPr id="20" name="Rounded Rectangle 19"/>
+          <p:cNvPr id="21" name="Rounded Rectangle 20"/>
           <p:cNvSpPr/>
           <p:nvPr/>
         </p:nvSpPr>
@@ -5488,7 +5582,7 @@
       </p:sp>
       <p:sp>
         <p:nvSpPr>
-          <p:cNvPr id="21" name="Rectangle 20"/>
+          <p:cNvPr id="22" name="Rectangle 21"/>
           <p:cNvSpPr/>
           <p:nvPr/>
         </p:nvSpPr>
@@ -5532,7 +5626,7 @@
       </p:sp>
       <p:sp>
         <p:nvSpPr>
-          <p:cNvPr id="22" name="TextBox 21"/>
+          <p:cNvPr id="23" name="TextBox 22"/>
           <p:cNvSpPr txBox="1"/>
           <p:nvPr/>
         </p:nvSpPr>
@@ -5579,7 +5673,7 @@
       </p:sp>
       <p:sp>
         <p:nvSpPr>
-          <p:cNvPr id="23" name="TextBox 22"/>
+          <p:cNvPr id="24" name="TextBox 23"/>
           <p:cNvSpPr txBox="1"/>
           <p:nvPr/>
         </p:nvSpPr>
@@ -5626,7 +5720,7 @@
       </p:sp>
       <p:sp>
         <p:nvSpPr>
-          <p:cNvPr id="24" name="Rounded Rectangle 23"/>
+          <p:cNvPr id="25" name="Rounded Rectangle 24"/>
           <p:cNvSpPr/>
           <p:nvPr/>
         </p:nvSpPr>
@@ -5680,7 +5774,7 @@
       </p:sp>
       <p:sp>
         <p:nvSpPr>
-          <p:cNvPr id="25" name="Rectangle 24"/>
+          <p:cNvPr id="26" name="Rectangle 25"/>
           <p:cNvSpPr/>
           <p:nvPr/>
         </p:nvSpPr>
@@ -5724,7 +5818,7 @@
       </p:sp>
       <p:sp>
         <p:nvSpPr>
-          <p:cNvPr id="26" name="TextBox 25"/>
+          <p:cNvPr id="27" name="TextBox 26"/>
           <p:cNvSpPr txBox="1"/>
           <p:nvPr/>
         </p:nvSpPr>
@@ -5771,7 +5865,7 @@
       </p:sp>
       <p:sp>
         <p:nvSpPr>
-          <p:cNvPr id="27" name="TextBox 26"/>
+          <p:cNvPr id="28" name="TextBox 27"/>
           <p:cNvSpPr txBox="1"/>
           <p:nvPr/>
         </p:nvSpPr>
@@ -5818,7 +5912,7 @@
       </p:sp>
       <p:sp>
         <p:nvSpPr>
-          <p:cNvPr id="28" name="Rounded Rectangle 27"/>
+          <p:cNvPr id="29" name="Rounded Rectangle 28"/>
           <p:cNvSpPr/>
           <p:nvPr/>
         </p:nvSpPr>
@@ -5872,7 +5966,7 @@
       </p:sp>
       <p:sp>
         <p:nvSpPr>
-          <p:cNvPr id="29" name="Rectangle 28"/>
+          <p:cNvPr id="30" name="Rectangle 29"/>
           <p:cNvSpPr/>
           <p:nvPr/>
         </p:nvSpPr>
@@ -5916,7 +6010,7 @@
       </p:sp>
       <p:sp>
         <p:nvSpPr>
-          <p:cNvPr id="30" name="TextBox 29"/>
+          <p:cNvPr id="31" name="TextBox 30"/>
           <p:cNvSpPr txBox="1"/>
           <p:nvPr/>
         </p:nvSpPr>
@@ -5963,7 +6057,7 @@
       </p:sp>
       <p:sp>
         <p:nvSpPr>
-          <p:cNvPr id="31" name="TextBox 30"/>
+          <p:cNvPr id="32" name="TextBox 31"/>
           <p:cNvSpPr txBox="1"/>
           <p:nvPr/>
         </p:nvSpPr>
@@ -6070,9 +6164,33 @@
           </a:p>
         </p:txBody>
       </p:sp>
-      <p:sp>
-        <p:nvSpPr>
-          <p:cNvPr id="3" name="TextBox 2"/>
+      <p:pic>
+        <p:nvPicPr>
+          <p:cNvPr id="3" name="college-logo" descr="logo-mark.png"/>
+          <p:cNvPicPr>
+            <a:picLocks noChangeAspect="1"/>
+          </p:cNvPicPr>
+          <p:nvPr/>
+        </p:nvPicPr>
+        <p:blipFill>
+          <a:blip r:embed="rId2"/>
+          <a:stretch>
+            <a:fillRect/>
+          </a:stretch>
+        </p:blipFill>
+        <p:spPr>
+          <a:xfrm>
+            <a:off x="11203333" y="6199632"/>
+            <a:ext cx="275129" cy="310896"/>
+          </a:xfrm>
+          <a:prstGeom prst="rect">
+            <a:avLst/>
+          </a:prstGeom>
+        </p:spPr>
+      </p:pic>
+      <p:sp>
+        <p:nvSpPr>
+          <p:cNvPr id="4" name="TextBox 3"/>
           <p:cNvSpPr txBox="1"/>
           <p:nvPr/>
         </p:nvSpPr>
@@ -6141,13 +6259,13 @@
       </p:sp>
       <p:sp>
         <p:nvSpPr>
-          <p:cNvPr id="4" name="TextBox 3"/>
+          <p:cNvPr id="5" name="TextBox 4"/>
           <p:cNvSpPr txBox="1"/>
           <p:nvPr/>
         </p:nvSpPr>
         <p:spPr>
           <a:xfrm>
-            <a:off x="8826703" y="6272784"/>
+            <a:off x="8240677" y="6272784"/>
             <a:ext cx="2651760" cy="219456"/>
           </a:xfrm>
           <a:prstGeom prst="rect">
@@ -6210,7 +6328,7 @@
       </p:sp>
       <p:sp>
         <p:nvSpPr>
-          <p:cNvPr id="5" name="TextBox 4"/>
+          <p:cNvPr id="6" name="TextBox 5"/>
           <p:cNvSpPr txBox="1"/>
           <p:nvPr/>
         </p:nvSpPr>
@@ -6257,7 +6375,7 @@
       </p:sp>
       <p:sp>
         <p:nvSpPr>
-          <p:cNvPr id="6" name="TextBox 5"/>
+          <p:cNvPr id="7" name="TextBox 6"/>
           <p:cNvSpPr txBox="1"/>
           <p:nvPr/>
         </p:nvSpPr>
@@ -6304,7 +6422,7 @@
       </p:sp>
       <p:sp>
         <p:nvSpPr>
-          <p:cNvPr id="7" name="Rectangle 6"/>
+          <p:cNvPr id="8" name="Rectangle 7"/>
           <p:cNvSpPr/>
           <p:nvPr/>
         </p:nvSpPr>
@@ -6348,7 +6466,7 @@
       </p:sp>
       <p:graphicFrame>
         <p:nvGraphicFramePr>
-          <p:cNvPr id="8" name="Table 7"/>
+          <p:cNvPr id="9" name="Table 8"/>
           <p:cNvGraphicFramePr>
             <a:graphicFrameLocks noGrp="1"/>
           </p:cNvGraphicFramePr>
@@ -6944,7 +7062,7 @@
       </p:graphicFrame>
       <p:sp>
         <p:nvSpPr>
-          <p:cNvPr id="9" name="Rounded Rectangle 8"/>
+          <p:cNvPr id="10" name="Rounded Rectangle 9"/>
           <p:cNvSpPr/>
           <p:nvPr/>
         </p:nvSpPr>
@@ -7011,7 +7129,7 @@
       </p:sp>
       <p:sp>
         <p:nvSpPr>
-          <p:cNvPr id="10" name="Rectangle 9"/>
+          <p:cNvPr id="11" name="Rectangle 10"/>
           <p:cNvSpPr/>
           <p:nvPr/>
         </p:nvSpPr>
@@ -7115,9 +7233,33 @@
           </a:p>
         </p:txBody>
       </p:sp>
-      <p:sp>
-        <p:nvSpPr>
-          <p:cNvPr id="3" name="TextBox 2"/>
+      <p:pic>
+        <p:nvPicPr>
+          <p:cNvPr id="3" name="college-logo" descr="logo-mark.png"/>
+          <p:cNvPicPr>
+            <a:picLocks noChangeAspect="1"/>
+          </p:cNvPicPr>
+          <p:nvPr/>
+        </p:nvPicPr>
+        <p:blipFill>
+          <a:blip r:embed="rId2"/>
+          <a:stretch>
+            <a:fillRect/>
+          </a:stretch>
+        </p:blipFill>
+        <p:spPr>
+          <a:xfrm>
+            <a:off x="11203333" y="6199632"/>
+            <a:ext cx="275129" cy="310896"/>
+          </a:xfrm>
+          <a:prstGeom prst="rect">
+            <a:avLst/>
+          </a:prstGeom>
+        </p:spPr>
+      </p:pic>
+      <p:sp>
+        <p:nvSpPr>
+          <p:cNvPr id="4" name="TextBox 3"/>
           <p:cNvSpPr txBox="1"/>
           <p:nvPr/>
         </p:nvSpPr>
@@ -7186,13 +7328,13 @@
       </p:sp>
       <p:sp>
         <p:nvSpPr>
-          <p:cNvPr id="4" name="TextBox 3"/>
+          <p:cNvPr id="5" name="TextBox 4"/>
           <p:cNvSpPr txBox="1"/>
           <p:nvPr/>
         </p:nvSpPr>
         <p:spPr>
           <a:xfrm>
-            <a:off x="8826703" y="6272784"/>
+            <a:off x="8240677" y="6272784"/>
             <a:ext cx="2651760" cy="219456"/>
           </a:xfrm>
           <a:prstGeom prst="rect">
@@ -7255,7 +7397,7 @@
       </p:sp>
       <p:sp>
         <p:nvSpPr>
-          <p:cNvPr id="5" name="TextBox 4"/>
+          <p:cNvPr id="6" name="TextBox 5"/>
           <p:cNvSpPr txBox="1"/>
           <p:nvPr/>
         </p:nvSpPr>
@@ -7302,7 +7444,7 @@
       </p:sp>
       <p:sp>
         <p:nvSpPr>
-          <p:cNvPr id="6" name="TextBox 5"/>
+          <p:cNvPr id="7" name="TextBox 6"/>
           <p:cNvSpPr txBox="1"/>
           <p:nvPr/>
         </p:nvSpPr>
@@ -7349,7 +7491,7 @@
       </p:sp>
       <p:sp>
         <p:nvSpPr>
-          <p:cNvPr id="7" name="Rectangle 6"/>
+          <p:cNvPr id="8" name="Rectangle 7"/>
           <p:cNvSpPr/>
           <p:nvPr/>
         </p:nvSpPr>
@@ -7393,7 +7535,7 @@
       </p:sp>
       <p:sp>
         <p:nvSpPr>
-          <p:cNvPr id="8" name="TextBox 7"/>
+          <p:cNvPr id="9" name="TextBox 8"/>
           <p:cNvSpPr txBox="1"/>
           <p:nvPr/>
         </p:nvSpPr>
@@ -7440,7 +7582,7 @@
       </p:sp>
       <p:sp>
         <p:nvSpPr>
-          <p:cNvPr id="9" name="Rounded Rectangle 8"/>
+          <p:cNvPr id="10" name="Rounded Rectangle 9"/>
           <p:cNvSpPr/>
           <p:nvPr/>
         </p:nvSpPr>
@@ -7494,7 +7636,7 @@
       </p:sp>
       <p:sp>
         <p:nvSpPr>
-          <p:cNvPr id="10" name="TextBox 9"/>
+          <p:cNvPr id="11" name="TextBox 10"/>
           <p:cNvSpPr txBox="1"/>
           <p:nvPr/>
         </p:nvSpPr>
@@ -7541,7 +7683,7 @@
       </p:sp>
       <p:sp>
         <p:nvSpPr>
-          <p:cNvPr id="11" name="Rectangle 10"/>
+          <p:cNvPr id="12" name="Rectangle 11"/>
           <p:cNvSpPr/>
           <p:nvPr/>
         </p:nvSpPr>
@@ -7585,7 +7727,7 @@
       </p:sp>
       <p:sp>
         <p:nvSpPr>
-          <p:cNvPr id="12" name="TextBox 11"/>
+          <p:cNvPr id="13" name="TextBox 12"/>
           <p:cNvSpPr txBox="1"/>
           <p:nvPr/>
         </p:nvSpPr>
@@ -7632,7 +7774,7 @@
       </p:sp>
       <p:sp>
         <p:nvSpPr>
-          <p:cNvPr id="13" name="TextBox 12"/>
+          <p:cNvPr id="14" name="TextBox 13"/>
           <p:cNvSpPr txBox="1"/>
           <p:nvPr/>
         </p:nvSpPr>
@@ -7679,7 +7821,7 @@
       </p:sp>
       <p:sp>
         <p:nvSpPr>
-          <p:cNvPr id="14" name="Rounded Rectangle 13"/>
+          <p:cNvPr id="15" name="Rounded Rectangle 14"/>
           <p:cNvSpPr/>
           <p:nvPr/>
         </p:nvSpPr>
@@ -7733,7 +7875,7 @@
       </p:sp>
       <p:sp>
         <p:nvSpPr>
-          <p:cNvPr id="15" name="TextBox 14"/>
+          <p:cNvPr id="16" name="TextBox 15"/>
           <p:cNvSpPr txBox="1"/>
           <p:nvPr/>
         </p:nvSpPr>
@@ -7780,7 +7922,7 @@
       </p:sp>
       <p:sp>
         <p:nvSpPr>
-          <p:cNvPr id="16" name="Rectangle 15"/>
+          <p:cNvPr id="17" name="Rectangle 16"/>
           <p:cNvSpPr/>
           <p:nvPr/>
         </p:nvSpPr>
@@ -7824,7 +7966,7 @@
       </p:sp>
       <p:sp>
         <p:nvSpPr>
-          <p:cNvPr id="17" name="TextBox 16"/>
+          <p:cNvPr id="18" name="TextBox 17"/>
           <p:cNvSpPr txBox="1"/>
           <p:nvPr/>
         </p:nvSpPr>
@@ -7871,7 +8013,7 @@
       </p:sp>
       <p:sp>
         <p:nvSpPr>
-          <p:cNvPr id="18" name="TextBox 17"/>
+          <p:cNvPr id="19" name="TextBox 18"/>
           <p:cNvSpPr txBox="1"/>
           <p:nvPr/>
         </p:nvSpPr>
@@ -7918,7 +8060,7 @@
       </p:sp>
       <p:sp>
         <p:nvSpPr>
-          <p:cNvPr id="19" name="Rounded Rectangle 18"/>
+          <p:cNvPr id="20" name="Rounded Rectangle 19"/>
           <p:cNvSpPr/>
           <p:nvPr/>
         </p:nvSpPr>
@@ -7972,7 +8114,7 @@
       </p:sp>
       <p:sp>
         <p:nvSpPr>
-          <p:cNvPr id="20" name="TextBox 19"/>
+          <p:cNvPr id="21" name="TextBox 20"/>
           <p:cNvSpPr txBox="1"/>
           <p:nvPr/>
         </p:nvSpPr>
@@ -8019,7 +8161,7 @@
       </p:sp>
       <p:sp>
         <p:nvSpPr>
-          <p:cNvPr id="21" name="Rectangle 20"/>
+          <p:cNvPr id="22" name="Rectangle 21"/>
           <p:cNvSpPr/>
           <p:nvPr/>
         </p:nvSpPr>
@@ -8063,7 +8205,7 @@
       </p:sp>
       <p:sp>
         <p:nvSpPr>
-          <p:cNvPr id="22" name="TextBox 21"/>
+          <p:cNvPr id="23" name="TextBox 22"/>
           <p:cNvSpPr txBox="1"/>
           <p:nvPr/>
         </p:nvSpPr>
@@ -8110,7 +8252,7 @@
       </p:sp>
       <p:sp>
         <p:nvSpPr>
-          <p:cNvPr id="23" name="TextBox 22"/>
+          <p:cNvPr id="24" name="TextBox 23"/>
           <p:cNvSpPr txBox="1"/>
           <p:nvPr/>
         </p:nvSpPr>
@@ -8157,7 +8299,7 @@
       </p:sp>
       <p:sp>
         <p:nvSpPr>
-          <p:cNvPr id="24" name="Rounded Rectangle 23"/>
+          <p:cNvPr id="25" name="Rounded Rectangle 24"/>
           <p:cNvSpPr/>
           <p:nvPr/>
         </p:nvSpPr>
@@ -8284,9 +8426,33 @@
           </a:p>
         </p:txBody>
       </p:sp>
-      <p:sp>
-        <p:nvSpPr>
-          <p:cNvPr id="3" name="TextBox 2"/>
+      <p:pic>
+        <p:nvPicPr>
+          <p:cNvPr id="3" name="college-logo" descr="logo-mark.png"/>
+          <p:cNvPicPr>
+            <a:picLocks noChangeAspect="1"/>
+          </p:cNvPicPr>
+          <p:nvPr/>
+        </p:nvPicPr>
+        <p:blipFill>
+          <a:blip r:embed="rId2"/>
+          <a:stretch>
+            <a:fillRect/>
+          </a:stretch>
+        </p:blipFill>
+        <p:spPr>
+          <a:xfrm>
+            <a:off x="11203333" y="6199632"/>
+            <a:ext cx="275129" cy="310896"/>
+          </a:xfrm>
+          <a:prstGeom prst="rect">
+            <a:avLst/>
+          </a:prstGeom>
+        </p:spPr>
+      </p:pic>
+      <p:sp>
+        <p:nvSpPr>
+          <p:cNvPr id="4" name="TextBox 3"/>
           <p:cNvSpPr txBox="1"/>
           <p:nvPr/>
         </p:nvSpPr>
@@ -8355,13 +8521,13 @@
       </p:sp>
       <p:sp>
         <p:nvSpPr>
-          <p:cNvPr id="4" name="TextBox 3"/>
+          <p:cNvPr id="5" name="TextBox 4"/>
           <p:cNvSpPr txBox="1"/>
           <p:nvPr/>
         </p:nvSpPr>
         <p:spPr>
           <a:xfrm>
-            <a:off x="8826703" y="6272784"/>
+            <a:off x="8240677" y="6272784"/>
             <a:ext cx="2651760" cy="219456"/>
           </a:xfrm>
           <a:prstGeom prst="rect">
@@ -8424,7 +8590,7 @@
       </p:sp>
       <p:sp>
         <p:nvSpPr>
-          <p:cNvPr id="5" name="TextBox 4"/>
+          <p:cNvPr id="6" name="TextBox 5"/>
           <p:cNvSpPr txBox="1"/>
           <p:nvPr/>
         </p:nvSpPr>
@@ -8471,7 +8637,7 @@
       </p:sp>
       <p:sp>
         <p:nvSpPr>
-          <p:cNvPr id="6" name="TextBox 5"/>
+          <p:cNvPr id="7" name="TextBox 6"/>
           <p:cNvSpPr txBox="1"/>
           <p:nvPr/>
         </p:nvSpPr>
@@ -8518,7 +8684,7 @@
       </p:sp>
       <p:sp>
         <p:nvSpPr>
-          <p:cNvPr id="7" name="Rectangle 6"/>
+          <p:cNvPr id="8" name="Rectangle 7"/>
           <p:cNvSpPr/>
           <p:nvPr/>
         </p:nvSpPr>
@@ -8562,7 +8728,7 @@
       </p:sp>
       <p:sp>
         <p:nvSpPr>
-          <p:cNvPr id="8" name="TextBox 7"/>
+          <p:cNvPr id="9" name="TextBox 8"/>
           <p:cNvSpPr txBox="1"/>
           <p:nvPr/>
         </p:nvSpPr>
@@ -8609,7 +8775,7 @@
       </p:sp>
       <p:sp>
         <p:nvSpPr>
-          <p:cNvPr id="9" name="Rounded Rectangle 8"/>
+          <p:cNvPr id="10" name="Rounded Rectangle 9"/>
           <p:cNvSpPr/>
           <p:nvPr/>
         </p:nvSpPr>
@@ -8663,7 +8829,7 @@
       </p:sp>
       <p:sp>
         <p:nvSpPr>
-          <p:cNvPr id="10" name="Rectangle 9"/>
+          <p:cNvPr id="11" name="Rectangle 10"/>
           <p:cNvSpPr/>
           <p:nvPr/>
         </p:nvSpPr>
@@ -8707,7 +8873,7 @@
       </p:sp>
       <p:sp>
         <p:nvSpPr>
-          <p:cNvPr id="11" name="TextBox 10"/>
+          <p:cNvPr id="12" name="TextBox 11"/>
           <p:cNvSpPr txBox="1"/>
           <p:nvPr/>
         </p:nvSpPr>
@@ -8754,7 +8920,7 @@
       </p:sp>
       <p:sp>
         <p:nvSpPr>
-          <p:cNvPr id="12" name="Rounded Rectangle 11"/>
+          <p:cNvPr id="13" name="Rounded Rectangle 12"/>
           <p:cNvSpPr/>
           <p:nvPr/>
         </p:nvSpPr>
@@ -8800,7 +8966,7 @@
       </p:sp>
       <p:sp>
         <p:nvSpPr>
-          <p:cNvPr id="13" name="TextBox 12"/>
+          <p:cNvPr id="14" name="TextBox 13"/>
           <p:cNvSpPr txBox="1"/>
           <p:nvPr/>
         </p:nvSpPr>
@@ -8847,7 +9013,7 @@
       </p:sp>
       <p:sp>
         <p:nvSpPr>
-          <p:cNvPr id="14" name="Rounded Rectangle 13"/>
+          <p:cNvPr id="15" name="Rounded Rectangle 14"/>
           <p:cNvSpPr/>
           <p:nvPr/>
         </p:nvSpPr>
@@ -8893,7 +9059,7 @@
       </p:sp>
       <p:sp>
         <p:nvSpPr>
-          <p:cNvPr id="15" name="TextBox 14"/>
+          <p:cNvPr id="16" name="TextBox 15"/>
           <p:cNvSpPr txBox="1"/>
           <p:nvPr/>
         </p:nvSpPr>
@@ -8940,7 +9106,7 @@
       </p:sp>
       <p:sp>
         <p:nvSpPr>
-          <p:cNvPr id="16" name="Rounded Rectangle 15"/>
+          <p:cNvPr id="17" name="Rounded Rectangle 16"/>
           <p:cNvSpPr/>
           <p:nvPr/>
         </p:nvSpPr>
@@ -8994,7 +9160,7 @@
       </p:sp>
       <p:sp>
         <p:nvSpPr>
-          <p:cNvPr id="17" name="Rectangle 16"/>
+          <p:cNvPr id="18" name="Rectangle 17"/>
           <p:cNvSpPr/>
           <p:nvPr/>
         </p:nvSpPr>
@@ -9038,7 +9204,7 @@
       </p:sp>
       <p:sp>
         <p:nvSpPr>
-          <p:cNvPr id="18" name="TextBox 17"/>
+          <p:cNvPr id="19" name="TextBox 18"/>
           <p:cNvSpPr txBox="1"/>
           <p:nvPr/>
         </p:nvSpPr>
@@ -9085,7 +9251,7 @@
       </p:sp>
       <p:sp>
         <p:nvSpPr>
-          <p:cNvPr id="19" name="Rounded Rectangle 18"/>
+          <p:cNvPr id="20" name="Rounded Rectangle 19"/>
           <p:cNvSpPr/>
           <p:nvPr/>
         </p:nvSpPr>
@@ -9131,7 +9297,7 @@
       </p:sp>
       <p:sp>
         <p:nvSpPr>
-          <p:cNvPr id="20" name="TextBox 19"/>
+          <p:cNvPr id="21" name="TextBox 20"/>
           <p:cNvSpPr txBox="1"/>
           <p:nvPr/>
         </p:nvSpPr>
@@ -9178,7 +9344,7 @@
       </p:sp>
       <p:sp>
         <p:nvSpPr>
-          <p:cNvPr id="21" name="Rounded Rectangle 20"/>
+          <p:cNvPr id="22" name="Rounded Rectangle 21"/>
           <p:cNvSpPr/>
           <p:nvPr/>
         </p:nvSpPr>
@@ -9224,7 +9390,7 @@
       </p:sp>
       <p:sp>
         <p:nvSpPr>
-          <p:cNvPr id="22" name="TextBox 21"/>
+          <p:cNvPr id="23" name="TextBox 22"/>
           <p:cNvSpPr txBox="1"/>
           <p:nvPr/>
         </p:nvSpPr>
@@ -9271,7 +9437,7 @@
       </p:sp>
       <p:sp>
         <p:nvSpPr>
-          <p:cNvPr id="23" name="Rounded Rectangle 22"/>
+          <p:cNvPr id="24" name="Rounded Rectangle 23"/>
           <p:cNvSpPr/>
           <p:nvPr/>
         </p:nvSpPr>
@@ -9325,7 +9491,7 @@
       </p:sp>
       <p:sp>
         <p:nvSpPr>
-          <p:cNvPr id="24" name="Rectangle 23"/>
+          <p:cNvPr id="25" name="Rectangle 24"/>
           <p:cNvSpPr/>
           <p:nvPr/>
         </p:nvSpPr>
@@ -9369,7 +9535,7 @@
       </p:sp>
       <p:sp>
         <p:nvSpPr>
-          <p:cNvPr id="25" name="TextBox 24"/>
+          <p:cNvPr id="26" name="TextBox 25"/>
           <p:cNvSpPr txBox="1"/>
           <p:nvPr/>
         </p:nvSpPr>
@@ -9416,7 +9582,7 @@
       </p:sp>
       <p:sp>
         <p:nvSpPr>
-          <p:cNvPr id="26" name="Rounded Rectangle 25"/>
+          <p:cNvPr id="27" name="Rounded Rectangle 26"/>
           <p:cNvSpPr/>
           <p:nvPr/>
         </p:nvSpPr>
@@ -9462,7 +9628,7 @@
       </p:sp>
       <p:sp>
         <p:nvSpPr>
-          <p:cNvPr id="27" name="TextBox 26"/>
+          <p:cNvPr id="28" name="TextBox 27"/>
           <p:cNvSpPr txBox="1"/>
           <p:nvPr/>
         </p:nvSpPr>
@@ -9509,7 +9675,7 @@
       </p:sp>
       <p:sp>
         <p:nvSpPr>
-          <p:cNvPr id="28" name="Rounded Rectangle 27"/>
+          <p:cNvPr id="29" name="Rounded Rectangle 28"/>
           <p:cNvSpPr/>
           <p:nvPr/>
         </p:nvSpPr>
@@ -9555,7 +9721,7 @@
       </p:sp>
       <p:sp>
         <p:nvSpPr>
-          <p:cNvPr id="29" name="TextBox 28"/>
+          <p:cNvPr id="30" name="TextBox 29"/>
           <p:cNvSpPr txBox="1"/>
           <p:nvPr/>
         </p:nvSpPr>
@@ -9602,7 +9768,7 @@
       </p:sp>
       <p:sp>
         <p:nvSpPr>
-          <p:cNvPr id="30" name="Rounded Rectangle 29"/>
+          <p:cNvPr id="31" name="Rounded Rectangle 30"/>
           <p:cNvSpPr/>
           <p:nvPr/>
         </p:nvSpPr>
@@ -9656,7 +9822,7 @@
       </p:sp>
       <p:sp>
         <p:nvSpPr>
-          <p:cNvPr id="31" name="Rectangle 30"/>
+          <p:cNvPr id="32" name="Rectangle 31"/>
           <p:cNvSpPr/>
           <p:nvPr/>
         </p:nvSpPr>
@@ -9700,7 +9866,7 @@
       </p:sp>
       <p:sp>
         <p:nvSpPr>
-          <p:cNvPr id="32" name="TextBox 31"/>
+          <p:cNvPr id="33" name="TextBox 32"/>
           <p:cNvSpPr txBox="1"/>
           <p:nvPr/>
         </p:nvSpPr>
@@ -9747,7 +9913,7 @@
       </p:sp>
       <p:sp>
         <p:nvSpPr>
-          <p:cNvPr id="33" name="Rounded Rectangle 32"/>
+          <p:cNvPr id="34" name="Rounded Rectangle 33"/>
           <p:cNvSpPr/>
           <p:nvPr/>
         </p:nvSpPr>
@@ -9793,7 +9959,7 @@
       </p:sp>
       <p:sp>
         <p:nvSpPr>
-          <p:cNvPr id="34" name="TextBox 33"/>
+          <p:cNvPr id="35" name="TextBox 34"/>
           <p:cNvSpPr txBox="1"/>
           <p:nvPr/>
         </p:nvSpPr>
@@ -9840,7 +10006,7 @@
       </p:sp>
       <p:sp>
         <p:nvSpPr>
-          <p:cNvPr id="35" name="Rounded Rectangle 34"/>
+          <p:cNvPr id="36" name="Rounded Rectangle 35"/>
           <p:cNvSpPr/>
           <p:nvPr/>
         </p:nvSpPr>
@@ -9886,7 +10052,7 @@
       </p:sp>
       <p:sp>
         <p:nvSpPr>
-          <p:cNvPr id="36" name="TextBox 35"/>
+          <p:cNvPr id="37" name="TextBox 36"/>
           <p:cNvSpPr txBox="1"/>
           <p:nvPr/>
         </p:nvSpPr>
@@ -10369,6 +10535,76 @@
           </a:p>
         </p:txBody>
       </p:sp>
+      <p:sp>
+        <p:nvSpPr>
+          <p:cNvPr id="11" name="logo-plate"/>
+          <p:cNvSpPr/>
+          <p:nvPr/>
+        </p:nvSpPr>
+        <p:spPr>
+          <a:xfrm>
+            <a:off x="9512190" y="539496"/>
+            <a:ext cx="1993704" cy="987552"/>
+          </a:xfrm>
+          <a:prstGeom prst="roundRect">
+            <a:avLst>
+              <a:gd name="adj" fmla="val 14000"/>
+            </a:avLst>
+          </a:prstGeom>
+          <a:solidFill>
+            <a:srgbClr val="FFFFFF"/>
+          </a:solidFill>
+          <a:ln>
+            <a:noFill/>
+          </a:ln>
+          <a:effectLst/>
+        </p:spPr>
+        <p:style>
+          <a:lnRef idx="1">
+            <a:schemeClr val="accent1"/>
+          </a:lnRef>
+          <a:fillRef idx="3">
+            <a:schemeClr val="accent1"/>
+          </a:fillRef>
+          <a:effectRef idx="2">
+            <a:schemeClr val="accent1"/>
+          </a:effectRef>
+          <a:fontRef idx="minor">
+            <a:schemeClr val="lt1"/>
+          </a:fontRef>
+        </p:style>
+        <p:txBody>
+          <a:bodyPr rtlCol="0" anchor="ctr" wrap="square"/>
+          <a:lstStyle/>
+          <a:p>
+            <a:pPr algn="ctr"/>
+          </a:p>
+        </p:txBody>
+      </p:sp>
+      <p:pic>
+        <p:nvPicPr>
+          <p:cNvPr id="12" name="college-logo" descr="logo-full.png"/>
+          <p:cNvPicPr>
+            <a:picLocks noChangeAspect="1"/>
+          </p:cNvPicPr>
+          <p:nvPr/>
+        </p:nvPicPr>
+        <p:blipFill>
+          <a:blip r:embed="rId2"/>
+          <a:stretch>
+            <a:fillRect/>
+          </a:stretch>
+        </p:blipFill>
+        <p:spPr>
+          <a:xfrm>
+            <a:off x="9631062" y="658368"/>
+            <a:ext cx="1755961" cy="749808"/>
+          </a:xfrm>
+          <a:prstGeom prst="rect">
+            <a:avLst/>
+          </a:prstGeom>
+        </p:spPr>
+      </p:pic>
     </p:spTree>
   </p:cSld>
   <p:clrMapOvr>
@@ -10431,9 +10667,33 @@
           </a:p>
         </p:txBody>
       </p:sp>
-      <p:sp>
-        <p:nvSpPr>
-          <p:cNvPr id="3" name="TextBox 2"/>
+      <p:pic>
+        <p:nvPicPr>
+          <p:cNvPr id="3" name="college-logo" descr="logo-mark.png"/>
+          <p:cNvPicPr>
+            <a:picLocks noChangeAspect="1"/>
+          </p:cNvPicPr>
+          <p:nvPr/>
+        </p:nvPicPr>
+        <p:blipFill>
+          <a:blip r:embed="rId2"/>
+          <a:stretch>
+            <a:fillRect/>
+          </a:stretch>
+        </p:blipFill>
+        <p:spPr>
+          <a:xfrm>
+            <a:off x="11203333" y="6199632"/>
+            <a:ext cx="275129" cy="310896"/>
+          </a:xfrm>
+          <a:prstGeom prst="rect">
+            <a:avLst/>
+          </a:prstGeom>
+        </p:spPr>
+      </p:pic>
+      <p:sp>
+        <p:nvSpPr>
+          <p:cNvPr id="4" name="TextBox 3"/>
           <p:cNvSpPr txBox="1"/>
           <p:nvPr/>
         </p:nvSpPr>
@@ -10502,13 +10762,13 @@
       </p:sp>
       <p:sp>
         <p:nvSpPr>
-          <p:cNvPr id="4" name="TextBox 3"/>
+          <p:cNvPr id="5" name="TextBox 4"/>
           <p:cNvSpPr txBox="1"/>
           <p:nvPr/>
         </p:nvSpPr>
         <p:spPr>
           <a:xfrm>
-            <a:off x="8826703" y="6272784"/>
+            <a:off x="8240677" y="6272784"/>
             <a:ext cx="2651760" cy="219456"/>
           </a:xfrm>
           <a:prstGeom prst="rect">
@@ -10571,7 +10831,7 @@
       </p:sp>
       <p:sp>
         <p:nvSpPr>
-          <p:cNvPr id="5" name="TextBox 4"/>
+          <p:cNvPr id="6" name="TextBox 5"/>
           <p:cNvSpPr txBox="1"/>
           <p:nvPr/>
         </p:nvSpPr>
@@ -10618,7 +10878,7 @@
       </p:sp>
       <p:sp>
         <p:nvSpPr>
-          <p:cNvPr id="6" name="TextBox 5"/>
+          <p:cNvPr id="7" name="TextBox 6"/>
           <p:cNvSpPr txBox="1"/>
           <p:nvPr/>
         </p:nvSpPr>
@@ -10665,7 +10925,7 @@
       </p:sp>
       <p:sp>
         <p:nvSpPr>
-          <p:cNvPr id="7" name="Rectangle 6"/>
+          <p:cNvPr id="8" name="Rectangle 7"/>
           <p:cNvSpPr/>
           <p:nvPr/>
         </p:nvSpPr>
@@ -10709,7 +10969,7 @@
       </p:sp>
       <p:sp>
         <p:nvSpPr>
-          <p:cNvPr id="8" name="TextBox 7"/>
+          <p:cNvPr id="9" name="TextBox 8"/>
           <p:cNvSpPr txBox="1"/>
           <p:nvPr/>
         </p:nvSpPr>
@@ -10756,7 +11016,7 @@
       </p:sp>
       <p:sp>
         <p:nvSpPr>
-          <p:cNvPr id="9" name="Rounded Rectangle 8"/>
+          <p:cNvPr id="10" name="Rounded Rectangle 9"/>
           <p:cNvSpPr/>
           <p:nvPr/>
         </p:nvSpPr>
@@ -10810,7 +11070,7 @@
       </p:sp>
       <p:sp>
         <p:nvSpPr>
-          <p:cNvPr id="10" name="Rectangle 9"/>
+          <p:cNvPr id="11" name="Rectangle 10"/>
           <p:cNvSpPr/>
           <p:nvPr/>
         </p:nvSpPr>
@@ -10854,7 +11114,7 @@
       </p:sp>
       <p:sp>
         <p:nvSpPr>
-          <p:cNvPr id="11" name="TextBox 10"/>
+          <p:cNvPr id="12" name="TextBox 11"/>
           <p:cNvSpPr txBox="1"/>
           <p:nvPr/>
         </p:nvSpPr>
@@ -10901,7 +11161,7 @@
       </p:sp>
       <p:sp>
         <p:nvSpPr>
-          <p:cNvPr id="12" name="TextBox 11"/>
+          <p:cNvPr id="13" name="TextBox 12"/>
           <p:cNvSpPr txBox="1"/>
           <p:nvPr/>
         </p:nvSpPr>
@@ -10948,7 +11208,7 @@
       </p:sp>
       <p:sp>
         <p:nvSpPr>
-          <p:cNvPr id="13" name="Rounded Rectangle 12"/>
+          <p:cNvPr id="14" name="Rounded Rectangle 13"/>
           <p:cNvSpPr/>
           <p:nvPr/>
         </p:nvSpPr>
@@ -11002,7 +11262,7 @@
       </p:sp>
       <p:sp>
         <p:nvSpPr>
-          <p:cNvPr id="14" name="Rectangle 13"/>
+          <p:cNvPr id="15" name="Rectangle 14"/>
           <p:cNvSpPr/>
           <p:nvPr/>
         </p:nvSpPr>
@@ -11046,7 +11306,7 @@
       </p:sp>
       <p:sp>
         <p:nvSpPr>
-          <p:cNvPr id="15" name="TextBox 14"/>
+          <p:cNvPr id="16" name="TextBox 15"/>
           <p:cNvSpPr txBox="1"/>
           <p:nvPr/>
         </p:nvSpPr>
@@ -11093,7 +11353,7 @@
       </p:sp>
       <p:sp>
         <p:nvSpPr>
-          <p:cNvPr id="16" name="TextBox 15"/>
+          <p:cNvPr id="17" name="TextBox 16"/>
           <p:cNvSpPr txBox="1"/>
           <p:nvPr/>
         </p:nvSpPr>
@@ -11140,7 +11400,7 @@
       </p:sp>
       <p:sp>
         <p:nvSpPr>
-          <p:cNvPr id="17" name="Rounded Rectangle 16"/>
+          <p:cNvPr id="18" name="Rounded Rectangle 17"/>
           <p:cNvSpPr/>
           <p:nvPr/>
         </p:nvSpPr>
@@ -11194,7 +11454,7 @@
       </p:sp>
       <p:sp>
         <p:nvSpPr>
-          <p:cNvPr id="18" name="Rectangle 17"/>
+          <p:cNvPr id="19" name="Rectangle 18"/>
           <p:cNvSpPr/>
           <p:nvPr/>
         </p:nvSpPr>
@@ -11238,7 +11498,7 @@
       </p:sp>
       <p:sp>
         <p:nvSpPr>
-          <p:cNvPr id="19" name="TextBox 18"/>
+          <p:cNvPr id="20" name="TextBox 19"/>
           <p:cNvSpPr txBox="1"/>
           <p:nvPr/>
         </p:nvSpPr>
@@ -11285,7 +11545,7 @@
       </p:sp>
       <p:sp>
         <p:nvSpPr>
-          <p:cNvPr id="20" name="TextBox 19"/>
+          <p:cNvPr id="21" name="TextBox 20"/>
           <p:cNvSpPr txBox="1"/>
           <p:nvPr/>
         </p:nvSpPr>
@@ -11332,7 +11592,7 @@
       </p:sp>
       <p:sp>
         <p:nvSpPr>
-          <p:cNvPr id="21" name="Rounded Rectangle 20"/>
+          <p:cNvPr id="22" name="Rounded Rectangle 21"/>
           <p:cNvSpPr/>
           <p:nvPr/>
         </p:nvSpPr>
@@ -11386,7 +11646,7 @@
       </p:sp>
       <p:sp>
         <p:nvSpPr>
-          <p:cNvPr id="22" name="Rectangle 21"/>
+          <p:cNvPr id="23" name="Rectangle 22"/>
           <p:cNvSpPr/>
           <p:nvPr/>
         </p:nvSpPr>
@@ -11430,7 +11690,7 @@
       </p:sp>
       <p:sp>
         <p:nvSpPr>
-          <p:cNvPr id="23" name="TextBox 22"/>
+          <p:cNvPr id="24" name="TextBox 23"/>
           <p:cNvSpPr txBox="1"/>
           <p:nvPr/>
         </p:nvSpPr>
@@ -11477,7 +11737,7 @@
       </p:sp>
       <p:sp>
         <p:nvSpPr>
-          <p:cNvPr id="24" name="TextBox 23"/>
+          <p:cNvPr id="25" name="TextBox 24"/>
           <p:cNvSpPr txBox="1"/>
           <p:nvPr/>
         </p:nvSpPr>
@@ -11524,7 +11784,7 @@
       </p:sp>
       <p:sp>
         <p:nvSpPr>
-          <p:cNvPr id="25" name="Rounded Rectangle 24"/>
+          <p:cNvPr id="26" name="Rounded Rectangle 25"/>
           <p:cNvSpPr/>
           <p:nvPr/>
         </p:nvSpPr>
@@ -11578,7 +11838,7 @@
       </p:sp>
       <p:sp>
         <p:nvSpPr>
-          <p:cNvPr id="26" name="Rectangle 25"/>
+          <p:cNvPr id="27" name="Rectangle 26"/>
           <p:cNvSpPr/>
           <p:nvPr/>
         </p:nvSpPr>
@@ -11622,7 +11882,7 @@
       </p:sp>
       <p:sp>
         <p:nvSpPr>
-          <p:cNvPr id="27" name="TextBox 26"/>
+          <p:cNvPr id="28" name="TextBox 27"/>
           <p:cNvSpPr txBox="1"/>
           <p:nvPr/>
         </p:nvSpPr>
@@ -11669,7 +11929,7 @@
       </p:sp>
       <p:sp>
         <p:nvSpPr>
-          <p:cNvPr id="28" name="TextBox 27"/>
+          <p:cNvPr id="29" name="TextBox 28"/>
           <p:cNvSpPr txBox="1"/>
           <p:nvPr/>
         </p:nvSpPr>
@@ -11716,7 +11976,7 @@
       </p:sp>
       <p:sp>
         <p:nvSpPr>
-          <p:cNvPr id="29" name="Rounded Rectangle 28"/>
+          <p:cNvPr id="30" name="Rounded Rectangle 29"/>
           <p:cNvSpPr/>
           <p:nvPr/>
         </p:nvSpPr>
@@ -11770,7 +12030,7 @@
       </p:sp>
       <p:sp>
         <p:nvSpPr>
-          <p:cNvPr id="30" name="Rectangle 29"/>
+          <p:cNvPr id="31" name="Rectangle 30"/>
           <p:cNvSpPr/>
           <p:nvPr/>
         </p:nvSpPr>
@@ -11814,7 +12074,7 @@
       </p:sp>
       <p:sp>
         <p:nvSpPr>
-          <p:cNvPr id="31" name="TextBox 30"/>
+          <p:cNvPr id="32" name="TextBox 31"/>
           <p:cNvSpPr txBox="1"/>
           <p:nvPr/>
         </p:nvSpPr>
@@ -11861,7 +12121,7 @@
       </p:sp>
       <p:sp>
         <p:nvSpPr>
-          <p:cNvPr id="32" name="TextBox 31"/>
+          <p:cNvPr id="33" name="TextBox 32"/>
           <p:cNvSpPr txBox="1"/>
           <p:nvPr/>
         </p:nvSpPr>
@@ -12344,6 +12604,76 @@
           </a:p>
         </p:txBody>
       </p:sp>
+      <p:sp>
+        <p:nvSpPr>
+          <p:cNvPr id="11" name="logo-plate"/>
+          <p:cNvSpPr/>
+          <p:nvPr/>
+        </p:nvSpPr>
+        <p:spPr>
+          <a:xfrm>
+            <a:off x="9512190" y="539496"/>
+            <a:ext cx="1993704" cy="987552"/>
+          </a:xfrm>
+          <a:prstGeom prst="roundRect">
+            <a:avLst>
+              <a:gd name="adj" fmla="val 14000"/>
+            </a:avLst>
+          </a:prstGeom>
+          <a:solidFill>
+            <a:srgbClr val="FFFFFF"/>
+          </a:solidFill>
+          <a:ln>
+            <a:noFill/>
+          </a:ln>
+          <a:effectLst/>
+        </p:spPr>
+        <p:style>
+          <a:lnRef idx="1">
+            <a:schemeClr val="accent1"/>
+          </a:lnRef>
+          <a:fillRef idx="3">
+            <a:schemeClr val="accent1"/>
+          </a:fillRef>
+          <a:effectRef idx="2">
+            <a:schemeClr val="accent1"/>
+          </a:effectRef>
+          <a:fontRef idx="minor">
+            <a:schemeClr val="lt1"/>
+          </a:fontRef>
+        </p:style>
+        <p:txBody>
+          <a:bodyPr rtlCol="0" anchor="ctr" wrap="square"/>
+          <a:lstStyle/>
+          <a:p>
+            <a:pPr algn="ctr"/>
+          </a:p>
+        </p:txBody>
+      </p:sp>
+      <p:pic>
+        <p:nvPicPr>
+          <p:cNvPr id="12" name="college-logo" descr="logo-full.png"/>
+          <p:cNvPicPr>
+            <a:picLocks noChangeAspect="1"/>
+          </p:cNvPicPr>
+          <p:nvPr/>
+        </p:nvPicPr>
+        <p:blipFill>
+          <a:blip r:embed="rId2"/>
+          <a:stretch>
+            <a:fillRect/>
+          </a:stretch>
+        </p:blipFill>
+        <p:spPr>
+          <a:xfrm>
+            <a:off x="9631062" y="658368"/>
+            <a:ext cx="1755961" cy="749808"/>
+          </a:xfrm>
+          <a:prstGeom prst="rect">
+            <a:avLst/>
+          </a:prstGeom>
+        </p:spPr>
+      </p:pic>
     </p:spTree>
   </p:cSld>
   <p:clrMapOvr>
@@ -12406,9 +12736,33 @@
           </a:p>
         </p:txBody>
       </p:sp>
-      <p:sp>
-        <p:nvSpPr>
-          <p:cNvPr id="3" name="TextBox 2"/>
+      <p:pic>
+        <p:nvPicPr>
+          <p:cNvPr id="3" name="college-logo" descr="logo-mark.png"/>
+          <p:cNvPicPr>
+            <a:picLocks noChangeAspect="1"/>
+          </p:cNvPicPr>
+          <p:nvPr/>
+        </p:nvPicPr>
+        <p:blipFill>
+          <a:blip r:embed="rId2"/>
+          <a:stretch>
+            <a:fillRect/>
+          </a:stretch>
+        </p:blipFill>
+        <p:spPr>
+          <a:xfrm>
+            <a:off x="11203333" y="6199632"/>
+            <a:ext cx="275129" cy="310896"/>
+          </a:xfrm>
+          <a:prstGeom prst="rect">
+            <a:avLst/>
+          </a:prstGeom>
+        </p:spPr>
+      </p:pic>
+      <p:sp>
+        <p:nvSpPr>
+          <p:cNvPr id="4" name="TextBox 3"/>
           <p:cNvSpPr txBox="1"/>
           <p:nvPr/>
         </p:nvSpPr>
@@ -12477,13 +12831,13 @@
       </p:sp>
       <p:sp>
         <p:nvSpPr>
-          <p:cNvPr id="4" name="TextBox 3"/>
+          <p:cNvPr id="5" name="TextBox 4"/>
           <p:cNvSpPr txBox="1"/>
           <p:nvPr/>
         </p:nvSpPr>
         <p:spPr>
           <a:xfrm>
-            <a:off x="8826703" y="6272784"/>
+            <a:off x="8240677" y="6272784"/>
             <a:ext cx="2651760" cy="219456"/>
           </a:xfrm>
           <a:prstGeom prst="rect">
@@ -12546,7 +12900,7 @@
       </p:sp>
       <p:sp>
         <p:nvSpPr>
-          <p:cNvPr id="5" name="TextBox 4"/>
+          <p:cNvPr id="6" name="TextBox 5"/>
           <p:cNvSpPr txBox="1"/>
           <p:nvPr/>
         </p:nvSpPr>
@@ -12593,7 +12947,7 @@
       </p:sp>
       <p:sp>
         <p:nvSpPr>
-          <p:cNvPr id="6" name="TextBox 5"/>
+          <p:cNvPr id="7" name="TextBox 6"/>
           <p:cNvSpPr txBox="1"/>
           <p:nvPr/>
         </p:nvSpPr>
@@ -12640,7 +12994,7 @@
       </p:sp>
       <p:sp>
         <p:nvSpPr>
-          <p:cNvPr id="7" name="Rectangle 6"/>
+          <p:cNvPr id="8" name="Rectangle 7"/>
           <p:cNvSpPr/>
           <p:nvPr/>
         </p:nvSpPr>
@@ -12684,7 +13038,7 @@
       </p:sp>
       <p:sp>
         <p:nvSpPr>
-          <p:cNvPr id="8" name="TextBox 7"/>
+          <p:cNvPr id="9" name="TextBox 8"/>
           <p:cNvSpPr txBox="1"/>
           <p:nvPr/>
         </p:nvSpPr>
@@ -12731,7 +13085,7 @@
       </p:sp>
       <p:sp>
         <p:nvSpPr>
-          <p:cNvPr id="9" name="Rounded Rectangle 8"/>
+          <p:cNvPr id="10" name="Rounded Rectangle 9"/>
           <p:cNvSpPr/>
           <p:nvPr/>
         </p:nvSpPr>
@@ -12785,7 +13139,7 @@
       </p:sp>
       <p:sp>
         <p:nvSpPr>
-          <p:cNvPr id="10" name="Rectangle 9"/>
+          <p:cNvPr id="11" name="Rectangle 10"/>
           <p:cNvSpPr/>
           <p:nvPr/>
         </p:nvSpPr>
@@ -12829,7 +13183,7 @@
       </p:sp>
       <p:sp>
         <p:nvSpPr>
-          <p:cNvPr id="11" name="Oval 10"/>
+          <p:cNvPr id="12" name="Oval 11"/>
           <p:cNvSpPr/>
           <p:nvPr/>
         </p:nvSpPr>
@@ -12873,7 +13227,7 @@
       </p:sp>
       <p:sp>
         <p:nvSpPr>
-          <p:cNvPr id="12" name="TextBox 11"/>
+          <p:cNvPr id="13" name="TextBox 12"/>
           <p:cNvSpPr txBox="1"/>
           <p:nvPr/>
         </p:nvSpPr>
@@ -12920,7 +13274,7 @@
       </p:sp>
       <p:sp>
         <p:nvSpPr>
-          <p:cNvPr id="13" name="TextBox 12"/>
+          <p:cNvPr id="14" name="TextBox 13"/>
           <p:cNvSpPr txBox="1"/>
           <p:nvPr/>
         </p:nvSpPr>
@@ -12967,7 +13321,7 @@
       </p:sp>
       <p:sp>
         <p:nvSpPr>
-          <p:cNvPr id="14" name="TextBox 13"/>
+          <p:cNvPr id="15" name="TextBox 14"/>
           <p:cNvSpPr txBox="1"/>
           <p:nvPr/>
         </p:nvSpPr>
@@ -13014,7 +13368,7 @@
       </p:sp>
       <p:sp>
         <p:nvSpPr>
-          <p:cNvPr id="15" name="Rounded Rectangle 14"/>
+          <p:cNvPr id="16" name="Rounded Rectangle 15"/>
           <p:cNvSpPr/>
           <p:nvPr/>
         </p:nvSpPr>
@@ -13068,7 +13422,7 @@
       </p:sp>
       <p:sp>
         <p:nvSpPr>
-          <p:cNvPr id="16" name="Rectangle 15"/>
+          <p:cNvPr id="17" name="Rectangle 16"/>
           <p:cNvSpPr/>
           <p:nvPr/>
         </p:nvSpPr>
@@ -13112,7 +13466,7 @@
       </p:sp>
       <p:sp>
         <p:nvSpPr>
-          <p:cNvPr id="17" name="Oval 16"/>
+          <p:cNvPr id="18" name="Oval 17"/>
           <p:cNvSpPr/>
           <p:nvPr/>
         </p:nvSpPr>
@@ -13156,7 +13510,7 @@
       </p:sp>
       <p:sp>
         <p:nvSpPr>
-          <p:cNvPr id="18" name="TextBox 17"/>
+          <p:cNvPr id="19" name="TextBox 18"/>
           <p:cNvSpPr txBox="1"/>
           <p:nvPr/>
         </p:nvSpPr>
@@ -13203,7 +13557,7 @@
       </p:sp>
       <p:sp>
         <p:nvSpPr>
-          <p:cNvPr id="19" name="TextBox 18"/>
+          <p:cNvPr id="20" name="TextBox 19"/>
           <p:cNvSpPr txBox="1"/>
           <p:nvPr/>
         </p:nvSpPr>
@@ -13250,7 +13604,7 @@
       </p:sp>
       <p:sp>
         <p:nvSpPr>
-          <p:cNvPr id="20" name="TextBox 19"/>
+          <p:cNvPr id="21" name="TextBox 20"/>
           <p:cNvSpPr txBox="1"/>
           <p:nvPr/>
         </p:nvSpPr>
@@ -13297,7 +13651,7 @@
       </p:sp>
       <p:sp>
         <p:nvSpPr>
-          <p:cNvPr id="21" name="Rounded Rectangle 20"/>
+          <p:cNvPr id="22" name="Rounded Rectangle 21"/>
           <p:cNvSpPr/>
           <p:nvPr/>
         </p:nvSpPr>
@@ -13351,7 +13705,7 @@
       </p:sp>
       <p:sp>
         <p:nvSpPr>
-          <p:cNvPr id="22" name="Rectangle 21"/>
+          <p:cNvPr id="23" name="Rectangle 22"/>
           <p:cNvSpPr/>
           <p:nvPr/>
         </p:nvSpPr>
@@ -13395,7 +13749,7 @@
       </p:sp>
       <p:sp>
         <p:nvSpPr>
-          <p:cNvPr id="23" name="Oval 22"/>
+          <p:cNvPr id="24" name="Oval 23"/>
           <p:cNvSpPr/>
           <p:nvPr/>
         </p:nvSpPr>
@@ -13439,7 +13793,7 @@
       </p:sp>
       <p:sp>
         <p:nvSpPr>
-          <p:cNvPr id="24" name="TextBox 23"/>
+          <p:cNvPr id="25" name="TextBox 24"/>
           <p:cNvSpPr txBox="1"/>
           <p:nvPr/>
         </p:nvSpPr>
@@ -13486,7 +13840,7 @@
       </p:sp>
       <p:sp>
         <p:nvSpPr>
-          <p:cNvPr id="25" name="TextBox 24"/>
+          <p:cNvPr id="26" name="TextBox 25"/>
           <p:cNvSpPr txBox="1"/>
           <p:nvPr/>
         </p:nvSpPr>
@@ -13533,7 +13887,7 @@
       </p:sp>
       <p:sp>
         <p:nvSpPr>
-          <p:cNvPr id="26" name="TextBox 25"/>
+          <p:cNvPr id="27" name="TextBox 26"/>
           <p:cNvSpPr txBox="1"/>
           <p:nvPr/>
         </p:nvSpPr>
@@ -13580,7 +13934,7 @@
       </p:sp>
       <p:sp>
         <p:nvSpPr>
-          <p:cNvPr id="27" name="Rounded Rectangle 26"/>
+          <p:cNvPr id="28" name="Rounded Rectangle 27"/>
           <p:cNvSpPr/>
           <p:nvPr/>
         </p:nvSpPr>
@@ -13634,7 +13988,7 @@
       </p:sp>
       <p:sp>
         <p:nvSpPr>
-          <p:cNvPr id="28" name="Rectangle 27"/>
+          <p:cNvPr id="29" name="Rectangle 28"/>
           <p:cNvSpPr/>
           <p:nvPr/>
         </p:nvSpPr>
@@ -13678,7 +14032,7 @@
       </p:sp>
       <p:sp>
         <p:nvSpPr>
-          <p:cNvPr id="29" name="Oval 28"/>
+          <p:cNvPr id="30" name="Oval 29"/>
           <p:cNvSpPr/>
           <p:nvPr/>
         </p:nvSpPr>
@@ -13722,7 +14076,7 @@
       </p:sp>
       <p:sp>
         <p:nvSpPr>
-          <p:cNvPr id="30" name="TextBox 29"/>
+          <p:cNvPr id="31" name="TextBox 30"/>
           <p:cNvSpPr txBox="1"/>
           <p:nvPr/>
         </p:nvSpPr>
@@ -13769,7 +14123,7 @@
       </p:sp>
       <p:sp>
         <p:nvSpPr>
-          <p:cNvPr id="31" name="TextBox 30"/>
+          <p:cNvPr id="32" name="TextBox 31"/>
           <p:cNvSpPr txBox="1"/>
           <p:nvPr/>
         </p:nvSpPr>
@@ -13816,7 +14170,7 @@
       </p:sp>
       <p:sp>
         <p:nvSpPr>
-          <p:cNvPr id="32" name="TextBox 31"/>
+          <p:cNvPr id="33" name="TextBox 32"/>
           <p:cNvSpPr txBox="1"/>
           <p:nvPr/>
         </p:nvSpPr>
@@ -13863,7 +14217,7 @@
       </p:sp>
       <p:sp>
         <p:nvSpPr>
-          <p:cNvPr id="33" name="Rounded Rectangle 32"/>
+          <p:cNvPr id="34" name="Rounded Rectangle 33"/>
           <p:cNvSpPr/>
           <p:nvPr/>
         </p:nvSpPr>
@@ -13917,7 +14271,7 @@
       </p:sp>
       <p:sp>
         <p:nvSpPr>
-          <p:cNvPr id="34" name="Rectangle 33"/>
+          <p:cNvPr id="35" name="Rectangle 34"/>
           <p:cNvSpPr/>
           <p:nvPr/>
         </p:nvSpPr>
@@ -13961,7 +14315,7 @@
       </p:sp>
       <p:sp>
         <p:nvSpPr>
-          <p:cNvPr id="35" name="Oval 34"/>
+          <p:cNvPr id="36" name="Oval 35"/>
           <p:cNvSpPr/>
           <p:nvPr/>
         </p:nvSpPr>
@@ -14005,7 +14359,7 @@
       </p:sp>
       <p:sp>
         <p:nvSpPr>
-          <p:cNvPr id="36" name="TextBox 35"/>
+          <p:cNvPr id="37" name="TextBox 36"/>
           <p:cNvSpPr txBox="1"/>
           <p:nvPr/>
         </p:nvSpPr>
@@ -14052,7 +14406,7 @@
       </p:sp>
       <p:sp>
         <p:nvSpPr>
-          <p:cNvPr id="37" name="TextBox 36"/>
+          <p:cNvPr id="38" name="TextBox 37"/>
           <p:cNvSpPr txBox="1"/>
           <p:nvPr/>
         </p:nvSpPr>
@@ -14099,7 +14453,7 @@
       </p:sp>
       <p:sp>
         <p:nvSpPr>
-          <p:cNvPr id="38" name="TextBox 37"/>
+          <p:cNvPr id="39" name="TextBox 38"/>
           <p:cNvSpPr txBox="1"/>
           <p:nvPr/>
         </p:nvSpPr>
@@ -14206,9 +14560,33 @@
           </a:p>
         </p:txBody>
       </p:sp>
-      <p:sp>
-        <p:nvSpPr>
-          <p:cNvPr id="3" name="TextBox 2"/>
+      <p:pic>
+        <p:nvPicPr>
+          <p:cNvPr id="3" name="college-logo" descr="logo-mark.png"/>
+          <p:cNvPicPr>
+            <a:picLocks noChangeAspect="1"/>
+          </p:cNvPicPr>
+          <p:nvPr/>
+        </p:nvPicPr>
+        <p:blipFill>
+          <a:blip r:embed="rId2"/>
+          <a:stretch>
+            <a:fillRect/>
+          </a:stretch>
+        </p:blipFill>
+        <p:spPr>
+          <a:xfrm>
+            <a:off x="11203333" y="6199632"/>
+            <a:ext cx="275129" cy="310896"/>
+          </a:xfrm>
+          <a:prstGeom prst="rect">
+            <a:avLst/>
+          </a:prstGeom>
+        </p:spPr>
+      </p:pic>
+      <p:sp>
+        <p:nvSpPr>
+          <p:cNvPr id="4" name="TextBox 3"/>
           <p:cNvSpPr txBox="1"/>
           <p:nvPr/>
         </p:nvSpPr>
@@ -14277,13 +14655,13 @@
       </p:sp>
       <p:sp>
         <p:nvSpPr>
-          <p:cNvPr id="4" name="TextBox 3"/>
+          <p:cNvPr id="5" name="TextBox 4"/>
           <p:cNvSpPr txBox="1"/>
           <p:nvPr/>
         </p:nvSpPr>
         <p:spPr>
           <a:xfrm>
-            <a:off x="8826703" y="6272784"/>
+            <a:off x="8240677" y="6272784"/>
             <a:ext cx="2651760" cy="219456"/>
           </a:xfrm>
           <a:prstGeom prst="rect">
@@ -14346,7 +14724,7 @@
       </p:sp>
       <p:sp>
         <p:nvSpPr>
-          <p:cNvPr id="5" name="TextBox 4"/>
+          <p:cNvPr id="6" name="TextBox 5"/>
           <p:cNvSpPr txBox="1"/>
           <p:nvPr/>
         </p:nvSpPr>
@@ -14393,7 +14771,7 @@
       </p:sp>
       <p:sp>
         <p:nvSpPr>
-          <p:cNvPr id="6" name="TextBox 5"/>
+          <p:cNvPr id="7" name="TextBox 6"/>
           <p:cNvSpPr txBox="1"/>
           <p:nvPr/>
         </p:nvSpPr>
@@ -14440,7 +14818,7 @@
       </p:sp>
       <p:sp>
         <p:nvSpPr>
-          <p:cNvPr id="7" name="Rectangle 6"/>
+          <p:cNvPr id="8" name="Rectangle 7"/>
           <p:cNvSpPr/>
           <p:nvPr/>
         </p:nvSpPr>
@@ -14484,7 +14862,7 @@
       </p:sp>
       <p:graphicFrame>
         <p:nvGraphicFramePr>
-          <p:cNvPr id="8" name="Table 7"/>
+          <p:cNvPr id="9" name="Table 8"/>
           <p:cNvGraphicFramePr>
             <a:graphicFrameLocks noGrp="1"/>
           </p:cNvGraphicFramePr>
@@ -15364,7 +15742,7 @@
       </p:graphicFrame>
       <p:sp>
         <p:nvSpPr>
-          <p:cNvPr id="9" name="Rounded Rectangle 8"/>
+          <p:cNvPr id="10" name="Rounded Rectangle 9"/>
           <p:cNvSpPr/>
           <p:nvPr/>
         </p:nvSpPr>
@@ -15431,7 +15809,7 @@
       </p:sp>
       <p:sp>
         <p:nvSpPr>
-          <p:cNvPr id="10" name="Rectangle 9"/>
+          <p:cNvPr id="11" name="Rectangle 10"/>
           <p:cNvSpPr/>
           <p:nvPr/>
         </p:nvSpPr>
@@ -15535,9 +15913,33 @@
           </a:p>
         </p:txBody>
       </p:sp>
-      <p:sp>
-        <p:nvSpPr>
-          <p:cNvPr id="3" name="TextBox 2"/>
+      <p:pic>
+        <p:nvPicPr>
+          <p:cNvPr id="3" name="college-logo" descr="logo-mark.png"/>
+          <p:cNvPicPr>
+            <a:picLocks noChangeAspect="1"/>
+          </p:cNvPicPr>
+          <p:nvPr/>
+        </p:nvPicPr>
+        <p:blipFill>
+          <a:blip r:embed="rId2"/>
+          <a:stretch>
+            <a:fillRect/>
+          </a:stretch>
+        </p:blipFill>
+        <p:spPr>
+          <a:xfrm>
+            <a:off x="11203333" y="6199632"/>
+            <a:ext cx="275129" cy="310896"/>
+          </a:xfrm>
+          <a:prstGeom prst="rect">
+            <a:avLst/>
+          </a:prstGeom>
+        </p:spPr>
+      </p:pic>
+      <p:sp>
+        <p:nvSpPr>
+          <p:cNvPr id="4" name="TextBox 3"/>
           <p:cNvSpPr txBox="1"/>
           <p:nvPr/>
         </p:nvSpPr>
@@ -15606,13 +16008,13 @@
       </p:sp>
       <p:sp>
         <p:nvSpPr>
-          <p:cNvPr id="4" name="TextBox 3"/>
+          <p:cNvPr id="5" name="TextBox 4"/>
           <p:cNvSpPr txBox="1"/>
           <p:nvPr/>
         </p:nvSpPr>
         <p:spPr>
           <a:xfrm>
-            <a:off x="8826703" y="6272784"/>
+            <a:off x="8240677" y="6272784"/>
             <a:ext cx="2651760" cy="219456"/>
           </a:xfrm>
           <a:prstGeom prst="rect">
@@ -15675,7 +16077,7 @@
       </p:sp>
       <p:sp>
         <p:nvSpPr>
-          <p:cNvPr id="5" name="TextBox 4"/>
+          <p:cNvPr id="6" name="TextBox 5"/>
           <p:cNvSpPr txBox="1"/>
           <p:nvPr/>
         </p:nvSpPr>
@@ -15722,7 +16124,7 @@
       </p:sp>
       <p:sp>
         <p:nvSpPr>
-          <p:cNvPr id="6" name="TextBox 5"/>
+          <p:cNvPr id="7" name="TextBox 6"/>
           <p:cNvSpPr txBox="1"/>
           <p:nvPr/>
         </p:nvSpPr>
@@ -15769,7 +16171,7 @@
       </p:sp>
       <p:sp>
         <p:nvSpPr>
-          <p:cNvPr id="7" name="Rectangle 6"/>
+          <p:cNvPr id="8" name="Rectangle 7"/>
           <p:cNvSpPr/>
           <p:nvPr/>
         </p:nvSpPr>
@@ -15813,7 +16215,7 @@
       </p:sp>
       <p:sp>
         <p:nvSpPr>
-          <p:cNvPr id="8" name="TextBox 7"/>
+          <p:cNvPr id="9" name="TextBox 8"/>
           <p:cNvSpPr txBox="1"/>
           <p:nvPr/>
         </p:nvSpPr>
@@ -15860,7 +16262,7 @@
       </p:sp>
       <p:sp>
         <p:nvSpPr>
-          <p:cNvPr id="9" name="Rounded Rectangle 8"/>
+          <p:cNvPr id="10" name="Rounded Rectangle 9"/>
           <p:cNvSpPr/>
           <p:nvPr/>
         </p:nvSpPr>
@@ -15906,7 +16308,7 @@
       </p:sp>
       <p:sp>
         <p:nvSpPr>
-          <p:cNvPr id="10" name="TextBox 9"/>
+          <p:cNvPr id="11" name="TextBox 10"/>
           <p:cNvSpPr txBox="1"/>
           <p:nvPr/>
         </p:nvSpPr>
@@ -15977,7 +16379,7 @@
       </p:sp>
       <p:sp>
         <p:nvSpPr>
-          <p:cNvPr id="11" name="Rounded Rectangle 10"/>
+          <p:cNvPr id="12" name="Rounded Rectangle 11"/>
           <p:cNvSpPr/>
           <p:nvPr/>
         </p:nvSpPr>
@@ -16023,7 +16425,7 @@
       </p:sp>
       <p:sp>
         <p:nvSpPr>
-          <p:cNvPr id="12" name="TextBox 11"/>
+          <p:cNvPr id="13" name="TextBox 12"/>
           <p:cNvSpPr txBox="1"/>
           <p:nvPr/>
         </p:nvSpPr>
@@ -16094,7 +16496,7 @@
       </p:sp>
       <p:sp>
         <p:nvSpPr>
-          <p:cNvPr id="13" name="Rounded Rectangle 12"/>
+          <p:cNvPr id="14" name="Rounded Rectangle 13"/>
           <p:cNvSpPr/>
           <p:nvPr/>
         </p:nvSpPr>
@@ -16140,7 +16542,7 @@
       </p:sp>
       <p:sp>
         <p:nvSpPr>
-          <p:cNvPr id="14" name="TextBox 13"/>
+          <p:cNvPr id="15" name="TextBox 14"/>
           <p:cNvSpPr txBox="1"/>
           <p:nvPr/>
         </p:nvSpPr>
@@ -16211,7 +16613,7 @@
       </p:sp>
       <p:sp>
         <p:nvSpPr>
-          <p:cNvPr id="15" name="Rounded Rectangle 14"/>
+          <p:cNvPr id="16" name="Rounded Rectangle 15"/>
           <p:cNvSpPr/>
           <p:nvPr/>
         </p:nvSpPr>
@@ -16257,7 +16659,7 @@
       </p:sp>
       <p:sp>
         <p:nvSpPr>
-          <p:cNvPr id="16" name="TextBox 15"/>
+          <p:cNvPr id="17" name="TextBox 16"/>
           <p:cNvSpPr txBox="1"/>
           <p:nvPr/>
         </p:nvSpPr>
@@ -16328,7 +16730,7 @@
       </p:sp>
       <p:sp>
         <p:nvSpPr>
-          <p:cNvPr id="17" name="Rounded Rectangle 16"/>
+          <p:cNvPr id="18" name="Rounded Rectangle 17"/>
           <p:cNvSpPr/>
           <p:nvPr/>
         </p:nvSpPr>
@@ -16374,7 +16776,7 @@
       </p:sp>
       <p:sp>
         <p:nvSpPr>
-          <p:cNvPr id="18" name="TextBox 17"/>
+          <p:cNvPr id="19" name="TextBox 18"/>
           <p:cNvSpPr txBox="1"/>
           <p:nvPr/>
         </p:nvSpPr>
@@ -16445,7 +16847,7 @@
       </p:sp>
       <p:sp>
         <p:nvSpPr>
-          <p:cNvPr id="19" name="Rounded Rectangle 18"/>
+          <p:cNvPr id="20" name="Rounded Rectangle 19"/>
           <p:cNvSpPr/>
           <p:nvPr/>
         </p:nvSpPr>
@@ -16491,7 +16893,7 @@
       </p:sp>
       <p:sp>
         <p:nvSpPr>
-          <p:cNvPr id="20" name="TextBox 19"/>
+          <p:cNvPr id="21" name="TextBox 20"/>
           <p:cNvSpPr txBox="1"/>
           <p:nvPr/>
         </p:nvSpPr>
@@ -16622,9 +17024,33 @@
           </a:p>
         </p:txBody>
       </p:sp>
-      <p:sp>
-        <p:nvSpPr>
-          <p:cNvPr id="3" name="TextBox 2"/>
+      <p:pic>
+        <p:nvPicPr>
+          <p:cNvPr id="3" name="college-logo" descr="logo-mark.png"/>
+          <p:cNvPicPr>
+            <a:picLocks noChangeAspect="1"/>
+          </p:cNvPicPr>
+          <p:nvPr/>
+        </p:nvPicPr>
+        <p:blipFill>
+          <a:blip r:embed="rId2"/>
+          <a:stretch>
+            <a:fillRect/>
+          </a:stretch>
+        </p:blipFill>
+        <p:spPr>
+          <a:xfrm>
+            <a:off x="11203333" y="6199632"/>
+            <a:ext cx="275129" cy="310896"/>
+          </a:xfrm>
+          <a:prstGeom prst="rect">
+            <a:avLst/>
+          </a:prstGeom>
+        </p:spPr>
+      </p:pic>
+      <p:sp>
+        <p:nvSpPr>
+          <p:cNvPr id="4" name="TextBox 3"/>
           <p:cNvSpPr txBox="1"/>
           <p:nvPr/>
         </p:nvSpPr>
@@ -16693,13 +17119,13 @@
       </p:sp>
       <p:sp>
         <p:nvSpPr>
-          <p:cNvPr id="4" name="TextBox 3"/>
+          <p:cNvPr id="5" name="TextBox 4"/>
           <p:cNvSpPr txBox="1"/>
           <p:nvPr/>
         </p:nvSpPr>
         <p:spPr>
           <a:xfrm>
-            <a:off x="8826703" y="6272784"/>
+            <a:off x="8240677" y="6272784"/>
             <a:ext cx="2651760" cy="219456"/>
           </a:xfrm>
           <a:prstGeom prst="rect">
@@ -16762,7 +17188,7 @@
       </p:sp>
       <p:sp>
         <p:nvSpPr>
-          <p:cNvPr id="5" name="TextBox 4"/>
+          <p:cNvPr id="6" name="TextBox 5"/>
           <p:cNvSpPr txBox="1"/>
           <p:nvPr/>
         </p:nvSpPr>
@@ -16809,7 +17235,7 @@
       </p:sp>
       <p:sp>
         <p:nvSpPr>
-          <p:cNvPr id="6" name="TextBox 5"/>
+          <p:cNvPr id="7" name="TextBox 6"/>
           <p:cNvSpPr txBox="1"/>
           <p:nvPr/>
         </p:nvSpPr>
@@ -16856,7 +17282,7 @@
       </p:sp>
       <p:sp>
         <p:nvSpPr>
-          <p:cNvPr id="7" name="Rectangle 6"/>
+          <p:cNvPr id="8" name="Rectangle 7"/>
           <p:cNvSpPr/>
           <p:nvPr/>
         </p:nvSpPr>
@@ -16900,7 +17326,7 @@
       </p:sp>
       <p:sp>
         <p:nvSpPr>
-          <p:cNvPr id="8" name="TextBox 7"/>
+          <p:cNvPr id="9" name="TextBox 8"/>
           <p:cNvSpPr txBox="1"/>
           <p:nvPr/>
         </p:nvSpPr>
@@ -16947,7 +17373,7 @@
       </p:sp>
       <p:sp>
         <p:nvSpPr>
-          <p:cNvPr id="9" name="Rectangle 8"/>
+          <p:cNvPr id="10" name="Rectangle 9"/>
           <p:cNvSpPr/>
           <p:nvPr/>
         </p:nvSpPr>
@@ -16991,7 +17417,7 @@
       </p:sp>
       <p:sp>
         <p:nvSpPr>
-          <p:cNvPr id="10" name="TextBox 9"/>
+          <p:cNvPr id="11" name="TextBox 10"/>
           <p:cNvSpPr txBox="1"/>
           <p:nvPr/>
         </p:nvSpPr>
@@ -17038,7 +17464,7 @@
       </p:sp>
       <p:sp>
         <p:nvSpPr>
-          <p:cNvPr id="11" name="TextBox 10"/>
+          <p:cNvPr id="12" name="TextBox 11"/>
           <p:cNvSpPr txBox="1"/>
           <p:nvPr/>
         </p:nvSpPr>
@@ -17109,7 +17535,7 @@
       </p:sp>
       <p:sp>
         <p:nvSpPr>
-          <p:cNvPr id="12" name="Rectangle 11"/>
+          <p:cNvPr id="13" name="Rectangle 12"/>
           <p:cNvSpPr/>
           <p:nvPr/>
         </p:nvSpPr>
@@ -17153,7 +17579,7 @@
       </p:sp>
       <p:sp>
         <p:nvSpPr>
-          <p:cNvPr id="13" name="TextBox 12"/>
+          <p:cNvPr id="14" name="TextBox 13"/>
           <p:cNvSpPr txBox="1"/>
           <p:nvPr/>
         </p:nvSpPr>
@@ -17200,7 +17626,7 @@
       </p:sp>
       <p:sp>
         <p:nvSpPr>
-          <p:cNvPr id="14" name="TextBox 13"/>
+          <p:cNvPr id="15" name="TextBox 14"/>
           <p:cNvSpPr txBox="1"/>
           <p:nvPr/>
         </p:nvSpPr>
@@ -17271,7 +17697,7 @@
       </p:sp>
       <p:sp>
         <p:nvSpPr>
-          <p:cNvPr id="15" name="Rectangle 14"/>
+          <p:cNvPr id="16" name="Rectangle 15"/>
           <p:cNvSpPr/>
           <p:nvPr/>
         </p:nvSpPr>
@@ -17315,7 +17741,7 @@
       </p:sp>
       <p:sp>
         <p:nvSpPr>
-          <p:cNvPr id="16" name="TextBox 15"/>
+          <p:cNvPr id="17" name="TextBox 16"/>
           <p:cNvSpPr txBox="1"/>
           <p:nvPr/>
         </p:nvSpPr>
@@ -17362,7 +17788,7 @@
       </p:sp>
       <p:sp>
         <p:nvSpPr>
-          <p:cNvPr id="17" name="TextBox 16"/>
+          <p:cNvPr id="18" name="TextBox 17"/>
           <p:cNvSpPr txBox="1"/>
           <p:nvPr/>
         </p:nvSpPr>
@@ -17433,7 +17859,7 @@
       </p:sp>
       <p:sp>
         <p:nvSpPr>
-          <p:cNvPr id="18" name="Rectangle 17"/>
+          <p:cNvPr id="19" name="Rectangle 18"/>
           <p:cNvSpPr/>
           <p:nvPr/>
         </p:nvSpPr>
@@ -17477,7 +17903,7 @@
       </p:sp>
       <p:sp>
         <p:nvSpPr>
-          <p:cNvPr id="19" name="TextBox 18"/>
+          <p:cNvPr id="20" name="TextBox 19"/>
           <p:cNvSpPr txBox="1"/>
           <p:nvPr/>
         </p:nvSpPr>
@@ -17524,7 +17950,7 @@
       </p:sp>
       <p:sp>
         <p:nvSpPr>
-          <p:cNvPr id="20" name="TextBox 19"/>
+          <p:cNvPr id="21" name="TextBox 20"/>
           <p:cNvSpPr txBox="1"/>
           <p:nvPr/>
         </p:nvSpPr>
@@ -17595,7 +18021,7 @@
       </p:sp>
       <p:sp>
         <p:nvSpPr>
-          <p:cNvPr id="21" name="Rectangle 20"/>
+          <p:cNvPr id="22" name="Rectangle 21"/>
           <p:cNvSpPr/>
           <p:nvPr/>
         </p:nvSpPr>
@@ -17639,7 +18065,7 @@
       </p:sp>
       <p:sp>
         <p:nvSpPr>
-          <p:cNvPr id="22" name="TextBox 21"/>
+          <p:cNvPr id="23" name="TextBox 22"/>
           <p:cNvSpPr txBox="1"/>
           <p:nvPr/>
         </p:nvSpPr>
@@ -17686,7 +18112,7 @@
       </p:sp>
       <p:sp>
         <p:nvSpPr>
-          <p:cNvPr id="23" name="TextBox 22"/>
+          <p:cNvPr id="24" name="TextBox 23"/>
           <p:cNvSpPr txBox="1"/>
           <p:nvPr/>
         </p:nvSpPr>
@@ -17757,7 +18183,7 @@
       </p:sp>
       <p:sp>
         <p:nvSpPr>
-          <p:cNvPr id="24" name="Rectangle 23"/>
+          <p:cNvPr id="25" name="Rectangle 24"/>
           <p:cNvSpPr/>
           <p:nvPr/>
         </p:nvSpPr>
@@ -17801,7 +18227,7 @@
       </p:sp>
       <p:sp>
         <p:nvSpPr>
-          <p:cNvPr id="25" name="TextBox 24"/>
+          <p:cNvPr id="26" name="TextBox 25"/>
           <p:cNvSpPr txBox="1"/>
           <p:nvPr/>
         </p:nvSpPr>
@@ -17848,7 +18274,7 @@
       </p:sp>
       <p:sp>
         <p:nvSpPr>
-          <p:cNvPr id="26" name="TextBox 25"/>
+          <p:cNvPr id="27" name="TextBox 26"/>
           <p:cNvSpPr txBox="1"/>
           <p:nvPr/>
         </p:nvSpPr>
@@ -17919,7 +18345,7 @@
       </p:sp>
       <p:sp>
         <p:nvSpPr>
-          <p:cNvPr id="27" name="Rectangle 26"/>
+          <p:cNvPr id="28" name="Rectangle 27"/>
           <p:cNvSpPr/>
           <p:nvPr/>
         </p:nvSpPr>
@@ -17963,7 +18389,7 @@
       </p:sp>
       <p:sp>
         <p:nvSpPr>
-          <p:cNvPr id="28" name="TextBox 27"/>
+          <p:cNvPr id="29" name="TextBox 28"/>
           <p:cNvSpPr txBox="1"/>
           <p:nvPr/>
         </p:nvSpPr>
@@ -18010,7 +18436,7 @@
       </p:sp>
       <p:sp>
         <p:nvSpPr>
-          <p:cNvPr id="29" name="TextBox 28"/>
+          <p:cNvPr id="30" name="TextBox 29"/>
           <p:cNvSpPr txBox="1"/>
           <p:nvPr/>
         </p:nvSpPr>
@@ -18081,7 +18507,7 @@
       </p:sp>
       <p:sp>
         <p:nvSpPr>
-          <p:cNvPr id="30" name="Rectangle 29"/>
+          <p:cNvPr id="31" name="Rectangle 30"/>
           <p:cNvSpPr/>
           <p:nvPr/>
         </p:nvSpPr>
@@ -18125,7 +18551,7 @@
       </p:sp>
       <p:sp>
         <p:nvSpPr>
-          <p:cNvPr id="31" name="TextBox 30"/>
+          <p:cNvPr id="32" name="TextBox 31"/>
           <p:cNvSpPr txBox="1"/>
           <p:nvPr/>
         </p:nvSpPr>
@@ -18172,7 +18598,7 @@
       </p:sp>
       <p:sp>
         <p:nvSpPr>
-          <p:cNvPr id="32" name="TextBox 31"/>
+          <p:cNvPr id="33" name="TextBox 32"/>
           <p:cNvSpPr txBox="1"/>
           <p:nvPr/>
         </p:nvSpPr>
@@ -18303,9 +18729,33 @@
           </a:p>
         </p:txBody>
       </p:sp>
-      <p:sp>
-        <p:nvSpPr>
-          <p:cNvPr id="3" name="TextBox 2"/>
+      <p:pic>
+        <p:nvPicPr>
+          <p:cNvPr id="3" name="college-logo" descr="logo-mark.png"/>
+          <p:cNvPicPr>
+            <a:picLocks noChangeAspect="1"/>
+          </p:cNvPicPr>
+          <p:nvPr/>
+        </p:nvPicPr>
+        <p:blipFill>
+          <a:blip r:embed="rId2"/>
+          <a:stretch>
+            <a:fillRect/>
+          </a:stretch>
+        </p:blipFill>
+        <p:spPr>
+          <a:xfrm>
+            <a:off x="11203333" y="6199632"/>
+            <a:ext cx="275129" cy="310896"/>
+          </a:xfrm>
+          <a:prstGeom prst="rect">
+            <a:avLst/>
+          </a:prstGeom>
+        </p:spPr>
+      </p:pic>
+      <p:sp>
+        <p:nvSpPr>
+          <p:cNvPr id="4" name="TextBox 3"/>
           <p:cNvSpPr txBox="1"/>
           <p:nvPr/>
         </p:nvSpPr>
@@ -18374,13 +18824,13 @@
       </p:sp>
       <p:sp>
         <p:nvSpPr>
-          <p:cNvPr id="4" name="TextBox 3"/>
+          <p:cNvPr id="5" name="TextBox 4"/>
           <p:cNvSpPr txBox="1"/>
           <p:nvPr/>
         </p:nvSpPr>
         <p:spPr>
           <a:xfrm>
-            <a:off x="8826703" y="6272784"/>
+            <a:off x="8240677" y="6272784"/>
             <a:ext cx="2651760" cy="219456"/>
           </a:xfrm>
           <a:prstGeom prst="rect">
@@ -18443,7 +18893,7 @@
       </p:sp>
       <p:sp>
         <p:nvSpPr>
-          <p:cNvPr id="5" name="TextBox 4"/>
+          <p:cNvPr id="6" name="TextBox 5"/>
           <p:cNvSpPr txBox="1"/>
           <p:nvPr/>
         </p:nvSpPr>
@@ -18490,7 +18940,7 @@
       </p:sp>
       <p:sp>
         <p:nvSpPr>
-          <p:cNvPr id="6" name="TextBox 5"/>
+          <p:cNvPr id="7" name="TextBox 6"/>
           <p:cNvSpPr txBox="1"/>
           <p:nvPr/>
         </p:nvSpPr>
@@ -18537,7 +18987,7 @@
       </p:sp>
       <p:sp>
         <p:nvSpPr>
-          <p:cNvPr id="7" name="Rectangle 6"/>
+          <p:cNvPr id="8" name="Rectangle 7"/>
           <p:cNvSpPr/>
           <p:nvPr/>
         </p:nvSpPr>
@@ -18581,7 +19031,7 @@
       </p:sp>
       <p:sp>
         <p:nvSpPr>
-          <p:cNvPr id="8" name="TextBox 7"/>
+          <p:cNvPr id="9" name="TextBox 8"/>
           <p:cNvSpPr txBox="1"/>
           <p:nvPr/>
         </p:nvSpPr>
@@ -18628,7 +19078,7 @@
       </p:sp>
       <p:sp>
         <p:nvSpPr>
-          <p:cNvPr id="9" name="Rectangle 8"/>
+          <p:cNvPr id="10" name="Rectangle 9"/>
           <p:cNvSpPr/>
           <p:nvPr/>
         </p:nvSpPr>
@@ -18672,7 +19122,7 @@
       </p:sp>
       <p:sp>
         <p:nvSpPr>
-          <p:cNvPr id="10" name="Oval 9"/>
+          <p:cNvPr id="11" name="Oval 10"/>
           <p:cNvSpPr/>
           <p:nvPr/>
         </p:nvSpPr>
@@ -18716,7 +19166,7 @@
       </p:sp>
       <p:sp>
         <p:nvSpPr>
-          <p:cNvPr id="11" name="TextBox 10"/>
+          <p:cNvPr id="12" name="TextBox 11"/>
           <p:cNvSpPr txBox="1"/>
           <p:nvPr/>
         </p:nvSpPr>
@@ -18763,7 +19213,7 @@
       </p:sp>
       <p:sp>
         <p:nvSpPr>
-          <p:cNvPr id="12" name="Rounded Rectangle 11"/>
+          <p:cNvPr id="13" name="Rounded Rectangle 12"/>
           <p:cNvSpPr/>
           <p:nvPr/>
         </p:nvSpPr>
@@ -18811,7 +19261,7 @@
       </p:sp>
       <p:sp>
         <p:nvSpPr>
-          <p:cNvPr id="13" name="TextBox 12"/>
+          <p:cNvPr id="14" name="TextBox 13"/>
           <p:cNvSpPr txBox="1"/>
           <p:nvPr/>
         </p:nvSpPr>
@@ -18858,7 +19308,7 @@
       </p:sp>
       <p:sp>
         <p:nvSpPr>
-          <p:cNvPr id="14" name="TextBox 13"/>
+          <p:cNvPr id="15" name="TextBox 14"/>
           <p:cNvSpPr txBox="1"/>
           <p:nvPr/>
         </p:nvSpPr>
@@ -18905,7 +19355,7 @@
       </p:sp>
       <p:sp>
         <p:nvSpPr>
-          <p:cNvPr id="15" name="Oval 14"/>
+          <p:cNvPr id="16" name="Oval 15"/>
           <p:cNvSpPr/>
           <p:nvPr/>
         </p:nvSpPr>
@@ -18949,7 +19399,7 @@
       </p:sp>
       <p:sp>
         <p:nvSpPr>
-          <p:cNvPr id="16" name="TextBox 15"/>
+          <p:cNvPr id="17" name="TextBox 16"/>
           <p:cNvSpPr txBox="1"/>
           <p:nvPr/>
         </p:nvSpPr>
@@ -18996,7 +19446,7 @@
       </p:sp>
       <p:sp>
         <p:nvSpPr>
-          <p:cNvPr id="17" name="Rounded Rectangle 16"/>
+          <p:cNvPr id="18" name="Rounded Rectangle 17"/>
           <p:cNvSpPr/>
           <p:nvPr/>
         </p:nvSpPr>
@@ -19044,7 +19494,7 @@
       </p:sp>
       <p:sp>
         <p:nvSpPr>
-          <p:cNvPr id="18" name="TextBox 17"/>
+          <p:cNvPr id="19" name="TextBox 18"/>
           <p:cNvSpPr txBox="1"/>
           <p:nvPr/>
         </p:nvSpPr>
@@ -19091,7 +19541,7 @@
       </p:sp>
       <p:sp>
         <p:nvSpPr>
-          <p:cNvPr id="19" name="TextBox 18"/>
+          <p:cNvPr id="20" name="TextBox 19"/>
           <p:cNvSpPr txBox="1"/>
           <p:nvPr/>
         </p:nvSpPr>
@@ -19138,7 +19588,7 @@
       </p:sp>
       <p:sp>
         <p:nvSpPr>
-          <p:cNvPr id="20" name="Oval 19"/>
+          <p:cNvPr id="21" name="Oval 20"/>
           <p:cNvSpPr/>
           <p:nvPr/>
         </p:nvSpPr>
@@ -19182,7 +19632,7 @@
       </p:sp>
       <p:sp>
         <p:nvSpPr>
-          <p:cNvPr id="21" name="TextBox 20"/>
+          <p:cNvPr id="22" name="TextBox 21"/>
           <p:cNvSpPr txBox="1"/>
           <p:nvPr/>
         </p:nvSpPr>
@@ -19229,7 +19679,7 @@
       </p:sp>
       <p:sp>
         <p:nvSpPr>
-          <p:cNvPr id="22" name="Rounded Rectangle 21"/>
+          <p:cNvPr id="23" name="Rounded Rectangle 22"/>
           <p:cNvSpPr/>
           <p:nvPr/>
         </p:nvSpPr>
@@ -19277,7 +19727,7 @@
       </p:sp>
       <p:sp>
         <p:nvSpPr>
-          <p:cNvPr id="23" name="TextBox 22"/>
+          <p:cNvPr id="24" name="TextBox 23"/>
           <p:cNvSpPr txBox="1"/>
           <p:nvPr/>
         </p:nvSpPr>
@@ -19324,7 +19774,7 @@
       </p:sp>
       <p:sp>
         <p:nvSpPr>
-          <p:cNvPr id="24" name="TextBox 23"/>
+          <p:cNvPr id="25" name="TextBox 24"/>
           <p:cNvSpPr txBox="1"/>
           <p:nvPr/>
         </p:nvSpPr>
@@ -19371,7 +19821,7 @@
       </p:sp>
       <p:sp>
         <p:nvSpPr>
-          <p:cNvPr id="25" name="Rounded Rectangle 24"/>
+          <p:cNvPr id="26" name="Rounded Rectangle 25"/>
           <p:cNvSpPr/>
           <p:nvPr/>
         </p:nvSpPr>
@@ -19438,7 +19888,7 @@
       </p:sp>
       <p:sp>
         <p:nvSpPr>
-          <p:cNvPr id="26" name="Rectangle 25"/>
+          <p:cNvPr id="27" name="Rectangle 26"/>
           <p:cNvSpPr/>
           <p:nvPr/>
         </p:nvSpPr>
@@ -19644,7 +20094,77 @@
       </p:sp>
       <p:sp>
         <p:nvSpPr>
-          <p:cNvPr id="5" name="TextBox 4"/>
+          <p:cNvPr id="5" name="logo-plate"/>
+          <p:cNvSpPr/>
+          <p:nvPr/>
+        </p:nvSpPr>
+        <p:spPr>
+          <a:xfrm>
+            <a:off x="9769160" y="502920"/>
+            <a:ext cx="1736734" cy="877824"/>
+          </a:xfrm>
+          <a:prstGeom prst="roundRect">
+            <a:avLst>
+              <a:gd name="adj" fmla="val 14000"/>
+            </a:avLst>
+          </a:prstGeom>
+          <a:solidFill>
+            <a:srgbClr val="FFFFFF"/>
+          </a:solidFill>
+          <a:ln>
+            <a:noFill/>
+          </a:ln>
+          <a:effectLst/>
+        </p:spPr>
+        <p:style>
+          <a:lnRef idx="1">
+            <a:schemeClr val="accent1"/>
+          </a:lnRef>
+          <a:fillRef idx="3">
+            <a:schemeClr val="accent1"/>
+          </a:fillRef>
+          <a:effectRef idx="2">
+            <a:schemeClr val="accent1"/>
+          </a:effectRef>
+          <a:fontRef idx="minor">
+            <a:schemeClr val="lt1"/>
+          </a:fontRef>
+        </p:style>
+        <p:txBody>
+          <a:bodyPr rtlCol="0" anchor="ctr" wrap="square"/>
+          <a:lstStyle/>
+          <a:p>
+            <a:pPr algn="ctr"/>
+          </a:p>
+        </p:txBody>
+      </p:sp>
+      <p:pic>
+        <p:nvPicPr>
+          <p:cNvPr id="6" name="college-logo" descr="logo-full.png"/>
+          <p:cNvPicPr>
+            <a:picLocks noChangeAspect="1"/>
+          </p:cNvPicPr>
+          <p:nvPr/>
+        </p:nvPicPr>
+        <p:blipFill>
+          <a:blip r:embed="rId2"/>
+          <a:stretch>
+            <a:fillRect/>
+          </a:stretch>
+        </p:blipFill>
+        <p:spPr>
+          <a:xfrm>
+            <a:off x="9888032" y="621792"/>
+            <a:ext cx="1498991" cy="640080"/>
+          </a:xfrm>
+          <a:prstGeom prst="rect">
+            <a:avLst/>
+          </a:prstGeom>
+        </p:spPr>
+      </p:pic>
+      <p:sp>
+        <p:nvSpPr>
+          <p:cNvPr id="7" name="TextBox 6"/>
           <p:cNvSpPr txBox="1"/>
           <p:nvPr/>
         </p:nvSpPr>
@@ -19691,7 +20211,7 @@
       </p:sp>
       <p:sp>
         <p:nvSpPr>
-          <p:cNvPr id="6" name="TextBox 5"/>
+          <p:cNvPr id="8" name="TextBox 7"/>
           <p:cNvSpPr txBox="1"/>
           <p:nvPr/>
         </p:nvSpPr>
@@ -19738,7 +20258,7 @@
       </p:sp>
       <p:sp>
         <p:nvSpPr>
-          <p:cNvPr id="7" name="Rectangle 6"/>
+          <p:cNvPr id="9" name="Rectangle 8"/>
           <p:cNvSpPr/>
           <p:nvPr/>
         </p:nvSpPr>
@@ -19782,7 +20302,7 @@
       </p:sp>
       <p:sp>
         <p:nvSpPr>
-          <p:cNvPr id="8" name="TextBox 7"/>
+          <p:cNvPr id="10" name="TextBox 9"/>
           <p:cNvSpPr txBox="1"/>
           <p:nvPr/>
         </p:nvSpPr>
@@ -19889,9 +20409,33 @@
           </a:p>
         </p:txBody>
       </p:sp>
-      <p:sp>
-        <p:nvSpPr>
-          <p:cNvPr id="3" name="TextBox 2"/>
+      <p:pic>
+        <p:nvPicPr>
+          <p:cNvPr id="3" name="college-logo" descr="logo-mark.png"/>
+          <p:cNvPicPr>
+            <a:picLocks noChangeAspect="1"/>
+          </p:cNvPicPr>
+          <p:nvPr/>
+        </p:nvPicPr>
+        <p:blipFill>
+          <a:blip r:embed="rId2"/>
+          <a:stretch>
+            <a:fillRect/>
+          </a:stretch>
+        </p:blipFill>
+        <p:spPr>
+          <a:xfrm>
+            <a:off x="11203333" y="6199632"/>
+            <a:ext cx="275129" cy="310896"/>
+          </a:xfrm>
+          <a:prstGeom prst="rect">
+            <a:avLst/>
+          </a:prstGeom>
+        </p:spPr>
+      </p:pic>
+      <p:sp>
+        <p:nvSpPr>
+          <p:cNvPr id="4" name="TextBox 3"/>
           <p:cNvSpPr txBox="1"/>
           <p:nvPr/>
         </p:nvSpPr>
@@ -19960,13 +20504,13 @@
       </p:sp>
       <p:sp>
         <p:nvSpPr>
-          <p:cNvPr id="4" name="TextBox 3"/>
+          <p:cNvPr id="5" name="TextBox 4"/>
           <p:cNvSpPr txBox="1"/>
           <p:nvPr/>
         </p:nvSpPr>
         <p:spPr>
           <a:xfrm>
-            <a:off x="8826703" y="6272784"/>
+            <a:off x="8240677" y="6272784"/>
             <a:ext cx="2651760" cy="219456"/>
           </a:xfrm>
           <a:prstGeom prst="rect">
@@ -20029,7 +20573,7 @@
       </p:sp>
       <p:sp>
         <p:nvSpPr>
-          <p:cNvPr id="5" name="TextBox 4"/>
+          <p:cNvPr id="6" name="TextBox 5"/>
           <p:cNvSpPr txBox="1"/>
           <p:nvPr/>
         </p:nvSpPr>
@@ -20076,7 +20620,7 @@
       </p:sp>
       <p:sp>
         <p:nvSpPr>
-          <p:cNvPr id="6" name="TextBox 5"/>
+          <p:cNvPr id="7" name="TextBox 6"/>
           <p:cNvSpPr txBox="1"/>
           <p:nvPr/>
         </p:nvSpPr>
@@ -20123,7 +20667,7 @@
       </p:sp>
       <p:sp>
         <p:nvSpPr>
-          <p:cNvPr id="7" name="Rectangle 6"/>
+          <p:cNvPr id="8" name="Rectangle 7"/>
           <p:cNvSpPr/>
           <p:nvPr/>
         </p:nvSpPr>
@@ -20167,7 +20711,7 @@
       </p:sp>
       <p:sp>
         <p:nvSpPr>
-          <p:cNvPr id="8" name="TextBox 7"/>
+          <p:cNvPr id="9" name="TextBox 8"/>
           <p:cNvSpPr txBox="1"/>
           <p:nvPr/>
         </p:nvSpPr>
@@ -20214,7 +20758,7 @@
       </p:sp>
       <p:sp>
         <p:nvSpPr>
-          <p:cNvPr id="9" name="Rounded Rectangle 8"/>
+          <p:cNvPr id="10" name="Rounded Rectangle 9"/>
           <p:cNvSpPr/>
           <p:nvPr/>
         </p:nvSpPr>
@@ -20268,7 +20812,7 @@
       </p:sp>
       <p:sp>
         <p:nvSpPr>
-          <p:cNvPr id="10" name="Rectangle 9"/>
+          <p:cNvPr id="11" name="Rectangle 10"/>
           <p:cNvSpPr/>
           <p:nvPr/>
         </p:nvSpPr>
@@ -20312,7 +20856,7 @@
       </p:sp>
       <p:sp>
         <p:nvSpPr>
-          <p:cNvPr id="11" name="Oval 10"/>
+          <p:cNvPr id="12" name="Oval 11"/>
           <p:cNvSpPr/>
           <p:nvPr/>
         </p:nvSpPr>
@@ -20356,7 +20900,7 @@
       </p:sp>
       <p:sp>
         <p:nvSpPr>
-          <p:cNvPr id="12" name="TextBox 11"/>
+          <p:cNvPr id="13" name="TextBox 12"/>
           <p:cNvSpPr txBox="1"/>
           <p:nvPr/>
         </p:nvSpPr>
@@ -20403,7 +20947,7 @@
       </p:sp>
       <p:sp>
         <p:nvSpPr>
-          <p:cNvPr id="13" name="TextBox 12"/>
+          <p:cNvPr id="14" name="TextBox 13"/>
           <p:cNvSpPr txBox="1"/>
           <p:nvPr/>
         </p:nvSpPr>
@@ -20474,7 +21018,7 @@
       </p:sp>
       <p:sp>
         <p:nvSpPr>
-          <p:cNvPr id="14" name="Rounded Rectangle 13"/>
+          <p:cNvPr id="15" name="Rounded Rectangle 14"/>
           <p:cNvSpPr/>
           <p:nvPr/>
         </p:nvSpPr>
@@ -20528,7 +21072,7 @@
       </p:sp>
       <p:sp>
         <p:nvSpPr>
-          <p:cNvPr id="15" name="Rectangle 14"/>
+          <p:cNvPr id="16" name="Rectangle 15"/>
           <p:cNvSpPr/>
           <p:nvPr/>
         </p:nvSpPr>
@@ -20572,7 +21116,7 @@
       </p:sp>
       <p:sp>
         <p:nvSpPr>
-          <p:cNvPr id="16" name="Oval 15"/>
+          <p:cNvPr id="17" name="Oval 16"/>
           <p:cNvSpPr/>
           <p:nvPr/>
         </p:nvSpPr>
@@ -20616,7 +21160,7 @@
       </p:sp>
       <p:sp>
         <p:nvSpPr>
-          <p:cNvPr id="17" name="TextBox 16"/>
+          <p:cNvPr id="18" name="TextBox 17"/>
           <p:cNvSpPr txBox="1"/>
           <p:nvPr/>
         </p:nvSpPr>
@@ -20663,7 +21207,7 @@
       </p:sp>
       <p:sp>
         <p:nvSpPr>
-          <p:cNvPr id="18" name="TextBox 17"/>
+          <p:cNvPr id="19" name="TextBox 18"/>
           <p:cNvSpPr txBox="1"/>
           <p:nvPr/>
         </p:nvSpPr>
@@ -20734,7 +21278,7 @@
       </p:sp>
       <p:sp>
         <p:nvSpPr>
-          <p:cNvPr id="19" name="Rounded Rectangle 18"/>
+          <p:cNvPr id="20" name="Rounded Rectangle 19"/>
           <p:cNvSpPr/>
           <p:nvPr/>
         </p:nvSpPr>
@@ -20788,7 +21332,7 @@
       </p:sp>
       <p:sp>
         <p:nvSpPr>
-          <p:cNvPr id="20" name="Rectangle 19"/>
+          <p:cNvPr id="21" name="Rectangle 20"/>
           <p:cNvSpPr/>
           <p:nvPr/>
         </p:nvSpPr>
@@ -20832,7 +21376,7 @@
       </p:sp>
       <p:sp>
         <p:nvSpPr>
-          <p:cNvPr id="21" name="Oval 20"/>
+          <p:cNvPr id="22" name="Oval 21"/>
           <p:cNvSpPr/>
           <p:nvPr/>
         </p:nvSpPr>
@@ -20876,7 +21420,7 @@
       </p:sp>
       <p:sp>
         <p:nvSpPr>
-          <p:cNvPr id="22" name="TextBox 21"/>
+          <p:cNvPr id="23" name="TextBox 22"/>
           <p:cNvSpPr txBox="1"/>
           <p:nvPr/>
         </p:nvSpPr>
@@ -20923,7 +21467,7 @@
       </p:sp>
       <p:sp>
         <p:nvSpPr>
-          <p:cNvPr id="23" name="TextBox 22"/>
+          <p:cNvPr id="24" name="TextBox 23"/>
           <p:cNvSpPr txBox="1"/>
           <p:nvPr/>
         </p:nvSpPr>
@@ -20994,7 +21538,7 @@
       </p:sp>
       <p:sp>
         <p:nvSpPr>
-          <p:cNvPr id="24" name="Rounded Rectangle 23"/>
+          <p:cNvPr id="25" name="Rounded Rectangle 24"/>
           <p:cNvSpPr/>
           <p:nvPr/>
         </p:nvSpPr>
@@ -21048,7 +21592,7 @@
       </p:sp>
       <p:sp>
         <p:nvSpPr>
-          <p:cNvPr id="25" name="Rectangle 24"/>
+          <p:cNvPr id="26" name="Rectangle 25"/>
           <p:cNvSpPr/>
           <p:nvPr/>
         </p:nvSpPr>
@@ -21092,7 +21636,7 @@
       </p:sp>
       <p:sp>
         <p:nvSpPr>
-          <p:cNvPr id="26" name="Oval 25"/>
+          <p:cNvPr id="27" name="Oval 26"/>
           <p:cNvSpPr/>
           <p:nvPr/>
         </p:nvSpPr>
@@ -21136,7 +21680,7 @@
       </p:sp>
       <p:sp>
         <p:nvSpPr>
-          <p:cNvPr id="27" name="TextBox 26"/>
+          <p:cNvPr id="28" name="TextBox 27"/>
           <p:cNvSpPr txBox="1"/>
           <p:nvPr/>
         </p:nvSpPr>
@@ -21183,7 +21727,7 @@
       </p:sp>
       <p:sp>
         <p:nvSpPr>
-          <p:cNvPr id="28" name="TextBox 27"/>
+          <p:cNvPr id="29" name="TextBox 28"/>
           <p:cNvSpPr txBox="1"/>
           <p:nvPr/>
         </p:nvSpPr>
@@ -21254,7 +21798,7 @@
       </p:sp>
       <p:sp>
         <p:nvSpPr>
-          <p:cNvPr id="29" name="Rounded Rectangle 28"/>
+          <p:cNvPr id="30" name="Rounded Rectangle 29"/>
           <p:cNvSpPr/>
           <p:nvPr/>
         </p:nvSpPr>
@@ -21308,7 +21852,7 @@
       </p:sp>
       <p:sp>
         <p:nvSpPr>
-          <p:cNvPr id="30" name="Rectangle 29"/>
+          <p:cNvPr id="31" name="Rectangle 30"/>
           <p:cNvSpPr/>
           <p:nvPr/>
         </p:nvSpPr>
@@ -21352,7 +21896,7 @@
       </p:sp>
       <p:sp>
         <p:nvSpPr>
-          <p:cNvPr id="31" name="Oval 30"/>
+          <p:cNvPr id="32" name="Oval 31"/>
           <p:cNvSpPr/>
           <p:nvPr/>
         </p:nvSpPr>
@@ -21396,7 +21940,7 @@
       </p:sp>
       <p:sp>
         <p:nvSpPr>
-          <p:cNvPr id="32" name="TextBox 31"/>
+          <p:cNvPr id="33" name="TextBox 32"/>
           <p:cNvSpPr txBox="1"/>
           <p:nvPr/>
         </p:nvSpPr>
@@ -21443,7 +21987,7 @@
       </p:sp>
       <p:sp>
         <p:nvSpPr>
-          <p:cNvPr id="33" name="TextBox 32"/>
+          <p:cNvPr id="34" name="TextBox 33"/>
           <p:cNvSpPr txBox="1"/>
           <p:nvPr/>
         </p:nvSpPr>
@@ -21514,7 +22058,7 @@
       </p:sp>
       <p:sp>
         <p:nvSpPr>
-          <p:cNvPr id="34" name="Rounded Rectangle 33"/>
+          <p:cNvPr id="35" name="Rounded Rectangle 34"/>
           <p:cNvSpPr/>
           <p:nvPr/>
         </p:nvSpPr>
@@ -21568,7 +22112,7 @@
       </p:sp>
       <p:sp>
         <p:nvSpPr>
-          <p:cNvPr id="35" name="Rectangle 34"/>
+          <p:cNvPr id="36" name="Rectangle 35"/>
           <p:cNvSpPr/>
           <p:nvPr/>
         </p:nvSpPr>
@@ -21612,7 +22156,7 @@
       </p:sp>
       <p:sp>
         <p:nvSpPr>
-          <p:cNvPr id="36" name="Oval 35"/>
+          <p:cNvPr id="37" name="Oval 36"/>
           <p:cNvSpPr/>
           <p:nvPr/>
         </p:nvSpPr>
@@ -21656,7 +22200,7 @@
       </p:sp>
       <p:sp>
         <p:nvSpPr>
-          <p:cNvPr id="37" name="TextBox 36"/>
+          <p:cNvPr id="38" name="TextBox 37"/>
           <p:cNvSpPr txBox="1"/>
           <p:nvPr/>
         </p:nvSpPr>
@@ -21703,7 +22247,7 @@
       </p:sp>
       <p:sp>
         <p:nvSpPr>
-          <p:cNvPr id="38" name="TextBox 37"/>
+          <p:cNvPr id="39" name="TextBox 38"/>
           <p:cNvSpPr txBox="1"/>
           <p:nvPr/>
         </p:nvSpPr>
@@ -22284,7 +22828,77 @@
       </p:sp>
       <p:sp>
         <p:nvSpPr>
-          <p:cNvPr id="11" name="Rectangle 10"/>
+          <p:cNvPr id="11" name="logo-plate"/>
+          <p:cNvSpPr/>
+          <p:nvPr/>
+        </p:nvSpPr>
+        <p:spPr>
+          <a:xfrm>
+            <a:off x="9233806" y="539496"/>
+            <a:ext cx="2272088" cy="1106424"/>
+          </a:xfrm>
+          <a:prstGeom prst="roundRect">
+            <a:avLst>
+              <a:gd name="adj" fmla="val 14000"/>
+            </a:avLst>
+          </a:prstGeom>
+          <a:solidFill>
+            <a:srgbClr val="FFFFFF"/>
+          </a:solidFill>
+          <a:ln>
+            <a:noFill/>
+          </a:ln>
+          <a:effectLst/>
+        </p:spPr>
+        <p:style>
+          <a:lnRef idx="1">
+            <a:schemeClr val="accent1"/>
+          </a:lnRef>
+          <a:fillRef idx="3">
+            <a:schemeClr val="accent1"/>
+          </a:fillRef>
+          <a:effectRef idx="2">
+            <a:schemeClr val="accent1"/>
+          </a:effectRef>
+          <a:fontRef idx="minor">
+            <a:schemeClr val="lt1"/>
+          </a:fontRef>
+        </p:style>
+        <p:txBody>
+          <a:bodyPr rtlCol="0" anchor="ctr" wrap="square"/>
+          <a:lstStyle/>
+          <a:p>
+            <a:pPr algn="ctr"/>
+          </a:p>
+        </p:txBody>
+      </p:sp>
+      <p:pic>
+        <p:nvPicPr>
+          <p:cNvPr id="12" name="college-logo" descr="logo-full.png"/>
+          <p:cNvPicPr>
+            <a:picLocks noChangeAspect="1"/>
+          </p:cNvPicPr>
+          <p:nvPr/>
+        </p:nvPicPr>
+        <p:blipFill>
+          <a:blip r:embed="rId2"/>
+          <a:stretch>
+            <a:fillRect/>
+          </a:stretch>
+        </p:blipFill>
+        <p:spPr>
+          <a:xfrm>
+            <a:off x="9352678" y="658368"/>
+            <a:ext cx="2034345" cy="868680"/>
+          </a:xfrm>
+          <a:prstGeom prst="rect">
+            <a:avLst/>
+          </a:prstGeom>
+        </p:spPr>
+      </p:pic>
+      <p:sp>
+        <p:nvSpPr>
+          <p:cNvPr id="13" name="Rectangle 12"/>
           <p:cNvSpPr/>
           <p:nvPr/>
         </p:nvSpPr>
@@ -22328,7 +22942,7 @@
       </p:sp>
       <p:sp>
         <p:nvSpPr>
-          <p:cNvPr id="12" name="TextBox 11"/>
+          <p:cNvPr id="14" name="TextBox 13"/>
           <p:cNvSpPr txBox="1"/>
           <p:nvPr/>
         </p:nvSpPr>
@@ -22855,6 +23469,76 @@
           </a:p>
         </p:txBody>
       </p:sp>
+      <p:sp>
+        <p:nvSpPr>
+          <p:cNvPr id="11" name="logo-plate"/>
+          <p:cNvSpPr/>
+          <p:nvPr/>
+        </p:nvSpPr>
+        <p:spPr>
+          <a:xfrm>
+            <a:off x="9512190" y="539496"/>
+            <a:ext cx="1993704" cy="987552"/>
+          </a:xfrm>
+          <a:prstGeom prst="roundRect">
+            <a:avLst>
+              <a:gd name="adj" fmla="val 14000"/>
+            </a:avLst>
+          </a:prstGeom>
+          <a:solidFill>
+            <a:srgbClr val="FFFFFF"/>
+          </a:solidFill>
+          <a:ln>
+            <a:noFill/>
+          </a:ln>
+          <a:effectLst/>
+        </p:spPr>
+        <p:style>
+          <a:lnRef idx="1">
+            <a:schemeClr val="accent1"/>
+          </a:lnRef>
+          <a:fillRef idx="3">
+            <a:schemeClr val="accent1"/>
+          </a:fillRef>
+          <a:effectRef idx="2">
+            <a:schemeClr val="accent1"/>
+          </a:effectRef>
+          <a:fontRef idx="minor">
+            <a:schemeClr val="lt1"/>
+          </a:fontRef>
+        </p:style>
+        <p:txBody>
+          <a:bodyPr rtlCol="0" anchor="ctr" wrap="square"/>
+          <a:lstStyle/>
+          <a:p>
+            <a:pPr algn="ctr"/>
+          </a:p>
+        </p:txBody>
+      </p:sp>
+      <p:pic>
+        <p:nvPicPr>
+          <p:cNvPr id="12" name="college-logo" descr="logo-full.png"/>
+          <p:cNvPicPr>
+            <a:picLocks noChangeAspect="1"/>
+          </p:cNvPicPr>
+          <p:nvPr/>
+        </p:nvPicPr>
+        <p:blipFill>
+          <a:blip r:embed="rId2"/>
+          <a:stretch>
+            <a:fillRect/>
+          </a:stretch>
+        </p:blipFill>
+        <p:spPr>
+          <a:xfrm>
+            <a:off x="9631062" y="658368"/>
+            <a:ext cx="1755961" cy="749808"/>
+          </a:xfrm>
+          <a:prstGeom prst="rect">
+            <a:avLst/>
+          </a:prstGeom>
+        </p:spPr>
+      </p:pic>
     </p:spTree>
   </p:cSld>
   <p:clrMapOvr>
@@ -22917,9 +23601,33 @@
           </a:p>
         </p:txBody>
       </p:sp>
-      <p:sp>
-        <p:nvSpPr>
-          <p:cNvPr id="3" name="TextBox 2"/>
+      <p:pic>
+        <p:nvPicPr>
+          <p:cNvPr id="3" name="college-logo" descr="logo-mark.png"/>
+          <p:cNvPicPr>
+            <a:picLocks noChangeAspect="1"/>
+          </p:cNvPicPr>
+          <p:nvPr/>
+        </p:nvPicPr>
+        <p:blipFill>
+          <a:blip r:embed="rId2"/>
+          <a:stretch>
+            <a:fillRect/>
+          </a:stretch>
+        </p:blipFill>
+        <p:spPr>
+          <a:xfrm>
+            <a:off x="11203333" y="6199632"/>
+            <a:ext cx="275129" cy="310896"/>
+          </a:xfrm>
+          <a:prstGeom prst="rect">
+            <a:avLst/>
+          </a:prstGeom>
+        </p:spPr>
+      </p:pic>
+      <p:sp>
+        <p:nvSpPr>
+          <p:cNvPr id="4" name="TextBox 3"/>
           <p:cNvSpPr txBox="1"/>
           <p:nvPr/>
         </p:nvSpPr>
@@ -22988,13 +23696,13 @@
       </p:sp>
       <p:sp>
         <p:nvSpPr>
-          <p:cNvPr id="4" name="TextBox 3"/>
+          <p:cNvPr id="5" name="TextBox 4"/>
           <p:cNvSpPr txBox="1"/>
           <p:nvPr/>
         </p:nvSpPr>
         <p:spPr>
           <a:xfrm>
-            <a:off x="8826703" y="6272784"/>
+            <a:off x="8240677" y="6272784"/>
             <a:ext cx="2651760" cy="219456"/>
           </a:xfrm>
           <a:prstGeom prst="rect">
@@ -23057,7 +23765,7 @@
       </p:sp>
       <p:sp>
         <p:nvSpPr>
-          <p:cNvPr id="5" name="TextBox 4"/>
+          <p:cNvPr id="6" name="TextBox 5"/>
           <p:cNvSpPr txBox="1"/>
           <p:nvPr/>
         </p:nvSpPr>
@@ -23104,7 +23812,7 @@
       </p:sp>
       <p:sp>
         <p:nvSpPr>
-          <p:cNvPr id="6" name="TextBox 5"/>
+          <p:cNvPr id="7" name="TextBox 6"/>
           <p:cNvSpPr txBox="1"/>
           <p:nvPr/>
         </p:nvSpPr>
@@ -23151,7 +23859,7 @@
       </p:sp>
       <p:sp>
         <p:nvSpPr>
-          <p:cNvPr id="7" name="Rectangle 6"/>
+          <p:cNvPr id="8" name="Rectangle 7"/>
           <p:cNvSpPr/>
           <p:nvPr/>
         </p:nvSpPr>
@@ -23195,7 +23903,7 @@
       </p:sp>
       <p:sp>
         <p:nvSpPr>
-          <p:cNvPr id="8" name="TextBox 7"/>
+          <p:cNvPr id="9" name="TextBox 8"/>
           <p:cNvSpPr txBox="1"/>
           <p:nvPr/>
         </p:nvSpPr>
@@ -23242,7 +23950,7 @@
       </p:sp>
       <p:sp>
         <p:nvSpPr>
-          <p:cNvPr id="9" name="Rounded Rectangle 8"/>
+          <p:cNvPr id="10" name="Rounded Rectangle 9"/>
           <p:cNvSpPr/>
           <p:nvPr/>
         </p:nvSpPr>
@@ -23288,7 +23996,7 @@
       </p:sp>
       <p:sp>
         <p:nvSpPr>
-          <p:cNvPr id="10" name="Rectangle 9"/>
+          <p:cNvPr id="11" name="Rectangle 10"/>
           <p:cNvSpPr/>
           <p:nvPr/>
         </p:nvSpPr>
@@ -23332,7 +24040,7 @@
       </p:sp>
       <p:sp>
         <p:nvSpPr>
-          <p:cNvPr id="11" name="TextBox 10"/>
+          <p:cNvPr id="12" name="TextBox 11"/>
           <p:cNvSpPr txBox="1"/>
           <p:nvPr/>
         </p:nvSpPr>
@@ -23379,7 +24087,7 @@
       </p:sp>
       <p:sp>
         <p:nvSpPr>
-          <p:cNvPr id="12" name="TextBox 11"/>
+          <p:cNvPr id="13" name="TextBox 12"/>
           <p:cNvSpPr txBox="1"/>
           <p:nvPr/>
         </p:nvSpPr>
@@ -23426,7 +24134,7 @@
       </p:sp>
       <p:sp>
         <p:nvSpPr>
-          <p:cNvPr id="13" name="Rounded Rectangle 12"/>
+          <p:cNvPr id="14" name="Rounded Rectangle 13"/>
           <p:cNvSpPr/>
           <p:nvPr/>
         </p:nvSpPr>
@@ -23472,7 +24180,7 @@
       </p:sp>
       <p:sp>
         <p:nvSpPr>
-          <p:cNvPr id="14" name="Rectangle 13"/>
+          <p:cNvPr id="15" name="Rectangle 14"/>
           <p:cNvSpPr/>
           <p:nvPr/>
         </p:nvSpPr>
@@ -23516,7 +24224,7 @@
       </p:sp>
       <p:sp>
         <p:nvSpPr>
-          <p:cNvPr id="15" name="TextBox 14"/>
+          <p:cNvPr id="16" name="TextBox 15"/>
           <p:cNvSpPr txBox="1"/>
           <p:nvPr/>
         </p:nvSpPr>
@@ -23563,7 +24271,7 @@
       </p:sp>
       <p:sp>
         <p:nvSpPr>
-          <p:cNvPr id="16" name="TextBox 15"/>
+          <p:cNvPr id="17" name="TextBox 16"/>
           <p:cNvSpPr txBox="1"/>
           <p:nvPr/>
         </p:nvSpPr>
@@ -23610,7 +24318,7 @@
       </p:sp>
       <p:sp>
         <p:nvSpPr>
-          <p:cNvPr id="17" name="Rounded Rectangle 16"/>
+          <p:cNvPr id="18" name="Rounded Rectangle 17"/>
           <p:cNvSpPr/>
           <p:nvPr/>
         </p:nvSpPr>
@@ -23656,7 +24364,7 @@
       </p:sp>
       <p:sp>
         <p:nvSpPr>
-          <p:cNvPr id="18" name="Rectangle 17"/>
+          <p:cNvPr id="19" name="Rectangle 18"/>
           <p:cNvSpPr/>
           <p:nvPr/>
         </p:nvSpPr>
@@ -23700,7 +24408,7 @@
       </p:sp>
       <p:sp>
         <p:nvSpPr>
-          <p:cNvPr id="19" name="TextBox 18"/>
+          <p:cNvPr id="20" name="TextBox 19"/>
           <p:cNvSpPr txBox="1"/>
           <p:nvPr/>
         </p:nvSpPr>
@@ -23747,7 +24455,7 @@
       </p:sp>
       <p:sp>
         <p:nvSpPr>
-          <p:cNvPr id="20" name="TextBox 19"/>
+          <p:cNvPr id="21" name="TextBox 20"/>
           <p:cNvSpPr txBox="1"/>
           <p:nvPr/>
         </p:nvSpPr>
@@ -23794,7 +24502,7 @@
       </p:sp>
       <p:sp>
         <p:nvSpPr>
-          <p:cNvPr id="21" name="Rounded Rectangle 20"/>
+          <p:cNvPr id="22" name="Rounded Rectangle 21"/>
           <p:cNvSpPr/>
           <p:nvPr/>
         </p:nvSpPr>
@@ -23840,7 +24548,7 @@
       </p:sp>
       <p:sp>
         <p:nvSpPr>
-          <p:cNvPr id="22" name="Rectangle 21"/>
+          <p:cNvPr id="23" name="Rectangle 22"/>
           <p:cNvSpPr/>
           <p:nvPr/>
         </p:nvSpPr>
@@ -23884,7 +24592,7 @@
       </p:sp>
       <p:sp>
         <p:nvSpPr>
-          <p:cNvPr id="23" name="TextBox 22"/>
+          <p:cNvPr id="24" name="TextBox 23"/>
           <p:cNvSpPr txBox="1"/>
           <p:nvPr/>
         </p:nvSpPr>
@@ -23931,7 +24639,7 @@
       </p:sp>
       <p:sp>
         <p:nvSpPr>
-          <p:cNvPr id="24" name="TextBox 23"/>
+          <p:cNvPr id="25" name="TextBox 24"/>
           <p:cNvSpPr txBox="1"/>
           <p:nvPr/>
         </p:nvSpPr>
@@ -24038,9 +24746,33 @@
           </a:p>
         </p:txBody>
       </p:sp>
-      <p:sp>
-        <p:nvSpPr>
-          <p:cNvPr id="3" name="TextBox 2"/>
+      <p:pic>
+        <p:nvPicPr>
+          <p:cNvPr id="3" name="college-logo" descr="logo-mark.png"/>
+          <p:cNvPicPr>
+            <a:picLocks noChangeAspect="1"/>
+          </p:cNvPicPr>
+          <p:nvPr/>
+        </p:nvPicPr>
+        <p:blipFill>
+          <a:blip r:embed="rId2"/>
+          <a:stretch>
+            <a:fillRect/>
+          </a:stretch>
+        </p:blipFill>
+        <p:spPr>
+          <a:xfrm>
+            <a:off x="11203333" y="6199632"/>
+            <a:ext cx="275129" cy="310896"/>
+          </a:xfrm>
+          <a:prstGeom prst="rect">
+            <a:avLst/>
+          </a:prstGeom>
+        </p:spPr>
+      </p:pic>
+      <p:sp>
+        <p:nvSpPr>
+          <p:cNvPr id="4" name="TextBox 3"/>
           <p:cNvSpPr txBox="1"/>
           <p:nvPr/>
         </p:nvSpPr>
@@ -24109,13 +24841,13 @@
       </p:sp>
       <p:sp>
         <p:nvSpPr>
-          <p:cNvPr id="4" name="TextBox 3"/>
+          <p:cNvPr id="5" name="TextBox 4"/>
           <p:cNvSpPr txBox="1"/>
           <p:nvPr/>
         </p:nvSpPr>
         <p:spPr>
           <a:xfrm>
-            <a:off x="8826703" y="6272784"/>
+            <a:off x="8240677" y="6272784"/>
             <a:ext cx="2651760" cy="219456"/>
           </a:xfrm>
           <a:prstGeom prst="rect">
@@ -24178,7 +24910,7 @@
       </p:sp>
       <p:sp>
         <p:nvSpPr>
-          <p:cNvPr id="5" name="TextBox 4"/>
+          <p:cNvPr id="6" name="TextBox 5"/>
           <p:cNvSpPr txBox="1"/>
           <p:nvPr/>
         </p:nvSpPr>
@@ -24225,7 +24957,7 @@
       </p:sp>
       <p:sp>
         <p:nvSpPr>
-          <p:cNvPr id="6" name="TextBox 5"/>
+          <p:cNvPr id="7" name="TextBox 6"/>
           <p:cNvSpPr txBox="1"/>
           <p:nvPr/>
         </p:nvSpPr>
@@ -24272,7 +25004,7 @@
       </p:sp>
       <p:sp>
         <p:nvSpPr>
-          <p:cNvPr id="7" name="Rectangle 6"/>
+          <p:cNvPr id="8" name="Rectangle 7"/>
           <p:cNvSpPr/>
           <p:nvPr/>
         </p:nvSpPr>
@@ -24316,7 +25048,7 @@
       </p:sp>
       <p:sp>
         <p:nvSpPr>
-          <p:cNvPr id="8" name="Rounded Rectangle 7"/>
+          <p:cNvPr id="9" name="Rounded Rectangle 8"/>
           <p:cNvSpPr/>
           <p:nvPr/>
         </p:nvSpPr>
@@ -24370,7 +25102,7 @@
       </p:sp>
       <p:sp>
         <p:nvSpPr>
-          <p:cNvPr id="9" name="Rectangle 8"/>
+          <p:cNvPr id="10" name="Rectangle 9"/>
           <p:cNvSpPr/>
           <p:nvPr/>
         </p:nvSpPr>
@@ -24414,7 +25146,7 @@
       </p:sp>
       <p:sp>
         <p:nvSpPr>
-          <p:cNvPr id="10" name="Rounded Rectangle 9"/>
+          <p:cNvPr id="11" name="Rounded Rectangle 10"/>
           <p:cNvSpPr/>
           <p:nvPr/>
         </p:nvSpPr>
@@ -24481,7 +25213,7 @@
       </p:sp>
       <p:sp>
         <p:nvSpPr>
-          <p:cNvPr id="11" name="TextBox 10"/>
+          <p:cNvPr id="12" name="TextBox 11"/>
           <p:cNvSpPr txBox="1"/>
           <p:nvPr/>
         </p:nvSpPr>
@@ -24528,7 +25260,7 @@
       </p:sp>
       <p:sp>
         <p:nvSpPr>
-          <p:cNvPr id="12" name="Rectangle 11"/>
+          <p:cNvPr id="13" name="Rectangle 12"/>
           <p:cNvSpPr/>
           <p:nvPr/>
         </p:nvSpPr>
@@ -24572,7 +25304,7 @@
       </p:sp>
       <p:sp>
         <p:nvSpPr>
-          <p:cNvPr id="13" name="Rounded Rectangle 12"/>
+          <p:cNvPr id="14" name="Rounded Rectangle 13"/>
           <p:cNvSpPr/>
           <p:nvPr/>
         </p:nvSpPr>
@@ -24618,7 +25350,7 @@
       </p:sp>
       <p:sp>
         <p:nvSpPr>
-          <p:cNvPr id="14" name="TextBox 13"/>
+          <p:cNvPr id="15" name="TextBox 14"/>
           <p:cNvSpPr txBox="1"/>
           <p:nvPr/>
         </p:nvSpPr>
@@ -24665,7 +25397,7 @@
       </p:sp>
       <p:sp>
         <p:nvSpPr>
-          <p:cNvPr id="15" name="Rounded Rectangle 14"/>
+          <p:cNvPr id="16" name="Rounded Rectangle 15"/>
           <p:cNvSpPr/>
           <p:nvPr/>
         </p:nvSpPr>
@@ -24711,7 +25443,7 @@
       </p:sp>
       <p:sp>
         <p:nvSpPr>
-          <p:cNvPr id="16" name="TextBox 15"/>
+          <p:cNvPr id="17" name="TextBox 16"/>
           <p:cNvSpPr txBox="1"/>
           <p:nvPr/>
         </p:nvSpPr>
@@ -24758,7 +25490,7 @@
       </p:sp>
       <p:sp>
         <p:nvSpPr>
-          <p:cNvPr id="17" name="Rounded Rectangle 16"/>
+          <p:cNvPr id="18" name="Rounded Rectangle 17"/>
           <p:cNvSpPr/>
           <p:nvPr/>
         </p:nvSpPr>
@@ -24804,7 +25536,7 @@
       </p:sp>
       <p:sp>
         <p:nvSpPr>
-          <p:cNvPr id="18" name="TextBox 17"/>
+          <p:cNvPr id="19" name="TextBox 18"/>
           <p:cNvSpPr txBox="1"/>
           <p:nvPr/>
         </p:nvSpPr>
@@ -24851,7 +25583,7 @@
       </p:sp>
       <p:sp>
         <p:nvSpPr>
-          <p:cNvPr id="19" name="Rounded Rectangle 18"/>
+          <p:cNvPr id="20" name="Rounded Rectangle 19"/>
           <p:cNvSpPr/>
           <p:nvPr/>
         </p:nvSpPr>
@@ -24897,7 +25629,7 @@
       </p:sp>
       <p:sp>
         <p:nvSpPr>
-          <p:cNvPr id="20" name="TextBox 19"/>
+          <p:cNvPr id="21" name="TextBox 20"/>
           <p:cNvSpPr txBox="1"/>
           <p:nvPr/>
         </p:nvSpPr>
@@ -24944,7 +25676,7 @@
       </p:sp>
       <p:sp>
         <p:nvSpPr>
-          <p:cNvPr id="21" name="Rounded Rectangle 20"/>
+          <p:cNvPr id="22" name="Rounded Rectangle 21"/>
           <p:cNvSpPr/>
           <p:nvPr/>
         </p:nvSpPr>
@@ -24990,7 +25722,7 @@
       </p:sp>
       <p:sp>
         <p:nvSpPr>
-          <p:cNvPr id="22" name="TextBox 21"/>
+          <p:cNvPr id="23" name="TextBox 22"/>
           <p:cNvSpPr txBox="1"/>
           <p:nvPr/>
         </p:nvSpPr>
@@ -25037,7 +25769,7 @@
       </p:sp>
       <p:sp>
         <p:nvSpPr>
-          <p:cNvPr id="23" name="Rounded Rectangle 22"/>
+          <p:cNvPr id="24" name="Rounded Rectangle 23"/>
           <p:cNvSpPr/>
           <p:nvPr/>
         </p:nvSpPr>
@@ -25091,7 +25823,7 @@
       </p:sp>
       <p:sp>
         <p:nvSpPr>
-          <p:cNvPr id="24" name="Rectangle 23"/>
+          <p:cNvPr id="25" name="Rectangle 24"/>
           <p:cNvSpPr/>
           <p:nvPr/>
         </p:nvSpPr>
@@ -25135,7 +25867,7 @@
       </p:sp>
       <p:sp>
         <p:nvSpPr>
-          <p:cNvPr id="25" name="Rounded Rectangle 24"/>
+          <p:cNvPr id="26" name="Rounded Rectangle 25"/>
           <p:cNvSpPr/>
           <p:nvPr/>
         </p:nvSpPr>
@@ -25202,7 +25934,7 @@
       </p:sp>
       <p:sp>
         <p:nvSpPr>
-          <p:cNvPr id="26" name="TextBox 25"/>
+          <p:cNvPr id="27" name="TextBox 26"/>
           <p:cNvSpPr txBox="1"/>
           <p:nvPr/>
         </p:nvSpPr>
@@ -25249,7 +25981,7 @@
       </p:sp>
       <p:sp>
         <p:nvSpPr>
-          <p:cNvPr id="27" name="Rectangle 26"/>
+          <p:cNvPr id="28" name="Rectangle 27"/>
           <p:cNvSpPr/>
           <p:nvPr/>
         </p:nvSpPr>
@@ -25293,7 +26025,7 @@
       </p:sp>
       <p:sp>
         <p:nvSpPr>
-          <p:cNvPr id="28" name="Rounded Rectangle 27"/>
+          <p:cNvPr id="29" name="Rounded Rectangle 28"/>
           <p:cNvSpPr/>
           <p:nvPr/>
         </p:nvSpPr>
@@ -25339,7 +26071,7 @@
       </p:sp>
       <p:sp>
         <p:nvSpPr>
-          <p:cNvPr id="29" name="TextBox 28"/>
+          <p:cNvPr id="30" name="TextBox 29"/>
           <p:cNvSpPr txBox="1"/>
           <p:nvPr/>
         </p:nvSpPr>
@@ -25386,7 +26118,7 @@
       </p:sp>
       <p:sp>
         <p:nvSpPr>
-          <p:cNvPr id="30" name="Rounded Rectangle 29"/>
+          <p:cNvPr id="31" name="Rounded Rectangle 30"/>
           <p:cNvSpPr/>
           <p:nvPr/>
         </p:nvSpPr>
@@ -25432,7 +26164,7 @@
       </p:sp>
       <p:sp>
         <p:nvSpPr>
-          <p:cNvPr id="31" name="TextBox 30"/>
+          <p:cNvPr id="32" name="TextBox 31"/>
           <p:cNvSpPr txBox="1"/>
           <p:nvPr/>
         </p:nvSpPr>
@@ -25479,7 +26211,7 @@
       </p:sp>
       <p:sp>
         <p:nvSpPr>
-          <p:cNvPr id="32" name="Rounded Rectangle 31"/>
+          <p:cNvPr id="33" name="Rounded Rectangle 32"/>
           <p:cNvSpPr/>
           <p:nvPr/>
         </p:nvSpPr>
@@ -25525,7 +26257,7 @@
       </p:sp>
       <p:sp>
         <p:nvSpPr>
-          <p:cNvPr id="33" name="TextBox 32"/>
+          <p:cNvPr id="34" name="TextBox 33"/>
           <p:cNvSpPr txBox="1"/>
           <p:nvPr/>
         </p:nvSpPr>
@@ -25572,7 +26304,7 @@
       </p:sp>
       <p:sp>
         <p:nvSpPr>
-          <p:cNvPr id="34" name="Rounded Rectangle 33"/>
+          <p:cNvPr id="35" name="Rounded Rectangle 34"/>
           <p:cNvSpPr/>
           <p:nvPr/>
         </p:nvSpPr>
@@ -25618,7 +26350,7 @@
       </p:sp>
       <p:sp>
         <p:nvSpPr>
-          <p:cNvPr id="35" name="TextBox 34"/>
+          <p:cNvPr id="36" name="TextBox 35"/>
           <p:cNvSpPr txBox="1"/>
           <p:nvPr/>
         </p:nvSpPr>
@@ -25665,7 +26397,7 @@
       </p:sp>
       <p:sp>
         <p:nvSpPr>
-          <p:cNvPr id="36" name="Rounded Rectangle 35"/>
+          <p:cNvPr id="37" name="Rounded Rectangle 36"/>
           <p:cNvSpPr/>
           <p:nvPr/>
         </p:nvSpPr>
@@ -25711,7 +26443,7 @@
       </p:sp>
       <p:sp>
         <p:nvSpPr>
-          <p:cNvPr id="37" name="TextBox 36"/>
+          <p:cNvPr id="38" name="TextBox 37"/>
           <p:cNvSpPr txBox="1"/>
           <p:nvPr/>
         </p:nvSpPr>
@@ -25758,7 +26490,7 @@
       </p:sp>
       <p:sp>
         <p:nvSpPr>
-          <p:cNvPr id="38" name="Rounded Rectangle 37"/>
+          <p:cNvPr id="39" name="Rounded Rectangle 38"/>
           <p:cNvSpPr/>
           <p:nvPr/>
         </p:nvSpPr>
@@ -25896,9 +26628,33 @@
           </a:p>
         </p:txBody>
       </p:sp>
-      <p:sp>
-        <p:nvSpPr>
-          <p:cNvPr id="3" name="TextBox 2"/>
+      <p:pic>
+        <p:nvPicPr>
+          <p:cNvPr id="3" name="college-logo" descr="logo-mark.png"/>
+          <p:cNvPicPr>
+            <a:picLocks noChangeAspect="1"/>
+          </p:cNvPicPr>
+          <p:nvPr/>
+        </p:nvPicPr>
+        <p:blipFill>
+          <a:blip r:embed="rId2"/>
+          <a:stretch>
+            <a:fillRect/>
+          </a:stretch>
+        </p:blipFill>
+        <p:spPr>
+          <a:xfrm>
+            <a:off x="11203333" y="6199632"/>
+            <a:ext cx="275129" cy="310896"/>
+          </a:xfrm>
+          <a:prstGeom prst="rect">
+            <a:avLst/>
+          </a:prstGeom>
+        </p:spPr>
+      </p:pic>
+      <p:sp>
+        <p:nvSpPr>
+          <p:cNvPr id="4" name="TextBox 3"/>
           <p:cNvSpPr txBox="1"/>
           <p:nvPr/>
         </p:nvSpPr>
@@ -25967,13 +26723,13 @@
       </p:sp>
       <p:sp>
         <p:nvSpPr>
-          <p:cNvPr id="4" name="TextBox 3"/>
+          <p:cNvPr id="5" name="TextBox 4"/>
           <p:cNvSpPr txBox="1"/>
           <p:nvPr/>
         </p:nvSpPr>
         <p:spPr>
           <a:xfrm>
-            <a:off x="8826703" y="6272784"/>
+            <a:off x="8240677" y="6272784"/>
             <a:ext cx="2651760" cy="219456"/>
           </a:xfrm>
           <a:prstGeom prst="rect">
@@ -26036,7 +26792,7 @@
       </p:sp>
       <p:sp>
         <p:nvSpPr>
-          <p:cNvPr id="5" name="TextBox 4"/>
+          <p:cNvPr id="6" name="TextBox 5"/>
           <p:cNvSpPr txBox="1"/>
           <p:nvPr/>
         </p:nvSpPr>
@@ -26083,7 +26839,7 @@
       </p:sp>
       <p:sp>
         <p:nvSpPr>
-          <p:cNvPr id="6" name="TextBox 5"/>
+          <p:cNvPr id="7" name="TextBox 6"/>
           <p:cNvSpPr txBox="1"/>
           <p:nvPr/>
         </p:nvSpPr>
@@ -26130,7 +26886,7 @@
       </p:sp>
       <p:sp>
         <p:nvSpPr>
-          <p:cNvPr id="7" name="Rectangle 6"/>
+          <p:cNvPr id="8" name="Rectangle 7"/>
           <p:cNvSpPr/>
           <p:nvPr/>
         </p:nvSpPr>
@@ -26174,7 +26930,7 @@
       </p:sp>
       <p:sp>
         <p:nvSpPr>
-          <p:cNvPr id="8" name="TextBox 7"/>
+          <p:cNvPr id="9" name="TextBox 8"/>
           <p:cNvSpPr txBox="1"/>
           <p:nvPr/>
         </p:nvSpPr>
@@ -26221,7 +26977,7 @@
       </p:sp>
       <p:sp>
         <p:nvSpPr>
-          <p:cNvPr id="9" name="Rounded Rectangle 8"/>
+          <p:cNvPr id="10" name="Rounded Rectangle 9"/>
           <p:cNvSpPr/>
           <p:nvPr/>
         </p:nvSpPr>
@@ -26275,7 +27031,7 @@
       </p:sp>
       <p:sp>
         <p:nvSpPr>
-          <p:cNvPr id="10" name="Rectangle 9"/>
+          <p:cNvPr id="11" name="Rectangle 10"/>
           <p:cNvSpPr/>
           <p:nvPr/>
         </p:nvSpPr>
@@ -26319,7 +27075,7 @@
       </p:sp>
       <p:sp>
         <p:nvSpPr>
-          <p:cNvPr id="11" name="TextBox 10"/>
+          <p:cNvPr id="12" name="TextBox 11"/>
           <p:cNvSpPr txBox="1"/>
           <p:nvPr/>
         </p:nvSpPr>
@@ -26366,7 +27122,7 @@
       </p:sp>
       <p:sp>
         <p:nvSpPr>
-          <p:cNvPr id="12" name="TextBox 11"/>
+          <p:cNvPr id="13" name="TextBox 12"/>
           <p:cNvSpPr txBox="1"/>
           <p:nvPr/>
         </p:nvSpPr>
@@ -26413,7 +27169,7 @@
       </p:sp>
       <p:sp>
         <p:nvSpPr>
-          <p:cNvPr id="13" name="Rounded Rectangle 12"/>
+          <p:cNvPr id="14" name="Rounded Rectangle 13"/>
           <p:cNvSpPr/>
           <p:nvPr/>
         </p:nvSpPr>
@@ -26467,7 +27223,7 @@
       </p:sp>
       <p:sp>
         <p:nvSpPr>
-          <p:cNvPr id="14" name="Rectangle 13"/>
+          <p:cNvPr id="15" name="Rectangle 14"/>
           <p:cNvSpPr/>
           <p:nvPr/>
         </p:nvSpPr>
@@ -26511,7 +27267,7 @@
       </p:sp>
       <p:sp>
         <p:nvSpPr>
-          <p:cNvPr id="15" name="TextBox 14"/>
+          <p:cNvPr id="16" name="TextBox 15"/>
           <p:cNvSpPr txBox="1"/>
           <p:nvPr/>
         </p:nvSpPr>
@@ -26558,7 +27314,7 @@
       </p:sp>
       <p:sp>
         <p:nvSpPr>
-          <p:cNvPr id="16" name="TextBox 15"/>
+          <p:cNvPr id="17" name="TextBox 16"/>
           <p:cNvSpPr txBox="1"/>
           <p:nvPr/>
         </p:nvSpPr>
@@ -26605,7 +27361,7 @@
       </p:sp>
       <p:sp>
         <p:nvSpPr>
-          <p:cNvPr id="17" name="Rounded Rectangle 16"/>
+          <p:cNvPr id="18" name="Rounded Rectangle 17"/>
           <p:cNvSpPr/>
           <p:nvPr/>
         </p:nvSpPr>
@@ -26659,7 +27415,7 @@
       </p:sp>
       <p:sp>
         <p:nvSpPr>
-          <p:cNvPr id="18" name="Rectangle 17"/>
+          <p:cNvPr id="19" name="Rectangle 18"/>
           <p:cNvSpPr/>
           <p:nvPr/>
         </p:nvSpPr>
@@ -26703,7 +27459,7 @@
       </p:sp>
       <p:sp>
         <p:nvSpPr>
-          <p:cNvPr id="19" name="TextBox 18"/>
+          <p:cNvPr id="20" name="TextBox 19"/>
           <p:cNvSpPr txBox="1"/>
           <p:nvPr/>
         </p:nvSpPr>
@@ -26750,7 +27506,7 @@
       </p:sp>
       <p:sp>
         <p:nvSpPr>
-          <p:cNvPr id="20" name="TextBox 19"/>
+          <p:cNvPr id="21" name="TextBox 20"/>
           <p:cNvSpPr txBox="1"/>
           <p:nvPr/>
         </p:nvSpPr>
@@ -26797,7 +27553,7 @@
       </p:sp>
       <p:sp>
         <p:nvSpPr>
-          <p:cNvPr id="21" name="Rounded Rectangle 20"/>
+          <p:cNvPr id="22" name="Rounded Rectangle 21"/>
           <p:cNvSpPr/>
           <p:nvPr/>
         </p:nvSpPr>
@@ -26851,7 +27607,7 @@
       </p:sp>
       <p:sp>
         <p:nvSpPr>
-          <p:cNvPr id="22" name="Rectangle 21"/>
+          <p:cNvPr id="23" name="Rectangle 22"/>
           <p:cNvSpPr/>
           <p:nvPr/>
         </p:nvSpPr>
@@ -26895,7 +27651,7 @@
       </p:sp>
       <p:sp>
         <p:nvSpPr>
-          <p:cNvPr id="23" name="TextBox 22"/>
+          <p:cNvPr id="24" name="TextBox 23"/>
           <p:cNvSpPr txBox="1"/>
           <p:nvPr/>
         </p:nvSpPr>
@@ -26942,7 +27698,7 @@
       </p:sp>
       <p:sp>
         <p:nvSpPr>
-          <p:cNvPr id="24" name="TextBox 23"/>
+          <p:cNvPr id="25" name="TextBox 24"/>
           <p:cNvSpPr txBox="1"/>
           <p:nvPr/>
         </p:nvSpPr>
@@ -27049,9 +27805,33 @@
           </a:p>
         </p:txBody>
       </p:sp>
-      <p:sp>
-        <p:nvSpPr>
-          <p:cNvPr id="3" name="TextBox 2"/>
+      <p:pic>
+        <p:nvPicPr>
+          <p:cNvPr id="3" name="college-logo" descr="logo-mark.png"/>
+          <p:cNvPicPr>
+            <a:picLocks noChangeAspect="1"/>
+          </p:cNvPicPr>
+          <p:nvPr/>
+        </p:nvPicPr>
+        <p:blipFill>
+          <a:blip r:embed="rId2"/>
+          <a:stretch>
+            <a:fillRect/>
+          </a:stretch>
+        </p:blipFill>
+        <p:spPr>
+          <a:xfrm>
+            <a:off x="11203333" y="6199632"/>
+            <a:ext cx="275129" cy="310896"/>
+          </a:xfrm>
+          <a:prstGeom prst="rect">
+            <a:avLst/>
+          </a:prstGeom>
+        </p:spPr>
+      </p:pic>
+      <p:sp>
+        <p:nvSpPr>
+          <p:cNvPr id="4" name="TextBox 3"/>
           <p:cNvSpPr txBox="1"/>
           <p:nvPr/>
         </p:nvSpPr>
@@ -27120,13 +27900,13 @@
       </p:sp>
       <p:sp>
         <p:nvSpPr>
-          <p:cNvPr id="4" name="TextBox 3"/>
+          <p:cNvPr id="5" name="TextBox 4"/>
           <p:cNvSpPr txBox="1"/>
           <p:nvPr/>
         </p:nvSpPr>
         <p:spPr>
           <a:xfrm>
-            <a:off x="8826703" y="6272784"/>
+            <a:off x="8240677" y="6272784"/>
             <a:ext cx="2651760" cy="219456"/>
           </a:xfrm>
           <a:prstGeom prst="rect">
@@ -27189,7 +27969,7 @@
       </p:sp>
       <p:sp>
         <p:nvSpPr>
-          <p:cNvPr id="5" name="TextBox 4"/>
+          <p:cNvPr id="6" name="TextBox 5"/>
           <p:cNvSpPr txBox="1"/>
           <p:nvPr/>
         </p:nvSpPr>
@@ -27236,7 +28016,7 @@
       </p:sp>
       <p:sp>
         <p:nvSpPr>
-          <p:cNvPr id="6" name="TextBox 5"/>
+          <p:cNvPr id="7" name="TextBox 6"/>
           <p:cNvSpPr txBox="1"/>
           <p:nvPr/>
         </p:nvSpPr>
@@ -27283,7 +28063,7 @@
       </p:sp>
       <p:sp>
         <p:nvSpPr>
-          <p:cNvPr id="7" name="Rectangle 6"/>
+          <p:cNvPr id="8" name="Rectangle 7"/>
           <p:cNvSpPr/>
           <p:nvPr/>
         </p:nvSpPr>
@@ -27327,7 +28107,7 @@
       </p:sp>
       <p:sp>
         <p:nvSpPr>
-          <p:cNvPr id="8" name="TextBox 7"/>
+          <p:cNvPr id="9" name="TextBox 8"/>
           <p:cNvSpPr txBox="1"/>
           <p:nvPr/>
         </p:nvSpPr>
@@ -27374,7 +28154,7 @@
       </p:sp>
       <p:sp>
         <p:nvSpPr>
-          <p:cNvPr id="9" name="Rounded Rectangle 8"/>
+          <p:cNvPr id="10" name="Rounded Rectangle 9"/>
           <p:cNvSpPr/>
           <p:nvPr/>
         </p:nvSpPr>
@@ -27428,7 +28208,7 @@
       </p:sp>
       <p:sp>
         <p:nvSpPr>
-          <p:cNvPr id="10" name="Rectangle 9"/>
+          <p:cNvPr id="11" name="Rectangle 10"/>
           <p:cNvSpPr/>
           <p:nvPr/>
         </p:nvSpPr>
@@ -27472,7 +28252,7 @@
       </p:sp>
       <p:sp>
         <p:nvSpPr>
-          <p:cNvPr id="11" name="Oval 10"/>
+          <p:cNvPr id="12" name="Oval 11"/>
           <p:cNvSpPr/>
           <p:nvPr/>
         </p:nvSpPr>
@@ -27516,7 +28296,7 @@
       </p:sp>
       <p:sp>
         <p:nvSpPr>
-          <p:cNvPr id="12" name="TextBox 11"/>
+          <p:cNvPr id="13" name="TextBox 12"/>
           <p:cNvSpPr txBox="1"/>
           <p:nvPr/>
         </p:nvSpPr>
@@ -27563,7 +28343,7 @@
       </p:sp>
       <p:sp>
         <p:nvSpPr>
-          <p:cNvPr id="13" name="TextBox 12"/>
+          <p:cNvPr id="14" name="TextBox 13"/>
           <p:cNvSpPr txBox="1"/>
           <p:nvPr/>
         </p:nvSpPr>
@@ -27610,7 +28390,7 @@
       </p:sp>
       <p:sp>
         <p:nvSpPr>
-          <p:cNvPr id="14" name="TextBox 13"/>
+          <p:cNvPr id="15" name="TextBox 14"/>
           <p:cNvSpPr txBox="1"/>
           <p:nvPr/>
         </p:nvSpPr>
@@ -27657,7 +28437,7 @@
       </p:sp>
       <p:sp>
         <p:nvSpPr>
-          <p:cNvPr id="15" name="Rounded Rectangle 14"/>
+          <p:cNvPr id="16" name="Rounded Rectangle 15"/>
           <p:cNvSpPr/>
           <p:nvPr/>
         </p:nvSpPr>
@@ -27711,7 +28491,7 @@
       </p:sp>
       <p:sp>
         <p:nvSpPr>
-          <p:cNvPr id="16" name="Rectangle 15"/>
+          <p:cNvPr id="17" name="Rectangle 16"/>
           <p:cNvSpPr/>
           <p:nvPr/>
         </p:nvSpPr>
@@ -27755,7 +28535,7 @@
       </p:sp>
       <p:sp>
         <p:nvSpPr>
-          <p:cNvPr id="17" name="Oval 16"/>
+          <p:cNvPr id="18" name="Oval 17"/>
           <p:cNvSpPr/>
           <p:nvPr/>
         </p:nvSpPr>
@@ -27799,7 +28579,7 @@
       </p:sp>
       <p:sp>
         <p:nvSpPr>
-          <p:cNvPr id="18" name="TextBox 17"/>
+          <p:cNvPr id="19" name="TextBox 18"/>
           <p:cNvSpPr txBox="1"/>
           <p:nvPr/>
         </p:nvSpPr>
@@ -27846,7 +28626,7 @@
       </p:sp>
       <p:sp>
         <p:nvSpPr>
-          <p:cNvPr id="19" name="TextBox 18"/>
+          <p:cNvPr id="20" name="TextBox 19"/>
           <p:cNvSpPr txBox="1"/>
           <p:nvPr/>
         </p:nvSpPr>
@@ -27893,7 +28673,7 @@
       </p:sp>
       <p:sp>
         <p:nvSpPr>
-          <p:cNvPr id="20" name="TextBox 19"/>
+          <p:cNvPr id="21" name="TextBox 20"/>
           <p:cNvSpPr txBox="1"/>
           <p:nvPr/>
         </p:nvSpPr>
@@ -27940,7 +28720,7 @@
       </p:sp>
       <p:sp>
         <p:nvSpPr>
-          <p:cNvPr id="21" name="Rounded Rectangle 20"/>
+          <p:cNvPr id="22" name="Rounded Rectangle 21"/>
           <p:cNvSpPr/>
           <p:nvPr/>
         </p:nvSpPr>
@@ -27994,7 +28774,7 @@
       </p:sp>
       <p:sp>
         <p:nvSpPr>
-          <p:cNvPr id="22" name="Rectangle 21"/>
+          <p:cNvPr id="23" name="Rectangle 22"/>
           <p:cNvSpPr/>
           <p:nvPr/>
         </p:nvSpPr>
@@ -28038,7 +28818,7 @@
       </p:sp>
       <p:sp>
         <p:nvSpPr>
-          <p:cNvPr id="23" name="Oval 22"/>
+          <p:cNvPr id="24" name="Oval 23"/>
           <p:cNvSpPr/>
           <p:nvPr/>
         </p:nvSpPr>
@@ -28082,7 +28862,7 @@
       </p:sp>
       <p:sp>
         <p:nvSpPr>
-          <p:cNvPr id="24" name="TextBox 23"/>
+          <p:cNvPr id="25" name="TextBox 24"/>
           <p:cNvSpPr txBox="1"/>
           <p:nvPr/>
         </p:nvSpPr>
@@ -28129,7 +28909,7 @@
       </p:sp>
       <p:sp>
         <p:nvSpPr>
-          <p:cNvPr id="25" name="TextBox 24"/>
+          <p:cNvPr id="26" name="TextBox 25"/>
           <p:cNvSpPr txBox="1"/>
           <p:nvPr/>
         </p:nvSpPr>
@@ -28176,7 +28956,7 @@
       </p:sp>
       <p:sp>
         <p:nvSpPr>
-          <p:cNvPr id="26" name="TextBox 25"/>
+          <p:cNvPr id="27" name="TextBox 26"/>
           <p:cNvSpPr txBox="1"/>
           <p:nvPr/>
         </p:nvSpPr>
@@ -28659,6 +29439,76 @@
           </a:p>
         </p:txBody>
       </p:sp>
+      <p:sp>
+        <p:nvSpPr>
+          <p:cNvPr id="11" name="logo-plate"/>
+          <p:cNvSpPr/>
+          <p:nvPr/>
+        </p:nvSpPr>
+        <p:spPr>
+          <a:xfrm>
+            <a:off x="9512190" y="539496"/>
+            <a:ext cx="1993704" cy="987552"/>
+          </a:xfrm>
+          <a:prstGeom prst="roundRect">
+            <a:avLst>
+              <a:gd name="adj" fmla="val 14000"/>
+            </a:avLst>
+          </a:prstGeom>
+          <a:solidFill>
+            <a:srgbClr val="FFFFFF"/>
+          </a:solidFill>
+          <a:ln>
+            <a:noFill/>
+          </a:ln>
+          <a:effectLst/>
+        </p:spPr>
+        <p:style>
+          <a:lnRef idx="1">
+            <a:schemeClr val="accent1"/>
+          </a:lnRef>
+          <a:fillRef idx="3">
+            <a:schemeClr val="accent1"/>
+          </a:fillRef>
+          <a:effectRef idx="2">
+            <a:schemeClr val="accent1"/>
+          </a:effectRef>
+          <a:fontRef idx="minor">
+            <a:schemeClr val="lt1"/>
+          </a:fontRef>
+        </p:style>
+        <p:txBody>
+          <a:bodyPr rtlCol="0" anchor="ctr" wrap="square"/>
+          <a:lstStyle/>
+          <a:p>
+            <a:pPr algn="ctr"/>
+          </a:p>
+        </p:txBody>
+      </p:sp>
+      <p:pic>
+        <p:nvPicPr>
+          <p:cNvPr id="12" name="college-logo" descr="logo-full.png"/>
+          <p:cNvPicPr>
+            <a:picLocks noChangeAspect="1"/>
+          </p:cNvPicPr>
+          <p:nvPr/>
+        </p:nvPicPr>
+        <p:blipFill>
+          <a:blip r:embed="rId2"/>
+          <a:stretch>
+            <a:fillRect/>
+          </a:stretch>
+        </p:blipFill>
+        <p:spPr>
+          <a:xfrm>
+            <a:off x="9631062" y="658368"/>
+            <a:ext cx="1755961" cy="749808"/>
+          </a:xfrm>
+          <a:prstGeom prst="rect">
+            <a:avLst/>
+          </a:prstGeom>
+        </p:spPr>
+      </p:pic>
     </p:spTree>
   </p:cSld>
   <p:clrMapOvr>
@@ -28721,9 +29571,33 @@
           </a:p>
         </p:txBody>
       </p:sp>
-      <p:sp>
-        <p:nvSpPr>
-          <p:cNvPr id="3" name="TextBox 2"/>
+      <p:pic>
+        <p:nvPicPr>
+          <p:cNvPr id="3" name="college-logo" descr="logo-mark.png"/>
+          <p:cNvPicPr>
+            <a:picLocks noChangeAspect="1"/>
+          </p:cNvPicPr>
+          <p:nvPr/>
+        </p:nvPicPr>
+        <p:blipFill>
+          <a:blip r:embed="rId2"/>
+          <a:stretch>
+            <a:fillRect/>
+          </a:stretch>
+        </p:blipFill>
+        <p:spPr>
+          <a:xfrm>
+            <a:off x="11203333" y="6199632"/>
+            <a:ext cx="275129" cy="310896"/>
+          </a:xfrm>
+          <a:prstGeom prst="rect">
+            <a:avLst/>
+          </a:prstGeom>
+        </p:spPr>
+      </p:pic>
+      <p:sp>
+        <p:nvSpPr>
+          <p:cNvPr id="4" name="TextBox 3"/>
           <p:cNvSpPr txBox="1"/>
           <p:nvPr/>
         </p:nvSpPr>
@@ -28792,13 +29666,13 @@
       </p:sp>
       <p:sp>
         <p:nvSpPr>
-          <p:cNvPr id="4" name="TextBox 3"/>
+          <p:cNvPr id="5" name="TextBox 4"/>
           <p:cNvSpPr txBox="1"/>
           <p:nvPr/>
         </p:nvSpPr>
         <p:spPr>
           <a:xfrm>
-            <a:off x="8826703" y="6272784"/>
+            <a:off x="8240677" y="6272784"/>
             <a:ext cx="2651760" cy="219456"/>
           </a:xfrm>
           <a:prstGeom prst="rect">
@@ -28861,7 +29735,7 @@
       </p:sp>
       <p:sp>
         <p:nvSpPr>
-          <p:cNvPr id="5" name="TextBox 4"/>
+          <p:cNvPr id="6" name="TextBox 5"/>
           <p:cNvSpPr txBox="1"/>
           <p:nvPr/>
         </p:nvSpPr>
@@ -28908,7 +29782,7 @@
       </p:sp>
       <p:sp>
         <p:nvSpPr>
-          <p:cNvPr id="6" name="TextBox 5"/>
+          <p:cNvPr id="7" name="TextBox 6"/>
           <p:cNvSpPr txBox="1"/>
           <p:nvPr/>
         </p:nvSpPr>
@@ -28955,7 +29829,7 @@
       </p:sp>
       <p:sp>
         <p:nvSpPr>
-          <p:cNvPr id="7" name="Rectangle 6"/>
+          <p:cNvPr id="8" name="Rectangle 7"/>
           <p:cNvSpPr/>
           <p:nvPr/>
         </p:nvSpPr>
@@ -28999,7 +29873,7 @@
       </p:sp>
       <p:sp>
         <p:nvSpPr>
-          <p:cNvPr id="8" name="Rectangle 7"/>
+          <p:cNvPr id="9" name="Rectangle 8"/>
           <p:cNvSpPr/>
           <p:nvPr/>
         </p:nvSpPr>
@@ -29043,7 +29917,7 @@
       </p:sp>
       <p:sp>
         <p:nvSpPr>
-          <p:cNvPr id="9" name="Oval 8"/>
+          <p:cNvPr id="10" name="Oval 9"/>
           <p:cNvSpPr/>
           <p:nvPr/>
         </p:nvSpPr>
@@ -29087,7 +29961,7 @@
       </p:sp>
       <p:sp>
         <p:nvSpPr>
-          <p:cNvPr id="10" name="TextBox 9"/>
+          <p:cNvPr id="11" name="TextBox 10"/>
           <p:cNvSpPr txBox="1"/>
           <p:nvPr/>
         </p:nvSpPr>
@@ -29134,7 +30008,7 @@
       </p:sp>
       <p:sp>
         <p:nvSpPr>
-          <p:cNvPr id="11" name="Rounded Rectangle 10"/>
+          <p:cNvPr id="12" name="Rounded Rectangle 11"/>
           <p:cNvSpPr/>
           <p:nvPr/>
         </p:nvSpPr>
@@ -29182,7 +30056,7 @@
       </p:sp>
       <p:sp>
         <p:nvSpPr>
-          <p:cNvPr id="12" name="TextBox 11"/>
+          <p:cNvPr id="13" name="TextBox 12"/>
           <p:cNvSpPr txBox="1"/>
           <p:nvPr/>
         </p:nvSpPr>
@@ -29229,7 +30103,7 @@
       </p:sp>
       <p:sp>
         <p:nvSpPr>
-          <p:cNvPr id="13" name="TextBox 12"/>
+          <p:cNvPr id="14" name="TextBox 13"/>
           <p:cNvSpPr txBox="1"/>
           <p:nvPr/>
         </p:nvSpPr>
@@ -29276,7 +30150,7 @@
       </p:sp>
       <p:sp>
         <p:nvSpPr>
-          <p:cNvPr id="14" name="Oval 13"/>
+          <p:cNvPr id="15" name="Oval 14"/>
           <p:cNvSpPr/>
           <p:nvPr/>
         </p:nvSpPr>
@@ -29320,7 +30194,7 @@
       </p:sp>
       <p:sp>
         <p:nvSpPr>
-          <p:cNvPr id="15" name="TextBox 14"/>
+          <p:cNvPr id="16" name="TextBox 15"/>
           <p:cNvSpPr txBox="1"/>
           <p:nvPr/>
         </p:nvSpPr>
@@ -29367,7 +30241,7 @@
       </p:sp>
       <p:sp>
         <p:nvSpPr>
-          <p:cNvPr id="16" name="Rounded Rectangle 15"/>
+          <p:cNvPr id="17" name="Rounded Rectangle 16"/>
           <p:cNvSpPr/>
           <p:nvPr/>
         </p:nvSpPr>
@@ -29415,7 +30289,7 @@
       </p:sp>
       <p:sp>
         <p:nvSpPr>
-          <p:cNvPr id="17" name="TextBox 16"/>
+          <p:cNvPr id="18" name="TextBox 17"/>
           <p:cNvSpPr txBox="1"/>
           <p:nvPr/>
         </p:nvSpPr>
@@ -29462,7 +30336,7 @@
       </p:sp>
       <p:sp>
         <p:nvSpPr>
-          <p:cNvPr id="18" name="TextBox 17"/>
+          <p:cNvPr id="19" name="TextBox 18"/>
           <p:cNvSpPr txBox="1"/>
           <p:nvPr/>
         </p:nvSpPr>
@@ -29509,7 +30383,7 @@
       </p:sp>
       <p:sp>
         <p:nvSpPr>
-          <p:cNvPr id="19" name="Oval 18"/>
+          <p:cNvPr id="20" name="Oval 19"/>
           <p:cNvSpPr/>
           <p:nvPr/>
         </p:nvSpPr>
@@ -29553,7 +30427,7 @@
       </p:sp>
       <p:sp>
         <p:nvSpPr>
-          <p:cNvPr id="20" name="TextBox 19"/>
+          <p:cNvPr id="21" name="TextBox 20"/>
           <p:cNvSpPr txBox="1"/>
           <p:nvPr/>
         </p:nvSpPr>
@@ -29600,7 +30474,7 @@
       </p:sp>
       <p:sp>
         <p:nvSpPr>
-          <p:cNvPr id="21" name="Rounded Rectangle 20"/>
+          <p:cNvPr id="22" name="Rounded Rectangle 21"/>
           <p:cNvSpPr/>
           <p:nvPr/>
         </p:nvSpPr>
@@ -29648,7 +30522,7 @@
       </p:sp>
       <p:sp>
         <p:nvSpPr>
-          <p:cNvPr id="22" name="TextBox 21"/>
+          <p:cNvPr id="23" name="TextBox 22"/>
           <p:cNvSpPr txBox="1"/>
           <p:nvPr/>
         </p:nvSpPr>
@@ -29695,7 +30569,7 @@
       </p:sp>
       <p:sp>
         <p:nvSpPr>
-          <p:cNvPr id="23" name="TextBox 22"/>
+          <p:cNvPr id="24" name="TextBox 23"/>
           <p:cNvSpPr txBox="1"/>
           <p:nvPr/>
         </p:nvSpPr>
@@ -29742,7 +30616,7 @@
       </p:sp>
       <p:sp>
         <p:nvSpPr>
-          <p:cNvPr id="24" name="Oval 23"/>
+          <p:cNvPr id="25" name="Oval 24"/>
           <p:cNvSpPr/>
           <p:nvPr/>
         </p:nvSpPr>
@@ -29786,7 +30660,7 @@
       </p:sp>
       <p:sp>
         <p:nvSpPr>
-          <p:cNvPr id="25" name="TextBox 24"/>
+          <p:cNvPr id="26" name="TextBox 25"/>
           <p:cNvSpPr txBox="1"/>
           <p:nvPr/>
         </p:nvSpPr>
@@ -29833,7 +30707,7 @@
       </p:sp>
       <p:sp>
         <p:nvSpPr>
-          <p:cNvPr id="26" name="Rounded Rectangle 25"/>
+          <p:cNvPr id="27" name="Rounded Rectangle 26"/>
           <p:cNvSpPr/>
           <p:nvPr/>
         </p:nvSpPr>
@@ -29881,7 +30755,7 @@
       </p:sp>
       <p:sp>
         <p:nvSpPr>
-          <p:cNvPr id="27" name="TextBox 26"/>
+          <p:cNvPr id="28" name="TextBox 27"/>
           <p:cNvSpPr txBox="1"/>
           <p:nvPr/>
         </p:nvSpPr>
@@ -29928,7 +30802,7 @@
       </p:sp>
       <p:sp>
         <p:nvSpPr>
-          <p:cNvPr id="28" name="TextBox 27"/>
+          <p:cNvPr id="29" name="TextBox 28"/>
           <p:cNvSpPr txBox="1"/>
           <p:nvPr/>
         </p:nvSpPr>
@@ -29975,7 +30849,7 @@
       </p:sp>
       <p:sp>
         <p:nvSpPr>
-          <p:cNvPr id="29" name="Oval 28"/>
+          <p:cNvPr id="30" name="Oval 29"/>
           <p:cNvSpPr/>
           <p:nvPr/>
         </p:nvSpPr>
@@ -30019,7 +30893,7 @@
       </p:sp>
       <p:sp>
         <p:nvSpPr>
-          <p:cNvPr id="30" name="TextBox 29"/>
+          <p:cNvPr id="31" name="TextBox 30"/>
           <p:cNvSpPr txBox="1"/>
           <p:nvPr/>
         </p:nvSpPr>
@@ -30066,7 +30940,7 @@
       </p:sp>
       <p:sp>
         <p:nvSpPr>
-          <p:cNvPr id="31" name="Rounded Rectangle 30"/>
+          <p:cNvPr id="32" name="Rounded Rectangle 31"/>
           <p:cNvSpPr/>
           <p:nvPr/>
         </p:nvSpPr>
@@ -30114,7 +30988,7 @@
       </p:sp>
       <p:sp>
         <p:nvSpPr>
-          <p:cNvPr id="32" name="TextBox 31"/>
+          <p:cNvPr id="33" name="TextBox 32"/>
           <p:cNvSpPr txBox="1"/>
           <p:nvPr/>
         </p:nvSpPr>
@@ -30161,7 +31035,7 @@
       </p:sp>
       <p:sp>
         <p:nvSpPr>
-          <p:cNvPr id="33" name="TextBox 32"/>
+          <p:cNvPr id="34" name="TextBox 33"/>
           <p:cNvSpPr txBox="1"/>
           <p:nvPr/>
         </p:nvSpPr>
@@ -30208,7 +31082,7 @@
       </p:sp>
       <p:sp>
         <p:nvSpPr>
-          <p:cNvPr id="34" name="Oval 33"/>
+          <p:cNvPr id="35" name="Oval 34"/>
           <p:cNvSpPr/>
           <p:nvPr/>
         </p:nvSpPr>
@@ -30252,7 +31126,7 @@
       </p:sp>
       <p:sp>
         <p:nvSpPr>
-          <p:cNvPr id="35" name="TextBox 34"/>
+          <p:cNvPr id="36" name="TextBox 35"/>
           <p:cNvSpPr txBox="1"/>
           <p:nvPr/>
         </p:nvSpPr>
@@ -30299,7 +31173,7 @@
       </p:sp>
       <p:sp>
         <p:nvSpPr>
-          <p:cNvPr id="36" name="Rounded Rectangle 35"/>
+          <p:cNvPr id="37" name="Rounded Rectangle 36"/>
           <p:cNvSpPr/>
           <p:nvPr/>
         </p:nvSpPr>
@@ -30347,7 +31221,7 @@
       </p:sp>
       <p:sp>
         <p:nvSpPr>
-          <p:cNvPr id="37" name="TextBox 36"/>
+          <p:cNvPr id="38" name="TextBox 37"/>
           <p:cNvSpPr txBox="1"/>
           <p:nvPr/>
         </p:nvSpPr>
@@ -30394,7 +31268,7 @@
       </p:sp>
       <p:sp>
         <p:nvSpPr>
-          <p:cNvPr id="38" name="TextBox 37"/>
+          <p:cNvPr id="39" name="TextBox 38"/>
           <p:cNvSpPr txBox="1"/>
           <p:nvPr/>
         </p:nvSpPr>
@@ -30441,7 +31315,7 @@
       </p:sp>
       <p:sp>
         <p:nvSpPr>
-          <p:cNvPr id="39" name="Rounded Rectangle 38"/>
+          <p:cNvPr id="40" name="Rounded Rectangle 39"/>
           <p:cNvSpPr/>
           <p:nvPr/>
         </p:nvSpPr>
@@ -30508,7 +31382,7 @@
       </p:sp>
       <p:sp>
         <p:nvSpPr>
-          <p:cNvPr id="40" name="Rectangle 39"/>
+          <p:cNvPr id="41" name="Rectangle 40"/>
           <p:cNvSpPr/>
           <p:nvPr/>
         </p:nvSpPr>

--- a/Unit 5 - Strategy, Innovation and Leadership.pptx
+++ b/Unit 5 - Strategy, Innovation and Leadership.pptx
@@ -3906,60 +3906,13 @@
       </p:pic>
       <p:sp>
         <p:nvSpPr>
-          <p:cNvPr id="9" name="TextBox 8"/>
-          <p:cNvSpPr txBox="1"/>
-          <p:nvPr/>
-        </p:nvSpPr>
-        <p:spPr>
-          <a:xfrm>
-            <a:off x="932688" y="1170432"/>
-            <a:ext cx="7223760" cy="274320"/>
-          </a:xfrm>
-          <a:prstGeom prst="rect">
-            <a:avLst/>
-          </a:prstGeom>
-          <a:noFill/>
-        </p:spPr>
-        <p:txBody>
-          <a:bodyPr wrap="square" lIns="0" rIns="0" tIns="0" bIns="0" anchor="t">
-            <a:spAutoFit/>
-          </a:bodyPr>
-          <a:lstStyle/>
-          <a:p>
-            <a:pPr algn="l">
-              <a:lnSpc>
-                <a:spcPct val="122000"/>
-              </a:lnSpc>
-              <a:spcBef>
-                <a:spcPts val="0"/>
-              </a:spcBef>
-              <a:spcAft>
-                <a:spcPts val="0"/>
-              </a:spcAft>
-            </a:pPr>
-            <a:r>
-              <a:rPr sz="1050" b="1" i="0" spc="220">
-                <a:solidFill>
-                  <a:srgbClr val="00B3A4"/>
-                </a:solidFill>
-                <a:latin typeface="Segoe UI"/>
-                <a:ea typeface="Segoe UI"/>
-                <a:cs typeface="Segoe UI"/>
-              </a:rPr>
-              <a:t>PGPM · SYSTEMS SPECIALISATION</a:t>
-            </a:r>
-          </a:p>
-        </p:txBody>
-      </p:sp>
-      <p:sp>
-        <p:nvSpPr>
-          <p:cNvPr id="10" name="Rounded Rectangle 9"/>
+          <p:cNvPr id="9" name="Rounded Rectangle 8"/>
           <p:cNvSpPr/>
           <p:nvPr/>
         </p:nvSpPr>
         <p:spPr>
           <a:xfrm>
-            <a:off x="932688" y="1627632"/>
+            <a:off x="932688" y="1572768"/>
             <a:ext cx="1481328" cy="384048"/>
           </a:xfrm>
           <a:prstGeom prst="roundRect">
@@ -4020,7 +3973,7 @@
       </p:sp>
       <p:sp>
         <p:nvSpPr>
-          <p:cNvPr id="11" name="TextBox 10"/>
+          <p:cNvPr id="10" name="TextBox 9"/>
           <p:cNvSpPr txBox="1"/>
           <p:nvPr/>
         </p:nvSpPr>
@@ -4067,7 +4020,7 @@
       </p:sp>
       <p:sp>
         <p:nvSpPr>
-          <p:cNvPr id="12" name="Rectangle 11"/>
+          <p:cNvPr id="11" name="Rectangle 10"/>
           <p:cNvSpPr/>
           <p:nvPr/>
         </p:nvSpPr>
@@ -4111,7 +4064,7 @@
       </p:sp>
       <p:sp>
         <p:nvSpPr>
-          <p:cNvPr id="13" name="TextBox 12"/>
+          <p:cNvPr id="12" name="TextBox 11"/>
           <p:cNvSpPr txBox="1"/>
           <p:nvPr/>
         </p:nvSpPr>
@@ -4158,7 +4111,7 @@
       </p:sp>
       <p:sp>
         <p:nvSpPr>
-          <p:cNvPr id="14" name="Rounded Rectangle 13"/>
+          <p:cNvPr id="13" name="Rounded Rectangle 12"/>
           <p:cNvSpPr/>
           <p:nvPr/>
         </p:nvSpPr>
@@ -4225,7 +4178,7 @@
       </p:sp>
       <p:sp>
         <p:nvSpPr>
-          <p:cNvPr id="15" name="Rounded Rectangle 14"/>
+          <p:cNvPr id="14" name="Rounded Rectangle 13"/>
           <p:cNvSpPr/>
           <p:nvPr/>
         </p:nvSpPr>
@@ -4292,7 +4245,7 @@
       </p:sp>
       <p:sp>
         <p:nvSpPr>
-          <p:cNvPr id="16" name="Rounded Rectangle 15"/>
+          <p:cNvPr id="15" name="Rounded Rectangle 14"/>
           <p:cNvSpPr/>
           <p:nvPr/>
         </p:nvSpPr>
@@ -4359,7 +4312,7 @@
       </p:sp>
       <p:sp>
         <p:nvSpPr>
-          <p:cNvPr id="17" name="Rounded Rectangle 16"/>
+          <p:cNvPr id="16" name="Rounded Rectangle 15"/>
           <p:cNvSpPr/>
           <p:nvPr/>
         </p:nvSpPr>
@@ -4426,7 +4379,7 @@
       </p:sp>
       <p:sp>
         <p:nvSpPr>
-          <p:cNvPr id="18" name="Rectangle 17"/>
+          <p:cNvPr id="17" name="Rectangle 16"/>
           <p:cNvSpPr/>
           <p:nvPr/>
         </p:nvSpPr>
@@ -4470,7 +4423,7 @@
       </p:sp>
       <p:sp>
         <p:nvSpPr>
-          <p:cNvPr id="19" name="TextBox 18"/>
+          <p:cNvPr id="18" name="TextBox 17"/>
           <p:cNvSpPr txBox="1"/>
           <p:nvPr/>
         </p:nvSpPr>
@@ -4557,53 +4510,6 @@
                 <a:cs typeface="Segoe UI"/>
               </a:rPr>
               <a:t>OSI2509030</a:t>
-            </a:r>
-          </a:p>
-        </p:txBody>
-      </p:sp>
-      <p:sp>
-        <p:nvSpPr>
-          <p:cNvPr id="20" name="TextBox 19"/>
-          <p:cNvSpPr txBox="1"/>
-          <p:nvPr/>
-        </p:nvSpPr>
-        <p:spPr>
-          <a:xfrm>
-            <a:off x="7180783" y="5870448"/>
-            <a:ext cx="4206240" cy="640080"/>
-          </a:xfrm>
-          <a:prstGeom prst="rect">
-            <a:avLst/>
-          </a:prstGeom>
-          <a:noFill/>
-        </p:spPr>
-        <p:txBody>
-          <a:bodyPr wrap="square" lIns="0" rIns="0" tIns="0" bIns="0" anchor="t">
-            <a:spAutoFit/>
-          </a:bodyPr>
-          <a:lstStyle/>
-          <a:p>
-            <a:pPr algn="r">
-              <a:lnSpc>
-                <a:spcPct val="134000"/>
-              </a:lnSpc>
-              <a:spcBef>
-                <a:spcPts val="0"/>
-              </a:spcBef>
-              <a:spcAft>
-                <a:spcPts val="0"/>
-              </a:spcAft>
-            </a:pPr>
-            <a:r>
-              <a:rPr sz="1000" b="1" i="0">
-                <a:solidFill>
-                  <a:srgbClr val="C5D2E8"/>
-                </a:solidFill>
-                <a:latin typeface="Segoe UI"/>
-                <a:ea typeface="Segoe UI"/>
-                <a:cs typeface="Segoe UI"/>
-              </a:rPr>
-              <a:t>Unit 5 of 5</a:t>
             </a:r>
           </a:p>
         </p:txBody>
@@ -4702,8 +4608,77 @@
         </p:nvSpPr>
         <p:spPr>
           <a:xfrm>
-            <a:off x="713232" y="6272784"/>
-            <a:ext cx="5597920" cy="219456"/>
+            <a:off x="8240677" y="6272784"/>
+            <a:ext cx="2651760" cy="219456"/>
+          </a:xfrm>
+          <a:prstGeom prst="rect">
+            <a:avLst/>
+          </a:prstGeom>
+          <a:noFill/>
+        </p:spPr>
+        <p:txBody>
+          <a:bodyPr wrap="square" lIns="0" rIns="0" tIns="0" bIns="0" anchor="t">
+            <a:spAutoFit/>
+          </a:bodyPr>
+          <a:lstStyle/>
+          <a:p>
+            <a:pPr algn="r">
+              <a:lnSpc>
+                <a:spcPct val="122000"/>
+              </a:lnSpc>
+              <a:spcBef>
+                <a:spcPts val="0"/>
+              </a:spcBef>
+              <a:spcAft>
+                <a:spcPts val="0"/>
+              </a:spcAft>
+            </a:pPr>
+            <a:r>
+              <a:rPr sz="900" b="0" i="0">
+                <a:solidFill>
+                  <a:srgbClr val="636E85"/>
+                </a:solidFill>
+                <a:latin typeface="Segoe UI"/>
+                <a:ea typeface="Segoe UI"/>
+                <a:cs typeface="Segoe UI"/>
+              </a:rPr>
+              <a:t>Lingesh K  ·  OSI2509030</a:t>
+            </a:r>
+            <a:r>
+              <a:rPr sz="900" b="0" i="0">
+                <a:solidFill>
+                  <a:srgbClr val="141C2E"/>
+                </a:solidFill>
+                <a:latin typeface="Segoe UI"/>
+                <a:ea typeface="Segoe UI"/>
+                <a:cs typeface="Segoe UI"/>
+              </a:rPr>
+              <a:t>     </a:t>
+            </a:r>
+            <a:r>
+              <a:rPr sz="900" b="1" i="0">
+                <a:solidFill>
+                  <a:srgbClr val="0E1E3C"/>
+                </a:solidFill>
+                <a:latin typeface="Segoe UI"/>
+                <a:ea typeface="Segoe UI"/>
+                <a:cs typeface="Segoe UI"/>
+              </a:rPr>
+              <a:t>10</a:t>
+            </a:r>
+          </a:p>
+        </p:txBody>
+      </p:sp>
+      <p:sp>
+        <p:nvSpPr>
+          <p:cNvPr id="5" name="TextBox 4"/>
+          <p:cNvSpPr txBox="1"/>
+          <p:nvPr/>
+        </p:nvSpPr>
+        <p:spPr>
+          <a:xfrm>
+            <a:off x="713232" y="566928"/>
+            <a:ext cx="10765231" cy="219456"/>
           </a:xfrm>
           <a:prstGeom prst="rect">
             <a:avLst/>
@@ -4728,106 +4703,15 @@
               </a:spcAft>
             </a:pPr>
             <a:r>
-              <a:rPr sz="900" b="1" i="0">
-                <a:solidFill>
-                  <a:srgbClr val="0E1E3C"/>
-                </a:solidFill>
-                <a:latin typeface="Segoe UI"/>
-                <a:ea typeface="Segoe UI"/>
-                <a:cs typeface="Segoe UI"/>
-              </a:rPr>
-              <a:t>Unit 5</a:t>
-            </a:r>
-            <a:r>
-              <a:rPr sz="900" b="0" i="0">
-                <a:solidFill>
-                  <a:srgbClr val="939EB3"/>
-                </a:solidFill>
-                <a:latin typeface="Segoe UI"/>
-                <a:ea typeface="Segoe UI"/>
-                <a:cs typeface="Segoe UI"/>
-              </a:rPr>
-              <a:t>  ·  </a:t>
-            </a:r>
-            <a:r>
-              <a:rPr sz="900" b="0" i="0">
-                <a:solidFill>
-                  <a:srgbClr val="636E85"/>
-                </a:solidFill>
-                <a:latin typeface="Segoe UI"/>
-                <a:ea typeface="Segoe UI"/>
-                <a:cs typeface="Segoe UI"/>
-              </a:rPr>
-              <a:t>Strategy, Innovation and Leadership</a:t>
-            </a:r>
-          </a:p>
-        </p:txBody>
-      </p:sp>
-      <p:sp>
-        <p:nvSpPr>
-          <p:cNvPr id="5" name="TextBox 4"/>
-          <p:cNvSpPr txBox="1"/>
-          <p:nvPr/>
-        </p:nvSpPr>
-        <p:spPr>
-          <a:xfrm>
-            <a:off x="8240677" y="6272784"/>
-            <a:ext cx="2651760" cy="219456"/>
-          </a:xfrm>
-          <a:prstGeom prst="rect">
-            <a:avLst/>
-          </a:prstGeom>
-          <a:noFill/>
-        </p:spPr>
-        <p:txBody>
-          <a:bodyPr wrap="square" lIns="0" rIns="0" tIns="0" bIns="0" anchor="t">
-            <a:spAutoFit/>
-          </a:bodyPr>
-          <a:lstStyle/>
-          <a:p>
-            <a:pPr algn="r">
-              <a:lnSpc>
-                <a:spcPct val="122000"/>
-              </a:lnSpc>
-              <a:spcBef>
-                <a:spcPts val="0"/>
-              </a:spcBef>
-              <a:spcAft>
-                <a:spcPts val="0"/>
-              </a:spcAft>
-            </a:pPr>
-            <a:r>
-              <a:rPr sz="900" b="0" i="0">
-                <a:solidFill>
-                  <a:srgbClr val="636E85"/>
-                </a:solidFill>
-                <a:latin typeface="Segoe UI"/>
-                <a:ea typeface="Segoe UI"/>
-                <a:cs typeface="Segoe UI"/>
-              </a:rPr>
-              <a:t>Lingesh K  ·  OSI2509030</a:t>
-            </a:r>
-            <a:r>
-              <a:rPr sz="900" b="0" i="0">
-                <a:solidFill>
-                  <a:srgbClr val="141C2E"/>
-                </a:solidFill>
-                <a:latin typeface="Segoe UI"/>
-                <a:ea typeface="Segoe UI"/>
-                <a:cs typeface="Segoe UI"/>
-              </a:rPr>
-              <a:t>     </a:t>
-            </a:r>
-            <a:r>
-              <a:rPr sz="900" b="1" i="0">
-                <a:solidFill>
-                  <a:srgbClr val="0E1E3C"/>
-                </a:solidFill>
-                <a:latin typeface="Segoe UI"/>
-                <a:ea typeface="Segoe UI"/>
-                <a:cs typeface="Segoe UI"/>
-              </a:rPr>
-              <a:t>10</a:t>
+              <a:rPr sz="950" b="1" i="0" spc="160">
+                <a:solidFill>
+                  <a:srgbClr val="27A06A"/>
+                </a:solidFill>
+                <a:latin typeface="Segoe UI"/>
+                <a:ea typeface="Segoe UI"/>
+                <a:cs typeface="Segoe UI"/>
+              </a:rPr>
+              <a:t>FRAMING</a:t>
             </a:r>
           </a:p>
         </p:txBody>
@@ -4835,53 +4719,6 @@
       <p:sp>
         <p:nvSpPr>
           <p:cNvPr id="6" name="TextBox 5"/>
-          <p:cNvSpPr txBox="1"/>
-          <p:nvPr/>
-        </p:nvSpPr>
-        <p:spPr>
-          <a:xfrm>
-            <a:off x="713232" y="566928"/>
-            <a:ext cx="10765231" cy="219456"/>
-          </a:xfrm>
-          <a:prstGeom prst="rect">
-            <a:avLst/>
-          </a:prstGeom>
-          <a:noFill/>
-        </p:spPr>
-        <p:txBody>
-          <a:bodyPr wrap="square" lIns="0" rIns="0" tIns="0" bIns="0" anchor="t">
-            <a:spAutoFit/>
-          </a:bodyPr>
-          <a:lstStyle/>
-          <a:p>
-            <a:pPr algn="l">
-              <a:lnSpc>
-                <a:spcPct val="122000"/>
-              </a:lnSpc>
-              <a:spcBef>
-                <a:spcPts val="0"/>
-              </a:spcBef>
-              <a:spcAft>
-                <a:spcPts val="0"/>
-              </a:spcAft>
-            </a:pPr>
-            <a:r>
-              <a:rPr sz="950" b="1" i="0" spc="160">
-                <a:solidFill>
-                  <a:srgbClr val="27A06A"/>
-                </a:solidFill>
-                <a:latin typeface="Segoe UI"/>
-                <a:ea typeface="Segoe UI"/>
-                <a:cs typeface="Segoe UI"/>
-              </a:rPr>
-              <a:t>FRAMING</a:t>
-            </a:r>
-          </a:p>
-        </p:txBody>
-      </p:sp>
-      <p:sp>
-        <p:nvSpPr>
-          <p:cNvPr id="7" name="TextBox 6"/>
           <p:cNvSpPr txBox="1"/>
           <p:nvPr/>
         </p:nvSpPr>
@@ -4928,7 +4765,7 @@
       </p:sp>
       <p:sp>
         <p:nvSpPr>
-          <p:cNvPr id="8" name="Rectangle 7"/>
+          <p:cNvPr id="7" name="Rectangle 6"/>
           <p:cNvSpPr/>
           <p:nvPr/>
         </p:nvSpPr>
@@ -4972,7 +4809,7 @@
       </p:sp>
       <p:sp>
         <p:nvSpPr>
-          <p:cNvPr id="9" name="TextBox 8"/>
+          <p:cNvPr id="8" name="TextBox 7"/>
           <p:cNvSpPr txBox="1"/>
           <p:nvPr/>
         </p:nvSpPr>
@@ -5019,7 +4856,7 @@
       </p:sp>
       <p:sp>
         <p:nvSpPr>
-          <p:cNvPr id="10" name="Rectangle 9"/>
+          <p:cNvPr id="9" name="Rectangle 8"/>
           <p:cNvSpPr/>
           <p:nvPr/>
         </p:nvSpPr>
@@ -5063,7 +4900,7 @@
       </p:sp>
       <p:sp>
         <p:nvSpPr>
-          <p:cNvPr id="11" name="Rounded Rectangle 10"/>
+          <p:cNvPr id="10" name="Rounded Rectangle 9"/>
           <p:cNvSpPr/>
           <p:nvPr/>
         </p:nvSpPr>
@@ -5109,7 +4946,7 @@
       </p:sp>
       <p:sp>
         <p:nvSpPr>
-          <p:cNvPr id="12" name="TextBox 11"/>
+          <p:cNvPr id="11" name="TextBox 10"/>
           <p:cNvSpPr txBox="1"/>
           <p:nvPr/>
         </p:nvSpPr>
@@ -5156,7 +4993,7 @@
       </p:sp>
       <p:sp>
         <p:nvSpPr>
-          <p:cNvPr id="13" name="Rounded Rectangle 12"/>
+          <p:cNvPr id="12" name="Rounded Rectangle 11"/>
           <p:cNvSpPr/>
           <p:nvPr/>
         </p:nvSpPr>
@@ -5202,7 +5039,7 @@
       </p:sp>
       <p:sp>
         <p:nvSpPr>
-          <p:cNvPr id="14" name="TextBox 13"/>
+          <p:cNvPr id="13" name="TextBox 12"/>
           <p:cNvSpPr txBox="1"/>
           <p:nvPr/>
         </p:nvSpPr>
@@ -5249,7 +5086,7 @@
       </p:sp>
       <p:sp>
         <p:nvSpPr>
-          <p:cNvPr id="15" name="Rounded Rectangle 14"/>
+          <p:cNvPr id="14" name="Rounded Rectangle 13"/>
           <p:cNvSpPr/>
           <p:nvPr/>
         </p:nvSpPr>
@@ -5295,7 +5132,7 @@
       </p:sp>
       <p:sp>
         <p:nvSpPr>
-          <p:cNvPr id="16" name="TextBox 15"/>
+          <p:cNvPr id="15" name="TextBox 14"/>
           <p:cNvSpPr txBox="1"/>
           <p:nvPr/>
         </p:nvSpPr>
@@ -5342,7 +5179,7 @@
       </p:sp>
       <p:sp>
         <p:nvSpPr>
-          <p:cNvPr id="17" name="Rounded Rectangle 16"/>
+          <p:cNvPr id="16" name="Rounded Rectangle 15"/>
           <p:cNvSpPr/>
           <p:nvPr/>
         </p:nvSpPr>
@@ -5388,7 +5225,7 @@
       </p:sp>
       <p:sp>
         <p:nvSpPr>
-          <p:cNvPr id="18" name="TextBox 17"/>
+          <p:cNvPr id="17" name="TextBox 16"/>
           <p:cNvSpPr txBox="1"/>
           <p:nvPr/>
         </p:nvSpPr>
@@ -5435,7 +5272,7 @@
       </p:sp>
       <p:sp>
         <p:nvSpPr>
-          <p:cNvPr id="19" name="Rounded Rectangle 18"/>
+          <p:cNvPr id="18" name="Rounded Rectangle 17"/>
           <p:cNvSpPr/>
           <p:nvPr/>
         </p:nvSpPr>
@@ -5481,7 +5318,7 @@
       </p:sp>
       <p:sp>
         <p:nvSpPr>
-          <p:cNvPr id="20" name="TextBox 19"/>
+          <p:cNvPr id="19" name="TextBox 18"/>
           <p:cNvSpPr txBox="1"/>
           <p:nvPr/>
         </p:nvSpPr>
@@ -5528,7 +5365,7 @@
       </p:sp>
       <p:sp>
         <p:nvSpPr>
-          <p:cNvPr id="21" name="Rounded Rectangle 20"/>
+          <p:cNvPr id="20" name="Rounded Rectangle 19"/>
           <p:cNvSpPr/>
           <p:nvPr/>
         </p:nvSpPr>
@@ -5582,7 +5419,7 @@
       </p:sp>
       <p:sp>
         <p:nvSpPr>
-          <p:cNvPr id="22" name="Rectangle 21"/>
+          <p:cNvPr id="21" name="Rectangle 20"/>
           <p:cNvSpPr/>
           <p:nvPr/>
         </p:nvSpPr>
@@ -5626,7 +5463,7 @@
       </p:sp>
       <p:sp>
         <p:nvSpPr>
-          <p:cNvPr id="23" name="TextBox 22"/>
+          <p:cNvPr id="22" name="TextBox 21"/>
           <p:cNvSpPr txBox="1"/>
           <p:nvPr/>
         </p:nvSpPr>
@@ -5673,7 +5510,7 @@
       </p:sp>
       <p:sp>
         <p:nvSpPr>
-          <p:cNvPr id="24" name="TextBox 23"/>
+          <p:cNvPr id="23" name="TextBox 22"/>
           <p:cNvSpPr txBox="1"/>
           <p:nvPr/>
         </p:nvSpPr>
@@ -5720,7 +5557,7 @@
       </p:sp>
       <p:sp>
         <p:nvSpPr>
-          <p:cNvPr id="25" name="Rounded Rectangle 24"/>
+          <p:cNvPr id="24" name="Rounded Rectangle 23"/>
           <p:cNvSpPr/>
           <p:nvPr/>
         </p:nvSpPr>
@@ -5774,7 +5611,7 @@
       </p:sp>
       <p:sp>
         <p:nvSpPr>
-          <p:cNvPr id="26" name="Rectangle 25"/>
+          <p:cNvPr id="25" name="Rectangle 24"/>
           <p:cNvSpPr/>
           <p:nvPr/>
         </p:nvSpPr>
@@ -5818,7 +5655,7 @@
       </p:sp>
       <p:sp>
         <p:nvSpPr>
-          <p:cNvPr id="27" name="TextBox 26"/>
+          <p:cNvPr id="26" name="TextBox 25"/>
           <p:cNvSpPr txBox="1"/>
           <p:nvPr/>
         </p:nvSpPr>
@@ -5865,7 +5702,7 @@
       </p:sp>
       <p:sp>
         <p:nvSpPr>
-          <p:cNvPr id="28" name="TextBox 27"/>
+          <p:cNvPr id="27" name="TextBox 26"/>
           <p:cNvSpPr txBox="1"/>
           <p:nvPr/>
         </p:nvSpPr>
@@ -5912,7 +5749,7 @@
       </p:sp>
       <p:sp>
         <p:nvSpPr>
-          <p:cNvPr id="29" name="Rounded Rectangle 28"/>
+          <p:cNvPr id="28" name="Rounded Rectangle 27"/>
           <p:cNvSpPr/>
           <p:nvPr/>
         </p:nvSpPr>
@@ -5966,7 +5803,7 @@
       </p:sp>
       <p:sp>
         <p:nvSpPr>
-          <p:cNvPr id="30" name="Rectangle 29"/>
+          <p:cNvPr id="29" name="Rectangle 28"/>
           <p:cNvSpPr/>
           <p:nvPr/>
         </p:nvSpPr>
@@ -6010,7 +5847,7 @@
       </p:sp>
       <p:sp>
         <p:nvSpPr>
-          <p:cNvPr id="31" name="TextBox 30"/>
+          <p:cNvPr id="30" name="TextBox 29"/>
           <p:cNvSpPr txBox="1"/>
           <p:nvPr/>
         </p:nvSpPr>
@@ -6057,7 +5894,7 @@
       </p:sp>
       <p:sp>
         <p:nvSpPr>
-          <p:cNvPr id="32" name="TextBox 31"/>
+          <p:cNvPr id="31" name="TextBox 30"/>
           <p:cNvSpPr txBox="1"/>
           <p:nvPr/>
         </p:nvSpPr>
@@ -6196,8 +6033,77 @@
         </p:nvSpPr>
         <p:spPr>
           <a:xfrm>
-            <a:off x="713232" y="6272784"/>
-            <a:ext cx="5597920" cy="219456"/>
+            <a:off x="8240677" y="6272784"/>
+            <a:ext cx="2651760" cy="219456"/>
+          </a:xfrm>
+          <a:prstGeom prst="rect">
+            <a:avLst/>
+          </a:prstGeom>
+          <a:noFill/>
+        </p:spPr>
+        <p:txBody>
+          <a:bodyPr wrap="square" lIns="0" rIns="0" tIns="0" bIns="0" anchor="t">
+            <a:spAutoFit/>
+          </a:bodyPr>
+          <a:lstStyle/>
+          <a:p>
+            <a:pPr algn="r">
+              <a:lnSpc>
+                <a:spcPct val="122000"/>
+              </a:lnSpc>
+              <a:spcBef>
+                <a:spcPts val="0"/>
+              </a:spcBef>
+              <a:spcAft>
+                <a:spcPts val="0"/>
+              </a:spcAft>
+            </a:pPr>
+            <a:r>
+              <a:rPr sz="900" b="0" i="0">
+                <a:solidFill>
+                  <a:srgbClr val="636E85"/>
+                </a:solidFill>
+                <a:latin typeface="Segoe UI"/>
+                <a:ea typeface="Segoe UI"/>
+                <a:cs typeface="Segoe UI"/>
+              </a:rPr>
+              <a:t>Lingesh K  ·  OSI2509030</a:t>
+            </a:r>
+            <a:r>
+              <a:rPr sz="900" b="0" i="0">
+                <a:solidFill>
+                  <a:srgbClr val="141C2E"/>
+                </a:solidFill>
+                <a:latin typeface="Segoe UI"/>
+                <a:ea typeface="Segoe UI"/>
+                <a:cs typeface="Segoe UI"/>
+              </a:rPr>
+              <a:t>     </a:t>
+            </a:r>
+            <a:r>
+              <a:rPr sz="900" b="1" i="0">
+                <a:solidFill>
+                  <a:srgbClr val="0E1E3C"/>
+                </a:solidFill>
+                <a:latin typeface="Segoe UI"/>
+                <a:ea typeface="Segoe UI"/>
+                <a:cs typeface="Segoe UI"/>
+              </a:rPr>
+              <a:t>11</a:t>
+            </a:r>
+          </a:p>
+        </p:txBody>
+      </p:sp>
+      <p:sp>
+        <p:nvSpPr>
+          <p:cNvPr id="5" name="TextBox 4"/>
+          <p:cNvSpPr txBox="1"/>
+          <p:nvPr/>
+        </p:nvSpPr>
+        <p:spPr>
+          <a:xfrm>
+            <a:off x="713232" y="566928"/>
+            <a:ext cx="10765231" cy="219456"/>
           </a:xfrm>
           <a:prstGeom prst="rect">
             <a:avLst/>
@@ -6222,106 +6128,15 @@
               </a:spcAft>
             </a:pPr>
             <a:r>
-              <a:rPr sz="900" b="1" i="0">
-                <a:solidFill>
-                  <a:srgbClr val="0E1E3C"/>
-                </a:solidFill>
-                <a:latin typeface="Segoe UI"/>
-                <a:ea typeface="Segoe UI"/>
-                <a:cs typeface="Segoe UI"/>
-              </a:rPr>
-              <a:t>Unit 5</a:t>
-            </a:r>
-            <a:r>
-              <a:rPr sz="900" b="0" i="0">
-                <a:solidFill>
-                  <a:srgbClr val="939EB3"/>
-                </a:solidFill>
-                <a:latin typeface="Segoe UI"/>
-                <a:ea typeface="Segoe UI"/>
-                <a:cs typeface="Segoe UI"/>
-              </a:rPr>
-              <a:t>  ·  </a:t>
-            </a:r>
-            <a:r>
-              <a:rPr sz="900" b="0" i="0">
-                <a:solidFill>
-                  <a:srgbClr val="636E85"/>
-                </a:solidFill>
-                <a:latin typeface="Segoe UI"/>
-                <a:ea typeface="Segoe UI"/>
-                <a:cs typeface="Segoe UI"/>
-              </a:rPr>
-              <a:t>Strategy, Innovation and Leadership</a:t>
-            </a:r>
-          </a:p>
-        </p:txBody>
-      </p:sp>
-      <p:sp>
-        <p:nvSpPr>
-          <p:cNvPr id="5" name="TextBox 4"/>
-          <p:cNvSpPr txBox="1"/>
-          <p:nvPr/>
-        </p:nvSpPr>
-        <p:spPr>
-          <a:xfrm>
-            <a:off x="8240677" y="6272784"/>
-            <a:ext cx="2651760" cy="219456"/>
-          </a:xfrm>
-          <a:prstGeom prst="rect">
-            <a:avLst/>
-          </a:prstGeom>
-          <a:noFill/>
-        </p:spPr>
-        <p:txBody>
-          <a:bodyPr wrap="square" lIns="0" rIns="0" tIns="0" bIns="0" anchor="t">
-            <a:spAutoFit/>
-          </a:bodyPr>
-          <a:lstStyle/>
-          <a:p>
-            <a:pPr algn="r">
-              <a:lnSpc>
-                <a:spcPct val="122000"/>
-              </a:lnSpc>
-              <a:spcBef>
-                <a:spcPts val="0"/>
-              </a:spcBef>
-              <a:spcAft>
-                <a:spcPts val="0"/>
-              </a:spcAft>
-            </a:pPr>
-            <a:r>
-              <a:rPr sz="900" b="0" i="0">
-                <a:solidFill>
-                  <a:srgbClr val="636E85"/>
-                </a:solidFill>
-                <a:latin typeface="Segoe UI"/>
-                <a:ea typeface="Segoe UI"/>
-                <a:cs typeface="Segoe UI"/>
-              </a:rPr>
-              <a:t>Lingesh K  ·  OSI2509030</a:t>
-            </a:r>
-            <a:r>
-              <a:rPr sz="900" b="0" i="0">
-                <a:solidFill>
-                  <a:srgbClr val="141C2E"/>
-                </a:solidFill>
-                <a:latin typeface="Segoe UI"/>
-                <a:ea typeface="Segoe UI"/>
-                <a:cs typeface="Segoe UI"/>
-              </a:rPr>
-              <a:t>     </a:t>
-            </a:r>
-            <a:r>
-              <a:rPr sz="900" b="1" i="0">
-                <a:solidFill>
-                  <a:srgbClr val="0E1E3C"/>
-                </a:solidFill>
-                <a:latin typeface="Segoe UI"/>
-                <a:ea typeface="Segoe UI"/>
-                <a:cs typeface="Segoe UI"/>
-              </a:rPr>
-              <a:t>11</a:t>
+              <a:rPr sz="950" b="1" i="0" spc="160">
+                <a:solidFill>
+                  <a:srgbClr val="745CE0"/>
+                </a:solidFill>
+                <a:latin typeface="Segoe UI"/>
+                <a:ea typeface="Segoe UI"/>
+                <a:cs typeface="Segoe UI"/>
+              </a:rPr>
+              <a:t>ROUTE TO MARKET</a:t>
             </a:r>
           </a:p>
         </p:txBody>
@@ -6329,53 +6144,6 @@
       <p:sp>
         <p:nvSpPr>
           <p:cNvPr id="6" name="TextBox 5"/>
-          <p:cNvSpPr txBox="1"/>
-          <p:nvPr/>
-        </p:nvSpPr>
-        <p:spPr>
-          <a:xfrm>
-            <a:off x="713232" y="566928"/>
-            <a:ext cx="10765231" cy="219456"/>
-          </a:xfrm>
-          <a:prstGeom prst="rect">
-            <a:avLst/>
-          </a:prstGeom>
-          <a:noFill/>
-        </p:spPr>
-        <p:txBody>
-          <a:bodyPr wrap="square" lIns="0" rIns="0" tIns="0" bIns="0" anchor="t">
-            <a:spAutoFit/>
-          </a:bodyPr>
-          <a:lstStyle/>
-          <a:p>
-            <a:pPr algn="l">
-              <a:lnSpc>
-                <a:spcPct val="122000"/>
-              </a:lnSpc>
-              <a:spcBef>
-                <a:spcPts val="0"/>
-              </a:spcBef>
-              <a:spcAft>
-                <a:spcPts val="0"/>
-              </a:spcAft>
-            </a:pPr>
-            <a:r>
-              <a:rPr sz="950" b="1" i="0" spc="160">
-                <a:solidFill>
-                  <a:srgbClr val="745CE0"/>
-                </a:solidFill>
-                <a:latin typeface="Segoe UI"/>
-                <a:ea typeface="Segoe UI"/>
-                <a:cs typeface="Segoe UI"/>
-              </a:rPr>
-              <a:t>ROUTE TO MARKET</a:t>
-            </a:r>
-          </a:p>
-        </p:txBody>
-      </p:sp>
-      <p:sp>
-        <p:nvSpPr>
-          <p:cNvPr id="7" name="TextBox 6"/>
           <p:cNvSpPr txBox="1"/>
           <p:nvPr/>
         </p:nvSpPr>
@@ -6422,7 +6190,7 @@
       </p:sp>
       <p:sp>
         <p:nvSpPr>
-          <p:cNvPr id="8" name="Rectangle 7"/>
+          <p:cNvPr id="7" name="Rectangle 6"/>
           <p:cNvSpPr/>
           <p:nvPr/>
         </p:nvSpPr>
@@ -6466,7 +6234,7 @@
       </p:sp>
       <p:graphicFrame>
         <p:nvGraphicFramePr>
-          <p:cNvPr id="9" name="Table 8"/>
+          <p:cNvPr id="8" name="Table 7"/>
           <p:cNvGraphicFramePr>
             <a:graphicFrameLocks noGrp="1"/>
           </p:cNvGraphicFramePr>
@@ -7062,7 +6830,7 @@
       </p:graphicFrame>
       <p:sp>
         <p:nvSpPr>
-          <p:cNvPr id="10" name="Rounded Rectangle 9"/>
+          <p:cNvPr id="9" name="Rounded Rectangle 8"/>
           <p:cNvSpPr/>
           <p:nvPr/>
         </p:nvSpPr>
@@ -7129,7 +6897,7 @@
       </p:sp>
       <p:sp>
         <p:nvSpPr>
-          <p:cNvPr id="11" name="Rectangle 10"/>
+          <p:cNvPr id="10" name="Rectangle 9"/>
           <p:cNvSpPr/>
           <p:nvPr/>
         </p:nvSpPr>
@@ -7265,8 +7033,77 @@
         </p:nvSpPr>
         <p:spPr>
           <a:xfrm>
-            <a:off x="713232" y="6272784"/>
-            <a:ext cx="5597920" cy="219456"/>
+            <a:off x="8240677" y="6272784"/>
+            <a:ext cx="2651760" cy="219456"/>
+          </a:xfrm>
+          <a:prstGeom prst="rect">
+            <a:avLst/>
+          </a:prstGeom>
+          <a:noFill/>
+        </p:spPr>
+        <p:txBody>
+          <a:bodyPr wrap="square" lIns="0" rIns="0" tIns="0" bIns="0" anchor="t">
+            <a:spAutoFit/>
+          </a:bodyPr>
+          <a:lstStyle/>
+          <a:p>
+            <a:pPr algn="r">
+              <a:lnSpc>
+                <a:spcPct val="122000"/>
+              </a:lnSpc>
+              <a:spcBef>
+                <a:spcPts val="0"/>
+              </a:spcBef>
+              <a:spcAft>
+                <a:spcPts val="0"/>
+              </a:spcAft>
+            </a:pPr>
+            <a:r>
+              <a:rPr sz="900" b="0" i="0">
+                <a:solidFill>
+                  <a:srgbClr val="636E85"/>
+                </a:solidFill>
+                <a:latin typeface="Segoe UI"/>
+                <a:ea typeface="Segoe UI"/>
+                <a:cs typeface="Segoe UI"/>
+              </a:rPr>
+              <a:t>Lingesh K  ·  OSI2509030</a:t>
+            </a:r>
+            <a:r>
+              <a:rPr sz="900" b="0" i="0">
+                <a:solidFill>
+                  <a:srgbClr val="141C2E"/>
+                </a:solidFill>
+                <a:latin typeface="Segoe UI"/>
+                <a:ea typeface="Segoe UI"/>
+                <a:cs typeface="Segoe UI"/>
+              </a:rPr>
+              <a:t>     </a:t>
+            </a:r>
+            <a:r>
+              <a:rPr sz="900" b="1" i="0">
+                <a:solidFill>
+                  <a:srgbClr val="0E1E3C"/>
+                </a:solidFill>
+                <a:latin typeface="Segoe UI"/>
+                <a:ea typeface="Segoe UI"/>
+                <a:cs typeface="Segoe UI"/>
+              </a:rPr>
+              <a:t>12</a:t>
+            </a:r>
+          </a:p>
+        </p:txBody>
+      </p:sp>
+      <p:sp>
+        <p:nvSpPr>
+          <p:cNvPr id="5" name="TextBox 4"/>
+          <p:cNvSpPr txBox="1"/>
+          <p:nvPr/>
+        </p:nvSpPr>
+        <p:spPr>
+          <a:xfrm>
+            <a:off x="713232" y="566928"/>
+            <a:ext cx="10765231" cy="219456"/>
           </a:xfrm>
           <a:prstGeom prst="rect">
             <a:avLst/>
@@ -7291,106 +7128,15 @@
               </a:spcAft>
             </a:pPr>
             <a:r>
-              <a:rPr sz="900" b="1" i="0">
-                <a:solidFill>
-                  <a:srgbClr val="0E1E3C"/>
-                </a:solidFill>
-                <a:latin typeface="Segoe UI"/>
-                <a:ea typeface="Segoe UI"/>
-                <a:cs typeface="Segoe UI"/>
-              </a:rPr>
-              <a:t>Unit 5</a:t>
-            </a:r>
-            <a:r>
-              <a:rPr sz="900" b="0" i="0">
-                <a:solidFill>
-                  <a:srgbClr val="939EB3"/>
-                </a:solidFill>
-                <a:latin typeface="Segoe UI"/>
-                <a:ea typeface="Segoe UI"/>
-                <a:cs typeface="Segoe UI"/>
-              </a:rPr>
-              <a:t>  ·  </a:t>
-            </a:r>
-            <a:r>
-              <a:rPr sz="900" b="0" i="0">
-                <a:solidFill>
-                  <a:srgbClr val="636E85"/>
-                </a:solidFill>
-                <a:latin typeface="Segoe UI"/>
-                <a:ea typeface="Segoe UI"/>
-                <a:cs typeface="Segoe UI"/>
-              </a:rPr>
-              <a:t>Strategy, Innovation and Leadership</a:t>
-            </a:r>
-          </a:p>
-        </p:txBody>
-      </p:sp>
-      <p:sp>
-        <p:nvSpPr>
-          <p:cNvPr id="5" name="TextBox 4"/>
-          <p:cNvSpPr txBox="1"/>
-          <p:nvPr/>
-        </p:nvSpPr>
-        <p:spPr>
-          <a:xfrm>
-            <a:off x="8240677" y="6272784"/>
-            <a:ext cx="2651760" cy="219456"/>
-          </a:xfrm>
-          <a:prstGeom prst="rect">
-            <a:avLst/>
-          </a:prstGeom>
-          <a:noFill/>
-        </p:spPr>
-        <p:txBody>
-          <a:bodyPr wrap="square" lIns="0" rIns="0" tIns="0" bIns="0" anchor="t">
-            <a:spAutoFit/>
-          </a:bodyPr>
-          <a:lstStyle/>
-          <a:p>
-            <a:pPr algn="r">
-              <a:lnSpc>
-                <a:spcPct val="122000"/>
-              </a:lnSpc>
-              <a:spcBef>
-                <a:spcPts val="0"/>
-              </a:spcBef>
-              <a:spcAft>
-                <a:spcPts val="0"/>
-              </a:spcAft>
-            </a:pPr>
-            <a:r>
-              <a:rPr sz="900" b="0" i="0">
-                <a:solidFill>
-                  <a:srgbClr val="636E85"/>
-                </a:solidFill>
-                <a:latin typeface="Segoe UI"/>
-                <a:ea typeface="Segoe UI"/>
-                <a:cs typeface="Segoe UI"/>
-              </a:rPr>
-              <a:t>Lingesh K  ·  OSI2509030</a:t>
-            </a:r>
-            <a:r>
-              <a:rPr sz="900" b="0" i="0">
-                <a:solidFill>
-                  <a:srgbClr val="141C2E"/>
-                </a:solidFill>
-                <a:latin typeface="Segoe UI"/>
-                <a:ea typeface="Segoe UI"/>
-                <a:cs typeface="Segoe UI"/>
-              </a:rPr>
-              <a:t>     </a:t>
-            </a:r>
-            <a:r>
-              <a:rPr sz="900" b="1" i="0">
-                <a:solidFill>
-                  <a:srgbClr val="0E1E3C"/>
-                </a:solidFill>
-                <a:latin typeface="Segoe UI"/>
-                <a:ea typeface="Segoe UI"/>
-                <a:cs typeface="Segoe UI"/>
-              </a:rPr>
-              <a:t>12</a:t>
+              <a:rPr sz="950" b="1" i="0" spc="160">
+                <a:solidFill>
+                  <a:srgbClr val="27A06A"/>
+                </a:solidFill>
+                <a:latin typeface="Segoe UI"/>
+                <a:ea typeface="Segoe UI"/>
+                <a:cs typeface="Segoe UI"/>
+              </a:rPr>
+              <a:t>MEASURING VALUE</a:t>
             </a:r>
           </a:p>
         </p:txBody>
@@ -7398,53 +7144,6 @@
       <p:sp>
         <p:nvSpPr>
           <p:cNvPr id="6" name="TextBox 5"/>
-          <p:cNvSpPr txBox="1"/>
-          <p:nvPr/>
-        </p:nvSpPr>
-        <p:spPr>
-          <a:xfrm>
-            <a:off x="713232" y="566928"/>
-            <a:ext cx="10765231" cy="219456"/>
-          </a:xfrm>
-          <a:prstGeom prst="rect">
-            <a:avLst/>
-          </a:prstGeom>
-          <a:noFill/>
-        </p:spPr>
-        <p:txBody>
-          <a:bodyPr wrap="square" lIns="0" rIns="0" tIns="0" bIns="0" anchor="t">
-            <a:spAutoFit/>
-          </a:bodyPr>
-          <a:lstStyle/>
-          <a:p>
-            <a:pPr algn="l">
-              <a:lnSpc>
-                <a:spcPct val="122000"/>
-              </a:lnSpc>
-              <a:spcBef>
-                <a:spcPts val="0"/>
-              </a:spcBef>
-              <a:spcAft>
-                <a:spcPts val="0"/>
-              </a:spcAft>
-            </a:pPr>
-            <a:r>
-              <a:rPr sz="950" b="1" i="0" spc="160">
-                <a:solidFill>
-                  <a:srgbClr val="27A06A"/>
-                </a:solidFill>
-                <a:latin typeface="Segoe UI"/>
-                <a:ea typeface="Segoe UI"/>
-                <a:cs typeface="Segoe UI"/>
-              </a:rPr>
-              <a:t>MEASURING VALUE</a:t>
-            </a:r>
-          </a:p>
-        </p:txBody>
-      </p:sp>
-      <p:sp>
-        <p:nvSpPr>
-          <p:cNvPr id="7" name="TextBox 6"/>
           <p:cNvSpPr txBox="1"/>
           <p:nvPr/>
         </p:nvSpPr>
@@ -7491,7 +7190,7 @@
       </p:sp>
       <p:sp>
         <p:nvSpPr>
-          <p:cNvPr id="8" name="Rectangle 7"/>
+          <p:cNvPr id="7" name="Rectangle 6"/>
           <p:cNvSpPr/>
           <p:nvPr/>
         </p:nvSpPr>
@@ -7535,7 +7234,7 @@
       </p:sp>
       <p:sp>
         <p:nvSpPr>
-          <p:cNvPr id="9" name="TextBox 8"/>
+          <p:cNvPr id="8" name="TextBox 7"/>
           <p:cNvSpPr txBox="1"/>
           <p:nvPr/>
         </p:nvSpPr>
@@ -7582,7 +7281,7 @@
       </p:sp>
       <p:sp>
         <p:nvSpPr>
-          <p:cNvPr id="10" name="Rounded Rectangle 9"/>
+          <p:cNvPr id="9" name="Rounded Rectangle 8"/>
           <p:cNvSpPr/>
           <p:nvPr/>
         </p:nvSpPr>
@@ -7636,7 +7335,7 @@
       </p:sp>
       <p:sp>
         <p:nvSpPr>
-          <p:cNvPr id="11" name="TextBox 10"/>
+          <p:cNvPr id="10" name="TextBox 9"/>
           <p:cNvSpPr txBox="1"/>
           <p:nvPr/>
         </p:nvSpPr>
@@ -7683,7 +7382,7 @@
       </p:sp>
       <p:sp>
         <p:nvSpPr>
-          <p:cNvPr id="12" name="Rectangle 11"/>
+          <p:cNvPr id="11" name="Rectangle 10"/>
           <p:cNvSpPr/>
           <p:nvPr/>
         </p:nvSpPr>
@@ -7727,7 +7426,7 @@
       </p:sp>
       <p:sp>
         <p:nvSpPr>
-          <p:cNvPr id="13" name="TextBox 12"/>
+          <p:cNvPr id="12" name="TextBox 11"/>
           <p:cNvSpPr txBox="1"/>
           <p:nvPr/>
         </p:nvSpPr>
@@ -7774,7 +7473,7 @@
       </p:sp>
       <p:sp>
         <p:nvSpPr>
-          <p:cNvPr id="14" name="TextBox 13"/>
+          <p:cNvPr id="13" name="TextBox 12"/>
           <p:cNvSpPr txBox="1"/>
           <p:nvPr/>
         </p:nvSpPr>
@@ -7821,7 +7520,7 @@
       </p:sp>
       <p:sp>
         <p:nvSpPr>
-          <p:cNvPr id="15" name="Rounded Rectangle 14"/>
+          <p:cNvPr id="14" name="Rounded Rectangle 13"/>
           <p:cNvSpPr/>
           <p:nvPr/>
         </p:nvSpPr>
@@ -7875,7 +7574,7 @@
       </p:sp>
       <p:sp>
         <p:nvSpPr>
-          <p:cNvPr id="16" name="TextBox 15"/>
+          <p:cNvPr id="15" name="TextBox 14"/>
           <p:cNvSpPr txBox="1"/>
           <p:nvPr/>
         </p:nvSpPr>
@@ -7922,7 +7621,7 @@
       </p:sp>
       <p:sp>
         <p:nvSpPr>
-          <p:cNvPr id="17" name="Rectangle 16"/>
+          <p:cNvPr id="16" name="Rectangle 15"/>
           <p:cNvSpPr/>
           <p:nvPr/>
         </p:nvSpPr>
@@ -7966,7 +7665,7 @@
       </p:sp>
       <p:sp>
         <p:nvSpPr>
-          <p:cNvPr id="18" name="TextBox 17"/>
+          <p:cNvPr id="17" name="TextBox 16"/>
           <p:cNvSpPr txBox="1"/>
           <p:nvPr/>
         </p:nvSpPr>
@@ -8013,7 +7712,7 @@
       </p:sp>
       <p:sp>
         <p:nvSpPr>
-          <p:cNvPr id="19" name="TextBox 18"/>
+          <p:cNvPr id="18" name="TextBox 17"/>
           <p:cNvSpPr txBox="1"/>
           <p:nvPr/>
         </p:nvSpPr>
@@ -8060,7 +7759,7 @@
       </p:sp>
       <p:sp>
         <p:nvSpPr>
-          <p:cNvPr id="20" name="Rounded Rectangle 19"/>
+          <p:cNvPr id="19" name="Rounded Rectangle 18"/>
           <p:cNvSpPr/>
           <p:nvPr/>
         </p:nvSpPr>
@@ -8114,7 +7813,7 @@
       </p:sp>
       <p:sp>
         <p:nvSpPr>
-          <p:cNvPr id="21" name="TextBox 20"/>
+          <p:cNvPr id="20" name="TextBox 19"/>
           <p:cNvSpPr txBox="1"/>
           <p:nvPr/>
         </p:nvSpPr>
@@ -8161,7 +7860,7 @@
       </p:sp>
       <p:sp>
         <p:nvSpPr>
-          <p:cNvPr id="22" name="Rectangle 21"/>
+          <p:cNvPr id="21" name="Rectangle 20"/>
           <p:cNvSpPr/>
           <p:nvPr/>
         </p:nvSpPr>
@@ -8205,7 +7904,7 @@
       </p:sp>
       <p:sp>
         <p:nvSpPr>
-          <p:cNvPr id="23" name="TextBox 22"/>
+          <p:cNvPr id="22" name="TextBox 21"/>
           <p:cNvSpPr txBox="1"/>
           <p:nvPr/>
         </p:nvSpPr>
@@ -8252,7 +7951,7 @@
       </p:sp>
       <p:sp>
         <p:nvSpPr>
-          <p:cNvPr id="24" name="TextBox 23"/>
+          <p:cNvPr id="23" name="TextBox 22"/>
           <p:cNvSpPr txBox="1"/>
           <p:nvPr/>
         </p:nvSpPr>
@@ -8299,7 +7998,7 @@
       </p:sp>
       <p:sp>
         <p:nvSpPr>
-          <p:cNvPr id="25" name="Rounded Rectangle 24"/>
+          <p:cNvPr id="24" name="Rounded Rectangle 23"/>
           <p:cNvSpPr/>
           <p:nvPr/>
         </p:nvSpPr>
@@ -8458,8 +8157,77 @@
         </p:nvSpPr>
         <p:spPr>
           <a:xfrm>
-            <a:off x="713232" y="6272784"/>
-            <a:ext cx="5597920" cy="219456"/>
+            <a:off x="8240677" y="6272784"/>
+            <a:ext cx="2651760" cy="219456"/>
+          </a:xfrm>
+          <a:prstGeom prst="rect">
+            <a:avLst/>
+          </a:prstGeom>
+          <a:noFill/>
+        </p:spPr>
+        <p:txBody>
+          <a:bodyPr wrap="square" lIns="0" rIns="0" tIns="0" bIns="0" anchor="t">
+            <a:spAutoFit/>
+          </a:bodyPr>
+          <a:lstStyle/>
+          <a:p>
+            <a:pPr algn="r">
+              <a:lnSpc>
+                <a:spcPct val="122000"/>
+              </a:lnSpc>
+              <a:spcBef>
+                <a:spcPts val="0"/>
+              </a:spcBef>
+              <a:spcAft>
+                <a:spcPts val="0"/>
+              </a:spcAft>
+            </a:pPr>
+            <a:r>
+              <a:rPr sz="900" b="0" i="0">
+                <a:solidFill>
+                  <a:srgbClr val="636E85"/>
+                </a:solidFill>
+                <a:latin typeface="Segoe UI"/>
+                <a:ea typeface="Segoe UI"/>
+                <a:cs typeface="Segoe UI"/>
+              </a:rPr>
+              <a:t>Lingesh K  ·  OSI2509030</a:t>
+            </a:r>
+            <a:r>
+              <a:rPr sz="900" b="0" i="0">
+                <a:solidFill>
+                  <a:srgbClr val="141C2E"/>
+                </a:solidFill>
+                <a:latin typeface="Segoe UI"/>
+                <a:ea typeface="Segoe UI"/>
+                <a:cs typeface="Segoe UI"/>
+              </a:rPr>
+              <a:t>     </a:t>
+            </a:r>
+            <a:r>
+              <a:rPr sz="900" b="1" i="0">
+                <a:solidFill>
+                  <a:srgbClr val="0E1E3C"/>
+                </a:solidFill>
+                <a:latin typeface="Segoe UI"/>
+                <a:ea typeface="Segoe UI"/>
+                <a:cs typeface="Segoe UI"/>
+              </a:rPr>
+              <a:t>13</a:t>
+            </a:r>
+          </a:p>
+        </p:txBody>
+      </p:sp>
+      <p:sp>
+        <p:nvSpPr>
+          <p:cNvPr id="5" name="TextBox 4"/>
+          <p:cNvSpPr txBox="1"/>
+          <p:nvPr/>
+        </p:nvSpPr>
+        <p:spPr>
+          <a:xfrm>
+            <a:off x="713232" y="566928"/>
+            <a:ext cx="10765231" cy="219456"/>
           </a:xfrm>
           <a:prstGeom prst="rect">
             <a:avLst/>
@@ -8484,106 +8252,15 @@
               </a:spcAft>
             </a:pPr>
             <a:r>
-              <a:rPr sz="900" b="1" i="0">
-                <a:solidFill>
-                  <a:srgbClr val="0E1E3C"/>
-                </a:solidFill>
-                <a:latin typeface="Segoe UI"/>
-                <a:ea typeface="Segoe UI"/>
-                <a:cs typeface="Segoe UI"/>
-              </a:rPr>
-              <a:t>Unit 5</a:t>
-            </a:r>
-            <a:r>
-              <a:rPr sz="900" b="0" i="0">
-                <a:solidFill>
-                  <a:srgbClr val="939EB3"/>
-                </a:solidFill>
-                <a:latin typeface="Segoe UI"/>
-                <a:ea typeface="Segoe UI"/>
-                <a:cs typeface="Segoe UI"/>
-              </a:rPr>
-              <a:t>  ·  </a:t>
-            </a:r>
-            <a:r>
-              <a:rPr sz="900" b="0" i="0">
-                <a:solidFill>
-                  <a:srgbClr val="636E85"/>
-                </a:solidFill>
-                <a:latin typeface="Segoe UI"/>
-                <a:ea typeface="Segoe UI"/>
-                <a:cs typeface="Segoe UI"/>
-              </a:rPr>
-              <a:t>Strategy, Innovation and Leadership</a:t>
-            </a:r>
-          </a:p>
-        </p:txBody>
-      </p:sp>
-      <p:sp>
-        <p:nvSpPr>
-          <p:cNvPr id="5" name="TextBox 4"/>
-          <p:cNvSpPr txBox="1"/>
-          <p:nvPr/>
-        </p:nvSpPr>
-        <p:spPr>
-          <a:xfrm>
-            <a:off x="8240677" y="6272784"/>
-            <a:ext cx="2651760" cy="219456"/>
-          </a:xfrm>
-          <a:prstGeom prst="rect">
-            <a:avLst/>
-          </a:prstGeom>
-          <a:noFill/>
-        </p:spPr>
-        <p:txBody>
-          <a:bodyPr wrap="square" lIns="0" rIns="0" tIns="0" bIns="0" anchor="t">
-            <a:spAutoFit/>
-          </a:bodyPr>
-          <a:lstStyle/>
-          <a:p>
-            <a:pPr algn="r">
-              <a:lnSpc>
-                <a:spcPct val="122000"/>
-              </a:lnSpc>
-              <a:spcBef>
-                <a:spcPts val="0"/>
-              </a:spcBef>
-              <a:spcAft>
-                <a:spcPts val="0"/>
-              </a:spcAft>
-            </a:pPr>
-            <a:r>
-              <a:rPr sz="900" b="0" i="0">
-                <a:solidFill>
-                  <a:srgbClr val="636E85"/>
-                </a:solidFill>
-                <a:latin typeface="Segoe UI"/>
-                <a:ea typeface="Segoe UI"/>
-                <a:cs typeface="Segoe UI"/>
-              </a:rPr>
-              <a:t>Lingesh K  ·  OSI2509030</a:t>
-            </a:r>
-            <a:r>
-              <a:rPr sz="900" b="0" i="0">
-                <a:solidFill>
-                  <a:srgbClr val="141C2E"/>
-                </a:solidFill>
-                <a:latin typeface="Segoe UI"/>
-                <a:ea typeface="Segoe UI"/>
-                <a:cs typeface="Segoe UI"/>
-              </a:rPr>
-              <a:t>     </a:t>
-            </a:r>
-            <a:r>
-              <a:rPr sz="900" b="1" i="0">
-                <a:solidFill>
-                  <a:srgbClr val="0E1E3C"/>
-                </a:solidFill>
-                <a:latin typeface="Segoe UI"/>
-                <a:ea typeface="Segoe UI"/>
-                <a:cs typeface="Segoe UI"/>
-              </a:rPr>
-              <a:t>13</a:t>
+              <a:rPr sz="950" b="1" i="0" spc="160">
+                <a:solidFill>
+                  <a:srgbClr val="E05151"/>
+                </a:solidFill>
+                <a:latin typeface="Segoe UI"/>
+                <a:ea typeface="Segoe UI"/>
+                <a:cs typeface="Segoe UI"/>
+              </a:rPr>
+              <a:t>WHY PROJECTS FAIL</a:t>
             </a:r>
           </a:p>
         </p:txBody>
@@ -8591,53 +8268,6 @@
       <p:sp>
         <p:nvSpPr>
           <p:cNvPr id="6" name="TextBox 5"/>
-          <p:cNvSpPr txBox="1"/>
-          <p:nvPr/>
-        </p:nvSpPr>
-        <p:spPr>
-          <a:xfrm>
-            <a:off x="713232" y="566928"/>
-            <a:ext cx="10765231" cy="219456"/>
-          </a:xfrm>
-          <a:prstGeom prst="rect">
-            <a:avLst/>
-          </a:prstGeom>
-          <a:noFill/>
-        </p:spPr>
-        <p:txBody>
-          <a:bodyPr wrap="square" lIns="0" rIns="0" tIns="0" bIns="0" anchor="t">
-            <a:spAutoFit/>
-          </a:bodyPr>
-          <a:lstStyle/>
-          <a:p>
-            <a:pPr algn="l">
-              <a:lnSpc>
-                <a:spcPct val="122000"/>
-              </a:lnSpc>
-              <a:spcBef>
-                <a:spcPts val="0"/>
-              </a:spcBef>
-              <a:spcAft>
-                <a:spcPts val="0"/>
-              </a:spcAft>
-            </a:pPr>
-            <a:r>
-              <a:rPr sz="950" b="1" i="0" spc="160">
-                <a:solidFill>
-                  <a:srgbClr val="E05151"/>
-                </a:solidFill>
-                <a:latin typeface="Segoe UI"/>
-                <a:ea typeface="Segoe UI"/>
-                <a:cs typeface="Segoe UI"/>
-              </a:rPr>
-              <a:t>WHY PROJECTS FAIL</a:t>
-            </a:r>
-          </a:p>
-        </p:txBody>
-      </p:sp>
-      <p:sp>
-        <p:nvSpPr>
-          <p:cNvPr id="7" name="TextBox 6"/>
           <p:cNvSpPr txBox="1"/>
           <p:nvPr/>
         </p:nvSpPr>
@@ -8684,7 +8314,7 @@
       </p:sp>
       <p:sp>
         <p:nvSpPr>
-          <p:cNvPr id="8" name="Rectangle 7"/>
+          <p:cNvPr id="7" name="Rectangle 6"/>
           <p:cNvSpPr/>
           <p:nvPr/>
         </p:nvSpPr>
@@ -8728,7 +8358,7 @@
       </p:sp>
       <p:sp>
         <p:nvSpPr>
-          <p:cNvPr id="9" name="TextBox 8"/>
+          <p:cNvPr id="8" name="TextBox 7"/>
           <p:cNvSpPr txBox="1"/>
           <p:nvPr/>
         </p:nvSpPr>
@@ -8775,7 +8405,7 @@
       </p:sp>
       <p:sp>
         <p:nvSpPr>
-          <p:cNvPr id="10" name="Rounded Rectangle 9"/>
+          <p:cNvPr id="9" name="Rounded Rectangle 8"/>
           <p:cNvSpPr/>
           <p:nvPr/>
         </p:nvSpPr>
@@ -8829,7 +8459,7 @@
       </p:sp>
       <p:sp>
         <p:nvSpPr>
-          <p:cNvPr id="11" name="Rectangle 10"/>
+          <p:cNvPr id="10" name="Rectangle 9"/>
           <p:cNvSpPr/>
           <p:nvPr/>
         </p:nvSpPr>
@@ -8873,7 +8503,7 @@
       </p:sp>
       <p:sp>
         <p:nvSpPr>
-          <p:cNvPr id="12" name="TextBox 11"/>
+          <p:cNvPr id="11" name="TextBox 10"/>
           <p:cNvSpPr txBox="1"/>
           <p:nvPr/>
         </p:nvSpPr>
@@ -8920,7 +8550,7 @@
       </p:sp>
       <p:sp>
         <p:nvSpPr>
-          <p:cNvPr id="13" name="Rounded Rectangle 12"/>
+          <p:cNvPr id="12" name="Rounded Rectangle 11"/>
           <p:cNvSpPr/>
           <p:nvPr/>
         </p:nvSpPr>
@@ -8966,7 +8596,7 @@
       </p:sp>
       <p:sp>
         <p:nvSpPr>
-          <p:cNvPr id="14" name="TextBox 13"/>
+          <p:cNvPr id="13" name="TextBox 12"/>
           <p:cNvSpPr txBox="1"/>
           <p:nvPr/>
         </p:nvSpPr>
@@ -9013,7 +8643,7 @@
       </p:sp>
       <p:sp>
         <p:nvSpPr>
-          <p:cNvPr id="15" name="Rounded Rectangle 14"/>
+          <p:cNvPr id="14" name="Rounded Rectangle 13"/>
           <p:cNvSpPr/>
           <p:nvPr/>
         </p:nvSpPr>
@@ -9059,7 +8689,7 @@
       </p:sp>
       <p:sp>
         <p:nvSpPr>
-          <p:cNvPr id="16" name="TextBox 15"/>
+          <p:cNvPr id="15" name="TextBox 14"/>
           <p:cNvSpPr txBox="1"/>
           <p:nvPr/>
         </p:nvSpPr>
@@ -9106,7 +8736,7 @@
       </p:sp>
       <p:sp>
         <p:nvSpPr>
-          <p:cNvPr id="17" name="Rounded Rectangle 16"/>
+          <p:cNvPr id="16" name="Rounded Rectangle 15"/>
           <p:cNvSpPr/>
           <p:nvPr/>
         </p:nvSpPr>
@@ -9160,7 +8790,7 @@
       </p:sp>
       <p:sp>
         <p:nvSpPr>
-          <p:cNvPr id="18" name="Rectangle 17"/>
+          <p:cNvPr id="17" name="Rectangle 16"/>
           <p:cNvSpPr/>
           <p:nvPr/>
         </p:nvSpPr>
@@ -9204,7 +8834,7 @@
       </p:sp>
       <p:sp>
         <p:nvSpPr>
-          <p:cNvPr id="19" name="TextBox 18"/>
+          <p:cNvPr id="18" name="TextBox 17"/>
           <p:cNvSpPr txBox="1"/>
           <p:nvPr/>
         </p:nvSpPr>
@@ -9251,7 +8881,7 @@
       </p:sp>
       <p:sp>
         <p:nvSpPr>
-          <p:cNvPr id="20" name="Rounded Rectangle 19"/>
+          <p:cNvPr id="19" name="Rounded Rectangle 18"/>
           <p:cNvSpPr/>
           <p:nvPr/>
         </p:nvSpPr>
@@ -9297,7 +8927,7 @@
       </p:sp>
       <p:sp>
         <p:nvSpPr>
-          <p:cNvPr id="21" name="TextBox 20"/>
+          <p:cNvPr id="20" name="TextBox 19"/>
           <p:cNvSpPr txBox="1"/>
           <p:nvPr/>
         </p:nvSpPr>
@@ -9344,7 +8974,7 @@
       </p:sp>
       <p:sp>
         <p:nvSpPr>
-          <p:cNvPr id="22" name="Rounded Rectangle 21"/>
+          <p:cNvPr id="21" name="Rounded Rectangle 20"/>
           <p:cNvSpPr/>
           <p:nvPr/>
         </p:nvSpPr>
@@ -9390,7 +9020,7 @@
       </p:sp>
       <p:sp>
         <p:nvSpPr>
-          <p:cNvPr id="23" name="TextBox 22"/>
+          <p:cNvPr id="22" name="TextBox 21"/>
           <p:cNvSpPr txBox="1"/>
           <p:nvPr/>
         </p:nvSpPr>
@@ -9437,7 +9067,7 @@
       </p:sp>
       <p:sp>
         <p:nvSpPr>
-          <p:cNvPr id="24" name="Rounded Rectangle 23"/>
+          <p:cNvPr id="23" name="Rounded Rectangle 22"/>
           <p:cNvSpPr/>
           <p:nvPr/>
         </p:nvSpPr>
@@ -9491,7 +9121,7 @@
       </p:sp>
       <p:sp>
         <p:nvSpPr>
-          <p:cNvPr id="25" name="Rectangle 24"/>
+          <p:cNvPr id="24" name="Rectangle 23"/>
           <p:cNvSpPr/>
           <p:nvPr/>
         </p:nvSpPr>
@@ -9535,7 +9165,7 @@
       </p:sp>
       <p:sp>
         <p:nvSpPr>
-          <p:cNvPr id="26" name="TextBox 25"/>
+          <p:cNvPr id="25" name="TextBox 24"/>
           <p:cNvSpPr txBox="1"/>
           <p:nvPr/>
         </p:nvSpPr>
@@ -9582,7 +9212,7 @@
       </p:sp>
       <p:sp>
         <p:nvSpPr>
-          <p:cNvPr id="27" name="Rounded Rectangle 26"/>
+          <p:cNvPr id="26" name="Rounded Rectangle 25"/>
           <p:cNvSpPr/>
           <p:nvPr/>
         </p:nvSpPr>
@@ -9628,7 +9258,7 @@
       </p:sp>
       <p:sp>
         <p:nvSpPr>
-          <p:cNvPr id="28" name="TextBox 27"/>
+          <p:cNvPr id="27" name="TextBox 26"/>
           <p:cNvSpPr txBox="1"/>
           <p:nvPr/>
         </p:nvSpPr>
@@ -9675,7 +9305,7 @@
       </p:sp>
       <p:sp>
         <p:nvSpPr>
-          <p:cNvPr id="29" name="Rounded Rectangle 28"/>
+          <p:cNvPr id="28" name="Rounded Rectangle 27"/>
           <p:cNvSpPr/>
           <p:nvPr/>
         </p:nvSpPr>
@@ -9721,7 +9351,7 @@
       </p:sp>
       <p:sp>
         <p:nvSpPr>
-          <p:cNvPr id="30" name="TextBox 29"/>
+          <p:cNvPr id="29" name="TextBox 28"/>
           <p:cNvSpPr txBox="1"/>
           <p:nvPr/>
         </p:nvSpPr>
@@ -9768,7 +9398,7 @@
       </p:sp>
       <p:sp>
         <p:nvSpPr>
-          <p:cNvPr id="31" name="Rounded Rectangle 30"/>
+          <p:cNvPr id="30" name="Rounded Rectangle 29"/>
           <p:cNvSpPr/>
           <p:nvPr/>
         </p:nvSpPr>
@@ -9822,7 +9452,7 @@
       </p:sp>
       <p:sp>
         <p:nvSpPr>
-          <p:cNvPr id="32" name="Rectangle 31"/>
+          <p:cNvPr id="31" name="Rectangle 30"/>
           <p:cNvSpPr/>
           <p:nvPr/>
         </p:nvSpPr>
@@ -9866,7 +9496,7 @@
       </p:sp>
       <p:sp>
         <p:nvSpPr>
-          <p:cNvPr id="33" name="TextBox 32"/>
+          <p:cNvPr id="32" name="TextBox 31"/>
           <p:cNvSpPr txBox="1"/>
           <p:nvPr/>
         </p:nvSpPr>
@@ -9913,7 +9543,7 @@
       </p:sp>
       <p:sp>
         <p:nvSpPr>
-          <p:cNvPr id="34" name="Rounded Rectangle 33"/>
+          <p:cNvPr id="33" name="Rounded Rectangle 32"/>
           <p:cNvSpPr/>
           <p:nvPr/>
         </p:nvSpPr>
@@ -9959,7 +9589,7 @@
       </p:sp>
       <p:sp>
         <p:nvSpPr>
-          <p:cNvPr id="35" name="TextBox 34"/>
+          <p:cNvPr id="34" name="TextBox 33"/>
           <p:cNvSpPr txBox="1"/>
           <p:nvPr/>
         </p:nvSpPr>
@@ -10006,7 +9636,7 @@
       </p:sp>
       <p:sp>
         <p:nvSpPr>
-          <p:cNvPr id="36" name="Rounded Rectangle 35"/>
+          <p:cNvPr id="35" name="Rounded Rectangle 34"/>
           <p:cNvSpPr/>
           <p:nvPr/>
         </p:nvSpPr>
@@ -10052,7 +9682,7 @@
       </p:sp>
       <p:sp>
         <p:nvSpPr>
-          <p:cNvPr id="37" name="TextBox 36"/>
+          <p:cNvPr id="36" name="TextBox 35"/>
           <p:cNvSpPr txBox="1"/>
           <p:nvPr/>
         </p:nvSpPr>
@@ -10490,54 +10120,7 @@
       </p:sp>
       <p:sp>
         <p:nvSpPr>
-          <p:cNvPr id="10" name="TextBox 9"/>
-          <p:cNvSpPr txBox="1"/>
-          <p:nvPr/>
-        </p:nvSpPr>
-        <p:spPr>
-          <a:xfrm>
-            <a:off x="987552" y="5943600"/>
-            <a:ext cx="6400800" cy="274320"/>
-          </a:xfrm>
-          <a:prstGeom prst="rect">
-            <a:avLst/>
-          </a:prstGeom>
-          <a:noFill/>
-        </p:spPr>
-        <p:txBody>
-          <a:bodyPr wrap="square" lIns="0" rIns="0" tIns="0" bIns="0" anchor="t">
-            <a:spAutoFit/>
-          </a:bodyPr>
-          <a:lstStyle/>
-          <a:p>
-            <a:pPr algn="l">
-              <a:lnSpc>
-                <a:spcPct val="122000"/>
-              </a:lnSpc>
-              <a:spcBef>
-                <a:spcPts val="0"/>
-              </a:spcBef>
-              <a:spcAft>
-                <a:spcPts val="0"/>
-              </a:spcAft>
-            </a:pPr>
-            <a:r>
-              <a:rPr sz="900" b="1" i="0" spc="160">
-                <a:solidFill>
-                  <a:srgbClr val="6B7FA6"/>
-                </a:solidFill>
-                <a:latin typeface="Segoe UI"/>
-                <a:ea typeface="Segoe UI"/>
-                <a:cs typeface="Segoe UI"/>
-              </a:rPr>
-              <a:t>UNIT 5  ·  STRATEGY, INNOVATION AND LEADERSHIP</a:t>
-            </a:r>
-          </a:p>
-        </p:txBody>
-      </p:sp>
-      <p:sp>
-        <p:nvSpPr>
-          <p:cNvPr id="11" name="logo-plate"/>
+          <p:cNvPr id="10" name="logo-plate"/>
           <p:cNvSpPr/>
           <p:nvPr/>
         </p:nvSpPr>
@@ -10583,7 +10166,7 @@
       </p:sp>
       <p:pic>
         <p:nvPicPr>
-          <p:cNvPr id="12" name="college-logo" descr="logo-full.png"/>
+          <p:cNvPr id="11" name="college-logo" descr="logo-full.png"/>
           <p:cNvPicPr>
             <a:picLocks noChangeAspect="1"/>
           </p:cNvPicPr>
@@ -10699,8 +10282,77 @@
         </p:nvSpPr>
         <p:spPr>
           <a:xfrm>
-            <a:off x="713232" y="6272784"/>
-            <a:ext cx="5597920" cy="219456"/>
+            <a:off x="8240677" y="6272784"/>
+            <a:ext cx="2651760" cy="219456"/>
+          </a:xfrm>
+          <a:prstGeom prst="rect">
+            <a:avLst/>
+          </a:prstGeom>
+          <a:noFill/>
+        </p:spPr>
+        <p:txBody>
+          <a:bodyPr wrap="square" lIns="0" rIns="0" tIns="0" bIns="0" anchor="t">
+            <a:spAutoFit/>
+          </a:bodyPr>
+          <a:lstStyle/>
+          <a:p>
+            <a:pPr algn="r">
+              <a:lnSpc>
+                <a:spcPct val="122000"/>
+              </a:lnSpc>
+              <a:spcBef>
+                <a:spcPts val="0"/>
+              </a:spcBef>
+              <a:spcAft>
+                <a:spcPts val="0"/>
+              </a:spcAft>
+            </a:pPr>
+            <a:r>
+              <a:rPr sz="900" b="0" i="0">
+                <a:solidFill>
+                  <a:srgbClr val="636E85"/>
+                </a:solidFill>
+                <a:latin typeface="Segoe UI"/>
+                <a:ea typeface="Segoe UI"/>
+                <a:cs typeface="Segoe UI"/>
+              </a:rPr>
+              <a:t>Lingesh K  ·  OSI2509030</a:t>
+            </a:r>
+            <a:r>
+              <a:rPr sz="900" b="0" i="0">
+                <a:solidFill>
+                  <a:srgbClr val="141C2E"/>
+                </a:solidFill>
+                <a:latin typeface="Segoe UI"/>
+                <a:ea typeface="Segoe UI"/>
+                <a:cs typeface="Segoe UI"/>
+              </a:rPr>
+              <a:t>     </a:t>
+            </a:r>
+            <a:r>
+              <a:rPr sz="900" b="1" i="0">
+                <a:solidFill>
+                  <a:srgbClr val="0E1E3C"/>
+                </a:solidFill>
+                <a:latin typeface="Segoe UI"/>
+                <a:ea typeface="Segoe UI"/>
+                <a:cs typeface="Segoe UI"/>
+              </a:rPr>
+              <a:t>15</a:t>
+            </a:r>
+          </a:p>
+        </p:txBody>
+      </p:sp>
+      <p:sp>
+        <p:nvSpPr>
+          <p:cNvPr id="5" name="TextBox 4"/>
+          <p:cNvSpPr txBox="1"/>
+          <p:nvPr/>
+        </p:nvSpPr>
+        <p:spPr>
+          <a:xfrm>
+            <a:off x="713232" y="566928"/>
+            <a:ext cx="10765231" cy="219456"/>
           </a:xfrm>
           <a:prstGeom prst="rect">
             <a:avLst/>
@@ -10725,106 +10377,15 @@
               </a:spcAft>
             </a:pPr>
             <a:r>
-              <a:rPr sz="900" b="1" i="0">
-                <a:solidFill>
-                  <a:srgbClr val="0E1E3C"/>
-                </a:solidFill>
-                <a:latin typeface="Segoe UI"/>
-                <a:ea typeface="Segoe UI"/>
-                <a:cs typeface="Segoe UI"/>
-              </a:rPr>
-              <a:t>Unit 5</a:t>
-            </a:r>
-            <a:r>
-              <a:rPr sz="900" b="0" i="0">
-                <a:solidFill>
-                  <a:srgbClr val="939EB3"/>
-                </a:solidFill>
-                <a:latin typeface="Segoe UI"/>
-                <a:ea typeface="Segoe UI"/>
-                <a:cs typeface="Segoe UI"/>
-              </a:rPr>
-              <a:t>  ·  </a:t>
-            </a:r>
-            <a:r>
-              <a:rPr sz="900" b="0" i="0">
-                <a:solidFill>
-                  <a:srgbClr val="636E85"/>
-                </a:solidFill>
-                <a:latin typeface="Segoe UI"/>
-                <a:ea typeface="Segoe UI"/>
-                <a:cs typeface="Segoe UI"/>
-              </a:rPr>
-              <a:t>Strategy, Innovation and Leadership</a:t>
-            </a:r>
-          </a:p>
-        </p:txBody>
-      </p:sp>
-      <p:sp>
-        <p:nvSpPr>
-          <p:cNvPr id="5" name="TextBox 4"/>
-          <p:cNvSpPr txBox="1"/>
-          <p:nvPr/>
-        </p:nvSpPr>
-        <p:spPr>
-          <a:xfrm>
-            <a:off x="8240677" y="6272784"/>
-            <a:ext cx="2651760" cy="219456"/>
-          </a:xfrm>
-          <a:prstGeom prst="rect">
-            <a:avLst/>
-          </a:prstGeom>
-          <a:noFill/>
-        </p:spPr>
-        <p:txBody>
-          <a:bodyPr wrap="square" lIns="0" rIns="0" tIns="0" bIns="0" anchor="t">
-            <a:spAutoFit/>
-          </a:bodyPr>
-          <a:lstStyle/>
-          <a:p>
-            <a:pPr algn="r">
-              <a:lnSpc>
-                <a:spcPct val="122000"/>
-              </a:lnSpc>
-              <a:spcBef>
-                <a:spcPts val="0"/>
-              </a:spcBef>
-              <a:spcAft>
-                <a:spcPts val="0"/>
-              </a:spcAft>
-            </a:pPr>
-            <a:r>
-              <a:rPr sz="900" b="0" i="0">
-                <a:solidFill>
-                  <a:srgbClr val="636E85"/>
-                </a:solidFill>
-                <a:latin typeface="Segoe UI"/>
-                <a:ea typeface="Segoe UI"/>
-                <a:cs typeface="Segoe UI"/>
-              </a:rPr>
-              <a:t>Lingesh K  ·  OSI2509030</a:t>
-            </a:r>
-            <a:r>
-              <a:rPr sz="900" b="0" i="0">
-                <a:solidFill>
-                  <a:srgbClr val="141C2E"/>
-                </a:solidFill>
-                <a:latin typeface="Segoe UI"/>
-                <a:ea typeface="Segoe UI"/>
-                <a:cs typeface="Segoe UI"/>
-              </a:rPr>
-              <a:t>     </a:t>
-            </a:r>
-            <a:r>
-              <a:rPr sz="900" b="1" i="0">
-                <a:solidFill>
-                  <a:srgbClr val="0E1E3C"/>
-                </a:solidFill>
-                <a:latin typeface="Segoe UI"/>
-                <a:ea typeface="Segoe UI"/>
-                <a:cs typeface="Segoe UI"/>
-              </a:rPr>
-              <a:t>15</a:t>
+              <a:rPr sz="950" b="1" i="0" spc="160">
+                <a:solidFill>
+                  <a:srgbClr val="F5A623"/>
+                </a:solidFill>
+                <a:latin typeface="Segoe UI"/>
+                <a:ea typeface="Segoe UI"/>
+                <a:cs typeface="Segoe UI"/>
+              </a:rPr>
+              <a:t>LEADING THE CHANGE</a:t>
             </a:r>
           </a:p>
         </p:txBody>
@@ -10832,53 +10393,6 @@
       <p:sp>
         <p:nvSpPr>
           <p:cNvPr id="6" name="TextBox 5"/>
-          <p:cNvSpPr txBox="1"/>
-          <p:nvPr/>
-        </p:nvSpPr>
-        <p:spPr>
-          <a:xfrm>
-            <a:off x="713232" y="566928"/>
-            <a:ext cx="10765231" cy="219456"/>
-          </a:xfrm>
-          <a:prstGeom prst="rect">
-            <a:avLst/>
-          </a:prstGeom>
-          <a:noFill/>
-        </p:spPr>
-        <p:txBody>
-          <a:bodyPr wrap="square" lIns="0" rIns="0" tIns="0" bIns="0" anchor="t">
-            <a:spAutoFit/>
-          </a:bodyPr>
-          <a:lstStyle/>
-          <a:p>
-            <a:pPr algn="l">
-              <a:lnSpc>
-                <a:spcPct val="122000"/>
-              </a:lnSpc>
-              <a:spcBef>
-                <a:spcPts val="0"/>
-              </a:spcBef>
-              <a:spcAft>
-                <a:spcPts val="0"/>
-              </a:spcAft>
-            </a:pPr>
-            <a:r>
-              <a:rPr sz="950" b="1" i="0" spc="160">
-                <a:solidFill>
-                  <a:srgbClr val="F5A623"/>
-                </a:solidFill>
-                <a:latin typeface="Segoe UI"/>
-                <a:ea typeface="Segoe UI"/>
-                <a:cs typeface="Segoe UI"/>
-              </a:rPr>
-              <a:t>LEADING THE CHANGE</a:t>
-            </a:r>
-          </a:p>
-        </p:txBody>
-      </p:sp>
-      <p:sp>
-        <p:nvSpPr>
-          <p:cNvPr id="7" name="TextBox 6"/>
           <p:cNvSpPr txBox="1"/>
           <p:nvPr/>
         </p:nvSpPr>
@@ -10925,7 +10439,7 @@
       </p:sp>
       <p:sp>
         <p:nvSpPr>
-          <p:cNvPr id="8" name="Rectangle 7"/>
+          <p:cNvPr id="7" name="Rectangle 6"/>
           <p:cNvSpPr/>
           <p:nvPr/>
         </p:nvSpPr>
@@ -10969,7 +10483,7 @@
       </p:sp>
       <p:sp>
         <p:nvSpPr>
-          <p:cNvPr id="9" name="TextBox 8"/>
+          <p:cNvPr id="8" name="TextBox 7"/>
           <p:cNvSpPr txBox="1"/>
           <p:nvPr/>
         </p:nvSpPr>
@@ -11016,7 +10530,7 @@
       </p:sp>
       <p:sp>
         <p:nvSpPr>
-          <p:cNvPr id="10" name="Rounded Rectangle 9"/>
+          <p:cNvPr id="9" name="Rounded Rectangle 8"/>
           <p:cNvSpPr/>
           <p:nvPr/>
         </p:nvSpPr>
@@ -11070,7 +10584,7 @@
       </p:sp>
       <p:sp>
         <p:nvSpPr>
-          <p:cNvPr id="11" name="Rectangle 10"/>
+          <p:cNvPr id="10" name="Rectangle 9"/>
           <p:cNvSpPr/>
           <p:nvPr/>
         </p:nvSpPr>
@@ -11114,7 +10628,7 @@
       </p:sp>
       <p:sp>
         <p:nvSpPr>
-          <p:cNvPr id="12" name="TextBox 11"/>
+          <p:cNvPr id="11" name="TextBox 10"/>
           <p:cNvSpPr txBox="1"/>
           <p:nvPr/>
         </p:nvSpPr>
@@ -11161,7 +10675,7 @@
       </p:sp>
       <p:sp>
         <p:nvSpPr>
-          <p:cNvPr id="13" name="TextBox 12"/>
+          <p:cNvPr id="12" name="TextBox 11"/>
           <p:cNvSpPr txBox="1"/>
           <p:nvPr/>
         </p:nvSpPr>
@@ -11208,7 +10722,7 @@
       </p:sp>
       <p:sp>
         <p:nvSpPr>
-          <p:cNvPr id="14" name="Rounded Rectangle 13"/>
+          <p:cNvPr id="13" name="Rounded Rectangle 12"/>
           <p:cNvSpPr/>
           <p:nvPr/>
         </p:nvSpPr>
@@ -11262,7 +10776,7 @@
       </p:sp>
       <p:sp>
         <p:nvSpPr>
-          <p:cNvPr id="15" name="Rectangle 14"/>
+          <p:cNvPr id="14" name="Rectangle 13"/>
           <p:cNvSpPr/>
           <p:nvPr/>
         </p:nvSpPr>
@@ -11306,7 +10820,7 @@
       </p:sp>
       <p:sp>
         <p:nvSpPr>
-          <p:cNvPr id="16" name="TextBox 15"/>
+          <p:cNvPr id="15" name="TextBox 14"/>
           <p:cNvSpPr txBox="1"/>
           <p:nvPr/>
         </p:nvSpPr>
@@ -11353,7 +10867,7 @@
       </p:sp>
       <p:sp>
         <p:nvSpPr>
-          <p:cNvPr id="17" name="TextBox 16"/>
+          <p:cNvPr id="16" name="TextBox 15"/>
           <p:cNvSpPr txBox="1"/>
           <p:nvPr/>
         </p:nvSpPr>
@@ -11400,7 +10914,7 @@
       </p:sp>
       <p:sp>
         <p:nvSpPr>
-          <p:cNvPr id="18" name="Rounded Rectangle 17"/>
+          <p:cNvPr id="17" name="Rounded Rectangle 16"/>
           <p:cNvSpPr/>
           <p:nvPr/>
         </p:nvSpPr>
@@ -11454,7 +10968,7 @@
       </p:sp>
       <p:sp>
         <p:nvSpPr>
-          <p:cNvPr id="19" name="Rectangle 18"/>
+          <p:cNvPr id="18" name="Rectangle 17"/>
           <p:cNvSpPr/>
           <p:nvPr/>
         </p:nvSpPr>
@@ -11498,7 +11012,7 @@
       </p:sp>
       <p:sp>
         <p:nvSpPr>
-          <p:cNvPr id="20" name="TextBox 19"/>
+          <p:cNvPr id="19" name="TextBox 18"/>
           <p:cNvSpPr txBox="1"/>
           <p:nvPr/>
         </p:nvSpPr>
@@ -11545,7 +11059,7 @@
       </p:sp>
       <p:sp>
         <p:nvSpPr>
-          <p:cNvPr id="21" name="TextBox 20"/>
+          <p:cNvPr id="20" name="TextBox 19"/>
           <p:cNvSpPr txBox="1"/>
           <p:nvPr/>
         </p:nvSpPr>
@@ -11592,7 +11106,7 @@
       </p:sp>
       <p:sp>
         <p:nvSpPr>
-          <p:cNvPr id="22" name="Rounded Rectangle 21"/>
+          <p:cNvPr id="21" name="Rounded Rectangle 20"/>
           <p:cNvSpPr/>
           <p:nvPr/>
         </p:nvSpPr>
@@ -11646,7 +11160,7 @@
       </p:sp>
       <p:sp>
         <p:nvSpPr>
-          <p:cNvPr id="23" name="Rectangle 22"/>
+          <p:cNvPr id="22" name="Rectangle 21"/>
           <p:cNvSpPr/>
           <p:nvPr/>
         </p:nvSpPr>
@@ -11690,7 +11204,7 @@
       </p:sp>
       <p:sp>
         <p:nvSpPr>
-          <p:cNvPr id="24" name="TextBox 23"/>
+          <p:cNvPr id="23" name="TextBox 22"/>
           <p:cNvSpPr txBox="1"/>
           <p:nvPr/>
         </p:nvSpPr>
@@ -11737,7 +11251,7 @@
       </p:sp>
       <p:sp>
         <p:nvSpPr>
-          <p:cNvPr id="25" name="TextBox 24"/>
+          <p:cNvPr id="24" name="TextBox 23"/>
           <p:cNvSpPr txBox="1"/>
           <p:nvPr/>
         </p:nvSpPr>
@@ -11784,7 +11298,7 @@
       </p:sp>
       <p:sp>
         <p:nvSpPr>
-          <p:cNvPr id="26" name="Rounded Rectangle 25"/>
+          <p:cNvPr id="25" name="Rounded Rectangle 24"/>
           <p:cNvSpPr/>
           <p:nvPr/>
         </p:nvSpPr>
@@ -11838,7 +11352,7 @@
       </p:sp>
       <p:sp>
         <p:nvSpPr>
-          <p:cNvPr id="27" name="Rectangle 26"/>
+          <p:cNvPr id="26" name="Rectangle 25"/>
           <p:cNvSpPr/>
           <p:nvPr/>
         </p:nvSpPr>
@@ -11882,7 +11396,7 @@
       </p:sp>
       <p:sp>
         <p:nvSpPr>
-          <p:cNvPr id="28" name="TextBox 27"/>
+          <p:cNvPr id="27" name="TextBox 26"/>
           <p:cNvSpPr txBox="1"/>
           <p:nvPr/>
         </p:nvSpPr>
@@ -11929,7 +11443,7 @@
       </p:sp>
       <p:sp>
         <p:nvSpPr>
-          <p:cNvPr id="29" name="TextBox 28"/>
+          <p:cNvPr id="28" name="TextBox 27"/>
           <p:cNvSpPr txBox="1"/>
           <p:nvPr/>
         </p:nvSpPr>
@@ -11976,7 +11490,7 @@
       </p:sp>
       <p:sp>
         <p:nvSpPr>
-          <p:cNvPr id="30" name="Rounded Rectangle 29"/>
+          <p:cNvPr id="29" name="Rounded Rectangle 28"/>
           <p:cNvSpPr/>
           <p:nvPr/>
         </p:nvSpPr>
@@ -12030,7 +11544,7 @@
       </p:sp>
       <p:sp>
         <p:nvSpPr>
-          <p:cNvPr id="31" name="Rectangle 30"/>
+          <p:cNvPr id="30" name="Rectangle 29"/>
           <p:cNvSpPr/>
           <p:nvPr/>
         </p:nvSpPr>
@@ -12074,7 +11588,7 @@
       </p:sp>
       <p:sp>
         <p:nvSpPr>
-          <p:cNvPr id="32" name="TextBox 31"/>
+          <p:cNvPr id="31" name="TextBox 30"/>
           <p:cNvSpPr txBox="1"/>
           <p:nvPr/>
         </p:nvSpPr>
@@ -12121,7 +11635,7 @@
       </p:sp>
       <p:sp>
         <p:nvSpPr>
-          <p:cNvPr id="33" name="TextBox 32"/>
+          <p:cNvPr id="32" name="TextBox 31"/>
           <p:cNvSpPr txBox="1"/>
           <p:nvPr/>
         </p:nvSpPr>
@@ -12559,54 +12073,7 @@
       </p:sp>
       <p:sp>
         <p:nvSpPr>
-          <p:cNvPr id="10" name="TextBox 9"/>
-          <p:cNvSpPr txBox="1"/>
-          <p:nvPr/>
-        </p:nvSpPr>
-        <p:spPr>
-          <a:xfrm>
-            <a:off x="987552" y="5943600"/>
-            <a:ext cx="6400800" cy="274320"/>
-          </a:xfrm>
-          <a:prstGeom prst="rect">
-            <a:avLst/>
-          </a:prstGeom>
-          <a:noFill/>
-        </p:spPr>
-        <p:txBody>
-          <a:bodyPr wrap="square" lIns="0" rIns="0" tIns="0" bIns="0" anchor="t">
-            <a:spAutoFit/>
-          </a:bodyPr>
-          <a:lstStyle/>
-          <a:p>
-            <a:pPr algn="l">
-              <a:lnSpc>
-                <a:spcPct val="122000"/>
-              </a:lnSpc>
-              <a:spcBef>
-                <a:spcPts val="0"/>
-              </a:spcBef>
-              <a:spcAft>
-                <a:spcPts val="0"/>
-              </a:spcAft>
-            </a:pPr>
-            <a:r>
-              <a:rPr sz="900" b="1" i="0" spc="160">
-                <a:solidFill>
-                  <a:srgbClr val="6B7FA6"/>
-                </a:solidFill>
-                <a:latin typeface="Segoe UI"/>
-                <a:ea typeface="Segoe UI"/>
-                <a:cs typeface="Segoe UI"/>
-              </a:rPr>
-              <a:t>UNIT 5  ·  STRATEGY, INNOVATION AND LEADERSHIP</a:t>
-            </a:r>
-          </a:p>
-        </p:txBody>
-      </p:sp>
-      <p:sp>
-        <p:nvSpPr>
-          <p:cNvPr id="11" name="logo-plate"/>
+          <p:cNvPr id="10" name="logo-plate"/>
           <p:cNvSpPr/>
           <p:nvPr/>
         </p:nvSpPr>
@@ -12652,7 +12119,7 @@
       </p:sp>
       <p:pic>
         <p:nvPicPr>
-          <p:cNvPr id="12" name="college-logo" descr="logo-full.png"/>
+          <p:cNvPr id="11" name="college-logo" descr="logo-full.png"/>
           <p:cNvPicPr>
             <a:picLocks noChangeAspect="1"/>
           </p:cNvPicPr>
@@ -12768,8 +12235,77 @@
         </p:nvSpPr>
         <p:spPr>
           <a:xfrm>
-            <a:off x="713232" y="6272784"/>
-            <a:ext cx="5597920" cy="219456"/>
+            <a:off x="8240677" y="6272784"/>
+            <a:ext cx="2651760" cy="219456"/>
+          </a:xfrm>
+          <a:prstGeom prst="rect">
+            <a:avLst/>
+          </a:prstGeom>
+          <a:noFill/>
+        </p:spPr>
+        <p:txBody>
+          <a:bodyPr wrap="square" lIns="0" rIns="0" tIns="0" bIns="0" anchor="t">
+            <a:spAutoFit/>
+          </a:bodyPr>
+          <a:lstStyle/>
+          <a:p>
+            <a:pPr algn="r">
+              <a:lnSpc>
+                <a:spcPct val="122000"/>
+              </a:lnSpc>
+              <a:spcBef>
+                <a:spcPts val="0"/>
+              </a:spcBef>
+              <a:spcAft>
+                <a:spcPts val="0"/>
+              </a:spcAft>
+            </a:pPr>
+            <a:r>
+              <a:rPr sz="900" b="0" i="0">
+                <a:solidFill>
+                  <a:srgbClr val="636E85"/>
+                </a:solidFill>
+                <a:latin typeface="Segoe UI"/>
+                <a:ea typeface="Segoe UI"/>
+                <a:cs typeface="Segoe UI"/>
+              </a:rPr>
+              <a:t>Lingesh K  ·  OSI2509030</a:t>
+            </a:r>
+            <a:r>
+              <a:rPr sz="900" b="0" i="0">
+                <a:solidFill>
+                  <a:srgbClr val="141C2E"/>
+                </a:solidFill>
+                <a:latin typeface="Segoe UI"/>
+                <a:ea typeface="Segoe UI"/>
+                <a:cs typeface="Segoe UI"/>
+              </a:rPr>
+              <a:t>     </a:t>
+            </a:r>
+            <a:r>
+              <a:rPr sz="900" b="1" i="0">
+                <a:solidFill>
+                  <a:srgbClr val="0E1E3C"/>
+                </a:solidFill>
+                <a:latin typeface="Segoe UI"/>
+                <a:ea typeface="Segoe UI"/>
+                <a:cs typeface="Segoe UI"/>
+              </a:rPr>
+              <a:t>17</a:t>
+            </a:r>
+          </a:p>
+        </p:txBody>
+      </p:sp>
+      <p:sp>
+        <p:nvSpPr>
+          <p:cNvPr id="5" name="TextBox 4"/>
+          <p:cNvSpPr txBox="1"/>
+          <p:nvPr/>
+        </p:nvSpPr>
+        <p:spPr>
+          <a:xfrm>
+            <a:off x="713232" y="566928"/>
+            <a:ext cx="10765231" cy="219456"/>
           </a:xfrm>
           <a:prstGeom prst="rect">
             <a:avLst/>
@@ -12794,106 +12330,15 @@
               </a:spcAft>
             </a:pPr>
             <a:r>
-              <a:rPr sz="900" b="1" i="0">
-                <a:solidFill>
-                  <a:srgbClr val="0E1E3C"/>
-                </a:solidFill>
-                <a:latin typeface="Segoe UI"/>
-                <a:ea typeface="Segoe UI"/>
-                <a:cs typeface="Segoe UI"/>
-              </a:rPr>
-              <a:t>Unit 5</a:t>
-            </a:r>
-            <a:r>
-              <a:rPr sz="900" b="0" i="0">
-                <a:solidFill>
-                  <a:srgbClr val="939EB3"/>
-                </a:solidFill>
-                <a:latin typeface="Segoe UI"/>
-                <a:ea typeface="Segoe UI"/>
-                <a:cs typeface="Segoe UI"/>
-              </a:rPr>
-              <a:t>  ·  </a:t>
-            </a:r>
-            <a:r>
-              <a:rPr sz="900" b="0" i="0">
-                <a:solidFill>
-                  <a:srgbClr val="636E85"/>
-                </a:solidFill>
-                <a:latin typeface="Segoe UI"/>
-                <a:ea typeface="Segoe UI"/>
-                <a:cs typeface="Segoe UI"/>
-              </a:rPr>
-              <a:t>Strategy, Innovation and Leadership</a:t>
-            </a:r>
-          </a:p>
-        </p:txBody>
-      </p:sp>
-      <p:sp>
-        <p:nvSpPr>
-          <p:cNvPr id="5" name="TextBox 4"/>
-          <p:cNvSpPr txBox="1"/>
-          <p:nvPr/>
-        </p:nvSpPr>
-        <p:spPr>
-          <a:xfrm>
-            <a:off x="8240677" y="6272784"/>
-            <a:ext cx="2651760" cy="219456"/>
-          </a:xfrm>
-          <a:prstGeom prst="rect">
-            <a:avLst/>
-          </a:prstGeom>
-          <a:noFill/>
-        </p:spPr>
-        <p:txBody>
-          <a:bodyPr wrap="square" lIns="0" rIns="0" tIns="0" bIns="0" anchor="t">
-            <a:spAutoFit/>
-          </a:bodyPr>
-          <a:lstStyle/>
-          <a:p>
-            <a:pPr algn="r">
-              <a:lnSpc>
-                <a:spcPct val="122000"/>
-              </a:lnSpc>
-              <a:spcBef>
-                <a:spcPts val="0"/>
-              </a:spcBef>
-              <a:spcAft>
-                <a:spcPts val="0"/>
-              </a:spcAft>
-            </a:pPr>
-            <a:r>
-              <a:rPr sz="900" b="0" i="0">
-                <a:solidFill>
-                  <a:srgbClr val="636E85"/>
-                </a:solidFill>
-                <a:latin typeface="Segoe UI"/>
-                <a:ea typeface="Segoe UI"/>
-                <a:cs typeface="Segoe UI"/>
-              </a:rPr>
-              <a:t>Lingesh K  ·  OSI2509030</a:t>
-            </a:r>
-            <a:r>
-              <a:rPr sz="900" b="0" i="0">
-                <a:solidFill>
-                  <a:srgbClr val="141C2E"/>
-                </a:solidFill>
-                <a:latin typeface="Segoe UI"/>
-                <a:ea typeface="Segoe UI"/>
-                <a:cs typeface="Segoe UI"/>
-              </a:rPr>
-              <a:t>     </a:t>
-            </a:r>
-            <a:r>
-              <a:rPr sz="900" b="1" i="0">
-                <a:solidFill>
-                  <a:srgbClr val="0E1E3C"/>
-                </a:solidFill>
-                <a:latin typeface="Segoe UI"/>
-                <a:ea typeface="Segoe UI"/>
-                <a:cs typeface="Segoe UI"/>
-              </a:rPr>
-              <a:t>17</a:t>
+              <a:rPr sz="950" b="1" i="0" spc="160">
+                <a:solidFill>
+                  <a:srgbClr val="745CE0"/>
+                </a:solidFill>
+                <a:latin typeface="Segoe UI"/>
+                <a:ea typeface="Segoe UI"/>
+                <a:cs typeface="Segoe UI"/>
+              </a:rPr>
+              <a:t>THE MATURITY LADDER</a:t>
             </a:r>
           </a:p>
         </p:txBody>
@@ -12901,53 +12346,6 @@
       <p:sp>
         <p:nvSpPr>
           <p:cNvPr id="6" name="TextBox 5"/>
-          <p:cNvSpPr txBox="1"/>
-          <p:nvPr/>
-        </p:nvSpPr>
-        <p:spPr>
-          <a:xfrm>
-            <a:off x="713232" y="566928"/>
-            <a:ext cx="10765231" cy="219456"/>
-          </a:xfrm>
-          <a:prstGeom prst="rect">
-            <a:avLst/>
-          </a:prstGeom>
-          <a:noFill/>
-        </p:spPr>
-        <p:txBody>
-          <a:bodyPr wrap="square" lIns="0" rIns="0" tIns="0" bIns="0" anchor="t">
-            <a:spAutoFit/>
-          </a:bodyPr>
-          <a:lstStyle/>
-          <a:p>
-            <a:pPr algn="l">
-              <a:lnSpc>
-                <a:spcPct val="122000"/>
-              </a:lnSpc>
-              <a:spcBef>
-                <a:spcPts val="0"/>
-              </a:spcBef>
-              <a:spcAft>
-                <a:spcPts val="0"/>
-              </a:spcAft>
-            </a:pPr>
-            <a:r>
-              <a:rPr sz="950" b="1" i="0" spc="160">
-                <a:solidFill>
-                  <a:srgbClr val="745CE0"/>
-                </a:solidFill>
-                <a:latin typeface="Segoe UI"/>
-                <a:ea typeface="Segoe UI"/>
-                <a:cs typeface="Segoe UI"/>
-              </a:rPr>
-              <a:t>THE MATURITY LADDER</a:t>
-            </a:r>
-          </a:p>
-        </p:txBody>
-      </p:sp>
-      <p:sp>
-        <p:nvSpPr>
-          <p:cNvPr id="7" name="TextBox 6"/>
           <p:cNvSpPr txBox="1"/>
           <p:nvPr/>
         </p:nvSpPr>
@@ -12994,7 +12392,7 @@
       </p:sp>
       <p:sp>
         <p:nvSpPr>
-          <p:cNvPr id="8" name="Rectangle 7"/>
+          <p:cNvPr id="7" name="Rectangle 6"/>
           <p:cNvSpPr/>
           <p:nvPr/>
         </p:nvSpPr>
@@ -13038,7 +12436,7 @@
       </p:sp>
       <p:sp>
         <p:nvSpPr>
-          <p:cNvPr id="9" name="TextBox 8"/>
+          <p:cNvPr id="8" name="TextBox 7"/>
           <p:cNvSpPr txBox="1"/>
           <p:nvPr/>
         </p:nvSpPr>
@@ -13085,7 +12483,7 @@
       </p:sp>
       <p:sp>
         <p:nvSpPr>
-          <p:cNvPr id="10" name="Rounded Rectangle 9"/>
+          <p:cNvPr id="9" name="Rounded Rectangle 8"/>
           <p:cNvSpPr/>
           <p:nvPr/>
         </p:nvSpPr>
@@ -13139,7 +12537,7 @@
       </p:sp>
       <p:sp>
         <p:nvSpPr>
-          <p:cNvPr id="11" name="Rectangle 10"/>
+          <p:cNvPr id="10" name="Rectangle 9"/>
           <p:cNvSpPr/>
           <p:nvPr/>
         </p:nvSpPr>
@@ -13183,7 +12581,7 @@
       </p:sp>
       <p:sp>
         <p:nvSpPr>
-          <p:cNvPr id="12" name="Oval 11"/>
+          <p:cNvPr id="11" name="Oval 10"/>
           <p:cNvSpPr/>
           <p:nvPr/>
         </p:nvSpPr>
@@ -13227,7 +12625,7 @@
       </p:sp>
       <p:sp>
         <p:nvSpPr>
-          <p:cNvPr id="13" name="TextBox 12"/>
+          <p:cNvPr id="12" name="TextBox 11"/>
           <p:cNvSpPr txBox="1"/>
           <p:nvPr/>
         </p:nvSpPr>
@@ -13274,7 +12672,7 @@
       </p:sp>
       <p:sp>
         <p:nvSpPr>
-          <p:cNvPr id="14" name="TextBox 13"/>
+          <p:cNvPr id="13" name="TextBox 12"/>
           <p:cNvSpPr txBox="1"/>
           <p:nvPr/>
         </p:nvSpPr>
@@ -13321,7 +12719,7 @@
       </p:sp>
       <p:sp>
         <p:nvSpPr>
-          <p:cNvPr id="15" name="TextBox 14"/>
+          <p:cNvPr id="14" name="TextBox 13"/>
           <p:cNvSpPr txBox="1"/>
           <p:nvPr/>
         </p:nvSpPr>
@@ -13368,7 +12766,7 @@
       </p:sp>
       <p:sp>
         <p:nvSpPr>
-          <p:cNvPr id="16" name="Rounded Rectangle 15"/>
+          <p:cNvPr id="15" name="Rounded Rectangle 14"/>
           <p:cNvSpPr/>
           <p:nvPr/>
         </p:nvSpPr>
@@ -13422,7 +12820,7 @@
       </p:sp>
       <p:sp>
         <p:nvSpPr>
-          <p:cNvPr id="17" name="Rectangle 16"/>
+          <p:cNvPr id="16" name="Rectangle 15"/>
           <p:cNvSpPr/>
           <p:nvPr/>
         </p:nvSpPr>
@@ -13466,7 +12864,7 @@
       </p:sp>
       <p:sp>
         <p:nvSpPr>
-          <p:cNvPr id="18" name="Oval 17"/>
+          <p:cNvPr id="17" name="Oval 16"/>
           <p:cNvSpPr/>
           <p:nvPr/>
         </p:nvSpPr>
@@ -13510,7 +12908,7 @@
       </p:sp>
       <p:sp>
         <p:nvSpPr>
-          <p:cNvPr id="19" name="TextBox 18"/>
+          <p:cNvPr id="18" name="TextBox 17"/>
           <p:cNvSpPr txBox="1"/>
           <p:nvPr/>
         </p:nvSpPr>
@@ -13557,7 +12955,7 @@
       </p:sp>
       <p:sp>
         <p:nvSpPr>
-          <p:cNvPr id="20" name="TextBox 19"/>
+          <p:cNvPr id="19" name="TextBox 18"/>
           <p:cNvSpPr txBox="1"/>
           <p:nvPr/>
         </p:nvSpPr>
@@ -13604,7 +13002,7 @@
       </p:sp>
       <p:sp>
         <p:nvSpPr>
-          <p:cNvPr id="21" name="TextBox 20"/>
+          <p:cNvPr id="20" name="TextBox 19"/>
           <p:cNvSpPr txBox="1"/>
           <p:nvPr/>
         </p:nvSpPr>
@@ -13651,7 +13049,7 @@
       </p:sp>
       <p:sp>
         <p:nvSpPr>
-          <p:cNvPr id="22" name="Rounded Rectangle 21"/>
+          <p:cNvPr id="21" name="Rounded Rectangle 20"/>
           <p:cNvSpPr/>
           <p:nvPr/>
         </p:nvSpPr>
@@ -13705,7 +13103,7 @@
       </p:sp>
       <p:sp>
         <p:nvSpPr>
-          <p:cNvPr id="23" name="Rectangle 22"/>
+          <p:cNvPr id="22" name="Rectangle 21"/>
           <p:cNvSpPr/>
           <p:nvPr/>
         </p:nvSpPr>
@@ -13749,7 +13147,7 @@
       </p:sp>
       <p:sp>
         <p:nvSpPr>
-          <p:cNvPr id="24" name="Oval 23"/>
+          <p:cNvPr id="23" name="Oval 22"/>
           <p:cNvSpPr/>
           <p:nvPr/>
         </p:nvSpPr>
@@ -13793,7 +13191,7 @@
       </p:sp>
       <p:sp>
         <p:nvSpPr>
-          <p:cNvPr id="25" name="TextBox 24"/>
+          <p:cNvPr id="24" name="TextBox 23"/>
           <p:cNvSpPr txBox="1"/>
           <p:nvPr/>
         </p:nvSpPr>
@@ -13840,7 +13238,7 @@
       </p:sp>
       <p:sp>
         <p:nvSpPr>
-          <p:cNvPr id="26" name="TextBox 25"/>
+          <p:cNvPr id="25" name="TextBox 24"/>
           <p:cNvSpPr txBox="1"/>
           <p:nvPr/>
         </p:nvSpPr>
@@ -13887,7 +13285,7 @@
       </p:sp>
       <p:sp>
         <p:nvSpPr>
-          <p:cNvPr id="27" name="TextBox 26"/>
+          <p:cNvPr id="26" name="TextBox 25"/>
           <p:cNvSpPr txBox="1"/>
           <p:nvPr/>
         </p:nvSpPr>
@@ -13934,7 +13332,7 @@
       </p:sp>
       <p:sp>
         <p:nvSpPr>
-          <p:cNvPr id="28" name="Rounded Rectangle 27"/>
+          <p:cNvPr id="27" name="Rounded Rectangle 26"/>
           <p:cNvSpPr/>
           <p:nvPr/>
         </p:nvSpPr>
@@ -13988,7 +13386,7 @@
       </p:sp>
       <p:sp>
         <p:nvSpPr>
-          <p:cNvPr id="29" name="Rectangle 28"/>
+          <p:cNvPr id="28" name="Rectangle 27"/>
           <p:cNvSpPr/>
           <p:nvPr/>
         </p:nvSpPr>
@@ -14032,7 +13430,7 @@
       </p:sp>
       <p:sp>
         <p:nvSpPr>
-          <p:cNvPr id="30" name="Oval 29"/>
+          <p:cNvPr id="29" name="Oval 28"/>
           <p:cNvSpPr/>
           <p:nvPr/>
         </p:nvSpPr>
@@ -14076,7 +13474,7 @@
       </p:sp>
       <p:sp>
         <p:nvSpPr>
-          <p:cNvPr id="31" name="TextBox 30"/>
+          <p:cNvPr id="30" name="TextBox 29"/>
           <p:cNvSpPr txBox="1"/>
           <p:nvPr/>
         </p:nvSpPr>
@@ -14123,7 +13521,7 @@
       </p:sp>
       <p:sp>
         <p:nvSpPr>
-          <p:cNvPr id="32" name="TextBox 31"/>
+          <p:cNvPr id="31" name="TextBox 30"/>
           <p:cNvSpPr txBox="1"/>
           <p:nvPr/>
         </p:nvSpPr>
@@ -14170,7 +13568,7 @@
       </p:sp>
       <p:sp>
         <p:nvSpPr>
-          <p:cNvPr id="33" name="TextBox 32"/>
+          <p:cNvPr id="32" name="TextBox 31"/>
           <p:cNvSpPr txBox="1"/>
           <p:nvPr/>
         </p:nvSpPr>
@@ -14217,7 +13615,7 @@
       </p:sp>
       <p:sp>
         <p:nvSpPr>
-          <p:cNvPr id="34" name="Rounded Rectangle 33"/>
+          <p:cNvPr id="33" name="Rounded Rectangle 32"/>
           <p:cNvSpPr/>
           <p:nvPr/>
         </p:nvSpPr>
@@ -14271,7 +13669,7 @@
       </p:sp>
       <p:sp>
         <p:nvSpPr>
-          <p:cNvPr id="35" name="Rectangle 34"/>
+          <p:cNvPr id="34" name="Rectangle 33"/>
           <p:cNvSpPr/>
           <p:nvPr/>
         </p:nvSpPr>
@@ -14315,7 +13713,7 @@
       </p:sp>
       <p:sp>
         <p:nvSpPr>
-          <p:cNvPr id="36" name="Oval 35"/>
+          <p:cNvPr id="35" name="Oval 34"/>
           <p:cNvSpPr/>
           <p:nvPr/>
         </p:nvSpPr>
@@ -14359,7 +13757,7 @@
       </p:sp>
       <p:sp>
         <p:nvSpPr>
-          <p:cNvPr id="37" name="TextBox 36"/>
+          <p:cNvPr id="36" name="TextBox 35"/>
           <p:cNvSpPr txBox="1"/>
           <p:nvPr/>
         </p:nvSpPr>
@@ -14406,7 +13804,7 @@
       </p:sp>
       <p:sp>
         <p:nvSpPr>
-          <p:cNvPr id="38" name="TextBox 37"/>
+          <p:cNvPr id="37" name="TextBox 36"/>
           <p:cNvSpPr txBox="1"/>
           <p:nvPr/>
         </p:nvSpPr>
@@ -14453,7 +13851,7 @@
       </p:sp>
       <p:sp>
         <p:nvSpPr>
-          <p:cNvPr id="39" name="TextBox 38"/>
+          <p:cNvPr id="38" name="TextBox 37"/>
           <p:cNvSpPr txBox="1"/>
           <p:nvPr/>
         </p:nvSpPr>
@@ -14592,8 +13990,77 @@
         </p:nvSpPr>
         <p:spPr>
           <a:xfrm>
-            <a:off x="713232" y="6272784"/>
-            <a:ext cx="5597920" cy="219456"/>
+            <a:off x="8240677" y="6272784"/>
+            <a:ext cx="2651760" cy="219456"/>
+          </a:xfrm>
+          <a:prstGeom prst="rect">
+            <a:avLst/>
+          </a:prstGeom>
+          <a:noFill/>
+        </p:spPr>
+        <p:txBody>
+          <a:bodyPr wrap="square" lIns="0" rIns="0" tIns="0" bIns="0" anchor="t">
+            <a:spAutoFit/>
+          </a:bodyPr>
+          <a:lstStyle/>
+          <a:p>
+            <a:pPr algn="r">
+              <a:lnSpc>
+                <a:spcPct val="122000"/>
+              </a:lnSpc>
+              <a:spcBef>
+                <a:spcPts val="0"/>
+              </a:spcBef>
+              <a:spcAft>
+                <a:spcPts val="0"/>
+              </a:spcAft>
+            </a:pPr>
+            <a:r>
+              <a:rPr sz="900" b="0" i="0">
+                <a:solidFill>
+                  <a:srgbClr val="636E85"/>
+                </a:solidFill>
+                <a:latin typeface="Segoe UI"/>
+                <a:ea typeface="Segoe UI"/>
+                <a:cs typeface="Segoe UI"/>
+              </a:rPr>
+              <a:t>Lingesh K  ·  OSI2509030</a:t>
+            </a:r>
+            <a:r>
+              <a:rPr sz="900" b="0" i="0">
+                <a:solidFill>
+                  <a:srgbClr val="141C2E"/>
+                </a:solidFill>
+                <a:latin typeface="Segoe UI"/>
+                <a:ea typeface="Segoe UI"/>
+                <a:cs typeface="Segoe UI"/>
+              </a:rPr>
+              <a:t>     </a:t>
+            </a:r>
+            <a:r>
+              <a:rPr sz="900" b="1" i="0">
+                <a:solidFill>
+                  <a:srgbClr val="0E1E3C"/>
+                </a:solidFill>
+                <a:latin typeface="Segoe UI"/>
+                <a:ea typeface="Segoe UI"/>
+                <a:cs typeface="Segoe UI"/>
+              </a:rPr>
+              <a:t>18</a:t>
+            </a:r>
+          </a:p>
+        </p:txBody>
+      </p:sp>
+      <p:sp>
+        <p:nvSpPr>
+          <p:cNvPr id="5" name="TextBox 4"/>
+          <p:cNvSpPr txBox="1"/>
+          <p:nvPr/>
+        </p:nvSpPr>
+        <p:spPr>
+          <a:xfrm>
+            <a:off x="713232" y="566928"/>
+            <a:ext cx="10765231" cy="219456"/>
           </a:xfrm>
           <a:prstGeom prst="rect">
             <a:avLst/>
@@ -14618,106 +14085,15 @@
               </a:spcAft>
             </a:pPr>
             <a:r>
-              <a:rPr sz="900" b="1" i="0">
-                <a:solidFill>
-                  <a:srgbClr val="0E1E3C"/>
-                </a:solidFill>
-                <a:latin typeface="Segoe UI"/>
-                <a:ea typeface="Segoe UI"/>
-                <a:cs typeface="Segoe UI"/>
-              </a:rPr>
-              <a:t>Unit 5</a:t>
-            </a:r>
-            <a:r>
-              <a:rPr sz="900" b="0" i="0">
-                <a:solidFill>
-                  <a:srgbClr val="939EB3"/>
-                </a:solidFill>
-                <a:latin typeface="Segoe UI"/>
-                <a:ea typeface="Segoe UI"/>
-                <a:cs typeface="Segoe UI"/>
-              </a:rPr>
-              <a:t>  ·  </a:t>
-            </a:r>
-            <a:r>
-              <a:rPr sz="900" b="0" i="0">
-                <a:solidFill>
-                  <a:srgbClr val="636E85"/>
-                </a:solidFill>
-                <a:latin typeface="Segoe UI"/>
-                <a:ea typeface="Segoe UI"/>
-                <a:cs typeface="Segoe UI"/>
-              </a:rPr>
-              <a:t>Strategy, Innovation and Leadership</a:t>
-            </a:r>
-          </a:p>
-        </p:txBody>
-      </p:sp>
-      <p:sp>
-        <p:nvSpPr>
-          <p:cNvPr id="5" name="TextBox 4"/>
-          <p:cNvSpPr txBox="1"/>
-          <p:nvPr/>
-        </p:nvSpPr>
-        <p:spPr>
-          <a:xfrm>
-            <a:off x="8240677" y="6272784"/>
-            <a:ext cx="2651760" cy="219456"/>
-          </a:xfrm>
-          <a:prstGeom prst="rect">
-            <a:avLst/>
-          </a:prstGeom>
-          <a:noFill/>
-        </p:spPr>
-        <p:txBody>
-          <a:bodyPr wrap="square" lIns="0" rIns="0" tIns="0" bIns="0" anchor="t">
-            <a:spAutoFit/>
-          </a:bodyPr>
-          <a:lstStyle/>
-          <a:p>
-            <a:pPr algn="r">
-              <a:lnSpc>
-                <a:spcPct val="122000"/>
-              </a:lnSpc>
-              <a:spcBef>
-                <a:spcPts val="0"/>
-              </a:spcBef>
-              <a:spcAft>
-                <a:spcPts val="0"/>
-              </a:spcAft>
-            </a:pPr>
-            <a:r>
-              <a:rPr sz="900" b="0" i="0">
-                <a:solidFill>
-                  <a:srgbClr val="636E85"/>
-                </a:solidFill>
-                <a:latin typeface="Segoe UI"/>
-                <a:ea typeface="Segoe UI"/>
-                <a:cs typeface="Segoe UI"/>
-              </a:rPr>
-              <a:t>Lingesh K  ·  OSI2509030</a:t>
-            </a:r>
-            <a:r>
-              <a:rPr sz="900" b="0" i="0">
-                <a:solidFill>
-                  <a:srgbClr val="141C2E"/>
-                </a:solidFill>
-                <a:latin typeface="Segoe UI"/>
-                <a:ea typeface="Segoe UI"/>
-                <a:cs typeface="Segoe UI"/>
-              </a:rPr>
-              <a:t>     </a:t>
-            </a:r>
-            <a:r>
-              <a:rPr sz="900" b="1" i="0">
-                <a:solidFill>
-                  <a:srgbClr val="0E1E3C"/>
-                </a:solidFill>
-                <a:latin typeface="Segoe UI"/>
-                <a:ea typeface="Segoe UI"/>
-                <a:cs typeface="Segoe UI"/>
-              </a:rPr>
-              <a:t>18</a:t>
+              <a:rPr sz="950" b="1" i="0" spc="160">
+                <a:solidFill>
+                  <a:srgbClr val="745CE0"/>
+                </a:solidFill>
+                <a:latin typeface="Segoe UI"/>
+                <a:ea typeface="Segoe UI"/>
+                <a:cs typeface="Segoe UI"/>
+              </a:rPr>
+              <a:t>MOVING UP A LEVEL</a:t>
             </a:r>
           </a:p>
         </p:txBody>
@@ -14725,53 +14101,6 @@
       <p:sp>
         <p:nvSpPr>
           <p:cNvPr id="6" name="TextBox 5"/>
-          <p:cNvSpPr txBox="1"/>
-          <p:nvPr/>
-        </p:nvSpPr>
-        <p:spPr>
-          <a:xfrm>
-            <a:off x="713232" y="566928"/>
-            <a:ext cx="10765231" cy="219456"/>
-          </a:xfrm>
-          <a:prstGeom prst="rect">
-            <a:avLst/>
-          </a:prstGeom>
-          <a:noFill/>
-        </p:spPr>
-        <p:txBody>
-          <a:bodyPr wrap="square" lIns="0" rIns="0" tIns="0" bIns="0" anchor="t">
-            <a:spAutoFit/>
-          </a:bodyPr>
-          <a:lstStyle/>
-          <a:p>
-            <a:pPr algn="l">
-              <a:lnSpc>
-                <a:spcPct val="122000"/>
-              </a:lnSpc>
-              <a:spcBef>
-                <a:spcPts val="0"/>
-              </a:spcBef>
-              <a:spcAft>
-                <a:spcPts val="0"/>
-              </a:spcAft>
-            </a:pPr>
-            <a:r>
-              <a:rPr sz="950" b="1" i="0" spc="160">
-                <a:solidFill>
-                  <a:srgbClr val="745CE0"/>
-                </a:solidFill>
-                <a:latin typeface="Segoe UI"/>
-                <a:ea typeface="Segoe UI"/>
-                <a:cs typeface="Segoe UI"/>
-              </a:rPr>
-              <a:t>MOVING UP A LEVEL</a:t>
-            </a:r>
-          </a:p>
-        </p:txBody>
-      </p:sp>
-      <p:sp>
-        <p:nvSpPr>
-          <p:cNvPr id="7" name="TextBox 6"/>
           <p:cNvSpPr txBox="1"/>
           <p:nvPr/>
         </p:nvSpPr>
@@ -14818,7 +14147,7 @@
       </p:sp>
       <p:sp>
         <p:nvSpPr>
-          <p:cNvPr id="8" name="Rectangle 7"/>
+          <p:cNvPr id="7" name="Rectangle 6"/>
           <p:cNvSpPr/>
           <p:nvPr/>
         </p:nvSpPr>
@@ -14862,7 +14191,7 @@
       </p:sp>
       <p:graphicFrame>
         <p:nvGraphicFramePr>
-          <p:cNvPr id="9" name="Table 8"/>
+          <p:cNvPr id="8" name="Table 7"/>
           <p:cNvGraphicFramePr>
             <a:graphicFrameLocks noGrp="1"/>
           </p:cNvGraphicFramePr>
@@ -15742,7 +15071,7 @@
       </p:graphicFrame>
       <p:sp>
         <p:nvSpPr>
-          <p:cNvPr id="10" name="Rounded Rectangle 9"/>
+          <p:cNvPr id="9" name="Rounded Rectangle 8"/>
           <p:cNvSpPr/>
           <p:nvPr/>
         </p:nvSpPr>
@@ -15809,7 +15138,7 @@
       </p:sp>
       <p:sp>
         <p:nvSpPr>
-          <p:cNvPr id="11" name="Rectangle 10"/>
+          <p:cNvPr id="10" name="Rectangle 9"/>
           <p:cNvSpPr/>
           <p:nvPr/>
         </p:nvSpPr>
@@ -15945,8 +15274,77 @@
         </p:nvSpPr>
         <p:spPr>
           <a:xfrm>
-            <a:off x="713232" y="6272784"/>
-            <a:ext cx="5597920" cy="219456"/>
+            <a:off x="8240677" y="6272784"/>
+            <a:ext cx="2651760" cy="219456"/>
+          </a:xfrm>
+          <a:prstGeom prst="rect">
+            <a:avLst/>
+          </a:prstGeom>
+          <a:noFill/>
+        </p:spPr>
+        <p:txBody>
+          <a:bodyPr wrap="square" lIns="0" rIns="0" tIns="0" bIns="0" anchor="t">
+            <a:spAutoFit/>
+          </a:bodyPr>
+          <a:lstStyle/>
+          <a:p>
+            <a:pPr algn="r">
+              <a:lnSpc>
+                <a:spcPct val="122000"/>
+              </a:lnSpc>
+              <a:spcBef>
+                <a:spcPts val="0"/>
+              </a:spcBef>
+              <a:spcAft>
+                <a:spcPts val="0"/>
+              </a:spcAft>
+            </a:pPr>
+            <a:r>
+              <a:rPr sz="900" b="0" i="0">
+                <a:solidFill>
+                  <a:srgbClr val="636E85"/>
+                </a:solidFill>
+                <a:latin typeface="Segoe UI"/>
+                <a:ea typeface="Segoe UI"/>
+                <a:cs typeface="Segoe UI"/>
+              </a:rPr>
+              <a:t>Lingesh K  ·  OSI2509030</a:t>
+            </a:r>
+            <a:r>
+              <a:rPr sz="900" b="0" i="0">
+                <a:solidFill>
+                  <a:srgbClr val="141C2E"/>
+                </a:solidFill>
+                <a:latin typeface="Segoe UI"/>
+                <a:ea typeface="Segoe UI"/>
+                <a:cs typeface="Segoe UI"/>
+              </a:rPr>
+              <a:t>     </a:t>
+            </a:r>
+            <a:r>
+              <a:rPr sz="900" b="1" i="0">
+                <a:solidFill>
+                  <a:srgbClr val="0E1E3C"/>
+                </a:solidFill>
+                <a:latin typeface="Segoe UI"/>
+                <a:ea typeface="Segoe UI"/>
+                <a:cs typeface="Segoe UI"/>
+              </a:rPr>
+              <a:t>19</a:t>
+            </a:r>
+          </a:p>
+        </p:txBody>
+      </p:sp>
+      <p:sp>
+        <p:nvSpPr>
+          <p:cNvPr id="5" name="TextBox 4"/>
+          <p:cNvSpPr txBox="1"/>
+          <p:nvPr/>
+        </p:nvSpPr>
+        <p:spPr>
+          <a:xfrm>
+            <a:off x="713232" y="566928"/>
+            <a:ext cx="10765231" cy="219456"/>
           </a:xfrm>
           <a:prstGeom prst="rect">
             <a:avLst/>
@@ -15971,106 +15369,15 @@
               </a:spcAft>
             </a:pPr>
             <a:r>
-              <a:rPr sz="900" b="1" i="0">
-                <a:solidFill>
-                  <a:srgbClr val="0E1E3C"/>
-                </a:solidFill>
-                <a:latin typeface="Segoe UI"/>
-                <a:ea typeface="Segoe UI"/>
-                <a:cs typeface="Segoe UI"/>
-              </a:rPr>
-              <a:t>Unit 5</a:t>
-            </a:r>
-            <a:r>
-              <a:rPr sz="900" b="0" i="0">
-                <a:solidFill>
-                  <a:srgbClr val="939EB3"/>
-                </a:solidFill>
-                <a:latin typeface="Segoe UI"/>
-                <a:ea typeface="Segoe UI"/>
-                <a:cs typeface="Segoe UI"/>
-              </a:rPr>
-              <a:t>  ·  </a:t>
-            </a:r>
-            <a:r>
-              <a:rPr sz="900" b="0" i="0">
-                <a:solidFill>
-                  <a:srgbClr val="636E85"/>
-                </a:solidFill>
-                <a:latin typeface="Segoe UI"/>
-                <a:ea typeface="Segoe UI"/>
-                <a:cs typeface="Segoe UI"/>
-              </a:rPr>
-              <a:t>Strategy, Innovation and Leadership</a:t>
-            </a:r>
-          </a:p>
-        </p:txBody>
-      </p:sp>
-      <p:sp>
-        <p:nvSpPr>
-          <p:cNvPr id="5" name="TextBox 4"/>
-          <p:cNvSpPr txBox="1"/>
-          <p:nvPr/>
-        </p:nvSpPr>
-        <p:spPr>
-          <a:xfrm>
-            <a:off x="8240677" y="6272784"/>
-            <a:ext cx="2651760" cy="219456"/>
-          </a:xfrm>
-          <a:prstGeom prst="rect">
-            <a:avLst/>
-          </a:prstGeom>
-          <a:noFill/>
-        </p:spPr>
-        <p:txBody>
-          <a:bodyPr wrap="square" lIns="0" rIns="0" tIns="0" bIns="0" anchor="t">
-            <a:spAutoFit/>
-          </a:bodyPr>
-          <a:lstStyle/>
-          <a:p>
-            <a:pPr algn="r">
-              <a:lnSpc>
-                <a:spcPct val="122000"/>
-              </a:lnSpc>
-              <a:spcBef>
-                <a:spcPts val="0"/>
-              </a:spcBef>
-              <a:spcAft>
-                <a:spcPts val="0"/>
-              </a:spcAft>
-            </a:pPr>
-            <a:r>
-              <a:rPr sz="900" b="0" i="0">
-                <a:solidFill>
-                  <a:srgbClr val="636E85"/>
-                </a:solidFill>
-                <a:latin typeface="Segoe UI"/>
-                <a:ea typeface="Segoe UI"/>
-                <a:cs typeface="Segoe UI"/>
-              </a:rPr>
-              <a:t>Lingesh K  ·  OSI2509030</a:t>
-            </a:r>
-            <a:r>
-              <a:rPr sz="900" b="0" i="0">
-                <a:solidFill>
-                  <a:srgbClr val="141C2E"/>
-                </a:solidFill>
-                <a:latin typeface="Segoe UI"/>
-                <a:ea typeface="Segoe UI"/>
-                <a:cs typeface="Segoe UI"/>
-              </a:rPr>
-              <a:t>     </a:t>
-            </a:r>
-            <a:r>
-              <a:rPr sz="900" b="1" i="0">
-                <a:solidFill>
-                  <a:srgbClr val="0E1E3C"/>
-                </a:solidFill>
-                <a:latin typeface="Segoe UI"/>
-                <a:ea typeface="Segoe UI"/>
-                <a:cs typeface="Segoe UI"/>
-              </a:rPr>
-              <a:t>19</a:t>
+              <a:rPr sz="950" b="1" i="0" spc="160">
+                <a:solidFill>
+                  <a:srgbClr val="00B3A4"/>
+                </a:solidFill>
+                <a:latin typeface="Segoe UI"/>
+                <a:ea typeface="Segoe UI"/>
+                <a:cs typeface="Segoe UI"/>
+              </a:rPr>
+              <a:t>THE SKILLS THAT TRAVEL</a:t>
             </a:r>
           </a:p>
         </p:txBody>
@@ -16078,53 +15385,6 @@
       <p:sp>
         <p:nvSpPr>
           <p:cNvPr id="6" name="TextBox 5"/>
-          <p:cNvSpPr txBox="1"/>
-          <p:nvPr/>
-        </p:nvSpPr>
-        <p:spPr>
-          <a:xfrm>
-            <a:off x="713232" y="566928"/>
-            <a:ext cx="10765231" cy="219456"/>
-          </a:xfrm>
-          <a:prstGeom prst="rect">
-            <a:avLst/>
-          </a:prstGeom>
-          <a:noFill/>
-        </p:spPr>
-        <p:txBody>
-          <a:bodyPr wrap="square" lIns="0" rIns="0" tIns="0" bIns="0" anchor="t">
-            <a:spAutoFit/>
-          </a:bodyPr>
-          <a:lstStyle/>
-          <a:p>
-            <a:pPr algn="l">
-              <a:lnSpc>
-                <a:spcPct val="122000"/>
-              </a:lnSpc>
-              <a:spcBef>
-                <a:spcPts val="0"/>
-              </a:spcBef>
-              <a:spcAft>
-                <a:spcPts val="0"/>
-              </a:spcAft>
-            </a:pPr>
-            <a:r>
-              <a:rPr sz="950" b="1" i="0" spc="160">
-                <a:solidFill>
-                  <a:srgbClr val="00B3A4"/>
-                </a:solidFill>
-                <a:latin typeface="Segoe UI"/>
-                <a:ea typeface="Segoe UI"/>
-                <a:cs typeface="Segoe UI"/>
-              </a:rPr>
-              <a:t>THE SKILLS THAT TRAVEL</a:t>
-            </a:r>
-          </a:p>
-        </p:txBody>
-      </p:sp>
-      <p:sp>
-        <p:nvSpPr>
-          <p:cNvPr id="7" name="TextBox 6"/>
           <p:cNvSpPr txBox="1"/>
           <p:nvPr/>
         </p:nvSpPr>
@@ -16171,7 +15431,7 @@
       </p:sp>
       <p:sp>
         <p:nvSpPr>
-          <p:cNvPr id="8" name="Rectangle 7"/>
+          <p:cNvPr id="7" name="Rectangle 6"/>
           <p:cNvSpPr/>
           <p:nvPr/>
         </p:nvSpPr>
@@ -16215,7 +15475,7 @@
       </p:sp>
       <p:sp>
         <p:nvSpPr>
-          <p:cNvPr id="9" name="TextBox 8"/>
+          <p:cNvPr id="8" name="TextBox 7"/>
           <p:cNvSpPr txBox="1"/>
           <p:nvPr/>
         </p:nvSpPr>
@@ -16262,7 +15522,7 @@
       </p:sp>
       <p:sp>
         <p:nvSpPr>
-          <p:cNvPr id="10" name="Rounded Rectangle 9"/>
+          <p:cNvPr id="9" name="Rounded Rectangle 8"/>
           <p:cNvSpPr/>
           <p:nvPr/>
         </p:nvSpPr>
@@ -16308,7 +15568,7 @@
       </p:sp>
       <p:sp>
         <p:nvSpPr>
-          <p:cNvPr id="11" name="TextBox 10"/>
+          <p:cNvPr id="10" name="TextBox 9"/>
           <p:cNvSpPr txBox="1"/>
           <p:nvPr/>
         </p:nvSpPr>
@@ -16379,7 +15639,7 @@
       </p:sp>
       <p:sp>
         <p:nvSpPr>
-          <p:cNvPr id="12" name="Rounded Rectangle 11"/>
+          <p:cNvPr id="11" name="Rounded Rectangle 10"/>
           <p:cNvSpPr/>
           <p:nvPr/>
         </p:nvSpPr>
@@ -16425,7 +15685,7 @@
       </p:sp>
       <p:sp>
         <p:nvSpPr>
-          <p:cNvPr id="13" name="TextBox 12"/>
+          <p:cNvPr id="12" name="TextBox 11"/>
           <p:cNvSpPr txBox="1"/>
           <p:nvPr/>
         </p:nvSpPr>
@@ -16496,7 +15756,7 @@
       </p:sp>
       <p:sp>
         <p:nvSpPr>
-          <p:cNvPr id="14" name="Rounded Rectangle 13"/>
+          <p:cNvPr id="13" name="Rounded Rectangle 12"/>
           <p:cNvSpPr/>
           <p:nvPr/>
         </p:nvSpPr>
@@ -16542,7 +15802,7 @@
       </p:sp>
       <p:sp>
         <p:nvSpPr>
-          <p:cNvPr id="15" name="TextBox 14"/>
+          <p:cNvPr id="14" name="TextBox 13"/>
           <p:cNvSpPr txBox="1"/>
           <p:nvPr/>
         </p:nvSpPr>
@@ -16613,7 +15873,7 @@
       </p:sp>
       <p:sp>
         <p:nvSpPr>
-          <p:cNvPr id="16" name="Rounded Rectangle 15"/>
+          <p:cNvPr id="15" name="Rounded Rectangle 14"/>
           <p:cNvSpPr/>
           <p:nvPr/>
         </p:nvSpPr>
@@ -16659,7 +15919,7 @@
       </p:sp>
       <p:sp>
         <p:nvSpPr>
-          <p:cNvPr id="17" name="TextBox 16"/>
+          <p:cNvPr id="16" name="TextBox 15"/>
           <p:cNvSpPr txBox="1"/>
           <p:nvPr/>
         </p:nvSpPr>
@@ -16730,7 +15990,7 @@
       </p:sp>
       <p:sp>
         <p:nvSpPr>
-          <p:cNvPr id="18" name="Rounded Rectangle 17"/>
+          <p:cNvPr id="17" name="Rounded Rectangle 16"/>
           <p:cNvSpPr/>
           <p:nvPr/>
         </p:nvSpPr>
@@ -16776,7 +16036,7 @@
       </p:sp>
       <p:sp>
         <p:nvSpPr>
-          <p:cNvPr id="19" name="TextBox 18"/>
+          <p:cNvPr id="18" name="TextBox 17"/>
           <p:cNvSpPr txBox="1"/>
           <p:nvPr/>
         </p:nvSpPr>
@@ -16847,7 +16107,7 @@
       </p:sp>
       <p:sp>
         <p:nvSpPr>
-          <p:cNvPr id="20" name="Rounded Rectangle 19"/>
+          <p:cNvPr id="19" name="Rounded Rectangle 18"/>
           <p:cNvSpPr/>
           <p:nvPr/>
         </p:nvSpPr>
@@ -16893,7 +16153,7 @@
       </p:sp>
       <p:sp>
         <p:nvSpPr>
-          <p:cNvPr id="21" name="TextBox 20"/>
+          <p:cNvPr id="20" name="TextBox 19"/>
           <p:cNvSpPr txBox="1"/>
           <p:nvPr/>
         </p:nvSpPr>
@@ -17056,8 +16316,77 @@
         </p:nvSpPr>
         <p:spPr>
           <a:xfrm>
-            <a:off x="713232" y="6272784"/>
-            <a:ext cx="5597920" cy="219456"/>
+            <a:off x="8240677" y="6272784"/>
+            <a:ext cx="2651760" cy="219456"/>
+          </a:xfrm>
+          <a:prstGeom prst="rect">
+            <a:avLst/>
+          </a:prstGeom>
+          <a:noFill/>
+        </p:spPr>
+        <p:txBody>
+          <a:bodyPr wrap="square" lIns="0" rIns="0" tIns="0" bIns="0" anchor="t">
+            <a:spAutoFit/>
+          </a:bodyPr>
+          <a:lstStyle/>
+          <a:p>
+            <a:pPr algn="r">
+              <a:lnSpc>
+                <a:spcPct val="122000"/>
+              </a:lnSpc>
+              <a:spcBef>
+                <a:spcPts val="0"/>
+              </a:spcBef>
+              <a:spcAft>
+                <a:spcPts val="0"/>
+              </a:spcAft>
+            </a:pPr>
+            <a:r>
+              <a:rPr sz="900" b="0" i="0">
+                <a:solidFill>
+                  <a:srgbClr val="636E85"/>
+                </a:solidFill>
+                <a:latin typeface="Segoe UI"/>
+                <a:ea typeface="Segoe UI"/>
+                <a:cs typeface="Segoe UI"/>
+              </a:rPr>
+              <a:t>Lingesh K  ·  OSI2509030</a:t>
+            </a:r>
+            <a:r>
+              <a:rPr sz="900" b="0" i="0">
+                <a:solidFill>
+                  <a:srgbClr val="141C2E"/>
+                </a:solidFill>
+                <a:latin typeface="Segoe UI"/>
+                <a:ea typeface="Segoe UI"/>
+                <a:cs typeface="Segoe UI"/>
+              </a:rPr>
+              <a:t>     </a:t>
+            </a:r>
+            <a:r>
+              <a:rPr sz="900" b="1" i="0">
+                <a:solidFill>
+                  <a:srgbClr val="0E1E3C"/>
+                </a:solidFill>
+                <a:latin typeface="Segoe UI"/>
+                <a:ea typeface="Segoe UI"/>
+                <a:cs typeface="Segoe UI"/>
+              </a:rPr>
+              <a:t>02</a:t>
+            </a:r>
+          </a:p>
+        </p:txBody>
+      </p:sp>
+      <p:sp>
+        <p:nvSpPr>
+          <p:cNvPr id="5" name="TextBox 4"/>
+          <p:cNvSpPr txBox="1"/>
+          <p:nvPr/>
+        </p:nvSpPr>
+        <p:spPr>
+          <a:xfrm>
+            <a:off x="713232" y="566928"/>
+            <a:ext cx="10765231" cy="219456"/>
           </a:xfrm>
           <a:prstGeom prst="rect">
             <a:avLst/>
@@ -17082,106 +16411,15 @@
               </a:spcAft>
             </a:pPr>
             <a:r>
-              <a:rPr sz="900" b="1" i="0">
-                <a:solidFill>
-                  <a:srgbClr val="0E1E3C"/>
-                </a:solidFill>
-                <a:latin typeface="Segoe UI"/>
-                <a:ea typeface="Segoe UI"/>
-                <a:cs typeface="Segoe UI"/>
-              </a:rPr>
-              <a:t>Unit 5</a:t>
-            </a:r>
-            <a:r>
-              <a:rPr sz="900" b="0" i="0">
-                <a:solidFill>
-                  <a:srgbClr val="939EB3"/>
-                </a:solidFill>
-                <a:latin typeface="Segoe UI"/>
-                <a:ea typeface="Segoe UI"/>
-                <a:cs typeface="Segoe UI"/>
-              </a:rPr>
-              <a:t>  ·  </a:t>
-            </a:r>
-            <a:r>
-              <a:rPr sz="900" b="0" i="0">
-                <a:solidFill>
-                  <a:srgbClr val="636E85"/>
-                </a:solidFill>
-                <a:latin typeface="Segoe UI"/>
-                <a:ea typeface="Segoe UI"/>
-                <a:cs typeface="Segoe UI"/>
-              </a:rPr>
-              <a:t>Strategy, Innovation and Leadership</a:t>
-            </a:r>
-          </a:p>
-        </p:txBody>
-      </p:sp>
-      <p:sp>
-        <p:nvSpPr>
-          <p:cNvPr id="5" name="TextBox 4"/>
-          <p:cNvSpPr txBox="1"/>
-          <p:nvPr/>
-        </p:nvSpPr>
-        <p:spPr>
-          <a:xfrm>
-            <a:off x="8240677" y="6272784"/>
-            <a:ext cx="2651760" cy="219456"/>
-          </a:xfrm>
-          <a:prstGeom prst="rect">
-            <a:avLst/>
-          </a:prstGeom>
-          <a:noFill/>
-        </p:spPr>
-        <p:txBody>
-          <a:bodyPr wrap="square" lIns="0" rIns="0" tIns="0" bIns="0" anchor="t">
-            <a:spAutoFit/>
-          </a:bodyPr>
-          <a:lstStyle/>
-          <a:p>
-            <a:pPr algn="r">
-              <a:lnSpc>
-                <a:spcPct val="122000"/>
-              </a:lnSpc>
-              <a:spcBef>
-                <a:spcPts val="0"/>
-              </a:spcBef>
-              <a:spcAft>
-                <a:spcPts val="0"/>
-              </a:spcAft>
-            </a:pPr>
-            <a:r>
-              <a:rPr sz="900" b="0" i="0">
-                <a:solidFill>
-                  <a:srgbClr val="636E85"/>
-                </a:solidFill>
-                <a:latin typeface="Segoe UI"/>
-                <a:ea typeface="Segoe UI"/>
-                <a:cs typeface="Segoe UI"/>
-              </a:rPr>
-              <a:t>Lingesh K  ·  OSI2509030</a:t>
-            </a:r>
-            <a:r>
-              <a:rPr sz="900" b="0" i="0">
-                <a:solidFill>
-                  <a:srgbClr val="141C2E"/>
-                </a:solidFill>
-                <a:latin typeface="Segoe UI"/>
-                <a:ea typeface="Segoe UI"/>
-                <a:cs typeface="Segoe UI"/>
-              </a:rPr>
-              <a:t>     </a:t>
-            </a:r>
-            <a:r>
-              <a:rPr sz="900" b="1" i="0">
-                <a:solidFill>
-                  <a:srgbClr val="0E1E3C"/>
-                </a:solidFill>
-                <a:latin typeface="Segoe UI"/>
-                <a:ea typeface="Segoe UI"/>
-                <a:cs typeface="Segoe UI"/>
-              </a:rPr>
-              <a:t>02</a:t>
+              <a:rPr sz="950" b="1" i="0" spc="160">
+                <a:solidFill>
+                  <a:srgbClr val="3B7AF7"/>
+                </a:solidFill>
+                <a:latin typeface="Segoe UI"/>
+                <a:ea typeface="Segoe UI"/>
+                <a:cs typeface="Segoe UI"/>
+              </a:rPr>
+              <a:t>AGENDA</a:t>
             </a:r>
           </a:p>
         </p:txBody>
@@ -17189,53 +16427,6 @@
       <p:sp>
         <p:nvSpPr>
           <p:cNvPr id="6" name="TextBox 5"/>
-          <p:cNvSpPr txBox="1"/>
-          <p:nvPr/>
-        </p:nvSpPr>
-        <p:spPr>
-          <a:xfrm>
-            <a:off x="713232" y="566928"/>
-            <a:ext cx="10765231" cy="219456"/>
-          </a:xfrm>
-          <a:prstGeom prst="rect">
-            <a:avLst/>
-          </a:prstGeom>
-          <a:noFill/>
-        </p:spPr>
-        <p:txBody>
-          <a:bodyPr wrap="square" lIns="0" rIns="0" tIns="0" bIns="0" anchor="t">
-            <a:spAutoFit/>
-          </a:bodyPr>
-          <a:lstStyle/>
-          <a:p>
-            <a:pPr algn="l">
-              <a:lnSpc>
-                <a:spcPct val="122000"/>
-              </a:lnSpc>
-              <a:spcBef>
-                <a:spcPts val="0"/>
-              </a:spcBef>
-              <a:spcAft>
-                <a:spcPts val="0"/>
-              </a:spcAft>
-            </a:pPr>
-            <a:r>
-              <a:rPr sz="950" b="1" i="0" spc="160">
-                <a:solidFill>
-                  <a:srgbClr val="3B7AF7"/>
-                </a:solidFill>
-                <a:latin typeface="Segoe UI"/>
-                <a:ea typeface="Segoe UI"/>
-                <a:cs typeface="Segoe UI"/>
-              </a:rPr>
-              <a:t>AGENDA</a:t>
-            </a:r>
-          </a:p>
-        </p:txBody>
-      </p:sp>
-      <p:sp>
-        <p:nvSpPr>
-          <p:cNvPr id="7" name="TextBox 6"/>
           <p:cNvSpPr txBox="1"/>
           <p:nvPr/>
         </p:nvSpPr>
@@ -17282,7 +16473,7 @@
       </p:sp>
       <p:sp>
         <p:nvSpPr>
-          <p:cNvPr id="8" name="Rectangle 7"/>
+          <p:cNvPr id="7" name="Rectangle 6"/>
           <p:cNvSpPr/>
           <p:nvPr/>
         </p:nvSpPr>
@@ -17326,7 +16517,7 @@
       </p:sp>
       <p:sp>
         <p:nvSpPr>
-          <p:cNvPr id="9" name="TextBox 8"/>
+          <p:cNvPr id="8" name="TextBox 7"/>
           <p:cNvSpPr txBox="1"/>
           <p:nvPr/>
         </p:nvSpPr>
@@ -17373,7 +16564,7 @@
       </p:sp>
       <p:sp>
         <p:nvSpPr>
-          <p:cNvPr id="10" name="Rectangle 9"/>
+          <p:cNvPr id="9" name="Rectangle 8"/>
           <p:cNvSpPr/>
           <p:nvPr/>
         </p:nvSpPr>
@@ -17417,7 +16608,7 @@
       </p:sp>
       <p:sp>
         <p:nvSpPr>
-          <p:cNvPr id="11" name="TextBox 10"/>
+          <p:cNvPr id="10" name="TextBox 9"/>
           <p:cNvSpPr txBox="1"/>
           <p:nvPr/>
         </p:nvSpPr>
@@ -17464,7 +16655,7 @@
       </p:sp>
       <p:sp>
         <p:nvSpPr>
-          <p:cNvPr id="12" name="TextBox 11"/>
+          <p:cNvPr id="11" name="TextBox 10"/>
           <p:cNvSpPr txBox="1"/>
           <p:nvPr/>
         </p:nvSpPr>
@@ -17535,7 +16726,7 @@
       </p:sp>
       <p:sp>
         <p:nvSpPr>
-          <p:cNvPr id="13" name="Rectangle 12"/>
+          <p:cNvPr id="12" name="Rectangle 11"/>
           <p:cNvSpPr/>
           <p:nvPr/>
         </p:nvSpPr>
@@ -17579,7 +16770,7 @@
       </p:sp>
       <p:sp>
         <p:nvSpPr>
-          <p:cNvPr id="14" name="TextBox 13"/>
+          <p:cNvPr id="13" name="TextBox 12"/>
           <p:cNvSpPr txBox="1"/>
           <p:nvPr/>
         </p:nvSpPr>
@@ -17626,7 +16817,7 @@
       </p:sp>
       <p:sp>
         <p:nvSpPr>
-          <p:cNvPr id="15" name="TextBox 14"/>
+          <p:cNvPr id="14" name="TextBox 13"/>
           <p:cNvSpPr txBox="1"/>
           <p:nvPr/>
         </p:nvSpPr>
@@ -17697,7 +16888,7 @@
       </p:sp>
       <p:sp>
         <p:nvSpPr>
-          <p:cNvPr id="16" name="Rectangle 15"/>
+          <p:cNvPr id="15" name="Rectangle 14"/>
           <p:cNvSpPr/>
           <p:nvPr/>
         </p:nvSpPr>
@@ -17741,7 +16932,7 @@
       </p:sp>
       <p:sp>
         <p:nvSpPr>
-          <p:cNvPr id="17" name="TextBox 16"/>
+          <p:cNvPr id="16" name="TextBox 15"/>
           <p:cNvSpPr txBox="1"/>
           <p:nvPr/>
         </p:nvSpPr>
@@ -17788,7 +16979,7 @@
       </p:sp>
       <p:sp>
         <p:nvSpPr>
-          <p:cNvPr id="18" name="TextBox 17"/>
+          <p:cNvPr id="17" name="TextBox 16"/>
           <p:cNvSpPr txBox="1"/>
           <p:nvPr/>
         </p:nvSpPr>
@@ -17859,7 +17050,7 @@
       </p:sp>
       <p:sp>
         <p:nvSpPr>
-          <p:cNvPr id="19" name="Rectangle 18"/>
+          <p:cNvPr id="18" name="Rectangle 17"/>
           <p:cNvSpPr/>
           <p:nvPr/>
         </p:nvSpPr>
@@ -17903,7 +17094,7 @@
       </p:sp>
       <p:sp>
         <p:nvSpPr>
-          <p:cNvPr id="20" name="TextBox 19"/>
+          <p:cNvPr id="19" name="TextBox 18"/>
           <p:cNvSpPr txBox="1"/>
           <p:nvPr/>
         </p:nvSpPr>
@@ -17950,7 +17141,7 @@
       </p:sp>
       <p:sp>
         <p:nvSpPr>
-          <p:cNvPr id="21" name="TextBox 20"/>
+          <p:cNvPr id="20" name="TextBox 19"/>
           <p:cNvSpPr txBox="1"/>
           <p:nvPr/>
         </p:nvSpPr>
@@ -18021,7 +17212,7 @@
       </p:sp>
       <p:sp>
         <p:nvSpPr>
-          <p:cNvPr id="22" name="Rectangle 21"/>
+          <p:cNvPr id="21" name="Rectangle 20"/>
           <p:cNvSpPr/>
           <p:nvPr/>
         </p:nvSpPr>
@@ -18065,7 +17256,7 @@
       </p:sp>
       <p:sp>
         <p:nvSpPr>
-          <p:cNvPr id="23" name="TextBox 22"/>
+          <p:cNvPr id="22" name="TextBox 21"/>
           <p:cNvSpPr txBox="1"/>
           <p:nvPr/>
         </p:nvSpPr>
@@ -18112,7 +17303,7 @@
       </p:sp>
       <p:sp>
         <p:nvSpPr>
-          <p:cNvPr id="24" name="TextBox 23"/>
+          <p:cNvPr id="23" name="TextBox 22"/>
           <p:cNvSpPr txBox="1"/>
           <p:nvPr/>
         </p:nvSpPr>
@@ -18183,7 +17374,7 @@
       </p:sp>
       <p:sp>
         <p:nvSpPr>
-          <p:cNvPr id="25" name="Rectangle 24"/>
+          <p:cNvPr id="24" name="Rectangle 23"/>
           <p:cNvSpPr/>
           <p:nvPr/>
         </p:nvSpPr>
@@ -18227,7 +17418,7 @@
       </p:sp>
       <p:sp>
         <p:nvSpPr>
-          <p:cNvPr id="26" name="TextBox 25"/>
+          <p:cNvPr id="25" name="TextBox 24"/>
           <p:cNvSpPr txBox="1"/>
           <p:nvPr/>
         </p:nvSpPr>
@@ -18274,7 +17465,7 @@
       </p:sp>
       <p:sp>
         <p:nvSpPr>
-          <p:cNvPr id="27" name="TextBox 26"/>
+          <p:cNvPr id="26" name="TextBox 25"/>
           <p:cNvSpPr txBox="1"/>
           <p:nvPr/>
         </p:nvSpPr>
@@ -18345,7 +17536,7 @@
       </p:sp>
       <p:sp>
         <p:nvSpPr>
-          <p:cNvPr id="28" name="Rectangle 27"/>
+          <p:cNvPr id="27" name="Rectangle 26"/>
           <p:cNvSpPr/>
           <p:nvPr/>
         </p:nvSpPr>
@@ -18389,7 +17580,7 @@
       </p:sp>
       <p:sp>
         <p:nvSpPr>
-          <p:cNvPr id="29" name="TextBox 28"/>
+          <p:cNvPr id="28" name="TextBox 27"/>
           <p:cNvSpPr txBox="1"/>
           <p:nvPr/>
         </p:nvSpPr>
@@ -18436,7 +17627,7 @@
       </p:sp>
       <p:sp>
         <p:nvSpPr>
-          <p:cNvPr id="30" name="TextBox 29"/>
+          <p:cNvPr id="29" name="TextBox 28"/>
           <p:cNvSpPr txBox="1"/>
           <p:nvPr/>
         </p:nvSpPr>
@@ -18507,7 +17698,7 @@
       </p:sp>
       <p:sp>
         <p:nvSpPr>
-          <p:cNvPr id="31" name="Rectangle 30"/>
+          <p:cNvPr id="30" name="Rectangle 29"/>
           <p:cNvSpPr/>
           <p:nvPr/>
         </p:nvSpPr>
@@ -18551,7 +17742,7 @@
       </p:sp>
       <p:sp>
         <p:nvSpPr>
-          <p:cNvPr id="32" name="TextBox 31"/>
+          <p:cNvPr id="31" name="TextBox 30"/>
           <p:cNvSpPr txBox="1"/>
           <p:nvPr/>
         </p:nvSpPr>
@@ -18598,7 +17789,7 @@
       </p:sp>
       <p:sp>
         <p:nvSpPr>
-          <p:cNvPr id="33" name="TextBox 32"/>
+          <p:cNvPr id="32" name="TextBox 31"/>
           <p:cNvSpPr txBox="1"/>
           <p:nvPr/>
         </p:nvSpPr>
@@ -18761,8 +17952,77 @@
         </p:nvSpPr>
         <p:spPr>
           <a:xfrm>
-            <a:off x="713232" y="6272784"/>
-            <a:ext cx="5597920" cy="219456"/>
+            <a:off x="8240677" y="6272784"/>
+            <a:ext cx="2651760" cy="219456"/>
+          </a:xfrm>
+          <a:prstGeom prst="rect">
+            <a:avLst/>
+          </a:prstGeom>
+          <a:noFill/>
+        </p:spPr>
+        <p:txBody>
+          <a:bodyPr wrap="square" lIns="0" rIns="0" tIns="0" bIns="0" anchor="t">
+            <a:spAutoFit/>
+          </a:bodyPr>
+          <a:lstStyle/>
+          <a:p>
+            <a:pPr algn="r">
+              <a:lnSpc>
+                <a:spcPct val="122000"/>
+              </a:lnSpc>
+              <a:spcBef>
+                <a:spcPts val="0"/>
+              </a:spcBef>
+              <a:spcAft>
+                <a:spcPts val="0"/>
+              </a:spcAft>
+            </a:pPr>
+            <a:r>
+              <a:rPr sz="900" b="0" i="0">
+                <a:solidFill>
+                  <a:srgbClr val="636E85"/>
+                </a:solidFill>
+                <a:latin typeface="Segoe UI"/>
+                <a:ea typeface="Segoe UI"/>
+                <a:cs typeface="Segoe UI"/>
+              </a:rPr>
+              <a:t>Lingesh K  ·  OSI2509030</a:t>
+            </a:r>
+            <a:r>
+              <a:rPr sz="900" b="0" i="0">
+                <a:solidFill>
+                  <a:srgbClr val="141C2E"/>
+                </a:solidFill>
+                <a:latin typeface="Segoe UI"/>
+                <a:ea typeface="Segoe UI"/>
+                <a:cs typeface="Segoe UI"/>
+              </a:rPr>
+              <a:t>     </a:t>
+            </a:r>
+            <a:r>
+              <a:rPr sz="900" b="1" i="0">
+                <a:solidFill>
+                  <a:srgbClr val="0E1E3C"/>
+                </a:solidFill>
+                <a:latin typeface="Segoe UI"/>
+                <a:ea typeface="Segoe UI"/>
+                <a:cs typeface="Segoe UI"/>
+              </a:rPr>
+              <a:t>20</a:t>
+            </a:r>
+          </a:p>
+        </p:txBody>
+      </p:sp>
+      <p:sp>
+        <p:nvSpPr>
+          <p:cNvPr id="5" name="TextBox 4"/>
+          <p:cNvSpPr txBox="1"/>
+          <p:nvPr/>
+        </p:nvSpPr>
+        <p:spPr>
+          <a:xfrm>
+            <a:off x="713232" y="566928"/>
+            <a:ext cx="10765231" cy="219456"/>
           </a:xfrm>
           <a:prstGeom prst="rect">
             <a:avLst/>
@@ -18787,106 +18047,15 @@
               </a:spcAft>
             </a:pPr>
             <a:r>
-              <a:rPr sz="900" b="1" i="0">
-                <a:solidFill>
-                  <a:srgbClr val="0E1E3C"/>
-                </a:solidFill>
-                <a:latin typeface="Segoe UI"/>
-                <a:ea typeface="Segoe UI"/>
-                <a:cs typeface="Segoe UI"/>
-              </a:rPr>
-              <a:t>Unit 5</a:t>
-            </a:r>
-            <a:r>
-              <a:rPr sz="900" b="0" i="0">
-                <a:solidFill>
-                  <a:srgbClr val="939EB3"/>
-                </a:solidFill>
-                <a:latin typeface="Segoe UI"/>
-                <a:ea typeface="Segoe UI"/>
-                <a:cs typeface="Segoe UI"/>
-              </a:rPr>
-              <a:t>  ·  </a:t>
-            </a:r>
-            <a:r>
-              <a:rPr sz="900" b="0" i="0">
-                <a:solidFill>
-                  <a:srgbClr val="636E85"/>
-                </a:solidFill>
-                <a:latin typeface="Segoe UI"/>
-                <a:ea typeface="Segoe UI"/>
-                <a:cs typeface="Segoe UI"/>
-              </a:rPr>
-              <a:t>Strategy, Innovation and Leadership</a:t>
-            </a:r>
-          </a:p>
-        </p:txBody>
-      </p:sp>
-      <p:sp>
-        <p:nvSpPr>
-          <p:cNvPr id="5" name="TextBox 4"/>
-          <p:cNvSpPr txBox="1"/>
-          <p:nvPr/>
-        </p:nvSpPr>
-        <p:spPr>
-          <a:xfrm>
-            <a:off x="8240677" y="6272784"/>
-            <a:ext cx="2651760" cy="219456"/>
-          </a:xfrm>
-          <a:prstGeom prst="rect">
-            <a:avLst/>
-          </a:prstGeom>
-          <a:noFill/>
-        </p:spPr>
-        <p:txBody>
-          <a:bodyPr wrap="square" lIns="0" rIns="0" tIns="0" bIns="0" anchor="t">
-            <a:spAutoFit/>
-          </a:bodyPr>
-          <a:lstStyle/>
-          <a:p>
-            <a:pPr algn="r">
-              <a:lnSpc>
-                <a:spcPct val="122000"/>
-              </a:lnSpc>
-              <a:spcBef>
-                <a:spcPts val="0"/>
-              </a:spcBef>
-              <a:spcAft>
-                <a:spcPts val="0"/>
-              </a:spcAft>
-            </a:pPr>
-            <a:r>
-              <a:rPr sz="900" b="0" i="0">
-                <a:solidFill>
-                  <a:srgbClr val="636E85"/>
-                </a:solidFill>
-                <a:latin typeface="Segoe UI"/>
-                <a:ea typeface="Segoe UI"/>
-                <a:cs typeface="Segoe UI"/>
-              </a:rPr>
-              <a:t>Lingesh K  ·  OSI2509030</a:t>
-            </a:r>
-            <a:r>
-              <a:rPr sz="900" b="0" i="0">
-                <a:solidFill>
-                  <a:srgbClr val="141C2E"/>
-                </a:solidFill>
-                <a:latin typeface="Segoe UI"/>
-                <a:ea typeface="Segoe UI"/>
-                <a:cs typeface="Segoe UI"/>
-              </a:rPr>
-              <a:t>     </a:t>
-            </a:r>
-            <a:r>
-              <a:rPr sz="900" b="1" i="0">
-                <a:solidFill>
-                  <a:srgbClr val="0E1E3C"/>
-                </a:solidFill>
-                <a:latin typeface="Segoe UI"/>
-                <a:ea typeface="Segoe UI"/>
-                <a:cs typeface="Segoe UI"/>
-              </a:rPr>
-              <a:t>20</a:t>
+              <a:rPr sz="950" b="1" i="0" spc="160">
+                <a:solidFill>
+                  <a:srgbClr val="3B7AF7"/>
+                </a:solidFill>
+                <a:latin typeface="Segoe UI"/>
+                <a:ea typeface="Segoe UI"/>
+                <a:cs typeface="Segoe UI"/>
+              </a:rPr>
+              <a:t>WHERE TO START</a:t>
             </a:r>
           </a:p>
         </p:txBody>
@@ -18894,53 +18063,6 @@
       <p:sp>
         <p:nvSpPr>
           <p:cNvPr id="6" name="TextBox 5"/>
-          <p:cNvSpPr txBox="1"/>
-          <p:nvPr/>
-        </p:nvSpPr>
-        <p:spPr>
-          <a:xfrm>
-            <a:off x="713232" y="566928"/>
-            <a:ext cx="10765231" cy="219456"/>
-          </a:xfrm>
-          <a:prstGeom prst="rect">
-            <a:avLst/>
-          </a:prstGeom>
-          <a:noFill/>
-        </p:spPr>
-        <p:txBody>
-          <a:bodyPr wrap="square" lIns="0" rIns="0" tIns="0" bIns="0" anchor="t">
-            <a:spAutoFit/>
-          </a:bodyPr>
-          <a:lstStyle/>
-          <a:p>
-            <a:pPr algn="l">
-              <a:lnSpc>
-                <a:spcPct val="122000"/>
-              </a:lnSpc>
-              <a:spcBef>
-                <a:spcPts val="0"/>
-              </a:spcBef>
-              <a:spcAft>
-                <a:spcPts val="0"/>
-              </a:spcAft>
-            </a:pPr>
-            <a:r>
-              <a:rPr sz="950" b="1" i="0" spc="160">
-                <a:solidFill>
-                  <a:srgbClr val="3B7AF7"/>
-                </a:solidFill>
-                <a:latin typeface="Segoe UI"/>
-                <a:ea typeface="Segoe UI"/>
-                <a:cs typeface="Segoe UI"/>
-              </a:rPr>
-              <a:t>WHERE TO START</a:t>
-            </a:r>
-          </a:p>
-        </p:txBody>
-      </p:sp>
-      <p:sp>
-        <p:nvSpPr>
-          <p:cNvPr id="7" name="TextBox 6"/>
           <p:cNvSpPr txBox="1"/>
           <p:nvPr/>
         </p:nvSpPr>
@@ -18987,7 +18109,7 @@
       </p:sp>
       <p:sp>
         <p:nvSpPr>
-          <p:cNvPr id="8" name="Rectangle 7"/>
+          <p:cNvPr id="7" name="Rectangle 6"/>
           <p:cNvSpPr/>
           <p:nvPr/>
         </p:nvSpPr>
@@ -19031,7 +18153,7 @@
       </p:sp>
       <p:sp>
         <p:nvSpPr>
-          <p:cNvPr id="9" name="TextBox 8"/>
+          <p:cNvPr id="8" name="TextBox 7"/>
           <p:cNvSpPr txBox="1"/>
           <p:nvPr/>
         </p:nvSpPr>
@@ -19078,7 +18200,7 @@
       </p:sp>
       <p:sp>
         <p:nvSpPr>
-          <p:cNvPr id="10" name="Rectangle 9"/>
+          <p:cNvPr id="9" name="Rectangle 8"/>
           <p:cNvSpPr/>
           <p:nvPr/>
         </p:nvSpPr>
@@ -19122,7 +18244,7 @@
       </p:sp>
       <p:sp>
         <p:nvSpPr>
-          <p:cNvPr id="11" name="Oval 10"/>
+          <p:cNvPr id="10" name="Oval 9"/>
           <p:cNvSpPr/>
           <p:nvPr/>
         </p:nvSpPr>
@@ -19166,7 +18288,7 @@
       </p:sp>
       <p:sp>
         <p:nvSpPr>
-          <p:cNvPr id="12" name="TextBox 11"/>
+          <p:cNvPr id="11" name="TextBox 10"/>
           <p:cNvSpPr txBox="1"/>
           <p:nvPr/>
         </p:nvSpPr>
@@ -19213,7 +18335,7 @@
       </p:sp>
       <p:sp>
         <p:nvSpPr>
-          <p:cNvPr id="13" name="Rounded Rectangle 12"/>
+          <p:cNvPr id="12" name="Rounded Rectangle 11"/>
           <p:cNvSpPr/>
           <p:nvPr/>
         </p:nvSpPr>
@@ -19261,7 +18383,7 @@
       </p:sp>
       <p:sp>
         <p:nvSpPr>
-          <p:cNvPr id="14" name="TextBox 13"/>
+          <p:cNvPr id="13" name="TextBox 12"/>
           <p:cNvSpPr txBox="1"/>
           <p:nvPr/>
         </p:nvSpPr>
@@ -19308,7 +18430,7 @@
       </p:sp>
       <p:sp>
         <p:nvSpPr>
-          <p:cNvPr id="15" name="TextBox 14"/>
+          <p:cNvPr id="14" name="TextBox 13"/>
           <p:cNvSpPr txBox="1"/>
           <p:nvPr/>
         </p:nvSpPr>
@@ -19355,7 +18477,7 @@
       </p:sp>
       <p:sp>
         <p:nvSpPr>
-          <p:cNvPr id="16" name="Oval 15"/>
+          <p:cNvPr id="15" name="Oval 14"/>
           <p:cNvSpPr/>
           <p:nvPr/>
         </p:nvSpPr>
@@ -19399,7 +18521,7 @@
       </p:sp>
       <p:sp>
         <p:nvSpPr>
-          <p:cNvPr id="17" name="TextBox 16"/>
+          <p:cNvPr id="16" name="TextBox 15"/>
           <p:cNvSpPr txBox="1"/>
           <p:nvPr/>
         </p:nvSpPr>
@@ -19446,7 +18568,7 @@
       </p:sp>
       <p:sp>
         <p:nvSpPr>
-          <p:cNvPr id="18" name="Rounded Rectangle 17"/>
+          <p:cNvPr id="17" name="Rounded Rectangle 16"/>
           <p:cNvSpPr/>
           <p:nvPr/>
         </p:nvSpPr>
@@ -19494,7 +18616,7 @@
       </p:sp>
       <p:sp>
         <p:nvSpPr>
-          <p:cNvPr id="19" name="TextBox 18"/>
+          <p:cNvPr id="18" name="TextBox 17"/>
           <p:cNvSpPr txBox="1"/>
           <p:nvPr/>
         </p:nvSpPr>
@@ -19541,7 +18663,7 @@
       </p:sp>
       <p:sp>
         <p:nvSpPr>
-          <p:cNvPr id="20" name="TextBox 19"/>
+          <p:cNvPr id="19" name="TextBox 18"/>
           <p:cNvSpPr txBox="1"/>
           <p:nvPr/>
         </p:nvSpPr>
@@ -19588,7 +18710,7 @@
       </p:sp>
       <p:sp>
         <p:nvSpPr>
-          <p:cNvPr id="21" name="Oval 20"/>
+          <p:cNvPr id="20" name="Oval 19"/>
           <p:cNvSpPr/>
           <p:nvPr/>
         </p:nvSpPr>
@@ -19632,7 +18754,7 @@
       </p:sp>
       <p:sp>
         <p:nvSpPr>
-          <p:cNvPr id="22" name="TextBox 21"/>
+          <p:cNvPr id="21" name="TextBox 20"/>
           <p:cNvSpPr txBox="1"/>
           <p:nvPr/>
         </p:nvSpPr>
@@ -19679,7 +18801,7 @@
       </p:sp>
       <p:sp>
         <p:nvSpPr>
-          <p:cNvPr id="23" name="Rounded Rectangle 22"/>
+          <p:cNvPr id="22" name="Rounded Rectangle 21"/>
           <p:cNvSpPr/>
           <p:nvPr/>
         </p:nvSpPr>
@@ -19727,7 +18849,7 @@
       </p:sp>
       <p:sp>
         <p:nvSpPr>
-          <p:cNvPr id="24" name="TextBox 23"/>
+          <p:cNvPr id="23" name="TextBox 22"/>
           <p:cNvSpPr txBox="1"/>
           <p:nvPr/>
         </p:nvSpPr>
@@ -19774,7 +18896,7 @@
       </p:sp>
       <p:sp>
         <p:nvSpPr>
-          <p:cNvPr id="25" name="TextBox 24"/>
+          <p:cNvPr id="24" name="TextBox 23"/>
           <p:cNvSpPr txBox="1"/>
           <p:nvPr/>
         </p:nvSpPr>
@@ -19821,7 +18943,7 @@
       </p:sp>
       <p:sp>
         <p:nvSpPr>
-          <p:cNvPr id="26" name="Rounded Rectangle 25"/>
+          <p:cNvPr id="25" name="Rounded Rectangle 24"/>
           <p:cNvSpPr/>
           <p:nvPr/>
         </p:nvSpPr>
@@ -19888,7 +19010,7 @@
       </p:sp>
       <p:sp>
         <p:nvSpPr>
-          <p:cNvPr id="27" name="Rectangle 26"/>
+          <p:cNvPr id="26" name="Rectangle 25"/>
           <p:cNvSpPr/>
           <p:nvPr/>
         </p:nvSpPr>
@@ -20441,8 +19563,77 @@
         </p:nvSpPr>
         <p:spPr>
           <a:xfrm>
-            <a:off x="713232" y="6272784"/>
-            <a:ext cx="5597920" cy="219456"/>
+            <a:off x="8240677" y="6272784"/>
+            <a:ext cx="2651760" cy="219456"/>
+          </a:xfrm>
+          <a:prstGeom prst="rect">
+            <a:avLst/>
+          </a:prstGeom>
+          <a:noFill/>
+        </p:spPr>
+        <p:txBody>
+          <a:bodyPr wrap="square" lIns="0" rIns="0" tIns="0" bIns="0" anchor="t">
+            <a:spAutoFit/>
+          </a:bodyPr>
+          <a:lstStyle/>
+          <a:p>
+            <a:pPr algn="r">
+              <a:lnSpc>
+                <a:spcPct val="122000"/>
+              </a:lnSpc>
+              <a:spcBef>
+                <a:spcPts val="0"/>
+              </a:spcBef>
+              <a:spcAft>
+                <a:spcPts val="0"/>
+              </a:spcAft>
+            </a:pPr>
+            <a:r>
+              <a:rPr sz="900" b="0" i="0">
+                <a:solidFill>
+                  <a:srgbClr val="636E85"/>
+                </a:solidFill>
+                <a:latin typeface="Segoe UI"/>
+                <a:ea typeface="Segoe UI"/>
+                <a:cs typeface="Segoe UI"/>
+              </a:rPr>
+              <a:t>Lingesh K  ·  OSI2509030</a:t>
+            </a:r>
+            <a:r>
+              <a:rPr sz="900" b="0" i="0">
+                <a:solidFill>
+                  <a:srgbClr val="141C2E"/>
+                </a:solidFill>
+                <a:latin typeface="Segoe UI"/>
+                <a:ea typeface="Segoe UI"/>
+                <a:cs typeface="Segoe UI"/>
+              </a:rPr>
+              <a:t>     </a:t>
+            </a:r>
+            <a:r>
+              <a:rPr sz="900" b="1" i="0">
+                <a:solidFill>
+                  <a:srgbClr val="0E1E3C"/>
+                </a:solidFill>
+                <a:latin typeface="Segoe UI"/>
+                <a:ea typeface="Segoe UI"/>
+                <a:cs typeface="Segoe UI"/>
+              </a:rPr>
+              <a:t>22</a:t>
+            </a:r>
+          </a:p>
+        </p:txBody>
+      </p:sp>
+      <p:sp>
+        <p:nvSpPr>
+          <p:cNvPr id="5" name="TextBox 4"/>
+          <p:cNvSpPr txBox="1"/>
+          <p:nvPr/>
+        </p:nvSpPr>
+        <p:spPr>
+          <a:xfrm>
+            <a:off x="713232" y="566928"/>
+            <a:ext cx="10765231" cy="219456"/>
           </a:xfrm>
           <a:prstGeom prst="rect">
             <a:avLst/>
@@ -20467,106 +19658,15 @@
               </a:spcAft>
             </a:pPr>
             <a:r>
-              <a:rPr sz="900" b="1" i="0">
-                <a:solidFill>
-                  <a:srgbClr val="0E1E3C"/>
-                </a:solidFill>
-                <a:latin typeface="Segoe UI"/>
-                <a:ea typeface="Segoe UI"/>
-                <a:cs typeface="Segoe UI"/>
-              </a:rPr>
-              <a:t>Unit 5</a:t>
-            </a:r>
-            <a:r>
-              <a:rPr sz="900" b="0" i="0">
-                <a:solidFill>
-                  <a:srgbClr val="939EB3"/>
-                </a:solidFill>
-                <a:latin typeface="Segoe UI"/>
-                <a:ea typeface="Segoe UI"/>
-                <a:cs typeface="Segoe UI"/>
-              </a:rPr>
-              <a:t>  ·  </a:t>
-            </a:r>
-            <a:r>
-              <a:rPr sz="900" b="0" i="0">
-                <a:solidFill>
-                  <a:srgbClr val="636E85"/>
-                </a:solidFill>
-                <a:latin typeface="Segoe UI"/>
-                <a:ea typeface="Segoe UI"/>
-                <a:cs typeface="Segoe UI"/>
-              </a:rPr>
-              <a:t>Strategy, Innovation and Leadership</a:t>
-            </a:r>
-          </a:p>
-        </p:txBody>
-      </p:sp>
-      <p:sp>
-        <p:nvSpPr>
-          <p:cNvPr id="5" name="TextBox 4"/>
-          <p:cNvSpPr txBox="1"/>
-          <p:nvPr/>
-        </p:nvSpPr>
-        <p:spPr>
-          <a:xfrm>
-            <a:off x="8240677" y="6272784"/>
-            <a:ext cx="2651760" cy="219456"/>
-          </a:xfrm>
-          <a:prstGeom prst="rect">
-            <a:avLst/>
-          </a:prstGeom>
-          <a:noFill/>
-        </p:spPr>
-        <p:txBody>
-          <a:bodyPr wrap="square" lIns="0" rIns="0" tIns="0" bIns="0" anchor="t">
-            <a:spAutoFit/>
-          </a:bodyPr>
-          <a:lstStyle/>
-          <a:p>
-            <a:pPr algn="r">
-              <a:lnSpc>
-                <a:spcPct val="122000"/>
-              </a:lnSpc>
-              <a:spcBef>
-                <a:spcPts val="0"/>
-              </a:spcBef>
-              <a:spcAft>
-                <a:spcPts val="0"/>
-              </a:spcAft>
-            </a:pPr>
-            <a:r>
-              <a:rPr sz="900" b="0" i="0">
-                <a:solidFill>
-                  <a:srgbClr val="636E85"/>
-                </a:solidFill>
-                <a:latin typeface="Segoe UI"/>
-                <a:ea typeface="Segoe UI"/>
-                <a:cs typeface="Segoe UI"/>
-              </a:rPr>
-              <a:t>Lingesh K  ·  OSI2509030</a:t>
-            </a:r>
-            <a:r>
-              <a:rPr sz="900" b="0" i="0">
-                <a:solidFill>
-                  <a:srgbClr val="141C2E"/>
-                </a:solidFill>
-                <a:latin typeface="Segoe UI"/>
-                <a:ea typeface="Segoe UI"/>
-                <a:cs typeface="Segoe UI"/>
-              </a:rPr>
-              <a:t>     </a:t>
-            </a:r>
-            <a:r>
-              <a:rPr sz="900" b="1" i="0">
-                <a:solidFill>
-                  <a:srgbClr val="0E1E3C"/>
-                </a:solidFill>
-                <a:latin typeface="Segoe UI"/>
-                <a:ea typeface="Segoe UI"/>
-                <a:cs typeface="Segoe UI"/>
-              </a:rPr>
-              <a:t>22</a:t>
+              <a:rPr sz="950" b="1" i="0" spc="160">
+                <a:solidFill>
+                  <a:srgbClr val="00B3A4"/>
+                </a:solidFill>
+                <a:latin typeface="Segoe UI"/>
+                <a:ea typeface="Segoe UI"/>
+                <a:cs typeface="Segoe UI"/>
+              </a:rPr>
+              <a:t>RECAP</a:t>
             </a:r>
           </a:p>
         </p:txBody>
@@ -20574,53 +19674,6 @@
       <p:sp>
         <p:nvSpPr>
           <p:cNvPr id="6" name="TextBox 5"/>
-          <p:cNvSpPr txBox="1"/>
-          <p:nvPr/>
-        </p:nvSpPr>
-        <p:spPr>
-          <a:xfrm>
-            <a:off x="713232" y="566928"/>
-            <a:ext cx="10765231" cy="219456"/>
-          </a:xfrm>
-          <a:prstGeom prst="rect">
-            <a:avLst/>
-          </a:prstGeom>
-          <a:noFill/>
-        </p:spPr>
-        <p:txBody>
-          <a:bodyPr wrap="square" lIns="0" rIns="0" tIns="0" bIns="0" anchor="t">
-            <a:spAutoFit/>
-          </a:bodyPr>
-          <a:lstStyle/>
-          <a:p>
-            <a:pPr algn="l">
-              <a:lnSpc>
-                <a:spcPct val="122000"/>
-              </a:lnSpc>
-              <a:spcBef>
-                <a:spcPts val="0"/>
-              </a:spcBef>
-              <a:spcAft>
-                <a:spcPts val="0"/>
-              </a:spcAft>
-            </a:pPr>
-            <a:r>
-              <a:rPr sz="950" b="1" i="0" spc="160">
-                <a:solidFill>
-                  <a:srgbClr val="00B3A4"/>
-                </a:solidFill>
-                <a:latin typeface="Segoe UI"/>
-                <a:ea typeface="Segoe UI"/>
-                <a:cs typeface="Segoe UI"/>
-              </a:rPr>
-              <a:t>RECAP</a:t>
-            </a:r>
-          </a:p>
-        </p:txBody>
-      </p:sp>
-      <p:sp>
-        <p:nvSpPr>
-          <p:cNvPr id="7" name="TextBox 6"/>
           <p:cNvSpPr txBox="1"/>
           <p:nvPr/>
         </p:nvSpPr>
@@ -20667,7 +19720,7 @@
       </p:sp>
       <p:sp>
         <p:nvSpPr>
-          <p:cNvPr id="8" name="Rectangle 7"/>
+          <p:cNvPr id="7" name="Rectangle 6"/>
           <p:cNvSpPr/>
           <p:nvPr/>
         </p:nvSpPr>
@@ -20711,7 +19764,7 @@
       </p:sp>
       <p:sp>
         <p:nvSpPr>
-          <p:cNvPr id="9" name="TextBox 8"/>
+          <p:cNvPr id="8" name="TextBox 7"/>
           <p:cNvSpPr txBox="1"/>
           <p:nvPr/>
         </p:nvSpPr>
@@ -20758,7 +19811,7 @@
       </p:sp>
       <p:sp>
         <p:nvSpPr>
-          <p:cNvPr id="10" name="Rounded Rectangle 9"/>
+          <p:cNvPr id="9" name="Rounded Rectangle 8"/>
           <p:cNvSpPr/>
           <p:nvPr/>
         </p:nvSpPr>
@@ -20812,7 +19865,7 @@
       </p:sp>
       <p:sp>
         <p:nvSpPr>
-          <p:cNvPr id="11" name="Rectangle 10"/>
+          <p:cNvPr id="10" name="Rectangle 9"/>
           <p:cNvSpPr/>
           <p:nvPr/>
         </p:nvSpPr>
@@ -20856,7 +19909,7 @@
       </p:sp>
       <p:sp>
         <p:nvSpPr>
-          <p:cNvPr id="12" name="Oval 11"/>
+          <p:cNvPr id="11" name="Oval 10"/>
           <p:cNvSpPr/>
           <p:nvPr/>
         </p:nvSpPr>
@@ -20900,7 +19953,7 @@
       </p:sp>
       <p:sp>
         <p:nvSpPr>
-          <p:cNvPr id="13" name="TextBox 12"/>
+          <p:cNvPr id="12" name="TextBox 11"/>
           <p:cNvSpPr txBox="1"/>
           <p:nvPr/>
         </p:nvSpPr>
@@ -20947,7 +20000,7 @@
       </p:sp>
       <p:sp>
         <p:nvSpPr>
-          <p:cNvPr id="14" name="TextBox 13"/>
+          <p:cNvPr id="13" name="TextBox 12"/>
           <p:cNvSpPr txBox="1"/>
           <p:nvPr/>
         </p:nvSpPr>
@@ -21018,7 +20071,7 @@
       </p:sp>
       <p:sp>
         <p:nvSpPr>
-          <p:cNvPr id="15" name="Rounded Rectangle 14"/>
+          <p:cNvPr id="14" name="Rounded Rectangle 13"/>
           <p:cNvSpPr/>
           <p:nvPr/>
         </p:nvSpPr>
@@ -21072,7 +20125,7 @@
       </p:sp>
       <p:sp>
         <p:nvSpPr>
-          <p:cNvPr id="16" name="Rectangle 15"/>
+          <p:cNvPr id="15" name="Rectangle 14"/>
           <p:cNvSpPr/>
           <p:nvPr/>
         </p:nvSpPr>
@@ -21116,7 +20169,7 @@
       </p:sp>
       <p:sp>
         <p:nvSpPr>
-          <p:cNvPr id="17" name="Oval 16"/>
+          <p:cNvPr id="16" name="Oval 15"/>
           <p:cNvSpPr/>
           <p:nvPr/>
         </p:nvSpPr>
@@ -21160,7 +20213,7 @@
       </p:sp>
       <p:sp>
         <p:nvSpPr>
-          <p:cNvPr id="18" name="TextBox 17"/>
+          <p:cNvPr id="17" name="TextBox 16"/>
           <p:cNvSpPr txBox="1"/>
           <p:nvPr/>
         </p:nvSpPr>
@@ -21207,7 +20260,7 @@
       </p:sp>
       <p:sp>
         <p:nvSpPr>
-          <p:cNvPr id="19" name="TextBox 18"/>
+          <p:cNvPr id="18" name="TextBox 17"/>
           <p:cNvSpPr txBox="1"/>
           <p:nvPr/>
         </p:nvSpPr>
@@ -21278,7 +20331,7 @@
       </p:sp>
       <p:sp>
         <p:nvSpPr>
-          <p:cNvPr id="20" name="Rounded Rectangle 19"/>
+          <p:cNvPr id="19" name="Rounded Rectangle 18"/>
           <p:cNvSpPr/>
           <p:nvPr/>
         </p:nvSpPr>
@@ -21332,7 +20385,7 @@
       </p:sp>
       <p:sp>
         <p:nvSpPr>
-          <p:cNvPr id="21" name="Rectangle 20"/>
+          <p:cNvPr id="20" name="Rectangle 19"/>
           <p:cNvSpPr/>
           <p:nvPr/>
         </p:nvSpPr>
@@ -21376,7 +20429,7 @@
       </p:sp>
       <p:sp>
         <p:nvSpPr>
-          <p:cNvPr id="22" name="Oval 21"/>
+          <p:cNvPr id="21" name="Oval 20"/>
           <p:cNvSpPr/>
           <p:nvPr/>
         </p:nvSpPr>
@@ -21420,7 +20473,7 @@
       </p:sp>
       <p:sp>
         <p:nvSpPr>
-          <p:cNvPr id="23" name="TextBox 22"/>
+          <p:cNvPr id="22" name="TextBox 21"/>
           <p:cNvSpPr txBox="1"/>
           <p:nvPr/>
         </p:nvSpPr>
@@ -21467,7 +20520,7 @@
       </p:sp>
       <p:sp>
         <p:nvSpPr>
-          <p:cNvPr id="24" name="TextBox 23"/>
+          <p:cNvPr id="23" name="TextBox 22"/>
           <p:cNvSpPr txBox="1"/>
           <p:nvPr/>
         </p:nvSpPr>
@@ -21538,7 +20591,7 @@
       </p:sp>
       <p:sp>
         <p:nvSpPr>
-          <p:cNvPr id="25" name="Rounded Rectangle 24"/>
+          <p:cNvPr id="24" name="Rounded Rectangle 23"/>
           <p:cNvSpPr/>
           <p:nvPr/>
         </p:nvSpPr>
@@ -21592,7 +20645,7 @@
       </p:sp>
       <p:sp>
         <p:nvSpPr>
-          <p:cNvPr id="26" name="Rectangle 25"/>
+          <p:cNvPr id="25" name="Rectangle 24"/>
           <p:cNvSpPr/>
           <p:nvPr/>
         </p:nvSpPr>
@@ -21636,7 +20689,7 @@
       </p:sp>
       <p:sp>
         <p:nvSpPr>
-          <p:cNvPr id="27" name="Oval 26"/>
+          <p:cNvPr id="26" name="Oval 25"/>
           <p:cNvSpPr/>
           <p:nvPr/>
         </p:nvSpPr>
@@ -21680,7 +20733,7 @@
       </p:sp>
       <p:sp>
         <p:nvSpPr>
-          <p:cNvPr id="28" name="TextBox 27"/>
+          <p:cNvPr id="27" name="TextBox 26"/>
           <p:cNvSpPr txBox="1"/>
           <p:nvPr/>
         </p:nvSpPr>
@@ -21727,7 +20780,7 @@
       </p:sp>
       <p:sp>
         <p:nvSpPr>
-          <p:cNvPr id="29" name="TextBox 28"/>
+          <p:cNvPr id="28" name="TextBox 27"/>
           <p:cNvSpPr txBox="1"/>
           <p:nvPr/>
         </p:nvSpPr>
@@ -21798,7 +20851,7 @@
       </p:sp>
       <p:sp>
         <p:nvSpPr>
-          <p:cNvPr id="30" name="Rounded Rectangle 29"/>
+          <p:cNvPr id="29" name="Rounded Rectangle 28"/>
           <p:cNvSpPr/>
           <p:nvPr/>
         </p:nvSpPr>
@@ -21852,7 +20905,7 @@
       </p:sp>
       <p:sp>
         <p:nvSpPr>
-          <p:cNvPr id="31" name="Rectangle 30"/>
+          <p:cNvPr id="30" name="Rectangle 29"/>
           <p:cNvSpPr/>
           <p:nvPr/>
         </p:nvSpPr>
@@ -21896,7 +20949,7 @@
       </p:sp>
       <p:sp>
         <p:nvSpPr>
-          <p:cNvPr id="32" name="Oval 31"/>
+          <p:cNvPr id="31" name="Oval 30"/>
           <p:cNvSpPr/>
           <p:nvPr/>
         </p:nvSpPr>
@@ -21940,7 +20993,7 @@
       </p:sp>
       <p:sp>
         <p:nvSpPr>
-          <p:cNvPr id="33" name="TextBox 32"/>
+          <p:cNvPr id="32" name="TextBox 31"/>
           <p:cNvSpPr txBox="1"/>
           <p:nvPr/>
         </p:nvSpPr>
@@ -21987,7 +21040,7 @@
       </p:sp>
       <p:sp>
         <p:nvSpPr>
-          <p:cNvPr id="34" name="TextBox 33"/>
+          <p:cNvPr id="33" name="TextBox 32"/>
           <p:cNvSpPr txBox="1"/>
           <p:nvPr/>
         </p:nvSpPr>
@@ -22058,7 +21111,7 @@
       </p:sp>
       <p:sp>
         <p:nvSpPr>
-          <p:cNvPr id="35" name="Rounded Rectangle 34"/>
+          <p:cNvPr id="34" name="Rounded Rectangle 33"/>
           <p:cNvSpPr/>
           <p:nvPr/>
         </p:nvSpPr>
@@ -22112,7 +21165,7 @@
       </p:sp>
       <p:sp>
         <p:nvSpPr>
-          <p:cNvPr id="36" name="Rectangle 35"/>
+          <p:cNvPr id="35" name="Rectangle 34"/>
           <p:cNvSpPr/>
           <p:nvPr/>
         </p:nvSpPr>
@@ -22156,7 +21209,7 @@
       </p:sp>
       <p:sp>
         <p:nvSpPr>
-          <p:cNvPr id="37" name="Oval 36"/>
+          <p:cNvPr id="36" name="Oval 35"/>
           <p:cNvSpPr/>
           <p:nvPr/>
         </p:nvSpPr>
@@ -22200,7 +21253,7 @@
       </p:sp>
       <p:sp>
         <p:nvSpPr>
-          <p:cNvPr id="38" name="TextBox 37"/>
+          <p:cNvPr id="37" name="TextBox 36"/>
           <p:cNvSpPr txBox="1"/>
           <p:nvPr/>
         </p:nvSpPr>
@@ -22247,7 +21300,7 @@
       </p:sp>
       <p:sp>
         <p:nvSpPr>
-          <p:cNvPr id="39" name="TextBox 38"/>
+          <p:cNvPr id="38" name="TextBox 37"/>
           <p:cNvSpPr txBox="1"/>
           <p:nvPr/>
         </p:nvSpPr>
@@ -22530,53 +21583,6 @@
         </p:nvSpPr>
         <p:spPr>
           <a:xfrm>
-            <a:off x="987552" y="2157984"/>
-            <a:ext cx="6766560" cy="274320"/>
-          </a:xfrm>
-          <a:prstGeom prst="rect">
-            <a:avLst/>
-          </a:prstGeom>
-          <a:noFill/>
-        </p:spPr>
-        <p:txBody>
-          <a:bodyPr wrap="square" lIns="0" rIns="0" tIns="0" bIns="0" anchor="t">
-            <a:spAutoFit/>
-          </a:bodyPr>
-          <a:lstStyle/>
-          <a:p>
-            <a:pPr algn="l">
-              <a:lnSpc>
-                <a:spcPct val="122000"/>
-              </a:lnSpc>
-              <a:spcBef>
-                <a:spcPts val="0"/>
-              </a:spcBef>
-              <a:spcAft>
-                <a:spcPts val="0"/>
-              </a:spcAft>
-            </a:pPr>
-            <a:r>
-              <a:rPr sz="1000" b="1" i="0" spc="200">
-                <a:solidFill>
-                  <a:srgbClr val="00B3A4"/>
-                </a:solidFill>
-                <a:latin typeface="Segoe UI"/>
-                <a:ea typeface="Segoe UI"/>
-                <a:cs typeface="Segoe UI"/>
-              </a:rPr>
-              <a:t>UNIT 05  ·  STRATEGY, INNOVATION AND LEADERSHIP</a:t>
-            </a:r>
-          </a:p>
-        </p:txBody>
-      </p:sp>
-      <p:sp>
-        <p:nvSpPr>
-          <p:cNvPr id="7" name="TextBox 6"/>
-          <p:cNvSpPr txBox="1"/>
-          <p:nvPr/>
-        </p:nvSpPr>
-        <p:spPr>
-          <a:xfrm>
             <a:off x="987552" y="2542032"/>
             <a:ext cx="7315200" cy="1005840"/>
           </a:xfrm>
@@ -22618,7 +21624,7 @@
       </p:sp>
       <p:sp>
         <p:nvSpPr>
-          <p:cNvPr id="8" name="Rectangle 7"/>
+          <p:cNvPr id="7" name="Rectangle 6"/>
           <p:cNvSpPr/>
           <p:nvPr/>
         </p:nvSpPr>
@@ -22662,7 +21668,7 @@
       </p:sp>
       <p:sp>
         <p:nvSpPr>
-          <p:cNvPr id="9" name="TextBox 8"/>
+          <p:cNvPr id="8" name="TextBox 7"/>
           <p:cNvSpPr txBox="1"/>
           <p:nvPr/>
         </p:nvSpPr>
@@ -22709,7 +21715,7 @@
       </p:sp>
       <p:sp>
         <p:nvSpPr>
-          <p:cNvPr id="10" name="TextBox 9"/>
+          <p:cNvPr id="9" name="TextBox 8"/>
           <p:cNvSpPr txBox="1"/>
           <p:nvPr/>
         </p:nvSpPr>
@@ -22828,7 +21834,7 @@
       </p:sp>
       <p:sp>
         <p:nvSpPr>
-          <p:cNvPr id="11" name="logo-plate"/>
+          <p:cNvPr id="10" name="logo-plate"/>
           <p:cNvSpPr/>
           <p:nvPr/>
         </p:nvSpPr>
@@ -22874,7 +21880,7 @@
       </p:sp>
       <p:pic>
         <p:nvPicPr>
-          <p:cNvPr id="12" name="college-logo" descr="logo-full.png"/>
+          <p:cNvPr id="11" name="college-logo" descr="logo-full.png"/>
           <p:cNvPicPr>
             <a:picLocks noChangeAspect="1"/>
           </p:cNvPicPr>
@@ -22898,7 +21904,7 @@
       </p:pic>
       <p:sp>
         <p:nvSpPr>
-          <p:cNvPr id="13" name="Rectangle 12"/>
+          <p:cNvPr id="12" name="Rectangle 11"/>
           <p:cNvSpPr/>
           <p:nvPr/>
         </p:nvSpPr>
@@ -22942,7 +21948,7 @@
       </p:sp>
       <p:sp>
         <p:nvSpPr>
-          <p:cNvPr id="14" name="TextBox 13"/>
+          <p:cNvPr id="13" name="TextBox 12"/>
           <p:cNvSpPr txBox="1"/>
           <p:nvPr/>
         </p:nvSpPr>
@@ -23005,28 +22011,6 @@
                 <a:cs typeface="Segoe UI"/>
               </a:rPr>
               <a:t>OSI2509030</a:t>
-            </a:r>
-            <a:r>
-              <a:rPr sz="1000" b="0" i="0">
-                <a:solidFill>
-                  <a:srgbClr val="4A5E86"/>
-                </a:solidFill>
-                <a:latin typeface="Segoe UI"/>
-                <a:ea typeface="Segoe UI"/>
-                <a:cs typeface="Segoe UI"/>
-              </a:rPr>
-              <a:t>   ·   </a:t>
-            </a:r>
-            <a:r>
-              <a:rPr sz="1000" b="0" i="0">
-                <a:solidFill>
-                  <a:srgbClr val="7E91B4"/>
-                </a:solidFill>
-                <a:latin typeface="Segoe UI"/>
-                <a:ea typeface="Segoe UI"/>
-                <a:cs typeface="Segoe UI"/>
-              </a:rPr>
-              <a:t>PGPM · Systems Specialisation</a:t>
             </a:r>
           </a:p>
         </p:txBody>
@@ -23424,54 +22408,7 @@
       </p:sp>
       <p:sp>
         <p:nvSpPr>
-          <p:cNvPr id="10" name="TextBox 9"/>
-          <p:cNvSpPr txBox="1"/>
-          <p:nvPr/>
-        </p:nvSpPr>
-        <p:spPr>
-          <a:xfrm>
-            <a:off x="987552" y="5943600"/>
-            <a:ext cx="6400800" cy="274320"/>
-          </a:xfrm>
-          <a:prstGeom prst="rect">
-            <a:avLst/>
-          </a:prstGeom>
-          <a:noFill/>
-        </p:spPr>
-        <p:txBody>
-          <a:bodyPr wrap="square" lIns="0" rIns="0" tIns="0" bIns="0" anchor="t">
-            <a:spAutoFit/>
-          </a:bodyPr>
-          <a:lstStyle/>
-          <a:p>
-            <a:pPr algn="l">
-              <a:lnSpc>
-                <a:spcPct val="122000"/>
-              </a:lnSpc>
-              <a:spcBef>
-                <a:spcPts val="0"/>
-              </a:spcBef>
-              <a:spcAft>
-                <a:spcPts val="0"/>
-              </a:spcAft>
-            </a:pPr>
-            <a:r>
-              <a:rPr sz="900" b="1" i="0" spc="160">
-                <a:solidFill>
-                  <a:srgbClr val="6B7FA6"/>
-                </a:solidFill>
-                <a:latin typeface="Segoe UI"/>
-                <a:ea typeface="Segoe UI"/>
-                <a:cs typeface="Segoe UI"/>
-              </a:rPr>
-              <a:t>UNIT 5  ·  STRATEGY, INNOVATION AND LEADERSHIP</a:t>
-            </a:r>
-          </a:p>
-        </p:txBody>
-      </p:sp>
-      <p:sp>
-        <p:nvSpPr>
-          <p:cNvPr id="11" name="logo-plate"/>
+          <p:cNvPr id="10" name="logo-plate"/>
           <p:cNvSpPr/>
           <p:nvPr/>
         </p:nvSpPr>
@@ -23517,7 +22454,7 @@
       </p:sp>
       <p:pic>
         <p:nvPicPr>
-          <p:cNvPr id="12" name="college-logo" descr="logo-full.png"/>
+          <p:cNvPr id="11" name="college-logo" descr="logo-full.png"/>
           <p:cNvPicPr>
             <a:picLocks noChangeAspect="1"/>
           </p:cNvPicPr>
@@ -23633,8 +22570,77 @@
         </p:nvSpPr>
         <p:spPr>
           <a:xfrm>
-            <a:off x="713232" y="6272784"/>
-            <a:ext cx="5597920" cy="219456"/>
+            <a:off x="8240677" y="6272784"/>
+            <a:ext cx="2651760" cy="219456"/>
+          </a:xfrm>
+          <a:prstGeom prst="rect">
+            <a:avLst/>
+          </a:prstGeom>
+          <a:noFill/>
+        </p:spPr>
+        <p:txBody>
+          <a:bodyPr wrap="square" lIns="0" rIns="0" tIns="0" bIns="0" anchor="t">
+            <a:spAutoFit/>
+          </a:bodyPr>
+          <a:lstStyle/>
+          <a:p>
+            <a:pPr algn="r">
+              <a:lnSpc>
+                <a:spcPct val="122000"/>
+              </a:lnSpc>
+              <a:spcBef>
+                <a:spcPts val="0"/>
+              </a:spcBef>
+              <a:spcAft>
+                <a:spcPts val="0"/>
+              </a:spcAft>
+            </a:pPr>
+            <a:r>
+              <a:rPr sz="900" b="0" i="0">
+                <a:solidFill>
+                  <a:srgbClr val="636E85"/>
+                </a:solidFill>
+                <a:latin typeface="Segoe UI"/>
+                <a:ea typeface="Segoe UI"/>
+                <a:cs typeface="Segoe UI"/>
+              </a:rPr>
+              <a:t>Lingesh K  ·  OSI2509030</a:t>
+            </a:r>
+            <a:r>
+              <a:rPr sz="900" b="0" i="0">
+                <a:solidFill>
+                  <a:srgbClr val="141C2E"/>
+                </a:solidFill>
+                <a:latin typeface="Segoe UI"/>
+                <a:ea typeface="Segoe UI"/>
+                <a:cs typeface="Segoe UI"/>
+              </a:rPr>
+              <a:t>     </a:t>
+            </a:r>
+            <a:r>
+              <a:rPr sz="900" b="1" i="0">
+                <a:solidFill>
+                  <a:srgbClr val="0E1E3C"/>
+                </a:solidFill>
+                <a:latin typeface="Segoe UI"/>
+                <a:ea typeface="Segoe UI"/>
+                <a:cs typeface="Segoe UI"/>
+              </a:rPr>
+              <a:t>04</a:t>
+            </a:r>
+          </a:p>
+        </p:txBody>
+      </p:sp>
+      <p:sp>
+        <p:nvSpPr>
+          <p:cNvPr id="5" name="TextBox 4"/>
+          <p:cNvSpPr txBox="1"/>
+          <p:nvPr/>
+        </p:nvSpPr>
+        <p:spPr>
+          <a:xfrm>
+            <a:off x="713232" y="566928"/>
+            <a:ext cx="10765231" cy="219456"/>
           </a:xfrm>
           <a:prstGeom prst="rect">
             <a:avLst/>
@@ -23659,106 +22665,15 @@
               </a:spcAft>
             </a:pPr>
             <a:r>
-              <a:rPr sz="900" b="1" i="0">
-                <a:solidFill>
-                  <a:srgbClr val="0E1E3C"/>
-                </a:solidFill>
-                <a:latin typeface="Segoe UI"/>
-                <a:ea typeface="Segoe UI"/>
-                <a:cs typeface="Segoe UI"/>
-              </a:rPr>
-              <a:t>Unit 5</a:t>
-            </a:r>
-            <a:r>
-              <a:rPr sz="900" b="0" i="0">
-                <a:solidFill>
-                  <a:srgbClr val="939EB3"/>
-                </a:solidFill>
-                <a:latin typeface="Segoe UI"/>
-                <a:ea typeface="Segoe UI"/>
-                <a:cs typeface="Segoe UI"/>
-              </a:rPr>
-              <a:t>  ·  </a:t>
-            </a:r>
-            <a:r>
-              <a:rPr sz="900" b="0" i="0">
-                <a:solidFill>
-                  <a:srgbClr val="636E85"/>
-                </a:solidFill>
-                <a:latin typeface="Segoe UI"/>
-                <a:ea typeface="Segoe UI"/>
-                <a:cs typeface="Segoe UI"/>
-              </a:rPr>
-              <a:t>Strategy, Innovation and Leadership</a:t>
-            </a:r>
-          </a:p>
-        </p:txBody>
-      </p:sp>
-      <p:sp>
-        <p:nvSpPr>
-          <p:cNvPr id="5" name="TextBox 4"/>
-          <p:cNvSpPr txBox="1"/>
-          <p:nvPr/>
-        </p:nvSpPr>
-        <p:spPr>
-          <a:xfrm>
-            <a:off x="8240677" y="6272784"/>
-            <a:ext cx="2651760" cy="219456"/>
-          </a:xfrm>
-          <a:prstGeom prst="rect">
-            <a:avLst/>
-          </a:prstGeom>
-          <a:noFill/>
-        </p:spPr>
-        <p:txBody>
-          <a:bodyPr wrap="square" lIns="0" rIns="0" tIns="0" bIns="0" anchor="t">
-            <a:spAutoFit/>
-          </a:bodyPr>
-          <a:lstStyle/>
-          <a:p>
-            <a:pPr algn="r">
-              <a:lnSpc>
-                <a:spcPct val="122000"/>
-              </a:lnSpc>
-              <a:spcBef>
-                <a:spcPts val="0"/>
-              </a:spcBef>
-              <a:spcAft>
-                <a:spcPts val="0"/>
-              </a:spcAft>
-            </a:pPr>
-            <a:r>
-              <a:rPr sz="900" b="0" i="0">
-                <a:solidFill>
-                  <a:srgbClr val="636E85"/>
-                </a:solidFill>
-                <a:latin typeface="Segoe UI"/>
-                <a:ea typeface="Segoe UI"/>
-                <a:cs typeface="Segoe UI"/>
-              </a:rPr>
-              <a:t>Lingesh K  ·  OSI2509030</a:t>
-            </a:r>
-            <a:r>
-              <a:rPr sz="900" b="0" i="0">
-                <a:solidFill>
-                  <a:srgbClr val="141C2E"/>
-                </a:solidFill>
-                <a:latin typeface="Segoe UI"/>
-                <a:ea typeface="Segoe UI"/>
-                <a:cs typeface="Segoe UI"/>
-              </a:rPr>
-              <a:t>     </a:t>
-            </a:r>
-            <a:r>
-              <a:rPr sz="900" b="1" i="0">
-                <a:solidFill>
-                  <a:srgbClr val="0E1E3C"/>
-                </a:solidFill>
-                <a:latin typeface="Segoe UI"/>
-                <a:ea typeface="Segoe UI"/>
-                <a:cs typeface="Segoe UI"/>
-              </a:rPr>
-              <a:t>04</a:t>
+              <a:rPr sz="950" b="1" i="0" spc="160">
+                <a:solidFill>
+                  <a:srgbClr val="3B7AF7"/>
+                </a:solidFill>
+                <a:latin typeface="Segoe UI"/>
+                <a:ea typeface="Segoe UI"/>
+                <a:cs typeface="Segoe UI"/>
+              </a:rPr>
+              <a:t>THE SHIFT</a:t>
             </a:r>
           </a:p>
         </p:txBody>
@@ -23766,53 +22681,6 @@
       <p:sp>
         <p:nvSpPr>
           <p:cNvPr id="6" name="TextBox 5"/>
-          <p:cNvSpPr txBox="1"/>
-          <p:nvPr/>
-        </p:nvSpPr>
-        <p:spPr>
-          <a:xfrm>
-            <a:off x="713232" y="566928"/>
-            <a:ext cx="10765231" cy="219456"/>
-          </a:xfrm>
-          <a:prstGeom prst="rect">
-            <a:avLst/>
-          </a:prstGeom>
-          <a:noFill/>
-        </p:spPr>
-        <p:txBody>
-          <a:bodyPr wrap="square" lIns="0" rIns="0" tIns="0" bIns="0" anchor="t">
-            <a:spAutoFit/>
-          </a:bodyPr>
-          <a:lstStyle/>
-          <a:p>
-            <a:pPr algn="l">
-              <a:lnSpc>
-                <a:spcPct val="122000"/>
-              </a:lnSpc>
-              <a:spcBef>
-                <a:spcPts val="0"/>
-              </a:spcBef>
-              <a:spcAft>
-                <a:spcPts val="0"/>
-              </a:spcAft>
-            </a:pPr>
-            <a:r>
-              <a:rPr sz="950" b="1" i="0" spc="160">
-                <a:solidFill>
-                  <a:srgbClr val="3B7AF7"/>
-                </a:solidFill>
-                <a:latin typeface="Segoe UI"/>
-                <a:ea typeface="Segoe UI"/>
-                <a:cs typeface="Segoe UI"/>
-              </a:rPr>
-              <a:t>THE SHIFT</a:t>
-            </a:r>
-          </a:p>
-        </p:txBody>
-      </p:sp>
-      <p:sp>
-        <p:nvSpPr>
-          <p:cNvPr id="7" name="TextBox 6"/>
           <p:cNvSpPr txBox="1"/>
           <p:nvPr/>
         </p:nvSpPr>
@@ -23859,7 +22727,7 @@
       </p:sp>
       <p:sp>
         <p:nvSpPr>
-          <p:cNvPr id="8" name="Rectangle 7"/>
+          <p:cNvPr id="7" name="Rectangle 6"/>
           <p:cNvSpPr/>
           <p:nvPr/>
         </p:nvSpPr>
@@ -23903,7 +22771,7 @@
       </p:sp>
       <p:sp>
         <p:nvSpPr>
-          <p:cNvPr id="9" name="TextBox 8"/>
+          <p:cNvPr id="8" name="TextBox 7"/>
           <p:cNvSpPr txBox="1"/>
           <p:nvPr/>
         </p:nvSpPr>
@@ -23950,7 +22818,7 @@
       </p:sp>
       <p:sp>
         <p:nvSpPr>
-          <p:cNvPr id="10" name="Rounded Rectangle 9"/>
+          <p:cNvPr id="9" name="Rounded Rectangle 8"/>
           <p:cNvSpPr/>
           <p:nvPr/>
         </p:nvSpPr>
@@ -23996,7 +22864,7 @@
       </p:sp>
       <p:sp>
         <p:nvSpPr>
-          <p:cNvPr id="11" name="Rectangle 10"/>
+          <p:cNvPr id="10" name="Rectangle 9"/>
           <p:cNvSpPr/>
           <p:nvPr/>
         </p:nvSpPr>
@@ -24040,7 +22908,7 @@
       </p:sp>
       <p:sp>
         <p:nvSpPr>
-          <p:cNvPr id="12" name="TextBox 11"/>
+          <p:cNvPr id="11" name="TextBox 10"/>
           <p:cNvSpPr txBox="1"/>
           <p:nvPr/>
         </p:nvSpPr>
@@ -24087,7 +22955,7 @@
       </p:sp>
       <p:sp>
         <p:nvSpPr>
-          <p:cNvPr id="13" name="TextBox 12"/>
+          <p:cNvPr id="12" name="TextBox 11"/>
           <p:cNvSpPr txBox="1"/>
           <p:nvPr/>
         </p:nvSpPr>
@@ -24134,7 +23002,7 @@
       </p:sp>
       <p:sp>
         <p:nvSpPr>
-          <p:cNvPr id="14" name="Rounded Rectangle 13"/>
+          <p:cNvPr id="13" name="Rounded Rectangle 12"/>
           <p:cNvSpPr/>
           <p:nvPr/>
         </p:nvSpPr>
@@ -24180,7 +23048,7 @@
       </p:sp>
       <p:sp>
         <p:nvSpPr>
-          <p:cNvPr id="15" name="Rectangle 14"/>
+          <p:cNvPr id="14" name="Rectangle 13"/>
           <p:cNvSpPr/>
           <p:nvPr/>
         </p:nvSpPr>
@@ -24224,7 +23092,7 @@
       </p:sp>
       <p:sp>
         <p:nvSpPr>
-          <p:cNvPr id="16" name="TextBox 15"/>
+          <p:cNvPr id="15" name="TextBox 14"/>
           <p:cNvSpPr txBox="1"/>
           <p:nvPr/>
         </p:nvSpPr>
@@ -24271,7 +23139,7 @@
       </p:sp>
       <p:sp>
         <p:nvSpPr>
-          <p:cNvPr id="17" name="TextBox 16"/>
+          <p:cNvPr id="16" name="TextBox 15"/>
           <p:cNvSpPr txBox="1"/>
           <p:nvPr/>
         </p:nvSpPr>
@@ -24318,7 +23186,7 @@
       </p:sp>
       <p:sp>
         <p:nvSpPr>
-          <p:cNvPr id="18" name="Rounded Rectangle 17"/>
+          <p:cNvPr id="17" name="Rounded Rectangle 16"/>
           <p:cNvSpPr/>
           <p:nvPr/>
         </p:nvSpPr>
@@ -24364,7 +23232,7 @@
       </p:sp>
       <p:sp>
         <p:nvSpPr>
-          <p:cNvPr id="19" name="Rectangle 18"/>
+          <p:cNvPr id="18" name="Rectangle 17"/>
           <p:cNvSpPr/>
           <p:nvPr/>
         </p:nvSpPr>
@@ -24408,7 +23276,7 @@
       </p:sp>
       <p:sp>
         <p:nvSpPr>
-          <p:cNvPr id="20" name="TextBox 19"/>
+          <p:cNvPr id="19" name="TextBox 18"/>
           <p:cNvSpPr txBox="1"/>
           <p:nvPr/>
         </p:nvSpPr>
@@ -24455,7 +23323,7 @@
       </p:sp>
       <p:sp>
         <p:nvSpPr>
-          <p:cNvPr id="21" name="TextBox 20"/>
+          <p:cNvPr id="20" name="TextBox 19"/>
           <p:cNvSpPr txBox="1"/>
           <p:nvPr/>
         </p:nvSpPr>
@@ -24502,7 +23370,7 @@
       </p:sp>
       <p:sp>
         <p:nvSpPr>
-          <p:cNvPr id="22" name="Rounded Rectangle 21"/>
+          <p:cNvPr id="21" name="Rounded Rectangle 20"/>
           <p:cNvSpPr/>
           <p:nvPr/>
         </p:nvSpPr>
@@ -24548,7 +23416,7 @@
       </p:sp>
       <p:sp>
         <p:nvSpPr>
-          <p:cNvPr id="23" name="Rectangle 22"/>
+          <p:cNvPr id="22" name="Rectangle 21"/>
           <p:cNvSpPr/>
           <p:nvPr/>
         </p:nvSpPr>
@@ -24592,7 +23460,7 @@
       </p:sp>
       <p:sp>
         <p:nvSpPr>
-          <p:cNvPr id="24" name="TextBox 23"/>
+          <p:cNvPr id="23" name="TextBox 22"/>
           <p:cNvSpPr txBox="1"/>
           <p:nvPr/>
         </p:nvSpPr>
@@ -24639,7 +23507,7 @@
       </p:sp>
       <p:sp>
         <p:nvSpPr>
-          <p:cNvPr id="25" name="TextBox 24"/>
+          <p:cNvPr id="24" name="TextBox 23"/>
           <p:cNvSpPr txBox="1"/>
           <p:nvPr/>
         </p:nvSpPr>
@@ -24778,8 +23646,77 @@
         </p:nvSpPr>
         <p:spPr>
           <a:xfrm>
-            <a:off x="713232" y="6272784"/>
-            <a:ext cx="5597920" cy="219456"/>
+            <a:off x="8240677" y="6272784"/>
+            <a:ext cx="2651760" cy="219456"/>
+          </a:xfrm>
+          <a:prstGeom prst="rect">
+            <a:avLst/>
+          </a:prstGeom>
+          <a:noFill/>
+        </p:spPr>
+        <p:txBody>
+          <a:bodyPr wrap="square" lIns="0" rIns="0" tIns="0" bIns="0" anchor="t">
+            <a:spAutoFit/>
+          </a:bodyPr>
+          <a:lstStyle/>
+          <a:p>
+            <a:pPr algn="r">
+              <a:lnSpc>
+                <a:spcPct val="122000"/>
+              </a:lnSpc>
+              <a:spcBef>
+                <a:spcPts val="0"/>
+              </a:spcBef>
+              <a:spcAft>
+                <a:spcPts val="0"/>
+              </a:spcAft>
+            </a:pPr>
+            <a:r>
+              <a:rPr sz="900" b="0" i="0">
+                <a:solidFill>
+                  <a:srgbClr val="636E85"/>
+                </a:solidFill>
+                <a:latin typeface="Segoe UI"/>
+                <a:ea typeface="Segoe UI"/>
+                <a:cs typeface="Segoe UI"/>
+              </a:rPr>
+              <a:t>Lingesh K  ·  OSI2509030</a:t>
+            </a:r>
+            <a:r>
+              <a:rPr sz="900" b="0" i="0">
+                <a:solidFill>
+                  <a:srgbClr val="141C2E"/>
+                </a:solidFill>
+                <a:latin typeface="Segoe UI"/>
+                <a:ea typeface="Segoe UI"/>
+                <a:cs typeface="Segoe UI"/>
+              </a:rPr>
+              <a:t>     </a:t>
+            </a:r>
+            <a:r>
+              <a:rPr sz="900" b="1" i="0">
+                <a:solidFill>
+                  <a:srgbClr val="0E1E3C"/>
+                </a:solidFill>
+                <a:latin typeface="Segoe UI"/>
+                <a:ea typeface="Segoe UI"/>
+                <a:cs typeface="Segoe UI"/>
+              </a:rPr>
+              <a:t>05</a:t>
+            </a:r>
+          </a:p>
+        </p:txBody>
+      </p:sp>
+      <p:sp>
+        <p:nvSpPr>
+          <p:cNvPr id="5" name="TextBox 4"/>
+          <p:cNvSpPr txBox="1"/>
+          <p:nvPr/>
+        </p:nvSpPr>
+        <p:spPr>
+          <a:xfrm>
+            <a:off x="713232" y="566928"/>
+            <a:ext cx="10765231" cy="219456"/>
           </a:xfrm>
           <a:prstGeom prst="rect">
             <a:avLst/>
@@ -24804,106 +23741,15 @@
               </a:spcAft>
             </a:pPr>
             <a:r>
-              <a:rPr sz="900" b="1" i="0">
-                <a:solidFill>
-                  <a:srgbClr val="0E1E3C"/>
-                </a:solidFill>
-                <a:latin typeface="Segoe UI"/>
-                <a:ea typeface="Segoe UI"/>
-                <a:cs typeface="Segoe UI"/>
-              </a:rPr>
-              <a:t>Unit 5</a:t>
-            </a:r>
-            <a:r>
-              <a:rPr sz="900" b="0" i="0">
-                <a:solidFill>
-                  <a:srgbClr val="939EB3"/>
-                </a:solidFill>
-                <a:latin typeface="Segoe UI"/>
-                <a:ea typeface="Segoe UI"/>
-                <a:cs typeface="Segoe UI"/>
-              </a:rPr>
-              <a:t>  ·  </a:t>
-            </a:r>
-            <a:r>
-              <a:rPr sz="900" b="0" i="0">
-                <a:solidFill>
-                  <a:srgbClr val="636E85"/>
-                </a:solidFill>
-                <a:latin typeface="Segoe UI"/>
-                <a:ea typeface="Segoe UI"/>
-                <a:cs typeface="Segoe UI"/>
-              </a:rPr>
-              <a:t>Strategy, Innovation and Leadership</a:t>
-            </a:r>
-          </a:p>
-        </p:txBody>
-      </p:sp>
-      <p:sp>
-        <p:nvSpPr>
-          <p:cNvPr id="5" name="TextBox 4"/>
-          <p:cNvSpPr txBox="1"/>
-          <p:nvPr/>
-        </p:nvSpPr>
-        <p:spPr>
-          <a:xfrm>
-            <a:off x="8240677" y="6272784"/>
-            <a:ext cx="2651760" cy="219456"/>
-          </a:xfrm>
-          <a:prstGeom prst="rect">
-            <a:avLst/>
-          </a:prstGeom>
-          <a:noFill/>
-        </p:spPr>
-        <p:txBody>
-          <a:bodyPr wrap="square" lIns="0" rIns="0" tIns="0" bIns="0" anchor="t">
-            <a:spAutoFit/>
-          </a:bodyPr>
-          <a:lstStyle/>
-          <a:p>
-            <a:pPr algn="r">
-              <a:lnSpc>
-                <a:spcPct val="122000"/>
-              </a:lnSpc>
-              <a:spcBef>
-                <a:spcPts val="0"/>
-              </a:spcBef>
-              <a:spcAft>
-                <a:spcPts val="0"/>
-              </a:spcAft>
-            </a:pPr>
-            <a:r>
-              <a:rPr sz="900" b="0" i="0">
-                <a:solidFill>
-                  <a:srgbClr val="636E85"/>
-                </a:solidFill>
-                <a:latin typeface="Segoe UI"/>
-                <a:ea typeface="Segoe UI"/>
-                <a:cs typeface="Segoe UI"/>
-              </a:rPr>
-              <a:t>Lingesh K  ·  OSI2509030</a:t>
-            </a:r>
-            <a:r>
-              <a:rPr sz="900" b="0" i="0">
-                <a:solidFill>
-                  <a:srgbClr val="141C2E"/>
-                </a:solidFill>
-                <a:latin typeface="Segoe UI"/>
-                <a:ea typeface="Segoe UI"/>
-                <a:cs typeface="Segoe UI"/>
-              </a:rPr>
-              <a:t>     </a:t>
-            </a:r>
-            <a:r>
-              <a:rPr sz="900" b="1" i="0">
-                <a:solidFill>
-                  <a:srgbClr val="0E1E3C"/>
-                </a:solidFill>
-                <a:latin typeface="Segoe UI"/>
-                <a:ea typeface="Segoe UI"/>
-                <a:cs typeface="Segoe UI"/>
-              </a:rPr>
-              <a:t>05</a:t>
+              <a:rPr sz="950" b="1" i="0" spc="160">
+                <a:solidFill>
+                  <a:srgbClr val="3B7AF7"/>
+                </a:solidFill>
+                <a:latin typeface="Segoe UI"/>
+                <a:ea typeface="Segoe UI"/>
+                <a:cs typeface="Segoe UI"/>
+              </a:rPr>
+              <a:t>WHAT DID NOT CHANGE</a:t>
             </a:r>
           </a:p>
         </p:txBody>
@@ -24911,53 +23757,6 @@
       <p:sp>
         <p:nvSpPr>
           <p:cNvPr id="6" name="TextBox 5"/>
-          <p:cNvSpPr txBox="1"/>
-          <p:nvPr/>
-        </p:nvSpPr>
-        <p:spPr>
-          <a:xfrm>
-            <a:off x="713232" y="566928"/>
-            <a:ext cx="10765231" cy="219456"/>
-          </a:xfrm>
-          <a:prstGeom prst="rect">
-            <a:avLst/>
-          </a:prstGeom>
-          <a:noFill/>
-        </p:spPr>
-        <p:txBody>
-          <a:bodyPr wrap="square" lIns="0" rIns="0" tIns="0" bIns="0" anchor="t">
-            <a:spAutoFit/>
-          </a:bodyPr>
-          <a:lstStyle/>
-          <a:p>
-            <a:pPr algn="l">
-              <a:lnSpc>
-                <a:spcPct val="122000"/>
-              </a:lnSpc>
-              <a:spcBef>
-                <a:spcPts val="0"/>
-              </a:spcBef>
-              <a:spcAft>
-                <a:spcPts val="0"/>
-              </a:spcAft>
-            </a:pPr>
-            <a:r>
-              <a:rPr sz="950" b="1" i="0" spc="160">
-                <a:solidFill>
-                  <a:srgbClr val="3B7AF7"/>
-                </a:solidFill>
-                <a:latin typeface="Segoe UI"/>
-                <a:ea typeface="Segoe UI"/>
-                <a:cs typeface="Segoe UI"/>
-              </a:rPr>
-              <a:t>WHAT DID NOT CHANGE</a:t>
-            </a:r>
-          </a:p>
-        </p:txBody>
-      </p:sp>
-      <p:sp>
-        <p:nvSpPr>
-          <p:cNvPr id="7" name="TextBox 6"/>
           <p:cNvSpPr txBox="1"/>
           <p:nvPr/>
         </p:nvSpPr>
@@ -25004,7 +23803,7 @@
       </p:sp>
       <p:sp>
         <p:nvSpPr>
-          <p:cNvPr id="8" name="Rectangle 7"/>
+          <p:cNvPr id="7" name="Rectangle 6"/>
           <p:cNvSpPr/>
           <p:nvPr/>
         </p:nvSpPr>
@@ -25048,7 +23847,7 @@
       </p:sp>
       <p:sp>
         <p:nvSpPr>
-          <p:cNvPr id="9" name="Rounded Rectangle 8"/>
+          <p:cNvPr id="8" name="Rounded Rectangle 7"/>
           <p:cNvSpPr/>
           <p:nvPr/>
         </p:nvSpPr>
@@ -25102,7 +23901,7 @@
       </p:sp>
       <p:sp>
         <p:nvSpPr>
-          <p:cNvPr id="10" name="Rectangle 9"/>
+          <p:cNvPr id="9" name="Rectangle 8"/>
           <p:cNvSpPr/>
           <p:nvPr/>
         </p:nvSpPr>
@@ -25146,7 +23945,7 @@
       </p:sp>
       <p:sp>
         <p:nvSpPr>
-          <p:cNvPr id="11" name="Rounded Rectangle 10"/>
+          <p:cNvPr id="10" name="Rounded Rectangle 9"/>
           <p:cNvSpPr/>
           <p:nvPr/>
         </p:nvSpPr>
@@ -25213,7 +24012,7 @@
       </p:sp>
       <p:sp>
         <p:nvSpPr>
-          <p:cNvPr id="12" name="TextBox 11"/>
+          <p:cNvPr id="11" name="TextBox 10"/>
           <p:cNvSpPr txBox="1"/>
           <p:nvPr/>
         </p:nvSpPr>
@@ -25260,7 +24059,7 @@
       </p:sp>
       <p:sp>
         <p:nvSpPr>
-          <p:cNvPr id="13" name="Rectangle 12"/>
+          <p:cNvPr id="12" name="Rectangle 11"/>
           <p:cNvSpPr/>
           <p:nvPr/>
         </p:nvSpPr>
@@ -25304,7 +24103,7 @@
       </p:sp>
       <p:sp>
         <p:nvSpPr>
-          <p:cNvPr id="14" name="Rounded Rectangle 13"/>
+          <p:cNvPr id="13" name="Rounded Rectangle 12"/>
           <p:cNvSpPr/>
           <p:nvPr/>
         </p:nvSpPr>
@@ -25350,7 +24149,7 @@
       </p:sp>
       <p:sp>
         <p:nvSpPr>
-          <p:cNvPr id="15" name="TextBox 14"/>
+          <p:cNvPr id="14" name="TextBox 13"/>
           <p:cNvSpPr txBox="1"/>
           <p:nvPr/>
         </p:nvSpPr>
@@ -25397,7 +24196,7 @@
       </p:sp>
       <p:sp>
         <p:nvSpPr>
-          <p:cNvPr id="16" name="Rounded Rectangle 15"/>
+          <p:cNvPr id="15" name="Rounded Rectangle 14"/>
           <p:cNvSpPr/>
           <p:nvPr/>
         </p:nvSpPr>
@@ -25443,7 +24242,7 @@
       </p:sp>
       <p:sp>
         <p:nvSpPr>
-          <p:cNvPr id="17" name="TextBox 16"/>
+          <p:cNvPr id="16" name="TextBox 15"/>
           <p:cNvSpPr txBox="1"/>
           <p:nvPr/>
         </p:nvSpPr>
@@ -25490,7 +24289,7 @@
       </p:sp>
       <p:sp>
         <p:nvSpPr>
-          <p:cNvPr id="18" name="Rounded Rectangle 17"/>
+          <p:cNvPr id="17" name="Rounded Rectangle 16"/>
           <p:cNvSpPr/>
           <p:nvPr/>
         </p:nvSpPr>
@@ -25536,7 +24335,7 @@
       </p:sp>
       <p:sp>
         <p:nvSpPr>
-          <p:cNvPr id="19" name="TextBox 18"/>
+          <p:cNvPr id="18" name="TextBox 17"/>
           <p:cNvSpPr txBox="1"/>
           <p:nvPr/>
         </p:nvSpPr>
@@ -25583,7 +24382,7 @@
       </p:sp>
       <p:sp>
         <p:nvSpPr>
-          <p:cNvPr id="20" name="Rounded Rectangle 19"/>
+          <p:cNvPr id="19" name="Rounded Rectangle 18"/>
           <p:cNvSpPr/>
           <p:nvPr/>
         </p:nvSpPr>
@@ -25629,7 +24428,7 @@
       </p:sp>
       <p:sp>
         <p:nvSpPr>
-          <p:cNvPr id="21" name="TextBox 20"/>
+          <p:cNvPr id="20" name="TextBox 19"/>
           <p:cNvSpPr txBox="1"/>
           <p:nvPr/>
         </p:nvSpPr>
@@ -25676,7 +24475,7 @@
       </p:sp>
       <p:sp>
         <p:nvSpPr>
-          <p:cNvPr id="22" name="Rounded Rectangle 21"/>
+          <p:cNvPr id="21" name="Rounded Rectangle 20"/>
           <p:cNvSpPr/>
           <p:nvPr/>
         </p:nvSpPr>
@@ -25722,7 +24521,7 @@
       </p:sp>
       <p:sp>
         <p:nvSpPr>
-          <p:cNvPr id="23" name="TextBox 22"/>
+          <p:cNvPr id="22" name="TextBox 21"/>
           <p:cNvSpPr txBox="1"/>
           <p:nvPr/>
         </p:nvSpPr>
@@ -25769,7 +24568,7 @@
       </p:sp>
       <p:sp>
         <p:nvSpPr>
-          <p:cNvPr id="24" name="Rounded Rectangle 23"/>
+          <p:cNvPr id="23" name="Rounded Rectangle 22"/>
           <p:cNvSpPr/>
           <p:nvPr/>
         </p:nvSpPr>
@@ -25823,7 +24622,7 @@
       </p:sp>
       <p:sp>
         <p:nvSpPr>
-          <p:cNvPr id="25" name="Rectangle 24"/>
+          <p:cNvPr id="24" name="Rectangle 23"/>
           <p:cNvSpPr/>
           <p:nvPr/>
         </p:nvSpPr>
@@ -25867,7 +24666,7 @@
       </p:sp>
       <p:sp>
         <p:nvSpPr>
-          <p:cNvPr id="26" name="Rounded Rectangle 25"/>
+          <p:cNvPr id="25" name="Rounded Rectangle 24"/>
           <p:cNvSpPr/>
           <p:nvPr/>
         </p:nvSpPr>
@@ -25934,7 +24733,7 @@
       </p:sp>
       <p:sp>
         <p:nvSpPr>
-          <p:cNvPr id="27" name="TextBox 26"/>
+          <p:cNvPr id="26" name="TextBox 25"/>
           <p:cNvSpPr txBox="1"/>
           <p:nvPr/>
         </p:nvSpPr>
@@ -25981,7 +24780,7 @@
       </p:sp>
       <p:sp>
         <p:nvSpPr>
-          <p:cNvPr id="28" name="Rectangle 27"/>
+          <p:cNvPr id="27" name="Rectangle 26"/>
           <p:cNvSpPr/>
           <p:nvPr/>
         </p:nvSpPr>
@@ -26025,7 +24824,7 @@
       </p:sp>
       <p:sp>
         <p:nvSpPr>
-          <p:cNvPr id="29" name="Rounded Rectangle 28"/>
+          <p:cNvPr id="28" name="Rounded Rectangle 27"/>
           <p:cNvSpPr/>
           <p:nvPr/>
         </p:nvSpPr>
@@ -26071,7 +24870,7 @@
       </p:sp>
       <p:sp>
         <p:nvSpPr>
-          <p:cNvPr id="30" name="TextBox 29"/>
+          <p:cNvPr id="29" name="TextBox 28"/>
           <p:cNvSpPr txBox="1"/>
           <p:nvPr/>
         </p:nvSpPr>
@@ -26118,7 +24917,7 @@
       </p:sp>
       <p:sp>
         <p:nvSpPr>
-          <p:cNvPr id="31" name="Rounded Rectangle 30"/>
+          <p:cNvPr id="30" name="Rounded Rectangle 29"/>
           <p:cNvSpPr/>
           <p:nvPr/>
         </p:nvSpPr>
@@ -26164,7 +24963,7 @@
       </p:sp>
       <p:sp>
         <p:nvSpPr>
-          <p:cNvPr id="32" name="TextBox 31"/>
+          <p:cNvPr id="31" name="TextBox 30"/>
           <p:cNvSpPr txBox="1"/>
           <p:nvPr/>
         </p:nvSpPr>
@@ -26211,7 +25010,7 @@
       </p:sp>
       <p:sp>
         <p:nvSpPr>
-          <p:cNvPr id="33" name="Rounded Rectangle 32"/>
+          <p:cNvPr id="32" name="Rounded Rectangle 31"/>
           <p:cNvSpPr/>
           <p:nvPr/>
         </p:nvSpPr>
@@ -26257,7 +25056,7 @@
       </p:sp>
       <p:sp>
         <p:nvSpPr>
-          <p:cNvPr id="34" name="TextBox 33"/>
+          <p:cNvPr id="33" name="TextBox 32"/>
           <p:cNvSpPr txBox="1"/>
           <p:nvPr/>
         </p:nvSpPr>
@@ -26304,7 +25103,7 @@
       </p:sp>
       <p:sp>
         <p:nvSpPr>
-          <p:cNvPr id="35" name="Rounded Rectangle 34"/>
+          <p:cNvPr id="34" name="Rounded Rectangle 33"/>
           <p:cNvSpPr/>
           <p:nvPr/>
         </p:nvSpPr>
@@ -26350,7 +25149,7 @@
       </p:sp>
       <p:sp>
         <p:nvSpPr>
-          <p:cNvPr id="36" name="TextBox 35"/>
+          <p:cNvPr id="35" name="TextBox 34"/>
           <p:cNvSpPr txBox="1"/>
           <p:nvPr/>
         </p:nvSpPr>
@@ -26397,7 +25196,7 @@
       </p:sp>
       <p:sp>
         <p:nvSpPr>
-          <p:cNvPr id="37" name="Rounded Rectangle 36"/>
+          <p:cNvPr id="36" name="Rounded Rectangle 35"/>
           <p:cNvSpPr/>
           <p:nvPr/>
         </p:nvSpPr>
@@ -26443,7 +25242,7 @@
       </p:sp>
       <p:sp>
         <p:nvSpPr>
-          <p:cNvPr id="38" name="TextBox 37"/>
+          <p:cNvPr id="37" name="TextBox 36"/>
           <p:cNvSpPr txBox="1"/>
           <p:nvPr/>
         </p:nvSpPr>
@@ -26490,7 +25289,7 @@
       </p:sp>
       <p:sp>
         <p:nvSpPr>
-          <p:cNvPr id="39" name="Rounded Rectangle 38"/>
+          <p:cNvPr id="38" name="Rounded Rectangle 37"/>
           <p:cNvSpPr/>
           <p:nvPr/>
         </p:nvSpPr>
@@ -26660,8 +25459,77 @@
         </p:nvSpPr>
         <p:spPr>
           <a:xfrm>
-            <a:off x="713232" y="6272784"/>
-            <a:ext cx="5597920" cy="219456"/>
+            <a:off x="8240677" y="6272784"/>
+            <a:ext cx="2651760" cy="219456"/>
+          </a:xfrm>
+          <a:prstGeom prst="rect">
+            <a:avLst/>
+          </a:prstGeom>
+          <a:noFill/>
+        </p:spPr>
+        <p:txBody>
+          <a:bodyPr wrap="square" lIns="0" rIns="0" tIns="0" bIns="0" anchor="t">
+            <a:spAutoFit/>
+          </a:bodyPr>
+          <a:lstStyle/>
+          <a:p>
+            <a:pPr algn="r">
+              <a:lnSpc>
+                <a:spcPct val="122000"/>
+              </a:lnSpc>
+              <a:spcBef>
+                <a:spcPts val="0"/>
+              </a:spcBef>
+              <a:spcAft>
+                <a:spcPts val="0"/>
+              </a:spcAft>
+            </a:pPr>
+            <a:r>
+              <a:rPr sz="900" b="0" i="0">
+                <a:solidFill>
+                  <a:srgbClr val="636E85"/>
+                </a:solidFill>
+                <a:latin typeface="Segoe UI"/>
+                <a:ea typeface="Segoe UI"/>
+                <a:cs typeface="Segoe UI"/>
+              </a:rPr>
+              <a:t>Lingesh K  ·  OSI2509030</a:t>
+            </a:r>
+            <a:r>
+              <a:rPr sz="900" b="0" i="0">
+                <a:solidFill>
+                  <a:srgbClr val="141C2E"/>
+                </a:solidFill>
+                <a:latin typeface="Segoe UI"/>
+                <a:ea typeface="Segoe UI"/>
+                <a:cs typeface="Segoe UI"/>
+              </a:rPr>
+              <a:t>     </a:t>
+            </a:r>
+            <a:r>
+              <a:rPr sz="900" b="1" i="0">
+                <a:solidFill>
+                  <a:srgbClr val="0E1E3C"/>
+                </a:solidFill>
+                <a:latin typeface="Segoe UI"/>
+                <a:ea typeface="Segoe UI"/>
+                <a:cs typeface="Segoe UI"/>
+              </a:rPr>
+              <a:t>06</a:t>
+            </a:r>
+          </a:p>
+        </p:txBody>
+      </p:sp>
+      <p:sp>
+        <p:nvSpPr>
+          <p:cNvPr id="5" name="TextBox 4"/>
+          <p:cNvSpPr txBox="1"/>
+          <p:nvPr/>
+        </p:nvSpPr>
+        <p:spPr>
+          <a:xfrm>
+            <a:off x="713232" y="566928"/>
+            <a:ext cx="10765231" cy="219456"/>
           </a:xfrm>
           <a:prstGeom prst="rect">
             <a:avLst/>
@@ -26686,106 +25554,15 @@
               </a:spcAft>
             </a:pPr>
             <a:r>
-              <a:rPr sz="900" b="1" i="0">
-                <a:solidFill>
-                  <a:srgbClr val="0E1E3C"/>
-                </a:solidFill>
-                <a:latin typeface="Segoe UI"/>
-                <a:ea typeface="Segoe UI"/>
-                <a:cs typeface="Segoe UI"/>
-              </a:rPr>
-              <a:t>Unit 5</a:t>
-            </a:r>
-            <a:r>
-              <a:rPr sz="900" b="0" i="0">
-                <a:solidFill>
-                  <a:srgbClr val="939EB3"/>
-                </a:solidFill>
-                <a:latin typeface="Segoe UI"/>
-                <a:ea typeface="Segoe UI"/>
-                <a:cs typeface="Segoe UI"/>
-              </a:rPr>
-              <a:t>  ·  </a:t>
-            </a:r>
-            <a:r>
-              <a:rPr sz="900" b="0" i="0">
-                <a:solidFill>
-                  <a:srgbClr val="636E85"/>
-                </a:solidFill>
-                <a:latin typeface="Segoe UI"/>
-                <a:ea typeface="Segoe UI"/>
-                <a:cs typeface="Segoe UI"/>
-              </a:rPr>
-              <a:t>Strategy, Innovation and Leadership</a:t>
-            </a:r>
-          </a:p>
-        </p:txBody>
-      </p:sp>
-      <p:sp>
-        <p:nvSpPr>
-          <p:cNvPr id="5" name="TextBox 4"/>
-          <p:cNvSpPr txBox="1"/>
-          <p:nvPr/>
-        </p:nvSpPr>
-        <p:spPr>
-          <a:xfrm>
-            <a:off x="8240677" y="6272784"/>
-            <a:ext cx="2651760" cy="219456"/>
-          </a:xfrm>
-          <a:prstGeom prst="rect">
-            <a:avLst/>
-          </a:prstGeom>
-          <a:noFill/>
-        </p:spPr>
-        <p:txBody>
-          <a:bodyPr wrap="square" lIns="0" rIns="0" tIns="0" bIns="0" anchor="t">
-            <a:spAutoFit/>
-          </a:bodyPr>
-          <a:lstStyle/>
-          <a:p>
-            <a:pPr algn="r">
-              <a:lnSpc>
-                <a:spcPct val="122000"/>
-              </a:lnSpc>
-              <a:spcBef>
-                <a:spcPts val="0"/>
-              </a:spcBef>
-              <a:spcAft>
-                <a:spcPts val="0"/>
-              </a:spcAft>
-            </a:pPr>
-            <a:r>
-              <a:rPr sz="900" b="0" i="0">
-                <a:solidFill>
-                  <a:srgbClr val="636E85"/>
-                </a:solidFill>
-                <a:latin typeface="Segoe UI"/>
-                <a:ea typeface="Segoe UI"/>
-                <a:cs typeface="Segoe UI"/>
-              </a:rPr>
-              <a:t>Lingesh K  ·  OSI2509030</a:t>
-            </a:r>
-            <a:r>
-              <a:rPr sz="900" b="0" i="0">
-                <a:solidFill>
-                  <a:srgbClr val="141C2E"/>
-                </a:solidFill>
-                <a:latin typeface="Segoe UI"/>
-                <a:ea typeface="Segoe UI"/>
-                <a:cs typeface="Segoe UI"/>
-              </a:rPr>
-              <a:t>     </a:t>
-            </a:r>
-            <a:r>
-              <a:rPr sz="900" b="1" i="0">
-                <a:solidFill>
-                  <a:srgbClr val="0E1E3C"/>
-                </a:solidFill>
-                <a:latin typeface="Segoe UI"/>
-                <a:ea typeface="Segoe UI"/>
-                <a:cs typeface="Segoe UI"/>
-              </a:rPr>
-              <a:t>06</a:t>
+              <a:rPr sz="950" b="1" i="0" spc="160">
+                <a:solidFill>
+                  <a:srgbClr val="00B3A4"/>
+                </a:solidFill>
+                <a:latin typeface="Segoe UI"/>
+                <a:ea typeface="Segoe UI"/>
+                <a:cs typeface="Segoe UI"/>
+              </a:rPr>
+              <a:t>COMPETITIVE ADVANTAGE</a:t>
             </a:r>
           </a:p>
         </p:txBody>
@@ -26793,53 +25570,6 @@
       <p:sp>
         <p:nvSpPr>
           <p:cNvPr id="6" name="TextBox 5"/>
-          <p:cNvSpPr txBox="1"/>
-          <p:nvPr/>
-        </p:nvSpPr>
-        <p:spPr>
-          <a:xfrm>
-            <a:off x="713232" y="566928"/>
-            <a:ext cx="10765231" cy="219456"/>
-          </a:xfrm>
-          <a:prstGeom prst="rect">
-            <a:avLst/>
-          </a:prstGeom>
-          <a:noFill/>
-        </p:spPr>
-        <p:txBody>
-          <a:bodyPr wrap="square" lIns="0" rIns="0" tIns="0" bIns="0" anchor="t">
-            <a:spAutoFit/>
-          </a:bodyPr>
-          <a:lstStyle/>
-          <a:p>
-            <a:pPr algn="l">
-              <a:lnSpc>
-                <a:spcPct val="122000"/>
-              </a:lnSpc>
-              <a:spcBef>
-                <a:spcPts val="0"/>
-              </a:spcBef>
-              <a:spcAft>
-                <a:spcPts val="0"/>
-              </a:spcAft>
-            </a:pPr>
-            <a:r>
-              <a:rPr sz="950" b="1" i="0" spc="160">
-                <a:solidFill>
-                  <a:srgbClr val="00B3A4"/>
-                </a:solidFill>
-                <a:latin typeface="Segoe UI"/>
-                <a:ea typeface="Segoe UI"/>
-                <a:cs typeface="Segoe UI"/>
-              </a:rPr>
-              <a:t>COMPETITIVE ADVANTAGE</a:t>
-            </a:r>
-          </a:p>
-        </p:txBody>
-      </p:sp>
-      <p:sp>
-        <p:nvSpPr>
-          <p:cNvPr id="7" name="TextBox 6"/>
           <p:cNvSpPr txBox="1"/>
           <p:nvPr/>
         </p:nvSpPr>
@@ -26886,7 +25616,7 @@
       </p:sp>
       <p:sp>
         <p:nvSpPr>
-          <p:cNvPr id="8" name="Rectangle 7"/>
+          <p:cNvPr id="7" name="Rectangle 6"/>
           <p:cNvSpPr/>
           <p:nvPr/>
         </p:nvSpPr>
@@ -26930,7 +25660,7 @@
       </p:sp>
       <p:sp>
         <p:nvSpPr>
-          <p:cNvPr id="9" name="TextBox 8"/>
+          <p:cNvPr id="8" name="TextBox 7"/>
           <p:cNvSpPr txBox="1"/>
           <p:nvPr/>
         </p:nvSpPr>
@@ -26977,7 +25707,7 @@
       </p:sp>
       <p:sp>
         <p:nvSpPr>
-          <p:cNvPr id="10" name="Rounded Rectangle 9"/>
+          <p:cNvPr id="9" name="Rounded Rectangle 8"/>
           <p:cNvSpPr/>
           <p:nvPr/>
         </p:nvSpPr>
@@ -27031,7 +25761,7 @@
       </p:sp>
       <p:sp>
         <p:nvSpPr>
-          <p:cNvPr id="11" name="Rectangle 10"/>
+          <p:cNvPr id="10" name="Rectangle 9"/>
           <p:cNvSpPr/>
           <p:nvPr/>
         </p:nvSpPr>
@@ -27075,7 +25805,7 @@
       </p:sp>
       <p:sp>
         <p:nvSpPr>
-          <p:cNvPr id="12" name="TextBox 11"/>
+          <p:cNvPr id="11" name="TextBox 10"/>
           <p:cNvSpPr txBox="1"/>
           <p:nvPr/>
         </p:nvSpPr>
@@ -27122,7 +25852,7 @@
       </p:sp>
       <p:sp>
         <p:nvSpPr>
-          <p:cNvPr id="13" name="TextBox 12"/>
+          <p:cNvPr id="12" name="TextBox 11"/>
           <p:cNvSpPr txBox="1"/>
           <p:nvPr/>
         </p:nvSpPr>
@@ -27169,7 +25899,7 @@
       </p:sp>
       <p:sp>
         <p:nvSpPr>
-          <p:cNvPr id="14" name="Rounded Rectangle 13"/>
+          <p:cNvPr id="13" name="Rounded Rectangle 12"/>
           <p:cNvSpPr/>
           <p:nvPr/>
         </p:nvSpPr>
@@ -27223,7 +25953,7 @@
       </p:sp>
       <p:sp>
         <p:nvSpPr>
-          <p:cNvPr id="15" name="Rectangle 14"/>
+          <p:cNvPr id="14" name="Rectangle 13"/>
           <p:cNvSpPr/>
           <p:nvPr/>
         </p:nvSpPr>
@@ -27267,7 +25997,7 @@
       </p:sp>
       <p:sp>
         <p:nvSpPr>
-          <p:cNvPr id="16" name="TextBox 15"/>
+          <p:cNvPr id="15" name="TextBox 14"/>
           <p:cNvSpPr txBox="1"/>
           <p:nvPr/>
         </p:nvSpPr>
@@ -27314,7 +26044,7 @@
       </p:sp>
       <p:sp>
         <p:nvSpPr>
-          <p:cNvPr id="17" name="TextBox 16"/>
+          <p:cNvPr id="16" name="TextBox 15"/>
           <p:cNvSpPr txBox="1"/>
           <p:nvPr/>
         </p:nvSpPr>
@@ -27361,7 +26091,7 @@
       </p:sp>
       <p:sp>
         <p:nvSpPr>
-          <p:cNvPr id="18" name="Rounded Rectangle 17"/>
+          <p:cNvPr id="17" name="Rounded Rectangle 16"/>
           <p:cNvSpPr/>
           <p:nvPr/>
         </p:nvSpPr>
@@ -27415,7 +26145,7 @@
       </p:sp>
       <p:sp>
         <p:nvSpPr>
-          <p:cNvPr id="19" name="Rectangle 18"/>
+          <p:cNvPr id="18" name="Rectangle 17"/>
           <p:cNvSpPr/>
           <p:nvPr/>
         </p:nvSpPr>
@@ -27459,7 +26189,7 @@
       </p:sp>
       <p:sp>
         <p:nvSpPr>
-          <p:cNvPr id="20" name="TextBox 19"/>
+          <p:cNvPr id="19" name="TextBox 18"/>
           <p:cNvSpPr txBox="1"/>
           <p:nvPr/>
         </p:nvSpPr>
@@ -27506,7 +26236,7 @@
       </p:sp>
       <p:sp>
         <p:nvSpPr>
-          <p:cNvPr id="21" name="TextBox 20"/>
+          <p:cNvPr id="20" name="TextBox 19"/>
           <p:cNvSpPr txBox="1"/>
           <p:nvPr/>
         </p:nvSpPr>
@@ -27553,7 +26283,7 @@
       </p:sp>
       <p:sp>
         <p:nvSpPr>
-          <p:cNvPr id="22" name="Rounded Rectangle 21"/>
+          <p:cNvPr id="21" name="Rounded Rectangle 20"/>
           <p:cNvSpPr/>
           <p:nvPr/>
         </p:nvSpPr>
@@ -27607,7 +26337,7 @@
       </p:sp>
       <p:sp>
         <p:nvSpPr>
-          <p:cNvPr id="23" name="Rectangle 22"/>
+          <p:cNvPr id="22" name="Rectangle 21"/>
           <p:cNvSpPr/>
           <p:nvPr/>
         </p:nvSpPr>
@@ -27651,7 +26381,7 @@
       </p:sp>
       <p:sp>
         <p:nvSpPr>
-          <p:cNvPr id="24" name="TextBox 23"/>
+          <p:cNvPr id="23" name="TextBox 22"/>
           <p:cNvSpPr txBox="1"/>
           <p:nvPr/>
         </p:nvSpPr>
@@ -27698,7 +26428,7 @@
       </p:sp>
       <p:sp>
         <p:nvSpPr>
-          <p:cNvPr id="25" name="TextBox 24"/>
+          <p:cNvPr id="24" name="TextBox 23"/>
           <p:cNvSpPr txBox="1"/>
           <p:nvPr/>
         </p:nvSpPr>
@@ -27837,8 +26567,77 @@
         </p:nvSpPr>
         <p:spPr>
           <a:xfrm>
-            <a:off x="713232" y="6272784"/>
-            <a:ext cx="5597920" cy="219456"/>
+            <a:off x="8240677" y="6272784"/>
+            <a:ext cx="2651760" cy="219456"/>
+          </a:xfrm>
+          <a:prstGeom prst="rect">
+            <a:avLst/>
+          </a:prstGeom>
+          <a:noFill/>
+        </p:spPr>
+        <p:txBody>
+          <a:bodyPr wrap="square" lIns="0" rIns="0" tIns="0" bIns="0" anchor="t">
+            <a:spAutoFit/>
+          </a:bodyPr>
+          <a:lstStyle/>
+          <a:p>
+            <a:pPr algn="r">
+              <a:lnSpc>
+                <a:spcPct val="122000"/>
+              </a:lnSpc>
+              <a:spcBef>
+                <a:spcPts val="0"/>
+              </a:spcBef>
+              <a:spcAft>
+                <a:spcPts val="0"/>
+              </a:spcAft>
+            </a:pPr>
+            <a:r>
+              <a:rPr sz="900" b="0" i="0">
+                <a:solidFill>
+                  <a:srgbClr val="636E85"/>
+                </a:solidFill>
+                <a:latin typeface="Segoe UI"/>
+                <a:ea typeface="Segoe UI"/>
+                <a:cs typeface="Segoe UI"/>
+              </a:rPr>
+              <a:t>Lingesh K  ·  OSI2509030</a:t>
+            </a:r>
+            <a:r>
+              <a:rPr sz="900" b="0" i="0">
+                <a:solidFill>
+                  <a:srgbClr val="141C2E"/>
+                </a:solidFill>
+                <a:latin typeface="Segoe UI"/>
+                <a:ea typeface="Segoe UI"/>
+                <a:cs typeface="Segoe UI"/>
+              </a:rPr>
+              <a:t>     </a:t>
+            </a:r>
+            <a:r>
+              <a:rPr sz="900" b="1" i="0">
+                <a:solidFill>
+                  <a:srgbClr val="0E1E3C"/>
+                </a:solidFill>
+                <a:latin typeface="Segoe UI"/>
+                <a:ea typeface="Segoe UI"/>
+                <a:cs typeface="Segoe UI"/>
+              </a:rPr>
+              <a:t>07</a:t>
+            </a:r>
+          </a:p>
+        </p:txBody>
+      </p:sp>
+      <p:sp>
+        <p:nvSpPr>
+          <p:cNvPr id="5" name="TextBox 4"/>
+          <p:cNvSpPr txBox="1"/>
+          <p:nvPr/>
+        </p:nvSpPr>
+        <p:spPr>
+          <a:xfrm>
+            <a:off x="713232" y="566928"/>
+            <a:ext cx="10765231" cy="219456"/>
           </a:xfrm>
           <a:prstGeom prst="rect">
             <a:avLst/>
@@ -27863,106 +26662,15 @@
               </a:spcAft>
             </a:pPr>
             <a:r>
-              <a:rPr sz="900" b="1" i="0">
-                <a:solidFill>
-                  <a:srgbClr val="0E1E3C"/>
-                </a:solidFill>
-                <a:latin typeface="Segoe UI"/>
-                <a:ea typeface="Segoe UI"/>
-                <a:cs typeface="Segoe UI"/>
-              </a:rPr>
-              <a:t>Unit 5</a:t>
-            </a:r>
-            <a:r>
-              <a:rPr sz="900" b="0" i="0">
-                <a:solidFill>
-                  <a:srgbClr val="939EB3"/>
-                </a:solidFill>
-                <a:latin typeface="Segoe UI"/>
-                <a:ea typeface="Segoe UI"/>
-                <a:cs typeface="Segoe UI"/>
-              </a:rPr>
-              <a:t>  ·  </a:t>
-            </a:r>
-            <a:r>
-              <a:rPr sz="900" b="0" i="0">
-                <a:solidFill>
-                  <a:srgbClr val="636E85"/>
-                </a:solidFill>
-                <a:latin typeface="Segoe UI"/>
-                <a:ea typeface="Segoe UI"/>
-                <a:cs typeface="Segoe UI"/>
-              </a:rPr>
-              <a:t>Strategy, Innovation and Leadership</a:t>
-            </a:r>
-          </a:p>
-        </p:txBody>
-      </p:sp>
-      <p:sp>
-        <p:nvSpPr>
-          <p:cNvPr id="5" name="TextBox 4"/>
-          <p:cNvSpPr txBox="1"/>
-          <p:nvPr/>
-        </p:nvSpPr>
-        <p:spPr>
-          <a:xfrm>
-            <a:off x="8240677" y="6272784"/>
-            <a:ext cx="2651760" cy="219456"/>
-          </a:xfrm>
-          <a:prstGeom prst="rect">
-            <a:avLst/>
-          </a:prstGeom>
-          <a:noFill/>
-        </p:spPr>
-        <p:txBody>
-          <a:bodyPr wrap="square" lIns="0" rIns="0" tIns="0" bIns="0" anchor="t">
-            <a:spAutoFit/>
-          </a:bodyPr>
-          <a:lstStyle/>
-          <a:p>
-            <a:pPr algn="r">
-              <a:lnSpc>
-                <a:spcPct val="122000"/>
-              </a:lnSpc>
-              <a:spcBef>
-                <a:spcPts val="0"/>
-              </a:spcBef>
-              <a:spcAft>
-                <a:spcPts val="0"/>
-              </a:spcAft>
-            </a:pPr>
-            <a:r>
-              <a:rPr sz="900" b="0" i="0">
-                <a:solidFill>
-                  <a:srgbClr val="636E85"/>
-                </a:solidFill>
-                <a:latin typeface="Segoe UI"/>
-                <a:ea typeface="Segoe UI"/>
-                <a:cs typeface="Segoe UI"/>
-              </a:rPr>
-              <a:t>Lingesh K  ·  OSI2509030</a:t>
-            </a:r>
-            <a:r>
-              <a:rPr sz="900" b="0" i="0">
-                <a:solidFill>
-                  <a:srgbClr val="141C2E"/>
-                </a:solidFill>
-                <a:latin typeface="Segoe UI"/>
-                <a:ea typeface="Segoe UI"/>
-                <a:cs typeface="Segoe UI"/>
-              </a:rPr>
-              <a:t>     </a:t>
-            </a:r>
-            <a:r>
-              <a:rPr sz="900" b="1" i="0">
-                <a:solidFill>
-                  <a:srgbClr val="0E1E3C"/>
-                </a:solidFill>
-                <a:latin typeface="Segoe UI"/>
-                <a:ea typeface="Segoe UI"/>
-                <a:cs typeface="Segoe UI"/>
-              </a:rPr>
-              <a:t>07</a:t>
+              <a:rPr sz="950" b="1" i="0" spc="160">
+                <a:solidFill>
+                  <a:srgbClr val="3B7AF7"/>
+                </a:solidFill>
+                <a:latin typeface="Segoe UI"/>
+                <a:ea typeface="Segoe UI"/>
+                <a:cs typeface="Segoe UI"/>
+              </a:rPr>
+              <a:t>STRATEGIC CHOICES</a:t>
             </a:r>
           </a:p>
         </p:txBody>
@@ -27970,53 +26678,6 @@
       <p:sp>
         <p:nvSpPr>
           <p:cNvPr id="6" name="TextBox 5"/>
-          <p:cNvSpPr txBox="1"/>
-          <p:nvPr/>
-        </p:nvSpPr>
-        <p:spPr>
-          <a:xfrm>
-            <a:off x="713232" y="566928"/>
-            <a:ext cx="10765231" cy="219456"/>
-          </a:xfrm>
-          <a:prstGeom prst="rect">
-            <a:avLst/>
-          </a:prstGeom>
-          <a:noFill/>
-        </p:spPr>
-        <p:txBody>
-          <a:bodyPr wrap="square" lIns="0" rIns="0" tIns="0" bIns="0" anchor="t">
-            <a:spAutoFit/>
-          </a:bodyPr>
-          <a:lstStyle/>
-          <a:p>
-            <a:pPr algn="l">
-              <a:lnSpc>
-                <a:spcPct val="122000"/>
-              </a:lnSpc>
-              <a:spcBef>
-                <a:spcPts val="0"/>
-              </a:spcBef>
-              <a:spcAft>
-                <a:spcPts val="0"/>
-              </a:spcAft>
-            </a:pPr>
-            <a:r>
-              <a:rPr sz="950" b="1" i="0" spc="160">
-                <a:solidFill>
-                  <a:srgbClr val="3B7AF7"/>
-                </a:solidFill>
-                <a:latin typeface="Segoe UI"/>
-                <a:ea typeface="Segoe UI"/>
-                <a:cs typeface="Segoe UI"/>
-              </a:rPr>
-              <a:t>STRATEGIC CHOICES</a:t>
-            </a:r>
-          </a:p>
-        </p:txBody>
-      </p:sp>
-      <p:sp>
-        <p:nvSpPr>
-          <p:cNvPr id="7" name="TextBox 6"/>
           <p:cNvSpPr txBox="1"/>
           <p:nvPr/>
         </p:nvSpPr>
@@ -28063,7 +26724,7 @@
       </p:sp>
       <p:sp>
         <p:nvSpPr>
-          <p:cNvPr id="8" name="Rectangle 7"/>
+          <p:cNvPr id="7" name="Rectangle 6"/>
           <p:cNvSpPr/>
           <p:nvPr/>
         </p:nvSpPr>
@@ -28107,7 +26768,7 @@
       </p:sp>
       <p:sp>
         <p:nvSpPr>
-          <p:cNvPr id="9" name="TextBox 8"/>
+          <p:cNvPr id="8" name="TextBox 7"/>
           <p:cNvSpPr txBox="1"/>
           <p:nvPr/>
         </p:nvSpPr>
@@ -28154,7 +26815,7 @@
       </p:sp>
       <p:sp>
         <p:nvSpPr>
-          <p:cNvPr id="10" name="Rounded Rectangle 9"/>
+          <p:cNvPr id="9" name="Rounded Rectangle 8"/>
           <p:cNvSpPr/>
           <p:nvPr/>
         </p:nvSpPr>
@@ -28208,7 +26869,7 @@
       </p:sp>
       <p:sp>
         <p:nvSpPr>
-          <p:cNvPr id="11" name="Rectangle 10"/>
+          <p:cNvPr id="10" name="Rectangle 9"/>
           <p:cNvSpPr/>
           <p:nvPr/>
         </p:nvSpPr>
@@ -28252,7 +26913,7 @@
       </p:sp>
       <p:sp>
         <p:nvSpPr>
-          <p:cNvPr id="12" name="Oval 11"/>
+          <p:cNvPr id="11" name="Oval 10"/>
           <p:cNvSpPr/>
           <p:nvPr/>
         </p:nvSpPr>
@@ -28296,7 +26957,7 @@
       </p:sp>
       <p:sp>
         <p:nvSpPr>
-          <p:cNvPr id="13" name="TextBox 12"/>
+          <p:cNvPr id="12" name="TextBox 11"/>
           <p:cNvSpPr txBox="1"/>
           <p:nvPr/>
         </p:nvSpPr>
@@ -28343,7 +27004,7 @@
       </p:sp>
       <p:sp>
         <p:nvSpPr>
-          <p:cNvPr id="14" name="TextBox 13"/>
+          <p:cNvPr id="13" name="TextBox 12"/>
           <p:cNvSpPr txBox="1"/>
           <p:nvPr/>
         </p:nvSpPr>
@@ -28390,7 +27051,7 @@
       </p:sp>
       <p:sp>
         <p:nvSpPr>
-          <p:cNvPr id="15" name="TextBox 14"/>
+          <p:cNvPr id="14" name="TextBox 13"/>
           <p:cNvSpPr txBox="1"/>
           <p:nvPr/>
         </p:nvSpPr>
@@ -28437,7 +27098,7 @@
       </p:sp>
       <p:sp>
         <p:nvSpPr>
-          <p:cNvPr id="16" name="Rounded Rectangle 15"/>
+          <p:cNvPr id="15" name="Rounded Rectangle 14"/>
           <p:cNvSpPr/>
           <p:nvPr/>
         </p:nvSpPr>
@@ -28491,7 +27152,7 @@
       </p:sp>
       <p:sp>
         <p:nvSpPr>
-          <p:cNvPr id="17" name="Rectangle 16"/>
+          <p:cNvPr id="16" name="Rectangle 15"/>
           <p:cNvSpPr/>
           <p:nvPr/>
         </p:nvSpPr>
@@ -28535,7 +27196,7 @@
       </p:sp>
       <p:sp>
         <p:nvSpPr>
-          <p:cNvPr id="18" name="Oval 17"/>
+          <p:cNvPr id="17" name="Oval 16"/>
           <p:cNvSpPr/>
           <p:nvPr/>
         </p:nvSpPr>
@@ -28579,7 +27240,7 @@
       </p:sp>
       <p:sp>
         <p:nvSpPr>
-          <p:cNvPr id="19" name="TextBox 18"/>
+          <p:cNvPr id="18" name="TextBox 17"/>
           <p:cNvSpPr txBox="1"/>
           <p:nvPr/>
         </p:nvSpPr>
@@ -28626,7 +27287,7 @@
       </p:sp>
       <p:sp>
         <p:nvSpPr>
-          <p:cNvPr id="20" name="TextBox 19"/>
+          <p:cNvPr id="19" name="TextBox 18"/>
           <p:cNvSpPr txBox="1"/>
           <p:nvPr/>
         </p:nvSpPr>
@@ -28673,7 +27334,7 @@
       </p:sp>
       <p:sp>
         <p:nvSpPr>
-          <p:cNvPr id="21" name="TextBox 20"/>
+          <p:cNvPr id="20" name="TextBox 19"/>
           <p:cNvSpPr txBox="1"/>
           <p:nvPr/>
         </p:nvSpPr>
@@ -28720,7 +27381,7 @@
       </p:sp>
       <p:sp>
         <p:nvSpPr>
-          <p:cNvPr id="22" name="Rounded Rectangle 21"/>
+          <p:cNvPr id="21" name="Rounded Rectangle 20"/>
           <p:cNvSpPr/>
           <p:nvPr/>
         </p:nvSpPr>
@@ -28774,7 +27435,7 @@
       </p:sp>
       <p:sp>
         <p:nvSpPr>
-          <p:cNvPr id="23" name="Rectangle 22"/>
+          <p:cNvPr id="22" name="Rectangle 21"/>
           <p:cNvSpPr/>
           <p:nvPr/>
         </p:nvSpPr>
@@ -28818,7 +27479,7 @@
       </p:sp>
       <p:sp>
         <p:nvSpPr>
-          <p:cNvPr id="24" name="Oval 23"/>
+          <p:cNvPr id="23" name="Oval 22"/>
           <p:cNvSpPr/>
           <p:nvPr/>
         </p:nvSpPr>
@@ -28862,7 +27523,7 @@
       </p:sp>
       <p:sp>
         <p:nvSpPr>
-          <p:cNvPr id="25" name="TextBox 24"/>
+          <p:cNvPr id="24" name="TextBox 23"/>
           <p:cNvSpPr txBox="1"/>
           <p:nvPr/>
         </p:nvSpPr>
@@ -28909,7 +27570,7 @@
       </p:sp>
       <p:sp>
         <p:nvSpPr>
-          <p:cNvPr id="26" name="TextBox 25"/>
+          <p:cNvPr id="25" name="TextBox 24"/>
           <p:cNvSpPr txBox="1"/>
           <p:nvPr/>
         </p:nvSpPr>
@@ -28956,7 +27617,7 @@
       </p:sp>
       <p:sp>
         <p:nvSpPr>
-          <p:cNvPr id="27" name="TextBox 26"/>
+          <p:cNvPr id="26" name="TextBox 25"/>
           <p:cNvSpPr txBox="1"/>
           <p:nvPr/>
         </p:nvSpPr>
@@ -29394,54 +28055,7 @@
       </p:sp>
       <p:sp>
         <p:nvSpPr>
-          <p:cNvPr id="10" name="TextBox 9"/>
-          <p:cNvSpPr txBox="1"/>
-          <p:nvPr/>
-        </p:nvSpPr>
-        <p:spPr>
-          <a:xfrm>
-            <a:off x="987552" y="5943600"/>
-            <a:ext cx="6400800" cy="274320"/>
-          </a:xfrm>
-          <a:prstGeom prst="rect">
-            <a:avLst/>
-          </a:prstGeom>
-          <a:noFill/>
-        </p:spPr>
-        <p:txBody>
-          <a:bodyPr wrap="square" lIns="0" rIns="0" tIns="0" bIns="0" anchor="t">
-            <a:spAutoFit/>
-          </a:bodyPr>
-          <a:lstStyle/>
-          <a:p>
-            <a:pPr algn="l">
-              <a:lnSpc>
-                <a:spcPct val="122000"/>
-              </a:lnSpc>
-              <a:spcBef>
-                <a:spcPts val="0"/>
-              </a:spcBef>
-              <a:spcAft>
-                <a:spcPts val="0"/>
-              </a:spcAft>
-            </a:pPr>
-            <a:r>
-              <a:rPr sz="900" b="1" i="0" spc="160">
-                <a:solidFill>
-                  <a:srgbClr val="6B7FA6"/>
-                </a:solidFill>
-                <a:latin typeface="Segoe UI"/>
-                <a:ea typeface="Segoe UI"/>
-                <a:cs typeface="Segoe UI"/>
-              </a:rPr>
-              <a:t>UNIT 5  ·  STRATEGY, INNOVATION AND LEADERSHIP</a:t>
-            </a:r>
-          </a:p>
-        </p:txBody>
-      </p:sp>
-      <p:sp>
-        <p:nvSpPr>
-          <p:cNvPr id="11" name="logo-plate"/>
+          <p:cNvPr id="10" name="logo-plate"/>
           <p:cNvSpPr/>
           <p:nvPr/>
         </p:nvSpPr>
@@ -29487,7 +28101,7 @@
       </p:sp>
       <p:pic>
         <p:nvPicPr>
-          <p:cNvPr id="12" name="college-logo" descr="logo-full.png"/>
+          <p:cNvPr id="11" name="college-logo" descr="logo-full.png"/>
           <p:cNvPicPr>
             <a:picLocks noChangeAspect="1"/>
           </p:cNvPicPr>
@@ -29603,8 +28217,77 @@
         </p:nvSpPr>
         <p:spPr>
           <a:xfrm>
-            <a:off x="713232" y="6272784"/>
-            <a:ext cx="5597920" cy="219456"/>
+            <a:off x="8240677" y="6272784"/>
+            <a:ext cx="2651760" cy="219456"/>
+          </a:xfrm>
+          <a:prstGeom prst="rect">
+            <a:avLst/>
+          </a:prstGeom>
+          <a:noFill/>
+        </p:spPr>
+        <p:txBody>
+          <a:bodyPr wrap="square" lIns="0" rIns="0" tIns="0" bIns="0" anchor="t">
+            <a:spAutoFit/>
+          </a:bodyPr>
+          <a:lstStyle/>
+          <a:p>
+            <a:pPr algn="r">
+              <a:lnSpc>
+                <a:spcPct val="122000"/>
+              </a:lnSpc>
+              <a:spcBef>
+                <a:spcPts val="0"/>
+              </a:spcBef>
+              <a:spcAft>
+                <a:spcPts val="0"/>
+              </a:spcAft>
+            </a:pPr>
+            <a:r>
+              <a:rPr sz="900" b="0" i="0">
+                <a:solidFill>
+                  <a:srgbClr val="636E85"/>
+                </a:solidFill>
+                <a:latin typeface="Segoe UI"/>
+                <a:ea typeface="Segoe UI"/>
+                <a:cs typeface="Segoe UI"/>
+              </a:rPr>
+              <a:t>Lingesh K  ·  OSI2509030</a:t>
+            </a:r>
+            <a:r>
+              <a:rPr sz="900" b="0" i="0">
+                <a:solidFill>
+                  <a:srgbClr val="141C2E"/>
+                </a:solidFill>
+                <a:latin typeface="Segoe UI"/>
+                <a:ea typeface="Segoe UI"/>
+                <a:cs typeface="Segoe UI"/>
+              </a:rPr>
+              <a:t>     </a:t>
+            </a:r>
+            <a:r>
+              <a:rPr sz="900" b="1" i="0">
+                <a:solidFill>
+                  <a:srgbClr val="0E1E3C"/>
+                </a:solidFill>
+                <a:latin typeface="Segoe UI"/>
+                <a:ea typeface="Segoe UI"/>
+                <a:cs typeface="Segoe UI"/>
+              </a:rPr>
+              <a:t>09</a:t>
+            </a:r>
+          </a:p>
+        </p:txBody>
+      </p:sp>
+      <p:sp>
+        <p:nvSpPr>
+          <p:cNvPr id="5" name="TextBox 4"/>
+          <p:cNvSpPr txBox="1"/>
+          <p:nvPr/>
+        </p:nvSpPr>
+        <p:spPr>
+          <a:xfrm>
+            <a:off x="713232" y="566928"/>
+            <a:ext cx="10765231" cy="219456"/>
           </a:xfrm>
           <a:prstGeom prst="rect">
             <a:avLst/>
@@ -29629,106 +28312,15 @@
               </a:spcAft>
             </a:pPr>
             <a:r>
-              <a:rPr sz="900" b="1" i="0">
-                <a:solidFill>
-                  <a:srgbClr val="0E1E3C"/>
-                </a:solidFill>
-                <a:latin typeface="Segoe UI"/>
-                <a:ea typeface="Segoe UI"/>
-                <a:cs typeface="Segoe UI"/>
-              </a:rPr>
-              <a:t>Unit 5</a:t>
-            </a:r>
-            <a:r>
-              <a:rPr sz="900" b="0" i="0">
-                <a:solidFill>
-                  <a:srgbClr val="939EB3"/>
-                </a:solidFill>
-                <a:latin typeface="Segoe UI"/>
-                <a:ea typeface="Segoe UI"/>
-                <a:cs typeface="Segoe UI"/>
-              </a:rPr>
-              <a:t>  ·  </a:t>
-            </a:r>
-            <a:r>
-              <a:rPr sz="900" b="0" i="0">
-                <a:solidFill>
-                  <a:srgbClr val="636E85"/>
-                </a:solidFill>
-                <a:latin typeface="Segoe UI"/>
-                <a:ea typeface="Segoe UI"/>
-                <a:cs typeface="Segoe UI"/>
-              </a:rPr>
-              <a:t>Strategy, Innovation and Leadership</a:t>
-            </a:r>
-          </a:p>
-        </p:txBody>
-      </p:sp>
-      <p:sp>
-        <p:nvSpPr>
-          <p:cNvPr id="5" name="TextBox 4"/>
-          <p:cNvSpPr txBox="1"/>
-          <p:nvPr/>
-        </p:nvSpPr>
-        <p:spPr>
-          <a:xfrm>
-            <a:off x="8240677" y="6272784"/>
-            <a:ext cx="2651760" cy="219456"/>
-          </a:xfrm>
-          <a:prstGeom prst="rect">
-            <a:avLst/>
-          </a:prstGeom>
-          <a:noFill/>
-        </p:spPr>
-        <p:txBody>
-          <a:bodyPr wrap="square" lIns="0" rIns="0" tIns="0" bIns="0" anchor="t">
-            <a:spAutoFit/>
-          </a:bodyPr>
-          <a:lstStyle/>
-          <a:p>
-            <a:pPr algn="r">
-              <a:lnSpc>
-                <a:spcPct val="122000"/>
-              </a:lnSpc>
-              <a:spcBef>
-                <a:spcPts val="0"/>
-              </a:spcBef>
-              <a:spcAft>
-                <a:spcPts val="0"/>
-              </a:spcAft>
-            </a:pPr>
-            <a:r>
-              <a:rPr sz="900" b="0" i="0">
-                <a:solidFill>
-                  <a:srgbClr val="636E85"/>
-                </a:solidFill>
-                <a:latin typeface="Segoe UI"/>
-                <a:ea typeface="Segoe UI"/>
-                <a:cs typeface="Segoe UI"/>
-              </a:rPr>
-              <a:t>Lingesh K  ·  OSI2509030</a:t>
-            </a:r>
-            <a:r>
-              <a:rPr sz="900" b="0" i="0">
-                <a:solidFill>
-                  <a:srgbClr val="141C2E"/>
-                </a:solidFill>
-                <a:latin typeface="Segoe UI"/>
-                <a:ea typeface="Segoe UI"/>
-                <a:cs typeface="Segoe UI"/>
-              </a:rPr>
-              <a:t>     </a:t>
-            </a:r>
-            <a:r>
-              <a:rPr sz="900" b="1" i="0">
-                <a:solidFill>
-                  <a:srgbClr val="0E1E3C"/>
-                </a:solidFill>
-                <a:latin typeface="Segoe UI"/>
-                <a:ea typeface="Segoe UI"/>
-                <a:cs typeface="Segoe UI"/>
-              </a:rPr>
-              <a:t>09</a:t>
+              <a:rPr sz="950" b="1" i="0" spc="160">
+                <a:solidFill>
+                  <a:srgbClr val="3B7AF7"/>
+                </a:solidFill>
+                <a:latin typeface="Segoe UI"/>
+                <a:ea typeface="Segoe UI"/>
+                <a:cs typeface="Segoe UI"/>
+              </a:rPr>
+              <a:t>THE BUILD PATH</a:t>
             </a:r>
           </a:p>
         </p:txBody>
@@ -29736,53 +28328,6 @@
       <p:sp>
         <p:nvSpPr>
           <p:cNvPr id="6" name="TextBox 5"/>
-          <p:cNvSpPr txBox="1"/>
-          <p:nvPr/>
-        </p:nvSpPr>
-        <p:spPr>
-          <a:xfrm>
-            <a:off x="713232" y="566928"/>
-            <a:ext cx="10765231" cy="219456"/>
-          </a:xfrm>
-          <a:prstGeom prst="rect">
-            <a:avLst/>
-          </a:prstGeom>
-          <a:noFill/>
-        </p:spPr>
-        <p:txBody>
-          <a:bodyPr wrap="square" lIns="0" rIns="0" tIns="0" bIns="0" anchor="t">
-            <a:spAutoFit/>
-          </a:bodyPr>
-          <a:lstStyle/>
-          <a:p>
-            <a:pPr algn="l">
-              <a:lnSpc>
-                <a:spcPct val="122000"/>
-              </a:lnSpc>
-              <a:spcBef>
-                <a:spcPts val="0"/>
-              </a:spcBef>
-              <a:spcAft>
-                <a:spcPts val="0"/>
-              </a:spcAft>
-            </a:pPr>
-            <a:r>
-              <a:rPr sz="950" b="1" i="0" spc="160">
-                <a:solidFill>
-                  <a:srgbClr val="3B7AF7"/>
-                </a:solidFill>
-                <a:latin typeface="Segoe UI"/>
-                <a:ea typeface="Segoe UI"/>
-                <a:cs typeface="Segoe UI"/>
-              </a:rPr>
-              <a:t>THE BUILD PATH</a:t>
-            </a:r>
-          </a:p>
-        </p:txBody>
-      </p:sp>
-      <p:sp>
-        <p:nvSpPr>
-          <p:cNvPr id="7" name="TextBox 6"/>
           <p:cNvSpPr txBox="1"/>
           <p:nvPr/>
         </p:nvSpPr>
@@ -29829,7 +28374,7 @@
       </p:sp>
       <p:sp>
         <p:nvSpPr>
-          <p:cNvPr id="8" name="Rectangle 7"/>
+          <p:cNvPr id="7" name="Rectangle 6"/>
           <p:cNvSpPr/>
           <p:nvPr/>
         </p:nvSpPr>
@@ -29873,7 +28418,7 @@
       </p:sp>
       <p:sp>
         <p:nvSpPr>
-          <p:cNvPr id="9" name="Rectangle 8"/>
+          <p:cNvPr id="8" name="Rectangle 7"/>
           <p:cNvSpPr/>
           <p:nvPr/>
         </p:nvSpPr>
@@ -29917,7 +28462,7 @@
       </p:sp>
       <p:sp>
         <p:nvSpPr>
-          <p:cNvPr id="10" name="Oval 9"/>
+          <p:cNvPr id="9" name="Oval 8"/>
           <p:cNvSpPr/>
           <p:nvPr/>
         </p:nvSpPr>
@@ -29961,7 +28506,7 @@
       </p:sp>
       <p:sp>
         <p:nvSpPr>
-          <p:cNvPr id="11" name="TextBox 10"/>
+          <p:cNvPr id="10" name="TextBox 9"/>
           <p:cNvSpPr txBox="1"/>
           <p:nvPr/>
         </p:nvSpPr>
@@ -30008,7 +28553,7 @@
       </p:sp>
       <p:sp>
         <p:nvSpPr>
-          <p:cNvPr id="12" name="Rounded Rectangle 11"/>
+          <p:cNvPr id="11" name="Rounded Rectangle 10"/>
           <p:cNvSpPr/>
           <p:nvPr/>
         </p:nvSpPr>
@@ -30056,7 +28601,7 @@
       </p:sp>
       <p:sp>
         <p:nvSpPr>
-          <p:cNvPr id="13" name="TextBox 12"/>
+          <p:cNvPr id="12" name="TextBox 11"/>
           <p:cNvSpPr txBox="1"/>
           <p:nvPr/>
         </p:nvSpPr>
@@ -30103,7 +28648,7 @@
       </p:sp>
       <p:sp>
         <p:nvSpPr>
-          <p:cNvPr id="14" name="TextBox 13"/>
+          <p:cNvPr id="13" name="TextBox 12"/>
           <p:cNvSpPr txBox="1"/>
           <p:nvPr/>
         </p:nvSpPr>
@@ -30150,7 +28695,7 @@
       </p:sp>
       <p:sp>
         <p:nvSpPr>
-          <p:cNvPr id="15" name="Oval 14"/>
+          <p:cNvPr id="14" name="Oval 13"/>
           <p:cNvSpPr/>
           <p:nvPr/>
         </p:nvSpPr>
@@ -30194,7 +28739,7 @@
       </p:sp>
       <p:sp>
         <p:nvSpPr>
-          <p:cNvPr id="16" name="TextBox 15"/>
+          <p:cNvPr id="15" name="TextBox 14"/>
           <p:cNvSpPr txBox="1"/>
           <p:nvPr/>
         </p:nvSpPr>
@@ -30241,7 +28786,7 @@
       </p:sp>
       <p:sp>
         <p:nvSpPr>
-          <p:cNvPr id="17" name="Rounded Rectangle 16"/>
+          <p:cNvPr id="16" name="Rounded Rectangle 15"/>
           <p:cNvSpPr/>
           <p:nvPr/>
         </p:nvSpPr>
@@ -30289,7 +28834,7 @@
       </p:sp>
       <p:sp>
         <p:nvSpPr>
-          <p:cNvPr id="18" name="TextBox 17"/>
+          <p:cNvPr id="17" name="TextBox 16"/>
           <p:cNvSpPr txBox="1"/>
           <p:nvPr/>
         </p:nvSpPr>
@@ -30336,7 +28881,7 @@
       </p:sp>
       <p:sp>
         <p:nvSpPr>
-          <p:cNvPr id="19" name="TextBox 18"/>
+          <p:cNvPr id="18" name="TextBox 17"/>
           <p:cNvSpPr txBox="1"/>
           <p:nvPr/>
         </p:nvSpPr>
@@ -30383,7 +28928,7 @@
       </p:sp>
       <p:sp>
         <p:nvSpPr>
-          <p:cNvPr id="20" name="Oval 19"/>
+          <p:cNvPr id="19" name="Oval 18"/>
           <p:cNvSpPr/>
           <p:nvPr/>
         </p:nvSpPr>
@@ -30427,7 +28972,7 @@
       </p:sp>
       <p:sp>
         <p:nvSpPr>
-          <p:cNvPr id="21" name="TextBox 20"/>
+          <p:cNvPr id="20" name="TextBox 19"/>
           <p:cNvSpPr txBox="1"/>
           <p:nvPr/>
         </p:nvSpPr>
@@ -30474,7 +29019,7 @@
       </p:sp>
       <p:sp>
         <p:nvSpPr>
-          <p:cNvPr id="22" name="Rounded Rectangle 21"/>
+          <p:cNvPr id="21" name="Rounded Rectangle 20"/>
           <p:cNvSpPr/>
           <p:nvPr/>
         </p:nvSpPr>
@@ -30522,7 +29067,7 @@
       </p:sp>
       <p:sp>
         <p:nvSpPr>
-          <p:cNvPr id="23" name="TextBox 22"/>
+          <p:cNvPr id="22" name="TextBox 21"/>
           <p:cNvSpPr txBox="1"/>
           <p:nvPr/>
         </p:nvSpPr>
@@ -30569,7 +29114,7 @@
       </p:sp>
       <p:sp>
         <p:nvSpPr>
-          <p:cNvPr id="24" name="TextBox 23"/>
+          <p:cNvPr id="23" name="TextBox 22"/>
           <p:cNvSpPr txBox="1"/>
           <p:nvPr/>
         </p:nvSpPr>
@@ -30616,7 +29161,7 @@
       </p:sp>
       <p:sp>
         <p:nvSpPr>
-          <p:cNvPr id="25" name="Oval 24"/>
+          <p:cNvPr id="24" name="Oval 23"/>
           <p:cNvSpPr/>
           <p:nvPr/>
         </p:nvSpPr>
@@ -30660,7 +29205,7 @@
       </p:sp>
       <p:sp>
         <p:nvSpPr>
-          <p:cNvPr id="26" name="TextBox 25"/>
+          <p:cNvPr id="25" name="TextBox 24"/>
           <p:cNvSpPr txBox="1"/>
           <p:nvPr/>
         </p:nvSpPr>
@@ -30707,7 +29252,7 @@
       </p:sp>
       <p:sp>
         <p:nvSpPr>
-          <p:cNvPr id="27" name="Rounded Rectangle 26"/>
+          <p:cNvPr id="26" name="Rounded Rectangle 25"/>
           <p:cNvSpPr/>
           <p:nvPr/>
         </p:nvSpPr>
@@ -30755,7 +29300,7 @@
       </p:sp>
       <p:sp>
         <p:nvSpPr>
-          <p:cNvPr id="28" name="TextBox 27"/>
+          <p:cNvPr id="27" name="TextBox 26"/>
           <p:cNvSpPr txBox="1"/>
           <p:nvPr/>
         </p:nvSpPr>
@@ -30802,7 +29347,7 @@
       </p:sp>
       <p:sp>
         <p:nvSpPr>
-          <p:cNvPr id="29" name="TextBox 28"/>
+          <p:cNvPr id="28" name="TextBox 27"/>
           <p:cNvSpPr txBox="1"/>
           <p:nvPr/>
         </p:nvSpPr>
@@ -30849,7 +29394,7 @@
       </p:sp>
       <p:sp>
         <p:nvSpPr>
-          <p:cNvPr id="30" name="Oval 29"/>
+          <p:cNvPr id="29" name="Oval 28"/>
           <p:cNvSpPr/>
           <p:nvPr/>
         </p:nvSpPr>
@@ -30893,7 +29438,7 @@
       </p:sp>
       <p:sp>
         <p:nvSpPr>
-          <p:cNvPr id="31" name="TextBox 30"/>
+          <p:cNvPr id="30" name="TextBox 29"/>
           <p:cNvSpPr txBox="1"/>
           <p:nvPr/>
         </p:nvSpPr>
@@ -30940,7 +29485,7 @@
       </p:sp>
       <p:sp>
         <p:nvSpPr>
-          <p:cNvPr id="32" name="Rounded Rectangle 31"/>
+          <p:cNvPr id="31" name="Rounded Rectangle 30"/>
           <p:cNvSpPr/>
           <p:nvPr/>
         </p:nvSpPr>
@@ -30988,7 +29533,7 @@
       </p:sp>
       <p:sp>
         <p:nvSpPr>
-          <p:cNvPr id="33" name="TextBox 32"/>
+          <p:cNvPr id="32" name="TextBox 31"/>
           <p:cNvSpPr txBox="1"/>
           <p:nvPr/>
         </p:nvSpPr>
@@ -31035,7 +29580,7 @@
       </p:sp>
       <p:sp>
         <p:nvSpPr>
-          <p:cNvPr id="34" name="TextBox 33"/>
+          <p:cNvPr id="33" name="TextBox 32"/>
           <p:cNvSpPr txBox="1"/>
           <p:nvPr/>
         </p:nvSpPr>
@@ -31082,7 +29627,7 @@
       </p:sp>
       <p:sp>
         <p:nvSpPr>
-          <p:cNvPr id="35" name="Oval 34"/>
+          <p:cNvPr id="34" name="Oval 33"/>
           <p:cNvSpPr/>
           <p:nvPr/>
         </p:nvSpPr>
@@ -31126,7 +29671,7 @@
       </p:sp>
       <p:sp>
         <p:nvSpPr>
-          <p:cNvPr id="36" name="TextBox 35"/>
+          <p:cNvPr id="35" name="TextBox 34"/>
           <p:cNvSpPr txBox="1"/>
           <p:nvPr/>
         </p:nvSpPr>
@@ -31173,7 +29718,7 @@
       </p:sp>
       <p:sp>
         <p:nvSpPr>
-          <p:cNvPr id="37" name="Rounded Rectangle 36"/>
+          <p:cNvPr id="36" name="Rounded Rectangle 35"/>
           <p:cNvSpPr/>
           <p:nvPr/>
         </p:nvSpPr>
@@ -31221,7 +29766,7 @@
       </p:sp>
       <p:sp>
         <p:nvSpPr>
-          <p:cNvPr id="38" name="TextBox 37"/>
+          <p:cNvPr id="37" name="TextBox 36"/>
           <p:cNvSpPr txBox="1"/>
           <p:nvPr/>
         </p:nvSpPr>
@@ -31268,7 +29813,7 @@
       </p:sp>
       <p:sp>
         <p:nvSpPr>
-          <p:cNvPr id="39" name="TextBox 38"/>
+          <p:cNvPr id="38" name="TextBox 37"/>
           <p:cNvSpPr txBox="1"/>
           <p:nvPr/>
         </p:nvSpPr>
@@ -31315,7 +29860,7 @@
       </p:sp>
       <p:sp>
         <p:nvSpPr>
-          <p:cNvPr id="40" name="Rounded Rectangle 39"/>
+          <p:cNvPr id="39" name="Rounded Rectangle 38"/>
           <p:cNvSpPr/>
           <p:nvPr/>
         </p:nvSpPr>
@@ -31382,7 +29927,7 @@
       </p:sp>
       <p:sp>
         <p:nvSpPr>
-          <p:cNvPr id="41" name="Rectangle 40"/>
+          <p:cNvPr id="40" name="Rectangle 39"/>
           <p:cNvSpPr/>
           <p:nvPr/>
         </p:nvSpPr>

--- a/Unit 5 - Strategy, Innovation and Leadership.pptx
+++ b/Unit 5 - Strategy, Innovation and Leadership.pptx
@@ -3906,80 +3906,13 @@
       </p:pic>
       <p:sp>
         <p:nvSpPr>
-          <p:cNvPr id="9" name="Rounded Rectangle 8"/>
-          <p:cNvSpPr/>
-          <p:nvPr/>
-        </p:nvSpPr>
-        <p:spPr>
-          <a:xfrm>
-            <a:off x="932688" y="1572768"/>
-            <a:ext cx="1481328" cy="384048"/>
-          </a:xfrm>
-          <a:prstGeom prst="roundRect">
-            <a:avLst>
-              <a:gd name="adj" fmla="val 50000"/>
-            </a:avLst>
-          </a:prstGeom>
-          <a:noFill/>
-          <a:ln w="15875">
-            <a:solidFill>
-              <a:srgbClr val="3B7AF7"/>
-            </a:solidFill>
-          </a:ln>
-          <a:effectLst/>
-        </p:spPr>
-        <p:style>
-          <a:lnRef idx="1">
-            <a:schemeClr val="accent1"/>
-          </a:lnRef>
-          <a:fillRef idx="3">
-            <a:schemeClr val="accent1"/>
-          </a:fillRef>
-          <a:effectRef idx="2">
-            <a:schemeClr val="accent1"/>
-          </a:effectRef>
-          <a:fontRef idx="minor">
-            <a:schemeClr val="lt1"/>
-          </a:fontRef>
-        </p:style>
-        <p:txBody>
-          <a:bodyPr rtlCol="0" anchor="ctr" wrap="square"/>
-          <a:lstStyle/>
-          <a:p>
-            <a:pPr algn="ctr">
-              <a:lnSpc>
-                <a:spcPct val="122000"/>
-              </a:lnSpc>
-              <a:spcBef>
-                <a:spcPts val="0"/>
-              </a:spcBef>
-              <a:spcAft>
-                <a:spcPts val="0"/>
-              </a:spcAft>
-            </a:pPr>
-            <a:r>
-              <a:rPr sz="1050" b="1" i="0" spc="160">
-                <a:solidFill>
-                  <a:srgbClr val="FFFFFF"/>
-                </a:solidFill>
-                <a:latin typeface="Segoe UI"/>
-                <a:ea typeface="Segoe UI"/>
-                <a:cs typeface="Segoe UI"/>
-              </a:rPr>
-              <a:t>UNIT 05</a:t>
-            </a:r>
-          </a:p>
-        </p:txBody>
-      </p:sp>
-      <p:sp>
-        <p:nvSpPr>
-          <p:cNvPr id="10" name="TextBox 9"/>
+          <p:cNvPr id="9" name="TextBox 8"/>
           <p:cNvSpPr txBox="1"/>
           <p:nvPr/>
         </p:nvSpPr>
         <p:spPr>
           <a:xfrm>
-            <a:off x="932688" y="2304288"/>
+            <a:off x="932688" y="2065553"/>
             <a:ext cx="7406640" cy="1578807"/>
           </a:xfrm>
           <a:prstGeom prst="rect">
@@ -4020,13 +3953,13 @@
       </p:sp>
       <p:sp>
         <p:nvSpPr>
-          <p:cNvPr id="11" name="Rectangle 10"/>
+          <p:cNvPr id="10" name="Rectangle 9"/>
           <p:cNvSpPr/>
           <p:nvPr/>
         </p:nvSpPr>
         <p:spPr>
           <a:xfrm>
-            <a:off x="932688" y="3901383"/>
+            <a:off x="932688" y="3662648"/>
             <a:ext cx="658368" cy="45720"/>
           </a:xfrm>
           <a:prstGeom prst="rect">
@@ -4064,14 +3997,14 @@
       </p:sp>
       <p:sp>
         <p:nvSpPr>
-          <p:cNvPr id="12" name="TextBox 11"/>
+          <p:cNvPr id="11" name="TextBox 10"/>
           <p:cNvSpPr txBox="1"/>
           <p:nvPr/>
         </p:nvSpPr>
         <p:spPr>
           <a:xfrm>
-            <a:off x="932688" y="4212279"/>
-            <a:ext cx="6766560" cy="960120"/>
+            <a:off x="932688" y="3973544"/>
+            <a:ext cx="6766560" cy="745750"/>
           </a:xfrm>
           <a:prstGeom prst="rect">
             <a:avLst/>
@@ -4111,13 +4044,13 @@
       </p:sp>
       <p:sp>
         <p:nvSpPr>
-          <p:cNvPr id="13" name="Rounded Rectangle 12"/>
+          <p:cNvPr id="12" name="Rounded Rectangle 11"/>
           <p:cNvSpPr/>
           <p:nvPr/>
         </p:nvSpPr>
         <p:spPr>
           <a:xfrm>
-            <a:off x="932688" y="4992624"/>
+            <a:off x="932688" y="4993614"/>
             <a:ext cx="1147734" cy="329184"/>
           </a:xfrm>
           <a:prstGeom prst="roundRect">
@@ -4178,13 +4111,13 @@
       </p:sp>
       <p:sp>
         <p:nvSpPr>
-          <p:cNvPr id="14" name="Rounded Rectangle 13"/>
+          <p:cNvPr id="13" name="Rounded Rectangle 12"/>
           <p:cNvSpPr/>
           <p:nvPr/>
         </p:nvSpPr>
         <p:spPr>
           <a:xfrm>
-            <a:off x="2208438" y="4992624"/>
+            <a:off x="2208438" y="4993614"/>
             <a:ext cx="1429267" cy="329184"/>
           </a:xfrm>
           <a:prstGeom prst="roundRect">
@@ -4245,13 +4178,13 @@
       </p:sp>
       <p:sp>
         <p:nvSpPr>
-          <p:cNvPr id="15" name="Rounded Rectangle 14"/>
+          <p:cNvPr id="14" name="Rounded Rectangle 13"/>
           <p:cNvSpPr/>
           <p:nvPr/>
         </p:nvSpPr>
         <p:spPr>
           <a:xfrm>
-            <a:off x="3765722" y="4992624"/>
+            <a:off x="3765722" y="4993614"/>
             <a:ext cx="998757" cy="329184"/>
           </a:xfrm>
           <a:prstGeom prst="roundRect">
@@ -4312,13 +4245,13 @@
       </p:sp>
       <p:sp>
         <p:nvSpPr>
-          <p:cNvPr id="16" name="Rounded Rectangle 15"/>
+          <p:cNvPr id="15" name="Rounded Rectangle 14"/>
           <p:cNvSpPr/>
           <p:nvPr/>
         </p:nvSpPr>
         <p:spPr>
           <a:xfrm>
-            <a:off x="4892496" y="4992624"/>
+            <a:off x="4892496" y="4993614"/>
             <a:ext cx="878554" cy="329184"/>
           </a:xfrm>
           <a:prstGeom prst="roundRect">
@@ -4379,7 +4312,7 @@
       </p:sp>
       <p:sp>
         <p:nvSpPr>
-          <p:cNvPr id="17" name="Rectangle 16"/>
+          <p:cNvPr id="16" name="Rectangle 15"/>
           <p:cNvSpPr/>
           <p:nvPr/>
         </p:nvSpPr>
@@ -4423,7 +4356,7 @@
       </p:sp>
       <p:sp>
         <p:nvSpPr>
-          <p:cNvPr id="18" name="TextBox 17"/>
+          <p:cNvPr id="17" name="TextBox 16"/>
           <p:cNvSpPr txBox="1"/>
           <p:nvPr/>
         </p:nvSpPr>
